--- a/content/교육/2026-07-23_교육시스템_정본/시즈_오리엔테이션.pptx
+++ b/content/교육/2026-07-23_교육시스템_정본/시즈_오리엔테이션.pptx
@@ -950,7 +950,7 @@
           <a:p>
             <a:r>
               <a:rPr lang="en-US" dirty="0"/>
-              <a:t>준비물은 전날, 과제는 다음 수업 전. 가발과 약제는 실수하면 되돌릴 수 없으니 안전과 신중함 강조.</a:t>
+              <a:t>준비물은 전날, 과제는 다음 수업 전. 가발과 약제는 실수하면 되돌릴 수 없으니 안전과 신중함 강조. 모르면 바로 선생님께.</a:t>
             </a:r>
             <a:endParaRPr lang="en-US" dirty="0"/>
           </a:p>
@@ -1038,7 +1038,7 @@
           <a:p>
             <a:r>
               <a:rPr lang="en-US" dirty="0"/>
-              <a:t>승급은 두 갈래: 헤어쇼 기준(4레벨 50%, 5레벨 80%) 또는 KPI 최종조건 충족. KPI 채우면 무조건 디자이너.</a:t>
+              <a:t>승급은 시그니처 쇼(인스타 헤어쇼)로 증명. 4레벨은 기존 정량 기준 50%, 5레벨은 80% 통과 시 쇼 기준 성립. 정량 기준: 포트폴리오30·인스타3개월·매출300~400만·리뷰월10·모델50명. SNS로 나를 알리는 힘도 함께.</a:t>
             </a:r>
             <a:endParaRPr lang="en-US" dirty="0"/>
           </a:p>
@@ -5950,10 +5950,44 @@
         </p:nvSpPr>
         <p:spPr>
           <a:xfrm>
-            <a:off x="566928" y="2770632"/>
-            <a:ext cx="146304" cy="310896"/>
-          </a:xfrm>
-          <a:prstGeom prst="rect">
+            <a:off x="548640" y="2697480"/>
+            <a:ext cx="5440680" cy="1170432"/>
+          </a:xfrm>
+          <a:prstGeom prst="roundRect">
+            <a:avLst>
+              <a:gd name="adj" fmla="val 9375"/>
+            </a:avLst>
+          </a:prstGeom>
+          <a:solidFill>
+            <a:srgbClr val="FBF8F3"/>
+          </a:solidFill>
+          <a:ln w="9525">
+            <a:solidFill>
+              <a:srgbClr val="E4DFD6"/>
+            </a:solidFill>
+            <a:prstDash val="solid"/>
+          </a:ln>
+          <a:effectLst>
+            <a:outerShdw sx="100000" sy="100000" kx="0" ky="0" algn="bl" rotWithShape="0" blurRad="88900" dist="25400" dir="5400000">
+              <a:srgbClr val="C9BFA8">
+                <a:alpha val="28000"/>
+              </a:srgbClr>
+            </a:outerShdw>
+          </a:effectLst>
+        </p:spPr>
+      </p:sp>
+      <p:sp>
+        <p:nvSpPr>
+          <p:cNvPr id="8" name="Shape 6"/>
+          <p:cNvSpPr/>
+          <p:nvPr/>
+        </p:nvSpPr>
+        <p:spPr>
+          <a:xfrm>
+            <a:off x="877824" y="2990088"/>
+            <a:ext cx="155448" cy="155448"/>
+          </a:xfrm>
+          <a:prstGeom prst="ellipse">
             <a:avLst/>
           </a:prstGeom>
           <a:solidFill>
@@ -5964,53 +5998,53 @@
       </p:sp>
       <p:sp>
         <p:nvSpPr>
-          <p:cNvPr id="8" name="Text 6"/>
-          <p:cNvSpPr/>
-          <p:nvPr/>
-        </p:nvSpPr>
-        <p:spPr>
-          <a:xfrm>
-            <a:off x="914400" y="2679192"/>
-            <a:ext cx="10515600" cy="365760"/>
-          </a:xfrm>
-          <a:prstGeom prst="rect">
-            <a:avLst/>
-          </a:prstGeom>
-          <a:noFill/>
-          <a:ln/>
-        </p:spPr>
-        <p:txBody>
-          <a:bodyPr wrap="square" rtlCol="0" anchor="ctr"/>
-          <a:lstStyle/>
-          <a:p>
-            <a:pPr indent="0" marL="0">
-              <a:buNone/>
-            </a:pPr>
-            <a:r>
-              <a:rPr lang="en-US" sz="1550" b="1" dirty="0">
+          <p:cNvPr id="9" name="Text 7"/>
+          <p:cNvSpPr/>
+          <p:nvPr/>
+        </p:nvSpPr>
+        <p:spPr>
+          <a:xfrm>
+            <a:off x="1152144" y="2898648"/>
+            <a:ext cx="4572000" cy="365760"/>
+          </a:xfrm>
+          <a:prstGeom prst="rect">
+            <a:avLst/>
+          </a:prstGeom>
+          <a:noFill/>
+          <a:ln/>
+        </p:spPr>
+        <p:txBody>
+          <a:bodyPr wrap="square" rtlCol="0" anchor="ctr"/>
+          <a:lstStyle/>
+          <a:p>
+            <a:pPr indent="0" marL="0">
+              <a:buNone/>
+            </a:pPr>
+            <a:r>
+              <a:rPr lang="en-US" sz="1900" b="1" dirty="0">
                 <a:solidFill>
                   <a:srgbClr val="1A1815"/>
                 </a:solidFill>
-                <a:latin typeface="Calibri" pitchFamily="34" charset="0"/>
-                <a:ea typeface="Calibri" pitchFamily="34" charset="-122"/>
-                <a:cs typeface="Calibri" pitchFamily="34" charset="-120"/>
-              </a:rPr>
-              <a:t>준비물은 수업 전날까지 세팅</a:t>
-            </a:r>
-            <a:endParaRPr lang="en-US" sz="1550" dirty="0"/>
-          </a:p>
-        </p:txBody>
-      </p:sp>
-      <p:sp>
-        <p:nvSpPr>
-          <p:cNvPr id="9" name="Text 7"/>
-          <p:cNvSpPr/>
-          <p:nvPr/>
-        </p:nvSpPr>
-        <p:spPr>
-          <a:xfrm>
-            <a:off x="914400" y="3008376"/>
-            <a:ext cx="10515600" cy="320040"/>
+                <a:latin typeface="Cambria" pitchFamily="34" charset="0"/>
+                <a:ea typeface="Cambria" pitchFamily="34" charset="-122"/>
+                <a:cs typeface="Cambria" pitchFamily="34" charset="-120"/>
+              </a:rPr>
+              <a:t>준비물은 전날까지</a:t>
+            </a:r>
+            <a:endParaRPr lang="en-US" sz="1900" dirty="0"/>
+          </a:p>
+        </p:txBody>
+      </p:sp>
+      <p:sp>
+        <p:nvSpPr>
+          <p:cNvPr id="10" name="Text 8"/>
+          <p:cNvSpPr/>
+          <p:nvPr/>
+        </p:nvSpPr>
+        <p:spPr>
+          <a:xfrm>
+            <a:off x="877824" y="3355848"/>
+            <a:ext cx="4800600" cy="347472"/>
           </a:xfrm>
           <a:prstGeom prst="rect">
             <a:avLst/>
@@ -6028,13 +6062,13 @@
             <a:r>
               <a:rPr lang="en-US" sz="1250" dirty="0">
                 <a:solidFill>
-                  <a:srgbClr val="666666"/>
-                </a:solidFill>
-                <a:latin typeface="Calibri" pitchFamily="34" charset="0"/>
-                <a:ea typeface="Calibri" pitchFamily="34" charset="-122"/>
-                <a:cs typeface="Calibri" pitchFamily="34" charset="-120"/>
-              </a:rPr>
-              <a:t>도구 · 마네킹 · 약제를 미리 챙긴다</a:t>
+                  <a:srgbClr val="6A655C"/>
+                </a:solidFill>
+                <a:latin typeface="Calibri" pitchFamily="34" charset="0"/>
+                <a:ea typeface="Calibri" pitchFamily="34" charset="-122"/>
+                <a:cs typeface="Calibri" pitchFamily="34" charset="-120"/>
+              </a:rPr>
+              <a:t>도구·마네킹·약제를 미리 챙겨 온다</a:t>
             </a:r>
             <a:endParaRPr lang="en-US" sz="1250" dirty="0"/>
           </a:p>
@@ -6042,16 +6076,50 @@
       </p:sp>
       <p:sp>
         <p:nvSpPr>
-          <p:cNvPr id="10" name="Shape 8"/>
-          <p:cNvSpPr/>
-          <p:nvPr/>
-        </p:nvSpPr>
-        <p:spPr>
-          <a:xfrm>
-            <a:off x="566928" y="3483864"/>
-            <a:ext cx="146304" cy="310896"/>
-          </a:xfrm>
-          <a:prstGeom prst="rect">
+          <p:cNvPr id="11" name="Shape 9"/>
+          <p:cNvSpPr/>
+          <p:nvPr/>
+        </p:nvSpPr>
+        <p:spPr>
+          <a:xfrm>
+            <a:off x="6217920" y="2697480"/>
+            <a:ext cx="5440680" cy="1170432"/>
+          </a:xfrm>
+          <a:prstGeom prst="roundRect">
+            <a:avLst>
+              <a:gd name="adj" fmla="val 9375"/>
+            </a:avLst>
+          </a:prstGeom>
+          <a:solidFill>
+            <a:srgbClr val="FBF8F3"/>
+          </a:solidFill>
+          <a:ln w="9525">
+            <a:solidFill>
+              <a:srgbClr val="E4DFD6"/>
+            </a:solidFill>
+            <a:prstDash val="solid"/>
+          </a:ln>
+          <a:effectLst>
+            <a:outerShdw sx="100000" sy="100000" kx="0" ky="0" algn="bl" rotWithShape="0" blurRad="88900" dist="25400" dir="5400000">
+              <a:srgbClr val="C9BFA8">
+                <a:alpha val="28000"/>
+              </a:srgbClr>
+            </a:outerShdw>
+          </a:effectLst>
+        </p:spPr>
+      </p:sp>
+      <p:sp>
+        <p:nvSpPr>
+          <p:cNvPr id="12" name="Shape 10"/>
+          <p:cNvSpPr/>
+          <p:nvPr/>
+        </p:nvSpPr>
+        <p:spPr>
+          <a:xfrm>
+            <a:off x="6547104" y="2990088"/>
+            <a:ext cx="155448" cy="155448"/>
+          </a:xfrm>
+          <a:prstGeom prst="ellipse">
             <a:avLst/>
           </a:prstGeom>
           <a:solidFill>
@@ -6062,53 +6130,53 @@
       </p:sp>
       <p:sp>
         <p:nvSpPr>
-          <p:cNvPr id="11" name="Text 9"/>
-          <p:cNvSpPr/>
-          <p:nvPr/>
-        </p:nvSpPr>
-        <p:spPr>
-          <a:xfrm>
-            <a:off x="914400" y="3392424"/>
-            <a:ext cx="10515600" cy="365760"/>
-          </a:xfrm>
-          <a:prstGeom prst="rect">
-            <a:avLst/>
-          </a:prstGeom>
-          <a:noFill/>
-          <a:ln/>
-        </p:spPr>
-        <p:txBody>
-          <a:bodyPr wrap="square" rtlCol="0" anchor="ctr"/>
-          <a:lstStyle/>
-          <a:p>
-            <a:pPr indent="0" marL="0">
-              <a:buNone/>
-            </a:pPr>
-            <a:r>
-              <a:rPr lang="en-US" sz="1550" b="1" dirty="0">
+          <p:cNvPr id="13" name="Text 11"/>
+          <p:cNvSpPr/>
+          <p:nvPr/>
+        </p:nvSpPr>
+        <p:spPr>
+          <a:xfrm>
+            <a:off x="6821424" y="2898648"/>
+            <a:ext cx="4572000" cy="365760"/>
+          </a:xfrm>
+          <a:prstGeom prst="rect">
+            <a:avLst/>
+          </a:prstGeom>
+          <a:noFill/>
+          <a:ln/>
+        </p:spPr>
+        <p:txBody>
+          <a:bodyPr wrap="square" rtlCol="0" anchor="ctr"/>
+          <a:lstStyle/>
+          <a:p>
+            <a:pPr indent="0" marL="0">
+              <a:buNone/>
+            </a:pPr>
+            <a:r>
+              <a:rPr lang="en-US" sz="1900" b="1" dirty="0">
                 <a:solidFill>
                   <a:srgbClr val="1A1815"/>
                 </a:solidFill>
-                <a:latin typeface="Calibri" pitchFamily="34" charset="0"/>
-                <a:ea typeface="Calibri" pitchFamily="34" charset="-122"/>
-                <a:cs typeface="Calibri" pitchFamily="34" charset="-120"/>
-              </a:rPr>
-              <a:t>과제는 다음 수업 시작 전 제출</a:t>
-            </a:r>
-            <a:endParaRPr lang="en-US" sz="1550" dirty="0"/>
-          </a:p>
-        </p:txBody>
-      </p:sp>
-      <p:sp>
-        <p:nvSpPr>
-          <p:cNvPr id="12" name="Text 10"/>
-          <p:cNvSpPr/>
-          <p:nvPr/>
-        </p:nvSpPr>
-        <p:spPr>
-          <a:xfrm>
-            <a:off x="914400" y="3721608"/>
-            <a:ext cx="10515600" cy="320040"/>
+                <a:latin typeface="Cambria" pitchFamily="34" charset="0"/>
+                <a:ea typeface="Cambria" pitchFamily="34" charset="-122"/>
+                <a:cs typeface="Cambria" pitchFamily="34" charset="-120"/>
+              </a:rPr>
+              <a:t>과제는 다음 수업 전</a:t>
+            </a:r>
+            <a:endParaRPr lang="en-US" sz="1900" dirty="0"/>
+          </a:p>
+        </p:txBody>
+      </p:sp>
+      <p:sp>
+        <p:nvSpPr>
+          <p:cNvPr id="14" name="Text 12"/>
+          <p:cNvSpPr/>
+          <p:nvPr/>
+        </p:nvSpPr>
+        <p:spPr>
+          <a:xfrm>
+            <a:off x="6547104" y="3355848"/>
+            <a:ext cx="4800600" cy="347472"/>
           </a:xfrm>
           <a:prstGeom prst="rect">
             <a:avLst/>
@@ -6126,13 +6194,13 @@
             <a:r>
               <a:rPr lang="en-US" sz="1250" dirty="0">
                 <a:solidFill>
-                  <a:srgbClr val="666666"/>
-                </a:solidFill>
-                <a:latin typeface="Calibri" pitchFamily="34" charset="0"/>
-                <a:ea typeface="Calibri" pitchFamily="34" charset="-122"/>
-                <a:cs typeface="Calibri" pitchFamily="34" charset="-120"/>
-              </a:rPr>
-              <a:t>촬영본 · 리포트</a:t>
+                  <a:srgbClr val="6A655C"/>
+                </a:solidFill>
+                <a:latin typeface="Calibri" pitchFamily="34" charset="0"/>
+                <a:ea typeface="Calibri" pitchFamily="34" charset="-122"/>
+                <a:cs typeface="Calibri" pitchFamily="34" charset="-120"/>
+              </a:rPr>
+              <a:t>촬영본·리포트로 제출</a:t>
             </a:r>
             <a:endParaRPr lang="en-US" sz="1250" dirty="0"/>
           </a:p>
@@ -6140,16 +6208,50 @@
       </p:sp>
       <p:sp>
         <p:nvSpPr>
-          <p:cNvPr id="13" name="Shape 11"/>
-          <p:cNvSpPr/>
-          <p:nvPr/>
-        </p:nvSpPr>
-        <p:spPr>
-          <a:xfrm>
-            <a:off x="566928" y="4197096"/>
-            <a:ext cx="146304" cy="310896"/>
-          </a:xfrm>
-          <a:prstGeom prst="rect">
+          <p:cNvPr id="15" name="Shape 13"/>
+          <p:cNvSpPr/>
+          <p:nvPr/>
+        </p:nvSpPr>
+        <p:spPr>
+          <a:xfrm>
+            <a:off x="548640" y="4050792"/>
+            <a:ext cx="5440680" cy="1170432"/>
+          </a:xfrm>
+          <a:prstGeom prst="roundRect">
+            <a:avLst>
+              <a:gd name="adj" fmla="val 9375"/>
+            </a:avLst>
+          </a:prstGeom>
+          <a:solidFill>
+            <a:srgbClr val="FBF8F3"/>
+          </a:solidFill>
+          <a:ln w="9525">
+            <a:solidFill>
+              <a:srgbClr val="E4DFD6"/>
+            </a:solidFill>
+            <a:prstDash val="solid"/>
+          </a:ln>
+          <a:effectLst>
+            <a:outerShdw sx="100000" sy="100000" kx="0" ky="0" algn="bl" rotWithShape="0" blurRad="88900" dist="25400" dir="5400000">
+              <a:srgbClr val="C9BFA8">
+                <a:alpha val="28000"/>
+              </a:srgbClr>
+            </a:outerShdw>
+          </a:effectLst>
+        </p:spPr>
+      </p:sp>
+      <p:sp>
+        <p:nvSpPr>
+          <p:cNvPr id="16" name="Shape 14"/>
+          <p:cNvSpPr/>
+          <p:nvPr/>
+        </p:nvSpPr>
+        <p:spPr>
+          <a:xfrm>
+            <a:off x="877824" y="4343400"/>
+            <a:ext cx="155448" cy="155448"/>
+          </a:xfrm>
+          <a:prstGeom prst="ellipse">
             <a:avLst/>
           </a:prstGeom>
           <a:solidFill>
@@ -6160,53 +6262,53 @@
       </p:sp>
       <p:sp>
         <p:nvSpPr>
-          <p:cNvPr id="14" name="Text 12"/>
-          <p:cNvSpPr/>
-          <p:nvPr/>
-        </p:nvSpPr>
-        <p:spPr>
-          <a:xfrm>
-            <a:off x="914400" y="4105656"/>
-            <a:ext cx="10515600" cy="365760"/>
-          </a:xfrm>
-          <a:prstGeom prst="rect">
-            <a:avLst/>
-          </a:prstGeom>
-          <a:noFill/>
-          <a:ln/>
-        </p:spPr>
-        <p:txBody>
-          <a:bodyPr wrap="square" rtlCol="0" anchor="ctr"/>
-          <a:lstStyle/>
-          <a:p>
-            <a:pPr indent="0" marL="0">
-              <a:buNone/>
-            </a:pPr>
-            <a:r>
-              <a:rPr lang="en-US" sz="1550" b="1" dirty="0">
+          <p:cNvPr id="17" name="Text 15"/>
+          <p:cNvSpPr/>
+          <p:nvPr/>
+        </p:nvSpPr>
+        <p:spPr>
+          <a:xfrm>
+            <a:off x="1152144" y="4251960"/>
+            <a:ext cx="4572000" cy="365760"/>
+          </a:xfrm>
+          <a:prstGeom prst="rect">
+            <a:avLst/>
+          </a:prstGeom>
+          <a:noFill/>
+          <a:ln/>
+        </p:spPr>
+        <p:txBody>
+          <a:bodyPr wrap="square" rtlCol="0" anchor="ctr"/>
+          <a:lstStyle/>
+          <a:p>
+            <a:pPr indent="0" marL="0">
+              <a:buNone/>
+            </a:pPr>
+            <a:r>
+              <a:rPr lang="en-US" sz="1900" b="1" dirty="0">
                 <a:solidFill>
                   <a:srgbClr val="1A1815"/>
                 </a:solidFill>
-                <a:latin typeface="Calibri" pitchFamily="34" charset="0"/>
-                <a:ea typeface="Calibri" pitchFamily="34" charset="-122"/>
-                <a:cs typeface="Calibri" pitchFamily="34" charset="-120"/>
-              </a:rPr>
-              <a:t>가발·모델모는 되돌릴 수 없다</a:t>
-            </a:r>
-            <a:endParaRPr lang="en-US" sz="1550" dirty="0"/>
-          </a:p>
-        </p:txBody>
-      </p:sp>
-      <p:sp>
-        <p:nvSpPr>
-          <p:cNvPr id="15" name="Text 13"/>
-          <p:cNvSpPr/>
-          <p:nvPr/>
-        </p:nvSpPr>
-        <p:spPr>
-          <a:xfrm>
-            <a:off x="914400" y="4434840"/>
-            <a:ext cx="10515600" cy="320040"/>
+                <a:latin typeface="Cambria" pitchFamily="34" charset="0"/>
+                <a:ea typeface="Cambria" pitchFamily="34" charset="-122"/>
+                <a:cs typeface="Cambria" pitchFamily="34" charset="-120"/>
+              </a:rPr>
+              <a:t>가발·모델모는 신중히</a:t>
+            </a:r>
+            <a:endParaRPr lang="en-US" sz="1900" dirty="0"/>
+          </a:p>
+        </p:txBody>
+      </p:sp>
+      <p:sp>
+        <p:nvSpPr>
+          <p:cNvPr id="18" name="Text 16"/>
+          <p:cNvSpPr/>
+          <p:nvPr/>
+        </p:nvSpPr>
+        <p:spPr>
+          <a:xfrm>
+            <a:off x="877824" y="4709160"/>
+            <a:ext cx="4800600" cy="347472"/>
           </a:xfrm>
           <a:prstGeom prst="rect">
             <a:avLst/>
@@ -6224,13 +6326,13 @@
             <a:r>
               <a:rPr lang="en-US" sz="1250" dirty="0">
                 <a:solidFill>
-                  <a:srgbClr val="666666"/>
-                </a:solidFill>
-                <a:latin typeface="Calibri" pitchFamily="34" charset="0"/>
-                <a:ea typeface="Calibri" pitchFamily="34" charset="-122"/>
-                <a:cs typeface="Calibri" pitchFamily="34" charset="-120"/>
-              </a:rPr>
-              <a:t>길게 시작하고 신중히</a:t>
+                  <a:srgbClr val="6A655C"/>
+                </a:solidFill>
+                <a:latin typeface="Calibri" pitchFamily="34" charset="0"/>
+                <a:ea typeface="Calibri" pitchFamily="34" charset="-122"/>
+                <a:cs typeface="Calibri" pitchFamily="34" charset="-120"/>
+              </a:rPr>
+              <a:t>되돌릴 수 없다 — 길게 시작</a:t>
             </a:r>
             <a:endParaRPr lang="en-US" sz="1250" dirty="0"/>
           </a:p>
@@ -6238,16 +6340,50 @@
       </p:sp>
       <p:sp>
         <p:nvSpPr>
-          <p:cNvPr id="16" name="Shape 14"/>
-          <p:cNvSpPr/>
-          <p:nvPr/>
-        </p:nvSpPr>
-        <p:spPr>
-          <a:xfrm>
-            <a:off x="566928" y="4910328"/>
-            <a:ext cx="146304" cy="310896"/>
-          </a:xfrm>
-          <a:prstGeom prst="rect">
+          <p:cNvPr id="19" name="Shape 17"/>
+          <p:cNvSpPr/>
+          <p:nvPr/>
+        </p:nvSpPr>
+        <p:spPr>
+          <a:xfrm>
+            <a:off x="6217920" y="4050792"/>
+            <a:ext cx="5440680" cy="1170432"/>
+          </a:xfrm>
+          <a:prstGeom prst="roundRect">
+            <a:avLst>
+              <a:gd name="adj" fmla="val 9375"/>
+            </a:avLst>
+          </a:prstGeom>
+          <a:solidFill>
+            <a:srgbClr val="FBF8F3"/>
+          </a:solidFill>
+          <a:ln w="9525">
+            <a:solidFill>
+              <a:srgbClr val="E4DFD6"/>
+            </a:solidFill>
+            <a:prstDash val="solid"/>
+          </a:ln>
+          <a:effectLst>
+            <a:outerShdw sx="100000" sy="100000" kx="0" ky="0" algn="bl" rotWithShape="0" blurRad="88900" dist="25400" dir="5400000">
+              <a:srgbClr val="C9BFA8">
+                <a:alpha val="28000"/>
+              </a:srgbClr>
+            </a:outerShdw>
+          </a:effectLst>
+        </p:spPr>
+      </p:sp>
+      <p:sp>
+        <p:nvSpPr>
+          <p:cNvPr id="20" name="Shape 18"/>
+          <p:cNvSpPr/>
+          <p:nvPr/>
+        </p:nvSpPr>
+        <p:spPr>
+          <a:xfrm>
+            <a:off x="6547104" y="4343400"/>
+            <a:ext cx="155448" cy="155448"/>
+          </a:xfrm>
+          <a:prstGeom prst="ellipse">
             <a:avLst/>
           </a:prstGeom>
           <a:solidFill>
@@ -6258,53 +6394,53 @@
       </p:sp>
       <p:sp>
         <p:nvSpPr>
-          <p:cNvPr id="17" name="Text 15"/>
-          <p:cNvSpPr/>
-          <p:nvPr/>
-        </p:nvSpPr>
-        <p:spPr>
-          <a:xfrm>
-            <a:off x="914400" y="4818888"/>
-            <a:ext cx="10515600" cy="365760"/>
-          </a:xfrm>
-          <a:prstGeom prst="rect">
-            <a:avLst/>
-          </a:prstGeom>
-          <a:noFill/>
-          <a:ln/>
-        </p:spPr>
-        <p:txBody>
-          <a:bodyPr wrap="square" rtlCol="0" anchor="ctr"/>
-          <a:lstStyle/>
-          <a:p>
-            <a:pPr indent="0" marL="0">
-              <a:buNone/>
-            </a:pPr>
-            <a:r>
-              <a:rPr lang="en-US" sz="1550" b="1" dirty="0">
+          <p:cNvPr id="21" name="Text 19"/>
+          <p:cNvSpPr/>
+          <p:nvPr/>
+        </p:nvSpPr>
+        <p:spPr>
+          <a:xfrm>
+            <a:off x="6821424" y="4251960"/>
+            <a:ext cx="4572000" cy="365760"/>
+          </a:xfrm>
+          <a:prstGeom prst="rect">
+            <a:avLst/>
+          </a:prstGeom>
+          <a:noFill/>
+          <a:ln/>
+        </p:spPr>
+        <p:txBody>
+          <a:bodyPr wrap="square" rtlCol="0" anchor="ctr"/>
+          <a:lstStyle/>
+          <a:p>
+            <a:pPr indent="0" marL="0">
+              <a:buNone/>
+            </a:pPr>
+            <a:r>
+              <a:rPr lang="en-US" sz="1900" b="1" dirty="0">
                 <a:solidFill>
                   <a:srgbClr val="1A1815"/>
                 </a:solidFill>
-                <a:latin typeface="Calibri" pitchFamily="34" charset="0"/>
-                <a:ea typeface="Calibri" pitchFamily="34" charset="-122"/>
-                <a:cs typeface="Calibri" pitchFamily="34" charset="-120"/>
+                <a:latin typeface="Cambria" pitchFamily="34" charset="0"/>
+                <a:ea typeface="Cambria" pitchFamily="34" charset="-122"/>
+                <a:cs typeface="Cambria" pitchFamily="34" charset="-120"/>
               </a:rPr>
               <a:t>약제·열기구는 안전 먼저</a:t>
             </a:r>
-            <a:endParaRPr lang="en-US" sz="1550" dirty="0"/>
-          </a:p>
-        </p:txBody>
-      </p:sp>
-      <p:sp>
-        <p:nvSpPr>
-          <p:cNvPr id="18" name="Text 16"/>
-          <p:cNvSpPr/>
-          <p:nvPr/>
-        </p:nvSpPr>
-        <p:spPr>
-          <a:xfrm>
-            <a:off x="914400" y="5148072"/>
-            <a:ext cx="10515600" cy="320040"/>
+            <a:endParaRPr lang="en-US" sz="1900" dirty="0"/>
+          </a:p>
+        </p:txBody>
+      </p:sp>
+      <p:sp>
+        <p:nvSpPr>
+          <p:cNvPr id="22" name="Text 20"/>
+          <p:cNvSpPr/>
+          <p:nvPr/>
+        </p:nvSpPr>
+        <p:spPr>
+          <a:xfrm>
+            <a:off x="6547104" y="4709160"/>
+            <a:ext cx="4800600" cy="347472"/>
           </a:xfrm>
           <a:prstGeom prst="rect">
             <a:avLst/>
@@ -6322,7 +6458,7 @@
             <a:r>
               <a:rPr lang="en-US" sz="1250" dirty="0">
                 <a:solidFill>
-                  <a:srgbClr val="666666"/>
+                  <a:srgbClr val="6A655C"/>
                 </a:solidFill>
                 <a:latin typeface="Calibri" pitchFamily="34" charset="0"/>
                 <a:ea typeface="Calibri" pitchFamily="34" charset="-122"/>
@@ -6336,16 +6472,50 @@
       </p:sp>
       <p:sp>
         <p:nvSpPr>
-          <p:cNvPr id="19" name="Shape 17"/>
-          <p:cNvSpPr/>
-          <p:nvPr/>
-        </p:nvSpPr>
-        <p:spPr>
-          <a:xfrm>
-            <a:off x="566928" y="5623560"/>
-            <a:ext cx="146304" cy="310896"/>
-          </a:xfrm>
-          <a:prstGeom prst="rect">
+          <p:cNvPr id="23" name="Shape 21"/>
+          <p:cNvSpPr/>
+          <p:nvPr/>
+        </p:nvSpPr>
+        <p:spPr>
+          <a:xfrm>
+            <a:off x="548640" y="5404104"/>
+            <a:ext cx="5440680" cy="1170432"/>
+          </a:xfrm>
+          <a:prstGeom prst="roundRect">
+            <a:avLst>
+              <a:gd name="adj" fmla="val 9375"/>
+            </a:avLst>
+          </a:prstGeom>
+          <a:solidFill>
+            <a:srgbClr val="FBF8F3"/>
+          </a:solidFill>
+          <a:ln w="9525">
+            <a:solidFill>
+              <a:srgbClr val="E4DFD6"/>
+            </a:solidFill>
+            <a:prstDash val="solid"/>
+          </a:ln>
+          <a:effectLst>
+            <a:outerShdw sx="100000" sy="100000" kx="0" ky="0" algn="bl" rotWithShape="0" blurRad="88900" dist="25400" dir="5400000">
+              <a:srgbClr val="C9BFA8">
+                <a:alpha val="28000"/>
+              </a:srgbClr>
+            </a:outerShdw>
+          </a:effectLst>
+        </p:spPr>
+      </p:sp>
+      <p:sp>
+        <p:nvSpPr>
+          <p:cNvPr id="24" name="Shape 22"/>
+          <p:cNvSpPr/>
+          <p:nvPr/>
+        </p:nvSpPr>
+        <p:spPr>
+          <a:xfrm>
+            <a:off x="877824" y="5696712"/>
+            <a:ext cx="155448" cy="155448"/>
+          </a:xfrm>
+          <a:prstGeom prst="ellipse">
             <a:avLst/>
           </a:prstGeom>
           <a:solidFill>
@@ -6356,53 +6526,53 @@
       </p:sp>
       <p:sp>
         <p:nvSpPr>
-          <p:cNvPr id="20" name="Text 18"/>
-          <p:cNvSpPr/>
-          <p:nvPr/>
-        </p:nvSpPr>
-        <p:spPr>
-          <a:xfrm>
-            <a:off x="914400" y="5532120"/>
-            <a:ext cx="10515600" cy="365760"/>
-          </a:xfrm>
-          <a:prstGeom prst="rect">
-            <a:avLst/>
-          </a:prstGeom>
-          <a:noFill/>
-          <a:ln/>
-        </p:spPr>
-        <p:txBody>
-          <a:bodyPr wrap="square" rtlCol="0" anchor="ctr"/>
-          <a:lstStyle/>
-          <a:p>
-            <a:pPr indent="0" marL="0">
-              <a:buNone/>
-            </a:pPr>
-            <a:r>
-              <a:rPr lang="en-US" sz="1550" b="1" dirty="0">
+          <p:cNvPr id="25" name="Text 23"/>
+          <p:cNvSpPr/>
+          <p:nvPr/>
+        </p:nvSpPr>
+        <p:spPr>
+          <a:xfrm>
+            <a:off x="1152144" y="5605272"/>
+            <a:ext cx="4572000" cy="365760"/>
+          </a:xfrm>
+          <a:prstGeom prst="rect">
+            <a:avLst/>
+          </a:prstGeom>
+          <a:noFill/>
+          <a:ln/>
+        </p:spPr>
+        <p:txBody>
+          <a:bodyPr wrap="square" rtlCol="0" anchor="ctr"/>
+          <a:lstStyle/>
+          <a:p>
+            <a:pPr indent="0" marL="0">
+              <a:buNone/>
+            </a:pPr>
+            <a:r>
+              <a:rPr lang="en-US" sz="1900" b="1" dirty="0">
                 <a:solidFill>
                   <a:srgbClr val="1A1815"/>
                 </a:solidFill>
-                <a:latin typeface="Calibri" pitchFamily="34" charset="0"/>
-                <a:ea typeface="Calibri" pitchFamily="34" charset="-122"/>
-                <a:cs typeface="Calibri" pitchFamily="34" charset="-120"/>
-              </a:rPr>
-              <a:t>과목별 상세는 배포 문서 참조</a:t>
-            </a:r>
-            <a:endParaRPr lang="en-US" sz="1550" dirty="0"/>
-          </a:p>
-        </p:txBody>
-      </p:sp>
-      <p:sp>
-        <p:nvSpPr>
-          <p:cNvPr id="21" name="Text 19"/>
-          <p:cNvSpPr/>
-          <p:nvPr/>
-        </p:nvSpPr>
-        <p:spPr>
-          <a:xfrm>
-            <a:off x="914400" y="5861304"/>
-            <a:ext cx="10515600" cy="320040"/>
+                <a:latin typeface="Cambria" pitchFamily="34" charset="0"/>
+                <a:ea typeface="Cambria" pitchFamily="34" charset="-122"/>
+                <a:cs typeface="Cambria" pitchFamily="34" charset="-120"/>
+              </a:rPr>
+              <a:t>모르면 바로 물어보기</a:t>
+            </a:r>
+            <a:endParaRPr lang="en-US" sz="1900" dirty="0"/>
+          </a:p>
+        </p:txBody>
+      </p:sp>
+      <p:sp>
+        <p:nvSpPr>
+          <p:cNvPr id="26" name="Text 24"/>
+          <p:cNvSpPr/>
+          <p:nvPr/>
+        </p:nvSpPr>
+        <p:spPr>
+          <a:xfrm>
+            <a:off x="877824" y="6062472"/>
+            <a:ext cx="4800600" cy="347472"/>
           </a:xfrm>
           <a:prstGeom prst="rect">
             <a:avLst/>
@@ -6420,15 +6590,104 @@
             <a:r>
               <a:rPr lang="en-US" sz="1250" dirty="0">
                 <a:solidFill>
-                  <a:srgbClr val="666666"/>
-                </a:solidFill>
-                <a:latin typeface="Calibri" pitchFamily="34" charset="0"/>
-                <a:ea typeface="Calibri" pitchFamily="34" charset="-122"/>
-                <a:cs typeface="Calibri" pitchFamily="34" charset="-120"/>
-              </a:rPr>
-              <a:t>「과목별 준비물·과제·주의」 (선생님별)</a:t>
+                  <a:srgbClr val="6A655C"/>
+                </a:solidFill>
+                <a:latin typeface="Calibri" pitchFamily="34" charset="0"/>
+                <a:ea typeface="Calibri" pitchFamily="34" charset="-122"/>
+                <a:cs typeface="Calibri" pitchFamily="34" charset="-120"/>
+              </a:rPr>
+              <a:t>과목별 상세는 배포 문서에</a:t>
             </a:r>
             <a:endParaRPr lang="en-US" sz="1250" dirty="0"/>
+          </a:p>
+        </p:txBody>
+      </p:sp>
+      <p:sp>
+        <p:nvSpPr>
+          <p:cNvPr id="27" name="Shape 25"/>
+          <p:cNvSpPr/>
+          <p:nvPr/>
+        </p:nvSpPr>
+        <p:spPr>
+          <a:xfrm>
+            <a:off x="6217920" y="5404104"/>
+            <a:ext cx="5440680" cy="1170432"/>
+          </a:xfrm>
+          <a:prstGeom prst="roundRect">
+            <a:avLst>
+              <a:gd name="adj" fmla="val 9375"/>
+            </a:avLst>
+          </a:prstGeom>
+          <a:solidFill>
+            <a:srgbClr val="1A1815"/>
+          </a:solidFill>
+          <a:ln/>
+          <a:effectLst>
+            <a:outerShdw sx="100000" sy="100000" kx="0" ky="0" algn="bl" rotWithShape="0" blurRad="88900" dist="25400" dir="5400000">
+              <a:srgbClr val="C9BFA8">
+                <a:alpha val="30000"/>
+              </a:srgbClr>
+            </a:outerShdw>
+          </a:effectLst>
+        </p:spPr>
+      </p:sp>
+      <p:sp>
+        <p:nvSpPr>
+          <p:cNvPr id="28" name="Text 26"/>
+          <p:cNvSpPr/>
+          <p:nvPr/>
+        </p:nvSpPr>
+        <p:spPr>
+          <a:xfrm>
+            <a:off x="6583680" y="5404104"/>
+            <a:ext cx="4709160" cy="1170432"/>
+          </a:xfrm>
+          <a:prstGeom prst="rect">
+            <a:avLst/>
+          </a:prstGeom>
+          <a:noFill/>
+          <a:ln/>
+        </p:spPr>
+        <p:txBody>
+          <a:bodyPr wrap="square" rtlCol="0" anchor="ctr"/>
+          <a:lstStyle/>
+          <a:p>
+            <a:pPr algn="l" indent="0" marL="0">
+              <a:lnSpc>
+                <a:spcPct val="105000"/>
+              </a:lnSpc>
+              <a:buNone/>
+            </a:pPr>
+            <a:r>
+              <a:rPr lang="en-US" sz="2200" b="1" dirty="0">
+                <a:solidFill>
+                  <a:srgbClr val="F7F5F1"/>
+                </a:solidFill>
+                <a:latin typeface="Cambria" pitchFamily="34" charset="0"/>
+                <a:ea typeface="Cambria" pitchFamily="34" charset="-122"/>
+                <a:cs typeface="Cambria" pitchFamily="34" charset="-120"/>
+              </a:rPr>
+              <a:t>준비된 손이
+</a:t>
+            </a:r>
+            <a:pPr algn="l" indent="0" marL="0">
+              <a:lnSpc>
+                <a:spcPct val="105000"/>
+              </a:lnSpc>
+              <a:buNone/>
+            </a:pPr>
+            <a:r>
+              <a:rPr lang="en-US" sz="2200" b="1" dirty="0">
+                <a:solidFill>
+                  <a:srgbClr val="A8895E"/>
+                </a:solidFill>
+                <a:latin typeface="Cambria" pitchFamily="34" charset="0"/>
+                <a:ea typeface="Cambria" pitchFamily="34" charset="-122"/>
+                <a:cs typeface="Cambria" pitchFamily="34" charset="-120"/>
+              </a:rPr>
+              <a:t>디자인이 된다</a:t>
+            </a:r>
+            <a:endParaRPr lang="en-US" sz="2200" dirty="0"/>
           </a:p>
         </p:txBody>
       </p:sp>
@@ -6579,7 +6838,7 @@
                 <a:ea typeface="Calibri" pitchFamily="34" charset="-122"/>
                 <a:cs typeface="Calibri" pitchFamily="34" charset="-120"/>
               </a:rPr>
-              <a:t>BECOME A DESIGNER</a:t>
+              <a:t>SIGNATURE SHOW</a:t>
             </a:r>
             <a:endParaRPr lang="en-US" sz="1000" dirty="0"/>
           </a:p>
@@ -6657,7 +6916,7 @@
                 <a:ea typeface="Cambria" pitchFamily="34" charset="-122"/>
                 <a:cs typeface="Cambria" pitchFamily="34" charset="-120"/>
               </a:rPr>
-              <a:t>How You Level Up</a:t>
+              <a:t>헤어디자이너 쇼 기준</a:t>
             </a:r>
             <a:endParaRPr lang="en-US" sz="4000" dirty="0"/>
           </a:p>
@@ -6665,276 +6924,321 @@
       </p:sp>
       <p:sp>
         <p:nvSpPr>
-          <p:cNvPr id="7" name="Text 5"/>
+          <p:cNvPr id="7" name="Shape 5"/>
           <p:cNvSpPr/>
           <p:nvPr/>
         </p:nvSpPr>
         <p:spPr>
           <a:xfrm>
             <a:off x="548640" y="2377440"/>
-            <a:ext cx="10972800" cy="457200"/>
-          </a:xfrm>
-          <a:prstGeom prst="rect">
-            <a:avLst/>
-          </a:prstGeom>
-          <a:noFill/>
-          <a:ln/>
-        </p:spPr>
-        <p:txBody>
-          <a:bodyPr wrap="square" rtlCol="0" anchor="ctr"/>
-          <a:lstStyle/>
-          <a:p>
-            <a:pPr indent="0" marL="0">
-              <a:lnSpc>
-                <a:spcPct val="130000"/>
-              </a:lnSpc>
-              <a:buNone/>
-            </a:pPr>
-            <a:r>
-              <a:rPr lang="en-US" sz="1500" dirty="0">
-                <a:solidFill>
-                  <a:srgbClr val="444444"/>
-                </a:solidFill>
-                <a:latin typeface="Calibri" pitchFamily="34" charset="0"/>
-                <a:ea typeface="Calibri" pitchFamily="34" charset="-122"/>
-                <a:cs typeface="Calibri" pitchFamily="34" charset="-120"/>
-              </a:rPr>
-              <a:t>4·5레벨은 각자 디자이너가 되는 레벨. </a:t>
-            </a:r>
-            <a:pPr indent="0" marL="0">
-              <a:lnSpc>
-                <a:spcPct val="130000"/>
-              </a:lnSpc>
-              <a:buNone/>
-            </a:pPr>
-            <a:r>
-              <a:rPr lang="en-US" sz="1500" b="1" dirty="0">
-                <a:solidFill>
-                  <a:srgbClr val="A8895E"/>
-                </a:solidFill>
-                <a:latin typeface="Calibri" pitchFamily="34" charset="0"/>
-                <a:ea typeface="Calibri" pitchFamily="34" charset="-122"/>
-                <a:cs typeface="Calibri" pitchFamily="34" charset="-120"/>
-              </a:rPr>
-              <a:t>인스타 헤어쇼(시그니처 쇼)</a:t>
-            </a:r>
-            <a:pPr indent="0" marL="0">
-              <a:lnSpc>
-                <a:spcPct val="130000"/>
-              </a:lnSpc>
-              <a:buNone/>
-            </a:pPr>
-            <a:r>
-              <a:rPr lang="en-US" sz="1500" dirty="0">
-                <a:solidFill>
-                  <a:srgbClr val="444444"/>
-                </a:solidFill>
-                <a:latin typeface="Calibri" pitchFamily="34" charset="0"/>
-                <a:ea typeface="Calibri" pitchFamily="34" charset="-122"/>
-                <a:cs typeface="Calibri" pitchFamily="34" charset="-120"/>
-              </a:rPr>
-              <a:t>로 실력을 눈으로 보여준다.</a:t>
-            </a:r>
-            <a:endParaRPr lang="en-US" sz="1500" dirty="0"/>
-          </a:p>
-        </p:txBody>
-      </p:sp>
-      <p:sp>
-        <p:nvSpPr>
-          <p:cNvPr id="8" name="Text 6"/>
-          <p:cNvSpPr/>
-          <p:nvPr/>
-        </p:nvSpPr>
-        <p:spPr>
-          <a:xfrm>
-            <a:off x="548640" y="2880360"/>
-            <a:ext cx="10972800" cy="365760"/>
-          </a:xfrm>
-          <a:prstGeom prst="rect">
-            <a:avLst/>
-          </a:prstGeom>
-          <a:noFill/>
-          <a:ln/>
-        </p:spPr>
-        <p:txBody>
-          <a:bodyPr wrap="square" rtlCol="0" anchor="ctr"/>
-          <a:lstStyle/>
-          <a:p>
-            <a:pPr indent="0" marL="0">
-              <a:buNone/>
-            </a:pPr>
-            <a:r>
-              <a:rPr lang="en-US" sz="1400" b="1" dirty="0">
-                <a:solidFill>
-                  <a:srgbClr val="1A1815"/>
-                </a:solidFill>
-                <a:latin typeface="Calibri" pitchFamily="34" charset="0"/>
-                <a:ea typeface="Calibri" pitchFamily="34" charset="-122"/>
-                <a:cs typeface="Calibri" pitchFamily="34" charset="-120"/>
-              </a:rPr>
-              <a:t>4레벨</a:t>
-            </a:r>
-            <a:pPr indent="0" marL="0">
-              <a:buNone/>
-            </a:pPr>
-            <a:r>
-              <a:rPr lang="en-US" sz="1400" dirty="0">
-                <a:solidFill>
-                  <a:srgbClr val="1A1815"/>
-                </a:solidFill>
-                <a:latin typeface="Calibri" pitchFamily="34" charset="0"/>
-                <a:ea typeface="Calibri" pitchFamily="34" charset="-122"/>
-                <a:cs typeface="Calibri" pitchFamily="34" charset="-120"/>
-              </a:rPr>
-              <a:t> 기존 정량 기준 </a:t>
-            </a:r>
-            <a:pPr indent="0" marL="0">
-              <a:buNone/>
-            </a:pPr>
-            <a:r>
-              <a:rPr lang="en-US" sz="1400" b="1" dirty="0">
-                <a:solidFill>
-                  <a:srgbClr val="A8895E"/>
-                </a:solidFill>
-                <a:latin typeface="Calibri" pitchFamily="34" charset="0"/>
-                <a:ea typeface="Calibri" pitchFamily="34" charset="-122"/>
-                <a:cs typeface="Calibri" pitchFamily="34" charset="-120"/>
-              </a:rPr>
-              <a:t>50% 통과</a:t>
-            </a:r>
-            <a:pPr indent="0" marL="0">
-              <a:buNone/>
-            </a:pPr>
-            <a:r>
-              <a:rPr lang="en-US" sz="1400" dirty="0">
-                <a:solidFill>
-                  <a:srgbClr val="8F887C"/>
-                </a:solidFill>
-                <a:latin typeface="Calibri" pitchFamily="34" charset="0"/>
-                <a:ea typeface="Calibri" pitchFamily="34" charset="-122"/>
-                <a:cs typeface="Calibri" pitchFamily="34" charset="-120"/>
-              </a:rPr>
-              <a:t>     ·     </a:t>
-            </a:r>
-            <a:pPr indent="0" marL="0">
-              <a:buNone/>
-            </a:pPr>
-            <a:r>
-              <a:rPr lang="en-US" sz="1400" b="1" dirty="0">
-                <a:solidFill>
-                  <a:srgbClr val="1A1815"/>
-                </a:solidFill>
-                <a:latin typeface="Calibri" pitchFamily="34" charset="0"/>
-                <a:ea typeface="Calibri" pitchFamily="34" charset="-122"/>
-                <a:cs typeface="Calibri" pitchFamily="34" charset="-120"/>
-              </a:rPr>
-              <a:t>5레벨</a:t>
-            </a:r>
-            <a:pPr indent="0" marL="0">
-              <a:buNone/>
-            </a:pPr>
-            <a:r>
-              <a:rPr lang="en-US" sz="1400" dirty="0">
-                <a:solidFill>
-                  <a:srgbClr val="1A1815"/>
-                </a:solidFill>
-                <a:latin typeface="Calibri" pitchFamily="34" charset="0"/>
-                <a:ea typeface="Calibri" pitchFamily="34" charset="-122"/>
-                <a:cs typeface="Calibri" pitchFamily="34" charset="-120"/>
-              </a:rPr>
-              <a:t> </a:t>
-            </a:r>
-            <a:pPr indent="0" marL="0">
-              <a:buNone/>
-            </a:pPr>
-            <a:r>
-              <a:rPr lang="en-US" sz="1400" b="1" dirty="0">
-                <a:solidFill>
-                  <a:srgbClr val="A8895E"/>
-                </a:solidFill>
-                <a:latin typeface="Calibri" pitchFamily="34" charset="0"/>
-                <a:ea typeface="Calibri" pitchFamily="34" charset="-122"/>
-                <a:cs typeface="Calibri" pitchFamily="34" charset="-120"/>
-              </a:rPr>
-              <a:t>80% 통과</a:t>
-            </a:r>
-            <a:pPr indent="0" marL="0">
-              <a:buNone/>
-            </a:pPr>
-            <a:r>
-              <a:rPr lang="en-US" sz="1400" dirty="0">
-                <a:solidFill>
-                  <a:srgbClr val="1A1815"/>
-                </a:solidFill>
-                <a:latin typeface="Calibri" pitchFamily="34" charset="0"/>
-                <a:ea typeface="Calibri" pitchFamily="34" charset="-122"/>
-                <a:cs typeface="Calibri" pitchFamily="34" charset="-120"/>
-              </a:rPr>
-              <a:t> 시 쇼 기준 성립</a:t>
-            </a:r>
-            <a:endParaRPr lang="en-US" sz="1400" dirty="0"/>
-          </a:p>
-        </p:txBody>
-      </p:sp>
-      <p:sp>
-        <p:nvSpPr>
-          <p:cNvPr id="9" name="Text 7"/>
-          <p:cNvSpPr/>
-          <p:nvPr/>
-        </p:nvSpPr>
-        <p:spPr>
-          <a:xfrm>
-            <a:off x="548640" y="3611880"/>
-            <a:ext cx="10972800" cy="320040"/>
-          </a:xfrm>
-          <a:prstGeom prst="rect">
-            <a:avLst/>
-          </a:prstGeom>
-          <a:noFill/>
-          <a:ln/>
-        </p:spPr>
-        <p:txBody>
-          <a:bodyPr wrap="square" rtlCol="0" anchor="ctr"/>
-          <a:lstStyle/>
-          <a:p>
-            <a:pPr indent="0" marL="0">
-              <a:buNone/>
-            </a:pPr>
-            <a:r>
-              <a:rPr lang="en-US" sz="1400" b="1" dirty="0">
-                <a:solidFill>
-                  <a:srgbClr val="1A1815"/>
-                </a:solidFill>
-                <a:latin typeface="Calibri" pitchFamily="34" charset="0"/>
-                <a:ea typeface="Calibri" pitchFamily="34" charset="-122"/>
-                <a:cs typeface="Calibri" pitchFamily="34" charset="-120"/>
-              </a:rPr>
-              <a:t>이 최종 조건을 채우면 시험과 무관하게 무조건 디자이너 (KPI)</a:t>
-            </a:r>
-            <a:endParaRPr lang="en-US" sz="1400" dirty="0"/>
-          </a:p>
-        </p:txBody>
-      </p:sp>
-      <p:sp>
-        <p:nvSpPr>
-          <p:cNvPr id="10" name="Shape 8"/>
-          <p:cNvSpPr/>
-          <p:nvPr/>
-        </p:nvSpPr>
-        <p:spPr>
-          <a:xfrm>
-            <a:off x="548640" y="4114800"/>
-            <a:ext cx="2084832" cy="658368"/>
+            <a:ext cx="11091672" cy="1005840"/>
           </a:xfrm>
           <a:prstGeom prst="roundRect">
             <a:avLst>
-              <a:gd name="adj" fmla="val 50000"/>
+              <a:gd name="adj" fmla="val 9091"/>
+            </a:avLst>
+          </a:prstGeom>
+          <a:solidFill>
+            <a:srgbClr val="1A1815"/>
+          </a:solidFill>
+          <a:ln/>
+          <a:effectLst>
+            <a:outerShdw sx="100000" sy="100000" kx="0" ky="0" algn="bl" rotWithShape="0" blurRad="88900" dist="25400" dir="5400000">
+              <a:srgbClr val="C9BFA8">
+                <a:alpha val="30000"/>
+              </a:srgbClr>
+            </a:outerShdw>
+          </a:effectLst>
+        </p:spPr>
+      </p:sp>
+      <p:sp>
+        <p:nvSpPr>
+          <p:cNvPr id="8" name="Text 6"/>
+          <p:cNvSpPr/>
+          <p:nvPr/>
+        </p:nvSpPr>
+        <p:spPr>
+          <a:xfrm>
+            <a:off x="914400" y="2542032"/>
+            <a:ext cx="10332720" cy="365760"/>
+          </a:xfrm>
+          <a:prstGeom prst="rect">
+            <a:avLst/>
+          </a:prstGeom>
+          <a:noFill/>
+          <a:ln/>
+        </p:spPr>
+        <p:txBody>
+          <a:bodyPr wrap="square" rtlCol="0" anchor="ctr"/>
+          <a:lstStyle/>
+          <a:p>
+            <a:pPr indent="0" marL="0">
+              <a:buNone/>
+            </a:pPr>
+            <a:r>
+              <a:rPr lang="en-US" sz="2100" b="1" dirty="0">
+                <a:solidFill>
+                  <a:srgbClr val="A8895E"/>
+                </a:solidFill>
+                <a:latin typeface="Cambria" pitchFamily="34" charset="0"/>
+                <a:ea typeface="Cambria" pitchFamily="34" charset="-122"/>
+                <a:cs typeface="Cambria" pitchFamily="34" charset="-120"/>
+              </a:rPr>
+              <a:t>시그니처 쇼</a:t>
+            </a:r>
+            <a:pPr indent="0" marL="0">
+              <a:buNone/>
+            </a:pPr>
+            <a:r>
+              <a:rPr lang="en-US" sz="2100" dirty="0">
+                <a:solidFill>
+                  <a:srgbClr val="C9C3B7"/>
+                </a:solidFill>
+                <a:latin typeface="Cambria" pitchFamily="34" charset="0"/>
+                <a:ea typeface="Cambria" pitchFamily="34" charset="-122"/>
+                <a:cs typeface="Cambria" pitchFamily="34" charset="-120"/>
+              </a:rPr>
+              <a:t>  인스타 헤어쇼 · 디렉터 입회</a:t>
+            </a:r>
+            <a:endParaRPr lang="en-US" sz="2100" dirty="0"/>
+          </a:p>
+        </p:txBody>
+      </p:sp>
+      <p:sp>
+        <p:nvSpPr>
+          <p:cNvPr id="9" name="Text 7"/>
+          <p:cNvSpPr/>
+          <p:nvPr/>
+        </p:nvSpPr>
+        <p:spPr>
+          <a:xfrm>
+            <a:off x="914400" y="2926080"/>
+            <a:ext cx="10332720" cy="365760"/>
+          </a:xfrm>
+          <a:prstGeom prst="rect">
+            <a:avLst/>
+          </a:prstGeom>
+          <a:noFill/>
+          <a:ln/>
+        </p:spPr>
+        <p:txBody>
+          <a:bodyPr wrap="square" rtlCol="0" anchor="ctr"/>
+          <a:lstStyle/>
+          <a:p>
+            <a:pPr indent="0" marL="0">
+              <a:buNone/>
+            </a:pPr>
+            <a:r>
+              <a:rPr lang="en-US" sz="1350" dirty="0">
+                <a:solidFill>
+                  <a:srgbClr val="F7F5F1"/>
+                </a:solidFill>
+                <a:latin typeface="Calibri" pitchFamily="34" charset="0"/>
+                <a:ea typeface="Calibri" pitchFamily="34" charset="-122"/>
+                <a:cs typeface="Calibri" pitchFamily="34" charset="-120"/>
+              </a:rPr>
+              <a:t>기획력 · PPT력 · 인스타 노출력으로 내 실력을 눈으로 증명한다</a:t>
+            </a:r>
+            <a:endParaRPr lang="en-US" sz="1350" dirty="0"/>
+          </a:p>
+        </p:txBody>
+      </p:sp>
+      <p:sp>
+        <p:nvSpPr>
+          <p:cNvPr id="10" name="Text 8"/>
+          <p:cNvSpPr/>
+          <p:nvPr/>
+        </p:nvSpPr>
+        <p:spPr>
+          <a:xfrm>
+            <a:off x="566928" y="3703320"/>
+            <a:ext cx="10972800" cy="365760"/>
+          </a:xfrm>
+          <a:prstGeom prst="rect">
+            <a:avLst/>
+          </a:prstGeom>
+          <a:noFill/>
+          <a:ln/>
+        </p:spPr>
+        <p:txBody>
+          <a:bodyPr wrap="square" rtlCol="0" anchor="ctr"/>
+          <a:lstStyle/>
+          <a:p>
+            <a:pPr indent="0" marL="0">
+              <a:buNone/>
+            </a:pPr>
+            <a:r>
+              <a:rPr lang="en-US" sz="1500" b="1" dirty="0">
+                <a:solidFill>
+                  <a:srgbClr val="1A1815"/>
+                </a:solidFill>
+                <a:latin typeface="Calibri" pitchFamily="34" charset="0"/>
+                <a:ea typeface="Calibri" pitchFamily="34" charset="-122"/>
+                <a:cs typeface="Calibri" pitchFamily="34" charset="-120"/>
+              </a:rPr>
+              <a:t>4레벨</a:t>
+            </a:r>
+            <a:pPr indent="0" marL="0">
+              <a:buNone/>
+            </a:pPr>
+            <a:r>
+              <a:rPr lang="en-US" sz="1500" dirty="0">
+                <a:solidFill>
+                  <a:srgbClr val="1A1815"/>
+                </a:solidFill>
+                <a:latin typeface="Calibri" pitchFamily="34" charset="0"/>
+                <a:ea typeface="Calibri" pitchFamily="34" charset="-122"/>
+                <a:cs typeface="Calibri" pitchFamily="34" charset="-120"/>
+              </a:rPr>
+              <a:t> 기존 정량 기준 </a:t>
+            </a:r>
+            <a:pPr indent="0" marL="0">
+              <a:buNone/>
+            </a:pPr>
+            <a:r>
+              <a:rPr lang="en-US" sz="1500" b="1" dirty="0">
+                <a:solidFill>
+                  <a:srgbClr val="A8895E"/>
+                </a:solidFill>
+                <a:latin typeface="Calibri" pitchFamily="34" charset="0"/>
+                <a:ea typeface="Calibri" pitchFamily="34" charset="-122"/>
+                <a:cs typeface="Calibri" pitchFamily="34" charset="-120"/>
+              </a:rPr>
+              <a:t>50% 통과</a:t>
+            </a:r>
+            <a:pPr indent="0" marL="0">
+              <a:buNone/>
+            </a:pPr>
+            <a:r>
+              <a:rPr lang="en-US" sz="1500" dirty="0">
+                <a:solidFill>
+                  <a:srgbClr val="8F887C"/>
+                </a:solidFill>
+                <a:latin typeface="Calibri" pitchFamily="34" charset="0"/>
+                <a:ea typeface="Calibri" pitchFamily="34" charset="-122"/>
+                <a:cs typeface="Calibri" pitchFamily="34" charset="-120"/>
+              </a:rPr>
+              <a:t>        ·        </a:t>
+            </a:r>
+            <a:pPr indent="0" marL="0">
+              <a:buNone/>
+            </a:pPr>
+            <a:r>
+              <a:rPr lang="en-US" sz="1500" b="1" dirty="0">
+                <a:solidFill>
+                  <a:srgbClr val="1A1815"/>
+                </a:solidFill>
+                <a:latin typeface="Calibri" pitchFamily="34" charset="0"/>
+                <a:ea typeface="Calibri" pitchFamily="34" charset="-122"/>
+                <a:cs typeface="Calibri" pitchFamily="34" charset="-120"/>
+              </a:rPr>
+              <a:t>5레벨</a:t>
+            </a:r>
+            <a:pPr indent="0" marL="0">
+              <a:buNone/>
+            </a:pPr>
+            <a:r>
+              <a:rPr lang="en-US" sz="1500" dirty="0">
+                <a:solidFill>
+                  <a:srgbClr val="1A1815"/>
+                </a:solidFill>
+                <a:latin typeface="Calibri" pitchFamily="34" charset="0"/>
+                <a:ea typeface="Calibri" pitchFamily="34" charset="-122"/>
+                <a:cs typeface="Calibri" pitchFamily="34" charset="-120"/>
+              </a:rPr>
+              <a:t> </a:t>
+            </a:r>
+            <a:pPr indent="0" marL="0">
+              <a:buNone/>
+            </a:pPr>
+            <a:r>
+              <a:rPr lang="en-US" sz="1500" b="1" dirty="0">
+                <a:solidFill>
+                  <a:srgbClr val="A8895E"/>
+                </a:solidFill>
+                <a:latin typeface="Calibri" pitchFamily="34" charset="0"/>
+                <a:ea typeface="Calibri" pitchFamily="34" charset="-122"/>
+                <a:cs typeface="Calibri" pitchFamily="34" charset="-120"/>
+              </a:rPr>
+              <a:t>80% 통과</a:t>
+            </a:r>
+            <a:pPr indent="0" marL="0">
+              <a:buNone/>
+            </a:pPr>
+            <a:r>
+              <a:rPr lang="en-US" sz="1500" dirty="0">
+                <a:solidFill>
+                  <a:srgbClr val="1A1815"/>
+                </a:solidFill>
+                <a:latin typeface="Calibri" pitchFamily="34" charset="0"/>
+                <a:ea typeface="Calibri" pitchFamily="34" charset="-122"/>
+                <a:cs typeface="Calibri" pitchFamily="34" charset="-120"/>
+              </a:rPr>
+              <a:t> 시 성립</a:t>
+            </a:r>
+            <a:endParaRPr lang="en-US" sz="1500" dirty="0"/>
+          </a:p>
+        </p:txBody>
+      </p:sp>
+      <p:sp>
+        <p:nvSpPr>
+          <p:cNvPr id="11" name="Text 9"/>
+          <p:cNvSpPr/>
+          <p:nvPr/>
+        </p:nvSpPr>
+        <p:spPr>
+          <a:xfrm>
+            <a:off x="566928" y="4297680"/>
+            <a:ext cx="10972800" cy="274320"/>
+          </a:xfrm>
+          <a:prstGeom prst="rect">
+            <a:avLst/>
+          </a:prstGeom>
+          <a:noFill/>
+          <a:ln/>
+        </p:spPr>
+        <p:txBody>
+          <a:bodyPr wrap="square" rtlCol="0" anchor="ctr"/>
+          <a:lstStyle/>
+          <a:p>
+            <a:pPr indent="0" marL="0">
+              <a:buNone/>
+            </a:pPr>
+            <a:r>
+              <a:rPr lang="en-US" sz="1200" b="1" spc="200" kern="0" dirty="0">
+                <a:solidFill>
+                  <a:srgbClr val="8F887C"/>
+                </a:solidFill>
+                <a:latin typeface="Calibri" pitchFamily="34" charset="0"/>
+                <a:ea typeface="Calibri" pitchFamily="34" charset="-122"/>
+                <a:cs typeface="Calibri" pitchFamily="34" charset="-120"/>
+              </a:rPr>
+              <a:t>기존 정량 기준</a:t>
+            </a:r>
+            <a:endParaRPr lang="en-US" sz="1200" dirty="0"/>
+          </a:p>
+        </p:txBody>
+      </p:sp>
+      <p:sp>
+        <p:nvSpPr>
+          <p:cNvPr id="12" name="Shape 10"/>
+          <p:cNvSpPr/>
+          <p:nvPr/>
+        </p:nvSpPr>
+        <p:spPr>
+          <a:xfrm>
+            <a:off x="566928" y="4663440"/>
+            <a:ext cx="2157984" cy="658368"/>
+          </a:xfrm>
+          <a:prstGeom prst="roundRect">
+            <a:avLst>
+              <a:gd name="adj" fmla="val 19444"/>
             </a:avLst>
           </a:prstGeom>
           <a:solidFill>
             <a:srgbClr val="FFFFFF"/>
           </a:solidFill>
-          <a:ln w="25400">
+          <a:ln w="19050">
             <a:solidFill>
               <a:srgbClr val="A8895E"/>
             </a:solidFill>
@@ -6944,14 +7248,14 @@
       </p:sp>
       <p:sp>
         <p:nvSpPr>
-          <p:cNvPr id="11" name="Text 9"/>
-          <p:cNvSpPr/>
-          <p:nvPr/>
-        </p:nvSpPr>
-        <p:spPr>
-          <a:xfrm>
-            <a:off x="548640" y="4114800"/>
-            <a:ext cx="2084832" cy="658368"/>
+          <p:cNvPr id="13" name="Text 11"/>
+          <p:cNvSpPr/>
+          <p:nvPr/>
+        </p:nvSpPr>
+        <p:spPr>
+          <a:xfrm>
+            <a:off x="612648" y="4663440"/>
+            <a:ext cx="2066544" cy="658368"/>
           </a:xfrm>
           <a:prstGeom prst="rect">
             <a:avLst/>
@@ -6967,7 +7271,7 @@
               <a:buNone/>
             </a:pPr>
             <a:r>
-              <a:rPr lang="en-US" sz="1500" b="1" dirty="0">
+              <a:rPr lang="en-US" sz="1300" b="1" dirty="0">
                 <a:solidFill>
                   <a:srgbClr val="1A1815"/>
                 </a:solidFill>
@@ -6975,32 +7279,32 @@
                 <a:ea typeface="Calibri" pitchFamily="34" charset="-122"/>
                 <a:cs typeface="Calibri" pitchFamily="34" charset="-120"/>
               </a:rPr>
-              <a:t>모델 100명</a:t>
-            </a:r>
-            <a:endParaRPr lang="en-US" sz="1500" dirty="0"/>
-          </a:p>
-        </p:txBody>
-      </p:sp>
-      <p:sp>
-        <p:nvSpPr>
-          <p:cNvPr id="12" name="Shape 10"/>
-          <p:cNvSpPr/>
-          <p:nvPr/>
-        </p:nvSpPr>
-        <p:spPr>
-          <a:xfrm>
-            <a:off x="2798064" y="4114800"/>
-            <a:ext cx="2084832" cy="658368"/>
+              <a:t>포트폴리오 30</a:t>
+            </a:r>
+            <a:endParaRPr lang="en-US" sz="1300" dirty="0"/>
+          </a:p>
+        </p:txBody>
+      </p:sp>
+      <p:sp>
+        <p:nvSpPr>
+          <p:cNvPr id="14" name="Shape 12"/>
+          <p:cNvSpPr/>
+          <p:nvPr/>
+        </p:nvSpPr>
+        <p:spPr>
+          <a:xfrm>
+            <a:off x="2793492" y="4663440"/>
+            <a:ext cx="2157984" cy="658368"/>
           </a:xfrm>
           <a:prstGeom prst="roundRect">
             <a:avLst>
-              <a:gd name="adj" fmla="val 50000"/>
+              <a:gd name="adj" fmla="val 19444"/>
             </a:avLst>
           </a:prstGeom>
           <a:solidFill>
             <a:srgbClr val="FFFFFF"/>
           </a:solidFill>
-          <a:ln w="25400">
+          <a:ln w="19050">
             <a:solidFill>
               <a:srgbClr val="A8895E"/>
             </a:solidFill>
@@ -7010,14 +7314,14 @@
       </p:sp>
       <p:sp>
         <p:nvSpPr>
-          <p:cNvPr id="13" name="Text 11"/>
-          <p:cNvSpPr/>
-          <p:nvPr/>
-        </p:nvSpPr>
-        <p:spPr>
-          <a:xfrm>
-            <a:off x="2798064" y="4114800"/>
-            <a:ext cx="2084832" cy="658368"/>
+          <p:cNvPr id="15" name="Text 13"/>
+          <p:cNvSpPr/>
+          <p:nvPr/>
+        </p:nvSpPr>
+        <p:spPr>
+          <a:xfrm>
+            <a:off x="2839212" y="4663440"/>
+            <a:ext cx="2066544" cy="658368"/>
           </a:xfrm>
           <a:prstGeom prst="rect">
             <a:avLst/>
@@ -7033,7 +7337,7 @@
               <a:buNone/>
             </a:pPr>
             <a:r>
-              <a:rPr lang="en-US" sz="1500" b="1" dirty="0">
+              <a:rPr lang="en-US" sz="1300" b="1" dirty="0">
                 <a:solidFill>
                   <a:srgbClr val="1A1815"/>
                 </a:solidFill>
@@ -7041,32 +7345,32 @@
                 <a:ea typeface="Calibri" pitchFamily="34" charset="-122"/>
                 <a:cs typeface="Calibri" pitchFamily="34" charset="-120"/>
               </a:rPr>
-              <a:t>매출 500</a:t>
-            </a:r>
-            <a:endParaRPr lang="en-US" sz="1500" dirty="0"/>
-          </a:p>
-        </p:txBody>
-      </p:sp>
-      <p:sp>
-        <p:nvSpPr>
-          <p:cNvPr id="14" name="Shape 12"/>
-          <p:cNvSpPr/>
-          <p:nvPr/>
-        </p:nvSpPr>
-        <p:spPr>
-          <a:xfrm>
-            <a:off x="5047488" y="4114800"/>
-            <a:ext cx="2084832" cy="658368"/>
+              <a:t>인스타 3개월</a:t>
+            </a:r>
+            <a:endParaRPr lang="en-US" sz="1300" dirty="0"/>
+          </a:p>
+        </p:txBody>
+      </p:sp>
+      <p:sp>
+        <p:nvSpPr>
+          <p:cNvPr id="16" name="Shape 14"/>
+          <p:cNvSpPr/>
+          <p:nvPr/>
+        </p:nvSpPr>
+        <p:spPr>
+          <a:xfrm>
+            <a:off x="5020056" y="4663440"/>
+            <a:ext cx="2157984" cy="658368"/>
           </a:xfrm>
           <a:prstGeom prst="roundRect">
             <a:avLst>
-              <a:gd name="adj" fmla="val 50000"/>
+              <a:gd name="adj" fmla="val 19444"/>
             </a:avLst>
           </a:prstGeom>
           <a:solidFill>
             <a:srgbClr val="FFFFFF"/>
           </a:solidFill>
-          <a:ln w="25400">
+          <a:ln w="19050">
             <a:solidFill>
               <a:srgbClr val="A8895E"/>
             </a:solidFill>
@@ -7076,14 +7380,14 @@
       </p:sp>
       <p:sp>
         <p:nvSpPr>
-          <p:cNvPr id="15" name="Text 13"/>
-          <p:cNvSpPr/>
-          <p:nvPr/>
-        </p:nvSpPr>
-        <p:spPr>
-          <a:xfrm>
-            <a:off x="5047488" y="4114800"/>
-            <a:ext cx="2084832" cy="658368"/>
+          <p:cNvPr id="17" name="Text 15"/>
+          <p:cNvSpPr/>
+          <p:nvPr/>
+        </p:nvSpPr>
+        <p:spPr>
+          <a:xfrm>
+            <a:off x="5065776" y="4663440"/>
+            <a:ext cx="2066544" cy="658368"/>
           </a:xfrm>
           <a:prstGeom prst="rect">
             <a:avLst/>
@@ -7099,7 +7403,7 @@
               <a:buNone/>
             </a:pPr>
             <a:r>
-              <a:rPr lang="en-US" sz="1500" b="1" dirty="0">
+              <a:rPr lang="en-US" sz="1300" b="1" dirty="0">
                 <a:solidFill>
                   <a:srgbClr val="1A1815"/>
                 </a:solidFill>
@@ -7107,32 +7411,32 @@
                 <a:ea typeface="Calibri" pitchFamily="34" charset="-122"/>
                 <a:cs typeface="Calibri" pitchFamily="34" charset="-120"/>
               </a:rPr>
-              <a:t>시그니처 60</a:t>
-            </a:r>
-            <a:endParaRPr lang="en-US" sz="1500" dirty="0"/>
-          </a:p>
-        </p:txBody>
-      </p:sp>
-      <p:sp>
-        <p:nvSpPr>
-          <p:cNvPr id="16" name="Shape 14"/>
-          <p:cNvSpPr/>
-          <p:nvPr/>
-        </p:nvSpPr>
-        <p:spPr>
-          <a:xfrm>
-            <a:off x="7296912" y="4114800"/>
-            <a:ext cx="2084832" cy="658368"/>
+              <a:t>매출 300~400만</a:t>
+            </a:r>
+            <a:endParaRPr lang="en-US" sz="1300" dirty="0"/>
+          </a:p>
+        </p:txBody>
+      </p:sp>
+      <p:sp>
+        <p:nvSpPr>
+          <p:cNvPr id="18" name="Shape 16"/>
+          <p:cNvSpPr/>
+          <p:nvPr/>
+        </p:nvSpPr>
+        <p:spPr>
+          <a:xfrm>
+            <a:off x="7246620" y="4663440"/>
+            <a:ext cx="2157984" cy="658368"/>
           </a:xfrm>
           <a:prstGeom prst="roundRect">
             <a:avLst>
-              <a:gd name="adj" fmla="val 50000"/>
+              <a:gd name="adj" fmla="val 19444"/>
             </a:avLst>
           </a:prstGeom>
           <a:solidFill>
             <a:srgbClr val="FFFFFF"/>
           </a:solidFill>
-          <a:ln w="25400">
+          <a:ln w="19050">
             <a:solidFill>
               <a:srgbClr val="A8895E"/>
             </a:solidFill>
@@ -7142,14 +7446,14 @@
       </p:sp>
       <p:sp>
         <p:nvSpPr>
-          <p:cNvPr id="17" name="Text 15"/>
-          <p:cNvSpPr/>
-          <p:nvPr/>
-        </p:nvSpPr>
-        <p:spPr>
-          <a:xfrm>
-            <a:off x="7296912" y="4114800"/>
-            <a:ext cx="2084832" cy="658368"/>
+          <p:cNvPr id="19" name="Text 17"/>
+          <p:cNvSpPr/>
+          <p:nvPr/>
+        </p:nvSpPr>
+        <p:spPr>
+          <a:xfrm>
+            <a:off x="7292340" y="4663440"/>
+            <a:ext cx="2066544" cy="658368"/>
           </a:xfrm>
           <a:prstGeom prst="rect">
             <a:avLst/>
@@ -7165,7 +7469,7 @@
               <a:buNone/>
             </a:pPr>
             <a:r>
-              <a:rPr lang="en-US" sz="1500" b="1" dirty="0">
+              <a:rPr lang="en-US" sz="1300" b="1" dirty="0">
                 <a:solidFill>
                   <a:srgbClr val="1A1815"/>
                 </a:solidFill>
@@ -7173,32 +7477,32 @@
                 <a:ea typeface="Calibri" pitchFamily="34" charset="-122"/>
                 <a:cs typeface="Calibri" pitchFamily="34" charset="-120"/>
               </a:rPr>
-              <a:t>리뷰 70</a:t>
-            </a:r>
-            <a:endParaRPr lang="en-US" sz="1500" dirty="0"/>
-          </a:p>
-        </p:txBody>
-      </p:sp>
-      <p:sp>
-        <p:nvSpPr>
-          <p:cNvPr id="18" name="Shape 16"/>
-          <p:cNvSpPr/>
-          <p:nvPr/>
-        </p:nvSpPr>
-        <p:spPr>
-          <a:xfrm>
-            <a:off x="9546336" y="4114800"/>
-            <a:ext cx="2084832" cy="658368"/>
+              <a:t>리뷰 월 10</a:t>
+            </a:r>
+            <a:endParaRPr lang="en-US" sz="1300" dirty="0"/>
+          </a:p>
+        </p:txBody>
+      </p:sp>
+      <p:sp>
+        <p:nvSpPr>
+          <p:cNvPr id="20" name="Shape 18"/>
+          <p:cNvSpPr/>
+          <p:nvPr/>
+        </p:nvSpPr>
+        <p:spPr>
+          <a:xfrm>
+            <a:off x="9473184" y="4663440"/>
+            <a:ext cx="2157984" cy="658368"/>
           </a:xfrm>
           <a:prstGeom prst="roundRect">
             <a:avLst>
-              <a:gd name="adj" fmla="val 50000"/>
+              <a:gd name="adj" fmla="val 19444"/>
             </a:avLst>
           </a:prstGeom>
           <a:solidFill>
             <a:srgbClr val="FFFFFF"/>
           </a:solidFill>
-          <a:ln w="25400">
+          <a:ln w="19050">
             <a:solidFill>
               <a:srgbClr val="A8895E"/>
             </a:solidFill>
@@ -7208,14 +7512,14 @@
       </p:sp>
       <p:sp>
         <p:nvSpPr>
-          <p:cNvPr id="19" name="Text 17"/>
-          <p:cNvSpPr/>
-          <p:nvPr/>
-        </p:nvSpPr>
-        <p:spPr>
-          <a:xfrm>
-            <a:off x="9546336" y="4114800"/>
-            <a:ext cx="2084832" cy="658368"/>
+          <p:cNvPr id="21" name="Text 19"/>
+          <p:cNvSpPr/>
+          <p:nvPr/>
+        </p:nvSpPr>
+        <p:spPr>
+          <a:xfrm>
+            <a:off x="9518904" y="4663440"/>
+            <a:ext cx="2066544" cy="658368"/>
           </a:xfrm>
           <a:prstGeom prst="rect">
             <a:avLst/>
@@ -7231,7 +7535,7 @@
               <a:buNone/>
             </a:pPr>
             <a:r>
-              <a:rPr lang="en-US" sz="1500" b="1" dirty="0">
+              <a:rPr lang="en-US" sz="1300" b="1" dirty="0">
                 <a:solidFill>
                   <a:srgbClr val="1A1815"/>
                 </a:solidFill>
@@ -7239,21 +7543,21 @@
                 <a:ea typeface="Calibri" pitchFamily="34" charset="-122"/>
                 <a:cs typeface="Calibri" pitchFamily="34" charset="-120"/>
               </a:rPr>
-              <a:t>조회수 10만</a:t>
-            </a:r>
-            <a:endParaRPr lang="en-US" sz="1500" dirty="0"/>
-          </a:p>
-        </p:txBody>
-      </p:sp>
-      <p:sp>
-        <p:nvSpPr>
-          <p:cNvPr id="20" name="Text 18"/>
-          <p:cNvSpPr/>
-          <p:nvPr/>
-        </p:nvSpPr>
-        <p:spPr>
-          <a:xfrm>
-            <a:off x="548640" y="5257800"/>
+              <a:t>모델 50명</a:t>
+            </a:r>
+            <a:endParaRPr lang="en-US" sz="1300" dirty="0"/>
+          </a:p>
+        </p:txBody>
+      </p:sp>
+      <p:sp>
+        <p:nvSpPr>
+          <p:cNvPr id="22" name="Text 20"/>
+          <p:cNvSpPr/>
+          <p:nvPr/>
+        </p:nvSpPr>
+        <p:spPr>
+          <a:xfrm>
+            <a:off x="566928" y="5623560"/>
             <a:ext cx="10972800" cy="365760"/>
           </a:xfrm>
           <a:prstGeom prst="rect">
@@ -7270,17 +7574,17 @@
               <a:buNone/>
             </a:pPr>
             <a:r>
-              <a:rPr lang="en-US" sz="1300" dirty="0">
-                <a:solidFill>
-                  <a:srgbClr val="555555"/>
-                </a:solidFill>
-                <a:latin typeface="Calibri" pitchFamily="34" charset="0"/>
-                <a:ea typeface="Calibri" pitchFamily="34" charset="-122"/>
-                <a:cs typeface="Calibri" pitchFamily="34" charset="-120"/>
-              </a:rPr>
-              <a:t>SNS 업로드 — 1·2레벨 주 1개 / 3·4레벨 주 2개 (나의 생각·연습)</a:t>
-            </a:r>
-            <a:endParaRPr lang="en-US" sz="1300" dirty="0"/>
+              <a:rPr lang="en-US" sz="1250" dirty="0">
+                <a:solidFill>
+                  <a:srgbClr val="6A655C"/>
+                </a:solidFill>
+                <a:latin typeface="Calibri" pitchFamily="34" charset="0"/>
+                <a:ea typeface="Calibri" pitchFamily="34" charset="-122"/>
+                <a:cs typeface="Calibri" pitchFamily="34" charset="-120"/>
+              </a:rPr>
+              <a:t>SNS — 1·2레벨 주 1개 / 3·4레벨 주 2개 (나의 생각·연습)로 나를 알리는 힘까지</a:t>
+            </a:r>
+            <a:endParaRPr lang="en-US" sz="1250" dirty="0"/>
           </a:p>
         </p:txBody>
       </p:sp>
@@ -7752,7 +8056,7 @@
                 <a:ea typeface="Calibri" pitchFamily="34" charset="-122"/>
                 <a:cs typeface="Calibri" pitchFamily="34" charset="-120"/>
               </a:rPr>
-              <a:t>디자이너는 시험만 통과하면?  </a:t>
+              <a:t>디자이너는 어떻게 되나요?  </a:t>
             </a:r>
             <a:pPr indent="0" marL="0">
               <a:buNone/>
@@ -7766,7 +8070,7 @@
                 <a:ea typeface="Calibri" pitchFamily="34" charset="-122"/>
                 <a:cs typeface="Calibri" pitchFamily="34" charset="-120"/>
               </a:rPr>
-              <a:t>쇼 기준 또는 KPI 최종조건 충족 시.</a:t>
+              <a:t>시그니처 쇼 — 4레벨 50%·5레벨 80% 통과 시.</a:t>
             </a:r>
             <a:endParaRPr lang="en-US" sz="1350" dirty="0"/>
           </a:p>

--- a/content/교육/2026-07-23_교육시스템_정본/시즈_오리엔테이션.pptx
+++ b/content/교육/2026-07-23_교육시스템_정본/시즈_오리엔테이션.pptx
@@ -950,7 +950,7 @@
           <a:p>
             <a:r>
               <a:rPr lang="en-US" dirty="0"/>
-              <a:t>준비물은 전날, 과제는 다음 수업 전. 가발과 약제는 실수하면 되돌릴 수 없으니 안전과 신중함 강조. 모르면 바로 선생님께.</a:t>
+              <a:t>준비물은 전날, 과제는 다음 수업 전. 가발·모델모는 되돌릴 수 없으니 신중히 — 준비부터가 이미 시험의 시작. 모르면 바로 선생님께.</a:t>
             </a:r>
             <a:endParaRPr lang="en-US" dirty="0"/>
           </a:p>
@@ -1038,7 +1038,7 @@
           <a:p>
             <a:r>
               <a:rPr lang="en-US" dirty="0"/>
-              <a:t>승급은 시그니처 쇼(인스타 헤어쇼)로 증명. 4레벨은 기존 정량 기준 50%, 5레벨은 80% 통과 시 쇼 기준 성립. 정량 기준: 포트폴리오30·인스타3개월·매출300~400만·리뷰월10·모델50명. SNS로 나를 알리는 힘도 함께.</a:t>
+              <a:t>승급은 시그니처 쇼(인스타 헤어쇼)로 증명 — 4레벨 정량기준 50%, 5레벨 80% 통과 시. 정량기준: 포트폴리오30·인스타3개월·매출300~400만·리뷰월10·모델50명. 그리고 최종 KPI(모델100·매출500·시그니처60·리뷰70·조회수10만) 달성 시엔 무조건 디자이너 승급.</a:t>
             </a:r>
             <a:endParaRPr lang="en-US" dirty="0"/>
           </a:p>
@@ -5950,12 +5950,12 @@
         </p:nvSpPr>
         <p:spPr>
           <a:xfrm>
-            <a:off x="548640" y="2697480"/>
-            <a:ext cx="5440680" cy="1170432"/>
+            <a:off x="548640" y="2651760"/>
+            <a:ext cx="5440680" cy="1371600"/>
           </a:xfrm>
           <a:prstGeom prst="roundRect">
             <a:avLst>
-              <a:gd name="adj" fmla="val 9375"/>
+              <a:gd name="adj" fmla="val 8000"/>
             </a:avLst>
           </a:prstGeom>
           <a:solidFill>
@@ -5984,8 +5984,8 @@
         </p:nvSpPr>
         <p:spPr>
           <a:xfrm>
-            <a:off x="877824" y="2990088"/>
-            <a:ext cx="155448" cy="155448"/>
+            <a:off x="914400" y="3035808"/>
+            <a:ext cx="164592" cy="164592"/>
           </a:xfrm>
           <a:prstGeom prst="ellipse">
             <a:avLst/>
@@ -6004,24 +6004,24 @@
         </p:nvSpPr>
         <p:spPr>
           <a:xfrm>
-            <a:off x="1152144" y="2898648"/>
-            <a:ext cx="4572000" cy="365760"/>
-          </a:xfrm>
-          <a:prstGeom prst="rect">
-            <a:avLst/>
-          </a:prstGeom>
-          <a:noFill/>
-          <a:ln/>
-        </p:spPr>
-        <p:txBody>
-          <a:bodyPr wrap="square" rtlCol="0" anchor="ctr"/>
-          <a:lstStyle/>
-          <a:p>
-            <a:pPr indent="0" marL="0">
-              <a:buNone/>
-            </a:pPr>
-            <a:r>
-              <a:rPr lang="en-US" sz="1900" b="1" dirty="0">
+            <a:off x="1207008" y="2926080"/>
+            <a:ext cx="4526280" cy="411480"/>
+          </a:xfrm>
+          <a:prstGeom prst="rect">
+            <a:avLst/>
+          </a:prstGeom>
+          <a:noFill/>
+          <a:ln/>
+        </p:spPr>
+        <p:txBody>
+          <a:bodyPr wrap="square" rtlCol="0" anchor="ctr"/>
+          <a:lstStyle/>
+          <a:p>
+            <a:pPr indent="0" marL="0">
+              <a:buNone/>
+            </a:pPr>
+            <a:r>
+              <a:rPr lang="en-US" sz="2100" b="1" dirty="0">
                 <a:solidFill>
                   <a:srgbClr val="1A1815"/>
                 </a:solidFill>
@@ -6031,7 +6031,7 @@
               </a:rPr>
               <a:t>준비물은 전날까지</a:t>
             </a:r>
-            <a:endParaRPr lang="en-US" sz="1900" dirty="0"/>
+            <a:endParaRPr lang="en-US" sz="2100" dirty="0"/>
           </a:p>
         </p:txBody>
       </p:sp>
@@ -6043,24 +6043,24 @@
         </p:nvSpPr>
         <p:spPr>
           <a:xfrm>
-            <a:off x="877824" y="3355848"/>
-            <a:ext cx="4800600" cy="347472"/>
-          </a:xfrm>
-          <a:prstGeom prst="rect">
-            <a:avLst/>
-          </a:prstGeom>
-          <a:noFill/>
-          <a:ln/>
-        </p:spPr>
-        <p:txBody>
-          <a:bodyPr wrap="square" rtlCol="0" anchor="ctr"/>
-          <a:lstStyle/>
-          <a:p>
-            <a:pPr indent="0" marL="0">
-              <a:buNone/>
-            </a:pPr>
-            <a:r>
-              <a:rPr lang="en-US" sz="1250" dirty="0">
+            <a:off x="914400" y="3456432"/>
+            <a:ext cx="4709160" cy="365760"/>
+          </a:xfrm>
+          <a:prstGeom prst="rect">
+            <a:avLst/>
+          </a:prstGeom>
+          <a:noFill/>
+          <a:ln/>
+        </p:spPr>
+        <p:txBody>
+          <a:bodyPr wrap="square" rtlCol="0" anchor="ctr"/>
+          <a:lstStyle/>
+          <a:p>
+            <a:pPr indent="0" marL="0">
+              <a:buNone/>
+            </a:pPr>
+            <a:r>
+              <a:rPr lang="en-US" sz="1300" dirty="0">
                 <a:solidFill>
                   <a:srgbClr val="6A655C"/>
                 </a:solidFill>
@@ -6070,7 +6070,7 @@
               </a:rPr>
               <a:t>도구·마네킹·약제를 미리 챙겨 온다</a:t>
             </a:r>
-            <a:endParaRPr lang="en-US" sz="1250" dirty="0"/>
+            <a:endParaRPr lang="en-US" sz="1300" dirty="0"/>
           </a:p>
         </p:txBody>
       </p:sp>
@@ -6082,12 +6082,12 @@
         </p:nvSpPr>
         <p:spPr>
           <a:xfrm>
-            <a:off x="6217920" y="2697480"/>
-            <a:ext cx="5440680" cy="1170432"/>
+            <a:off x="6217920" y="2651760"/>
+            <a:ext cx="5440680" cy="1371600"/>
           </a:xfrm>
           <a:prstGeom prst="roundRect">
             <a:avLst>
-              <a:gd name="adj" fmla="val 9375"/>
+              <a:gd name="adj" fmla="val 8000"/>
             </a:avLst>
           </a:prstGeom>
           <a:solidFill>
@@ -6116,8 +6116,8 @@
         </p:nvSpPr>
         <p:spPr>
           <a:xfrm>
-            <a:off x="6547104" y="2990088"/>
-            <a:ext cx="155448" cy="155448"/>
+            <a:off x="6583680" y="3035808"/>
+            <a:ext cx="164592" cy="164592"/>
           </a:xfrm>
           <a:prstGeom prst="ellipse">
             <a:avLst/>
@@ -6136,24 +6136,24 @@
         </p:nvSpPr>
         <p:spPr>
           <a:xfrm>
-            <a:off x="6821424" y="2898648"/>
-            <a:ext cx="4572000" cy="365760"/>
-          </a:xfrm>
-          <a:prstGeom prst="rect">
-            <a:avLst/>
-          </a:prstGeom>
-          <a:noFill/>
-          <a:ln/>
-        </p:spPr>
-        <p:txBody>
-          <a:bodyPr wrap="square" rtlCol="0" anchor="ctr"/>
-          <a:lstStyle/>
-          <a:p>
-            <a:pPr indent="0" marL="0">
-              <a:buNone/>
-            </a:pPr>
-            <a:r>
-              <a:rPr lang="en-US" sz="1900" b="1" dirty="0">
+            <a:off x="6876288" y="2926080"/>
+            <a:ext cx="4526280" cy="411480"/>
+          </a:xfrm>
+          <a:prstGeom prst="rect">
+            <a:avLst/>
+          </a:prstGeom>
+          <a:noFill/>
+          <a:ln/>
+        </p:spPr>
+        <p:txBody>
+          <a:bodyPr wrap="square" rtlCol="0" anchor="ctr"/>
+          <a:lstStyle/>
+          <a:p>
+            <a:pPr indent="0" marL="0">
+              <a:buNone/>
+            </a:pPr>
+            <a:r>
+              <a:rPr lang="en-US" sz="2100" b="1" dirty="0">
                 <a:solidFill>
                   <a:srgbClr val="1A1815"/>
                 </a:solidFill>
@@ -6163,7 +6163,7 @@
               </a:rPr>
               <a:t>과제는 다음 수업 전</a:t>
             </a:r>
-            <a:endParaRPr lang="en-US" sz="1900" dirty="0"/>
+            <a:endParaRPr lang="en-US" sz="2100" dirty="0"/>
           </a:p>
         </p:txBody>
       </p:sp>
@@ -6175,24 +6175,24 @@
         </p:nvSpPr>
         <p:spPr>
           <a:xfrm>
-            <a:off x="6547104" y="3355848"/>
-            <a:ext cx="4800600" cy="347472"/>
-          </a:xfrm>
-          <a:prstGeom prst="rect">
-            <a:avLst/>
-          </a:prstGeom>
-          <a:noFill/>
-          <a:ln/>
-        </p:spPr>
-        <p:txBody>
-          <a:bodyPr wrap="square" rtlCol="0" anchor="ctr"/>
-          <a:lstStyle/>
-          <a:p>
-            <a:pPr indent="0" marL="0">
-              <a:buNone/>
-            </a:pPr>
-            <a:r>
-              <a:rPr lang="en-US" sz="1250" dirty="0">
+            <a:off x="6583680" y="3456432"/>
+            <a:ext cx="4709160" cy="365760"/>
+          </a:xfrm>
+          <a:prstGeom prst="rect">
+            <a:avLst/>
+          </a:prstGeom>
+          <a:noFill/>
+          <a:ln/>
+        </p:spPr>
+        <p:txBody>
+          <a:bodyPr wrap="square" rtlCol="0" anchor="ctr"/>
+          <a:lstStyle/>
+          <a:p>
+            <a:pPr indent="0" marL="0">
+              <a:buNone/>
+            </a:pPr>
+            <a:r>
+              <a:rPr lang="en-US" sz="1300" dirty="0">
                 <a:solidFill>
                   <a:srgbClr val="6A655C"/>
                 </a:solidFill>
@@ -6202,7 +6202,7 @@
               </a:rPr>
               <a:t>촬영본·리포트로 제출</a:t>
             </a:r>
-            <a:endParaRPr lang="en-US" sz="1250" dirty="0"/>
+            <a:endParaRPr lang="en-US" sz="1300" dirty="0"/>
           </a:p>
         </p:txBody>
       </p:sp>
@@ -6214,12 +6214,12 @@
         </p:nvSpPr>
         <p:spPr>
           <a:xfrm>
-            <a:off x="548640" y="4050792"/>
-            <a:ext cx="5440680" cy="1170432"/>
+            <a:off x="548640" y="4224528"/>
+            <a:ext cx="5440680" cy="1371600"/>
           </a:xfrm>
           <a:prstGeom prst="roundRect">
             <a:avLst>
-              <a:gd name="adj" fmla="val 9375"/>
+              <a:gd name="adj" fmla="val 8000"/>
             </a:avLst>
           </a:prstGeom>
           <a:solidFill>
@@ -6248,8 +6248,8 @@
         </p:nvSpPr>
         <p:spPr>
           <a:xfrm>
-            <a:off x="877824" y="4343400"/>
-            <a:ext cx="155448" cy="155448"/>
+            <a:off x="914400" y="4608576"/>
+            <a:ext cx="164592" cy="164592"/>
           </a:xfrm>
           <a:prstGeom prst="ellipse">
             <a:avLst/>
@@ -6268,24 +6268,24 @@
         </p:nvSpPr>
         <p:spPr>
           <a:xfrm>
-            <a:off x="1152144" y="4251960"/>
-            <a:ext cx="4572000" cy="365760"/>
-          </a:xfrm>
-          <a:prstGeom prst="rect">
-            <a:avLst/>
-          </a:prstGeom>
-          <a:noFill/>
-          <a:ln/>
-        </p:spPr>
-        <p:txBody>
-          <a:bodyPr wrap="square" rtlCol="0" anchor="ctr"/>
-          <a:lstStyle/>
-          <a:p>
-            <a:pPr indent="0" marL="0">
-              <a:buNone/>
-            </a:pPr>
-            <a:r>
-              <a:rPr lang="en-US" sz="1900" b="1" dirty="0">
+            <a:off x="1207008" y="4498848"/>
+            <a:ext cx="4526280" cy="411480"/>
+          </a:xfrm>
+          <a:prstGeom prst="rect">
+            <a:avLst/>
+          </a:prstGeom>
+          <a:noFill/>
+          <a:ln/>
+        </p:spPr>
+        <p:txBody>
+          <a:bodyPr wrap="square" rtlCol="0" anchor="ctr"/>
+          <a:lstStyle/>
+          <a:p>
+            <a:pPr indent="0" marL="0">
+              <a:buNone/>
+            </a:pPr>
+            <a:r>
+              <a:rPr lang="en-US" sz="2100" b="1" dirty="0">
                 <a:solidFill>
                   <a:srgbClr val="1A1815"/>
                 </a:solidFill>
@@ -6295,7 +6295,7 @@
               </a:rPr>
               <a:t>가발·모델모는 신중히</a:t>
             </a:r>
-            <a:endParaRPr lang="en-US" sz="1900" dirty="0"/>
+            <a:endParaRPr lang="en-US" sz="2100" dirty="0"/>
           </a:p>
         </p:txBody>
       </p:sp>
@@ -6307,24 +6307,24 @@
         </p:nvSpPr>
         <p:spPr>
           <a:xfrm>
-            <a:off x="877824" y="4709160"/>
-            <a:ext cx="4800600" cy="347472"/>
-          </a:xfrm>
-          <a:prstGeom prst="rect">
-            <a:avLst/>
-          </a:prstGeom>
-          <a:noFill/>
-          <a:ln/>
-        </p:spPr>
-        <p:txBody>
-          <a:bodyPr wrap="square" rtlCol="0" anchor="ctr"/>
-          <a:lstStyle/>
-          <a:p>
-            <a:pPr indent="0" marL="0">
-              <a:buNone/>
-            </a:pPr>
-            <a:r>
-              <a:rPr lang="en-US" sz="1250" dirty="0">
+            <a:off x="914400" y="5029200"/>
+            <a:ext cx="4709160" cy="365760"/>
+          </a:xfrm>
+          <a:prstGeom prst="rect">
+            <a:avLst/>
+          </a:prstGeom>
+          <a:noFill/>
+          <a:ln/>
+        </p:spPr>
+        <p:txBody>
+          <a:bodyPr wrap="square" rtlCol="0" anchor="ctr"/>
+          <a:lstStyle/>
+          <a:p>
+            <a:pPr indent="0" marL="0">
+              <a:buNone/>
+            </a:pPr>
+            <a:r>
+              <a:rPr lang="en-US" sz="1300" dirty="0">
                 <a:solidFill>
                   <a:srgbClr val="6A655C"/>
                 </a:solidFill>
@@ -6332,9 +6332,9 @@
                 <a:ea typeface="Calibri" pitchFamily="34" charset="-122"/>
                 <a:cs typeface="Calibri" pitchFamily="34" charset="-120"/>
               </a:rPr>
-              <a:t>되돌릴 수 없다 — 길게 시작</a:t>
-            </a:r>
-            <a:endParaRPr lang="en-US" sz="1250" dirty="0"/>
+              <a:t>준비부터가 시험 시작</a:t>
+            </a:r>
+            <a:endParaRPr lang="en-US" sz="1300" dirty="0"/>
           </a:p>
         </p:txBody>
       </p:sp>
@@ -6346,12 +6346,12 @@
         </p:nvSpPr>
         <p:spPr>
           <a:xfrm>
-            <a:off x="6217920" y="4050792"/>
-            <a:ext cx="5440680" cy="1170432"/>
+            <a:off x="6217920" y="4224528"/>
+            <a:ext cx="5440680" cy="1371600"/>
           </a:xfrm>
           <a:prstGeom prst="roundRect">
             <a:avLst>
-              <a:gd name="adj" fmla="val 9375"/>
+              <a:gd name="adj" fmla="val 8000"/>
             </a:avLst>
           </a:prstGeom>
           <a:solidFill>
@@ -6380,8 +6380,8 @@
         </p:nvSpPr>
         <p:spPr>
           <a:xfrm>
-            <a:off x="6547104" y="4343400"/>
-            <a:ext cx="155448" cy="155448"/>
+            <a:off x="6583680" y="4608576"/>
+            <a:ext cx="164592" cy="164592"/>
           </a:xfrm>
           <a:prstGeom prst="ellipse">
             <a:avLst/>
@@ -6400,24 +6400,24 @@
         </p:nvSpPr>
         <p:spPr>
           <a:xfrm>
-            <a:off x="6821424" y="4251960"/>
-            <a:ext cx="4572000" cy="365760"/>
-          </a:xfrm>
-          <a:prstGeom prst="rect">
-            <a:avLst/>
-          </a:prstGeom>
-          <a:noFill/>
-          <a:ln/>
-        </p:spPr>
-        <p:txBody>
-          <a:bodyPr wrap="square" rtlCol="0" anchor="ctr"/>
-          <a:lstStyle/>
-          <a:p>
-            <a:pPr indent="0" marL="0">
-              <a:buNone/>
-            </a:pPr>
-            <a:r>
-              <a:rPr lang="en-US" sz="1900" b="1" dirty="0">
+            <a:off x="6876288" y="4498848"/>
+            <a:ext cx="4526280" cy="411480"/>
+          </a:xfrm>
+          <a:prstGeom prst="rect">
+            <a:avLst/>
+          </a:prstGeom>
+          <a:noFill/>
+          <a:ln/>
+        </p:spPr>
+        <p:txBody>
+          <a:bodyPr wrap="square" rtlCol="0" anchor="ctr"/>
+          <a:lstStyle/>
+          <a:p>
+            <a:pPr indent="0" marL="0">
+              <a:buNone/>
+            </a:pPr>
+            <a:r>
+              <a:rPr lang="en-US" sz="2100" b="1" dirty="0">
                 <a:solidFill>
                   <a:srgbClr val="1A1815"/>
                 </a:solidFill>
@@ -6425,9 +6425,9 @@
                 <a:ea typeface="Cambria" pitchFamily="34" charset="-122"/>
                 <a:cs typeface="Cambria" pitchFamily="34" charset="-120"/>
               </a:rPr>
-              <a:t>약제·열기구는 안전 먼저</a:t>
-            </a:r>
-            <a:endParaRPr lang="en-US" sz="1900" dirty="0"/>
+              <a:t>모르면 바로 물어보기</a:t>
+            </a:r>
+            <a:endParaRPr lang="en-US" sz="2100" dirty="0"/>
           </a:p>
         </p:txBody>
       </p:sp>
@@ -6439,24 +6439,24 @@
         </p:nvSpPr>
         <p:spPr>
           <a:xfrm>
-            <a:off x="6547104" y="4709160"/>
-            <a:ext cx="4800600" cy="347472"/>
-          </a:xfrm>
-          <a:prstGeom prst="rect">
-            <a:avLst/>
-          </a:prstGeom>
-          <a:noFill/>
-          <a:ln/>
-        </p:spPr>
-        <p:txBody>
-          <a:bodyPr wrap="square" rtlCol="0" anchor="ctr"/>
-          <a:lstStyle/>
-          <a:p>
-            <a:pPr indent="0" marL="0">
-              <a:buNone/>
-            </a:pPr>
-            <a:r>
-              <a:rPr lang="en-US" sz="1250" dirty="0">
+            <a:off x="6583680" y="5029200"/>
+            <a:ext cx="4709160" cy="365760"/>
+          </a:xfrm>
+          <a:prstGeom prst="rect">
+            <a:avLst/>
+          </a:prstGeom>
+          <a:noFill/>
+          <a:ln/>
+        </p:spPr>
+        <p:txBody>
+          <a:bodyPr wrap="square" rtlCol="0" anchor="ctr"/>
+          <a:lstStyle/>
+          <a:p>
+            <a:pPr indent="0" marL="0">
+              <a:buNone/>
+            </a:pPr>
+            <a:r>
+              <a:rPr lang="en-US" sz="1300" dirty="0">
                 <a:solidFill>
                   <a:srgbClr val="6A655C"/>
                 </a:solidFill>
@@ -6464,9 +6464,9 @@
                 <a:ea typeface="Calibri" pitchFamily="34" charset="-122"/>
                 <a:cs typeface="Calibri" pitchFamily="34" charset="-120"/>
               </a:rPr>
-              <a:t>온도·시간 기록, 화상 주의</a:t>
-            </a:r>
-            <a:endParaRPr lang="en-US" sz="1250" dirty="0"/>
+              <a:t>과목별 상세는 배포 문서에</a:t>
+            </a:r>
+            <a:endParaRPr lang="en-US" sz="1300" dirty="0"/>
           </a:p>
         </p:txBody>
       </p:sp>
@@ -6478,144 +6478,12 @@
         </p:nvSpPr>
         <p:spPr>
           <a:xfrm>
-            <a:off x="548640" y="5404104"/>
-            <a:ext cx="5440680" cy="1170432"/>
+            <a:off x="548640" y="5797296"/>
+            <a:ext cx="11109960" cy="822960"/>
           </a:xfrm>
           <a:prstGeom prst="roundRect">
             <a:avLst>
-              <a:gd name="adj" fmla="val 9375"/>
-            </a:avLst>
-          </a:prstGeom>
-          <a:solidFill>
-            <a:srgbClr val="FBF8F3"/>
-          </a:solidFill>
-          <a:ln w="9525">
-            <a:solidFill>
-              <a:srgbClr val="E4DFD6"/>
-            </a:solidFill>
-            <a:prstDash val="solid"/>
-          </a:ln>
-          <a:effectLst>
-            <a:outerShdw sx="100000" sy="100000" kx="0" ky="0" algn="bl" rotWithShape="0" blurRad="88900" dist="25400" dir="5400000">
-              <a:srgbClr val="C9BFA8">
-                <a:alpha val="28000"/>
-              </a:srgbClr>
-            </a:outerShdw>
-          </a:effectLst>
-        </p:spPr>
-      </p:sp>
-      <p:sp>
-        <p:nvSpPr>
-          <p:cNvPr id="24" name="Shape 22"/>
-          <p:cNvSpPr/>
-          <p:nvPr/>
-        </p:nvSpPr>
-        <p:spPr>
-          <a:xfrm>
-            <a:off x="877824" y="5696712"/>
-            <a:ext cx="155448" cy="155448"/>
-          </a:xfrm>
-          <a:prstGeom prst="ellipse">
-            <a:avLst/>
-          </a:prstGeom>
-          <a:solidFill>
-            <a:srgbClr val="A8895E"/>
-          </a:solidFill>
-          <a:ln/>
-        </p:spPr>
-      </p:sp>
-      <p:sp>
-        <p:nvSpPr>
-          <p:cNvPr id="25" name="Text 23"/>
-          <p:cNvSpPr/>
-          <p:nvPr/>
-        </p:nvSpPr>
-        <p:spPr>
-          <a:xfrm>
-            <a:off x="1152144" y="5605272"/>
-            <a:ext cx="4572000" cy="365760"/>
-          </a:xfrm>
-          <a:prstGeom prst="rect">
-            <a:avLst/>
-          </a:prstGeom>
-          <a:noFill/>
-          <a:ln/>
-        </p:spPr>
-        <p:txBody>
-          <a:bodyPr wrap="square" rtlCol="0" anchor="ctr"/>
-          <a:lstStyle/>
-          <a:p>
-            <a:pPr indent="0" marL="0">
-              <a:buNone/>
-            </a:pPr>
-            <a:r>
-              <a:rPr lang="en-US" sz="1900" b="1" dirty="0">
-                <a:solidFill>
-                  <a:srgbClr val="1A1815"/>
-                </a:solidFill>
-                <a:latin typeface="Cambria" pitchFamily="34" charset="0"/>
-                <a:ea typeface="Cambria" pitchFamily="34" charset="-122"/>
-                <a:cs typeface="Cambria" pitchFamily="34" charset="-120"/>
-              </a:rPr>
-              <a:t>모르면 바로 물어보기</a:t>
-            </a:r>
-            <a:endParaRPr lang="en-US" sz="1900" dirty="0"/>
-          </a:p>
-        </p:txBody>
-      </p:sp>
-      <p:sp>
-        <p:nvSpPr>
-          <p:cNvPr id="26" name="Text 24"/>
-          <p:cNvSpPr/>
-          <p:nvPr/>
-        </p:nvSpPr>
-        <p:spPr>
-          <a:xfrm>
-            <a:off x="877824" y="6062472"/>
-            <a:ext cx="4800600" cy="347472"/>
-          </a:xfrm>
-          <a:prstGeom prst="rect">
-            <a:avLst/>
-          </a:prstGeom>
-          <a:noFill/>
-          <a:ln/>
-        </p:spPr>
-        <p:txBody>
-          <a:bodyPr wrap="square" rtlCol="0" anchor="ctr"/>
-          <a:lstStyle/>
-          <a:p>
-            <a:pPr indent="0" marL="0">
-              <a:buNone/>
-            </a:pPr>
-            <a:r>
-              <a:rPr lang="en-US" sz="1250" dirty="0">
-                <a:solidFill>
-                  <a:srgbClr val="6A655C"/>
-                </a:solidFill>
-                <a:latin typeface="Calibri" pitchFamily="34" charset="0"/>
-                <a:ea typeface="Calibri" pitchFamily="34" charset="-122"/>
-                <a:cs typeface="Calibri" pitchFamily="34" charset="-120"/>
-              </a:rPr>
-              <a:t>과목별 상세는 배포 문서에</a:t>
-            </a:r>
-            <a:endParaRPr lang="en-US" sz="1250" dirty="0"/>
-          </a:p>
-        </p:txBody>
-      </p:sp>
-      <p:sp>
-        <p:nvSpPr>
-          <p:cNvPr id="27" name="Shape 25"/>
-          <p:cNvSpPr/>
-          <p:nvPr/>
-        </p:nvSpPr>
-        <p:spPr>
-          <a:xfrm>
-            <a:off x="6217920" y="5404104"/>
-            <a:ext cx="5440680" cy="1170432"/>
-          </a:xfrm>
-          <a:prstGeom prst="roundRect">
-            <a:avLst>
-              <a:gd name="adj" fmla="val 9375"/>
+              <a:gd name="adj" fmla="val 11111"/>
             </a:avLst>
           </a:prstGeom>
           <a:solidFill>
@@ -6633,33 +6501,30 @@
       </p:sp>
       <p:sp>
         <p:nvSpPr>
-          <p:cNvPr id="28" name="Text 26"/>
-          <p:cNvSpPr/>
-          <p:nvPr/>
-        </p:nvSpPr>
-        <p:spPr>
-          <a:xfrm>
-            <a:off x="6583680" y="5404104"/>
-            <a:ext cx="4709160" cy="1170432"/>
-          </a:xfrm>
-          <a:prstGeom prst="rect">
-            <a:avLst/>
-          </a:prstGeom>
-          <a:noFill/>
-          <a:ln/>
-        </p:spPr>
-        <p:txBody>
-          <a:bodyPr wrap="square" rtlCol="0" anchor="ctr"/>
-          <a:lstStyle/>
-          <a:p>
-            <a:pPr algn="l" indent="0" marL="0">
-              <a:lnSpc>
-                <a:spcPct val="105000"/>
-              </a:lnSpc>
-              <a:buNone/>
-            </a:pPr>
-            <a:r>
-              <a:rPr lang="en-US" sz="2200" b="1" dirty="0">
+          <p:cNvPr id="24" name="Text 22"/>
+          <p:cNvSpPr/>
+          <p:nvPr/>
+        </p:nvSpPr>
+        <p:spPr>
+          <a:xfrm>
+            <a:off x="548640" y="5797296"/>
+            <a:ext cx="11109960" cy="822960"/>
+          </a:xfrm>
+          <a:prstGeom prst="rect">
+            <a:avLst/>
+          </a:prstGeom>
+          <a:noFill/>
+          <a:ln/>
+        </p:spPr>
+        <p:txBody>
+          <a:bodyPr wrap="square" rtlCol="0" anchor="ctr"/>
+          <a:lstStyle/>
+          <a:p>
+            <a:pPr algn="ctr" indent="0" marL="0">
+              <a:buNone/>
+            </a:pPr>
+            <a:r>
+              <a:rPr lang="en-US" sz="2400" b="1" dirty="0">
                 <a:solidFill>
                   <a:srgbClr val="F7F5F1"/>
                 </a:solidFill>
@@ -6667,17 +6532,13 @@
                 <a:ea typeface="Cambria" pitchFamily="34" charset="-122"/>
                 <a:cs typeface="Cambria" pitchFamily="34" charset="-120"/>
               </a:rPr>
-              <a:t>준비된 손이
-</a:t>
-            </a:r>
-            <a:pPr algn="l" indent="0" marL="0">
-              <a:lnSpc>
-                <a:spcPct val="105000"/>
-              </a:lnSpc>
-              <a:buNone/>
-            </a:pPr>
-            <a:r>
-              <a:rPr lang="en-US" sz="2200" b="1" dirty="0">
+              <a:t>준비된 손이  </a:t>
+            </a:r>
+            <a:pPr algn="ctr" indent="0" marL="0">
+              <a:buNone/>
+            </a:pPr>
+            <a:r>
+              <a:rPr lang="en-US" sz="2400" b="1" dirty="0">
                 <a:solidFill>
                   <a:srgbClr val="A8895E"/>
                 </a:solidFill>
@@ -6687,7 +6548,7 @@
               </a:rPr>
               <a:t>디자인이 된다</a:t>
             </a:r>
-            <a:endParaRPr lang="en-US" sz="2200" dirty="0"/>
+            <a:endParaRPr lang="en-US" sz="2400" dirty="0"/>
           </a:p>
         </p:txBody>
       </p:sp>
@@ -6930,12 +6791,12 @@
         </p:nvSpPr>
         <p:spPr>
           <a:xfrm>
-            <a:off x="548640" y="2377440"/>
-            <a:ext cx="11091672" cy="1005840"/>
+            <a:off x="548640" y="2286000"/>
+            <a:ext cx="11091672" cy="868680"/>
           </a:xfrm>
           <a:prstGeom prst="roundRect">
             <a:avLst>
-              <a:gd name="adj" fmla="val 9091"/>
+              <a:gd name="adj" fmla="val 10526"/>
             </a:avLst>
           </a:prstGeom>
           <a:solidFill>
@@ -6959,24 +6820,24 @@
         </p:nvSpPr>
         <p:spPr>
           <a:xfrm>
-            <a:off x="914400" y="2542032"/>
-            <a:ext cx="10332720" cy="365760"/>
-          </a:xfrm>
-          <a:prstGeom prst="rect">
-            <a:avLst/>
-          </a:prstGeom>
-          <a:noFill/>
-          <a:ln/>
-        </p:spPr>
-        <p:txBody>
-          <a:bodyPr wrap="square" rtlCol="0" anchor="ctr"/>
-          <a:lstStyle/>
-          <a:p>
-            <a:pPr indent="0" marL="0">
-              <a:buNone/>
-            </a:pPr>
-            <a:r>
-              <a:rPr lang="en-US" sz="2100" b="1" dirty="0">
+            <a:off x="914400" y="2286000"/>
+            <a:ext cx="10424160" cy="868680"/>
+          </a:xfrm>
+          <a:prstGeom prst="rect">
+            <a:avLst/>
+          </a:prstGeom>
+          <a:noFill/>
+          <a:ln/>
+        </p:spPr>
+        <p:txBody>
+          <a:bodyPr wrap="square" rtlCol="0" anchor="ctr"/>
+          <a:lstStyle/>
+          <a:p>
+            <a:pPr indent="0" marL="0">
+              <a:buNone/>
+            </a:pPr>
+            <a:r>
+              <a:rPr lang="en-US" sz="1800" b="1" dirty="0">
                 <a:solidFill>
                   <a:srgbClr val="A8895E"/>
                 </a:solidFill>
@@ -6990,17 +6851,17 @@
               <a:buNone/>
             </a:pPr>
             <a:r>
-              <a:rPr lang="en-US" sz="2100" dirty="0">
-                <a:solidFill>
-                  <a:srgbClr val="C9C3B7"/>
+              <a:rPr lang="en-US" sz="1800" dirty="0">
+                <a:solidFill>
+                  <a:srgbClr val="D7D1C6"/>
                 </a:solidFill>
                 <a:latin typeface="Cambria" pitchFamily="34" charset="0"/>
                 <a:ea typeface="Cambria" pitchFamily="34" charset="-122"/>
                 <a:cs typeface="Cambria" pitchFamily="34" charset="-120"/>
               </a:rPr>
-              <a:t>  인스타 헤어쇼 · 디렉터 입회</a:t>
-            </a:r>
-            <a:endParaRPr lang="en-US" sz="2100" dirty="0"/>
+              <a:t>   인스타 헤어쇼 · 디렉터 입회 · 기획력·PPT력·노출력으로 증명</a:t>
+            </a:r>
+            <a:endParaRPr lang="en-US" sz="1800" dirty="0"/>
           </a:p>
         </p:txBody>
       </p:sp>
@@ -7012,34 +6873,132 @@
         </p:nvSpPr>
         <p:spPr>
           <a:xfrm>
-            <a:off x="914400" y="2926080"/>
-            <a:ext cx="10332720" cy="365760"/>
-          </a:xfrm>
-          <a:prstGeom prst="rect">
-            <a:avLst/>
-          </a:prstGeom>
-          <a:noFill/>
-          <a:ln/>
-        </p:spPr>
-        <p:txBody>
-          <a:bodyPr wrap="square" rtlCol="0" anchor="ctr"/>
-          <a:lstStyle/>
-          <a:p>
-            <a:pPr indent="0" marL="0">
-              <a:buNone/>
-            </a:pPr>
-            <a:r>
-              <a:rPr lang="en-US" sz="1350" dirty="0">
-                <a:solidFill>
-                  <a:srgbClr val="F7F5F1"/>
-                </a:solidFill>
-                <a:latin typeface="Calibri" pitchFamily="34" charset="0"/>
-                <a:ea typeface="Calibri" pitchFamily="34" charset="-122"/>
-                <a:cs typeface="Calibri" pitchFamily="34" charset="-120"/>
-              </a:rPr>
-              <a:t>기획력 · PPT력 · 인스타 노출력으로 내 실력을 눈으로 증명한다</a:t>
-            </a:r>
-            <a:endParaRPr lang="en-US" sz="1350" dirty="0"/>
+            <a:off x="566928" y="3310128"/>
+            <a:ext cx="10972800" cy="320040"/>
+          </a:xfrm>
+          <a:prstGeom prst="rect">
+            <a:avLst/>
+          </a:prstGeom>
+          <a:noFill/>
+          <a:ln/>
+        </p:spPr>
+        <p:txBody>
+          <a:bodyPr wrap="square" rtlCol="0" anchor="ctr"/>
+          <a:lstStyle/>
+          <a:p>
+            <a:pPr indent="0" marL="0">
+              <a:buNone/>
+            </a:pPr>
+            <a:r>
+              <a:rPr lang="en-US" sz="1400" dirty="0">
+                <a:solidFill>
+                  <a:srgbClr val="555555"/>
+                </a:solidFill>
+                <a:latin typeface="Calibri" pitchFamily="34" charset="0"/>
+                <a:ea typeface="Calibri" pitchFamily="34" charset="-122"/>
+                <a:cs typeface="Calibri" pitchFamily="34" charset="-120"/>
+              </a:rPr>
+              <a:t>쇼 기준 성립 — </a:t>
+            </a:r>
+            <a:pPr indent="0" marL="0">
+              <a:buNone/>
+            </a:pPr>
+            <a:r>
+              <a:rPr lang="en-US" sz="1400" b="1" dirty="0">
+                <a:solidFill>
+                  <a:srgbClr val="1A1815"/>
+                </a:solidFill>
+                <a:latin typeface="Calibri" pitchFamily="34" charset="0"/>
+                <a:ea typeface="Calibri" pitchFamily="34" charset="-122"/>
+                <a:cs typeface="Calibri" pitchFamily="34" charset="-120"/>
+              </a:rPr>
+              <a:t>4레벨</a:t>
+            </a:r>
+            <a:pPr indent="0" marL="0">
+              <a:buNone/>
+            </a:pPr>
+            <a:r>
+              <a:rPr lang="en-US" sz="1400" dirty="0">
+                <a:solidFill>
+                  <a:srgbClr val="1A1815"/>
+                </a:solidFill>
+                <a:latin typeface="Calibri" pitchFamily="34" charset="0"/>
+                <a:ea typeface="Calibri" pitchFamily="34" charset="-122"/>
+                <a:cs typeface="Calibri" pitchFamily="34" charset="-120"/>
+              </a:rPr>
+              <a:t> 정량기준 </a:t>
+            </a:r>
+            <a:pPr indent="0" marL="0">
+              <a:buNone/>
+            </a:pPr>
+            <a:r>
+              <a:rPr lang="en-US" sz="1400" b="1" dirty="0">
+                <a:solidFill>
+                  <a:srgbClr val="A8895E"/>
+                </a:solidFill>
+                <a:latin typeface="Calibri" pitchFamily="34" charset="0"/>
+                <a:ea typeface="Calibri" pitchFamily="34" charset="-122"/>
+                <a:cs typeface="Calibri" pitchFamily="34" charset="-120"/>
+              </a:rPr>
+              <a:t>50%</a:t>
+            </a:r>
+            <a:pPr indent="0" marL="0">
+              <a:buNone/>
+            </a:pPr>
+            <a:r>
+              <a:rPr lang="en-US" sz="1400" dirty="0">
+                <a:solidFill>
+                  <a:srgbClr val="8F887C"/>
+                </a:solidFill>
+                <a:latin typeface="Calibri" pitchFamily="34" charset="0"/>
+                <a:ea typeface="Calibri" pitchFamily="34" charset="-122"/>
+                <a:cs typeface="Calibri" pitchFamily="34" charset="-120"/>
+              </a:rPr>
+              <a:t>   ·   </a:t>
+            </a:r>
+            <a:pPr indent="0" marL="0">
+              <a:buNone/>
+            </a:pPr>
+            <a:r>
+              <a:rPr lang="en-US" sz="1400" b="1" dirty="0">
+                <a:solidFill>
+                  <a:srgbClr val="1A1815"/>
+                </a:solidFill>
+                <a:latin typeface="Calibri" pitchFamily="34" charset="0"/>
+                <a:ea typeface="Calibri" pitchFamily="34" charset="-122"/>
+                <a:cs typeface="Calibri" pitchFamily="34" charset="-120"/>
+              </a:rPr>
+              <a:t>5레벨</a:t>
+            </a:r>
+            <a:pPr indent="0" marL="0">
+              <a:buNone/>
+            </a:pPr>
+            <a:r>
+              <a:rPr lang="en-US" sz="1400" dirty="0">
+                <a:solidFill>
+                  <a:srgbClr val="1A1815"/>
+                </a:solidFill>
+                <a:latin typeface="Calibri" pitchFamily="34" charset="0"/>
+                <a:ea typeface="Calibri" pitchFamily="34" charset="-122"/>
+                <a:cs typeface="Calibri" pitchFamily="34" charset="-120"/>
+              </a:rPr>
+              <a:t> </a:t>
+            </a:r>
+            <a:pPr indent="0" marL="0">
+              <a:buNone/>
+            </a:pPr>
+            <a:r>
+              <a:rPr lang="en-US" sz="1400" b="1" dirty="0">
+                <a:solidFill>
+                  <a:srgbClr val="A8895E"/>
+                </a:solidFill>
+                <a:latin typeface="Calibri" pitchFamily="34" charset="0"/>
+                <a:ea typeface="Calibri" pitchFamily="34" charset="-122"/>
+                <a:cs typeface="Calibri" pitchFamily="34" charset="-120"/>
+              </a:rPr>
+              <a:t>80% 통과 시</a:t>
+            </a:r>
+            <a:endParaRPr lang="en-US" sz="1400" dirty="0"/>
           </a:p>
         </p:txBody>
       </p:sp>
@@ -7052,65 +7011,23 @@
         <p:spPr>
           <a:xfrm>
             <a:off x="566928" y="3703320"/>
-            <a:ext cx="10972800" cy="365760"/>
-          </a:xfrm>
-          <a:prstGeom prst="rect">
-            <a:avLst/>
-          </a:prstGeom>
-          <a:noFill/>
-          <a:ln/>
-        </p:spPr>
-        <p:txBody>
-          <a:bodyPr wrap="square" rtlCol="0" anchor="ctr"/>
-          <a:lstStyle/>
-          <a:p>
-            <a:pPr indent="0" marL="0">
-              <a:buNone/>
-            </a:pPr>
-            <a:r>
-              <a:rPr lang="en-US" sz="1500" b="1" dirty="0">
-                <a:solidFill>
-                  <a:srgbClr val="1A1815"/>
-                </a:solidFill>
-                <a:latin typeface="Calibri" pitchFamily="34" charset="0"/>
-                <a:ea typeface="Calibri" pitchFamily="34" charset="-122"/>
-                <a:cs typeface="Calibri" pitchFamily="34" charset="-120"/>
-              </a:rPr>
-              <a:t>4레벨</a:t>
-            </a:r>
-            <a:pPr indent="0" marL="0">
-              <a:buNone/>
-            </a:pPr>
-            <a:r>
-              <a:rPr lang="en-US" sz="1500" dirty="0">
-                <a:solidFill>
-                  <a:srgbClr val="1A1815"/>
-                </a:solidFill>
-                <a:latin typeface="Calibri" pitchFamily="34" charset="0"/>
-                <a:ea typeface="Calibri" pitchFamily="34" charset="-122"/>
-                <a:cs typeface="Calibri" pitchFamily="34" charset="-120"/>
-              </a:rPr>
-              <a:t> 기존 정량 기준 </a:t>
-            </a:r>
-            <a:pPr indent="0" marL="0">
-              <a:buNone/>
-            </a:pPr>
-            <a:r>
-              <a:rPr lang="en-US" sz="1500" b="1" dirty="0">
-                <a:solidFill>
-                  <a:srgbClr val="A8895E"/>
-                </a:solidFill>
-                <a:latin typeface="Calibri" pitchFamily="34" charset="0"/>
-                <a:ea typeface="Calibri" pitchFamily="34" charset="-122"/>
-                <a:cs typeface="Calibri" pitchFamily="34" charset="-120"/>
-              </a:rPr>
-              <a:t>50% 통과</a:t>
-            </a:r>
-            <a:pPr indent="0" marL="0">
-              <a:buNone/>
-            </a:pPr>
-            <a:r>
-              <a:rPr lang="en-US" sz="1500" dirty="0">
+            <a:ext cx="10972800" cy="256032"/>
+          </a:xfrm>
+          <a:prstGeom prst="rect">
+            <a:avLst/>
+          </a:prstGeom>
+          <a:noFill/>
+          <a:ln/>
+        </p:spPr>
+        <p:txBody>
+          <a:bodyPr wrap="square" rtlCol="0" anchor="ctr"/>
+          <a:lstStyle/>
+          <a:p>
+            <a:pPr indent="0" marL="0">
+              <a:buNone/>
+            </a:pPr>
+            <a:r>
+              <a:rPr lang="en-US" sz="1150" b="1" spc="200" kern="0" dirty="0">
                 <a:solidFill>
                   <a:srgbClr val="8F887C"/>
                 </a:solidFill>
@@ -7118,127 +7035,32 @@
                 <a:ea typeface="Calibri" pitchFamily="34" charset="-122"/>
                 <a:cs typeface="Calibri" pitchFamily="34" charset="-120"/>
               </a:rPr>
-              <a:t>        ·        </a:t>
-            </a:r>
-            <a:pPr indent="0" marL="0">
-              <a:buNone/>
-            </a:pPr>
-            <a:r>
-              <a:rPr lang="en-US" sz="1500" b="1" dirty="0">
-                <a:solidFill>
-                  <a:srgbClr val="1A1815"/>
-                </a:solidFill>
-                <a:latin typeface="Calibri" pitchFamily="34" charset="0"/>
-                <a:ea typeface="Calibri" pitchFamily="34" charset="-122"/>
-                <a:cs typeface="Calibri" pitchFamily="34" charset="-120"/>
-              </a:rPr>
-              <a:t>5레벨</a:t>
-            </a:r>
-            <a:pPr indent="0" marL="0">
-              <a:buNone/>
-            </a:pPr>
-            <a:r>
-              <a:rPr lang="en-US" sz="1500" dirty="0">
-                <a:solidFill>
-                  <a:srgbClr val="1A1815"/>
-                </a:solidFill>
-                <a:latin typeface="Calibri" pitchFamily="34" charset="0"/>
-                <a:ea typeface="Calibri" pitchFamily="34" charset="-122"/>
-                <a:cs typeface="Calibri" pitchFamily="34" charset="-120"/>
-              </a:rPr>
-              <a:t> </a:t>
-            </a:r>
-            <a:pPr indent="0" marL="0">
-              <a:buNone/>
-            </a:pPr>
-            <a:r>
-              <a:rPr lang="en-US" sz="1500" b="1" dirty="0">
-                <a:solidFill>
-                  <a:srgbClr val="A8895E"/>
-                </a:solidFill>
-                <a:latin typeface="Calibri" pitchFamily="34" charset="0"/>
-                <a:ea typeface="Calibri" pitchFamily="34" charset="-122"/>
-                <a:cs typeface="Calibri" pitchFamily="34" charset="-120"/>
-              </a:rPr>
-              <a:t>80% 통과</a:t>
-            </a:r>
-            <a:pPr indent="0" marL="0">
-              <a:buNone/>
-            </a:pPr>
-            <a:r>
-              <a:rPr lang="en-US" sz="1500" dirty="0">
-                <a:solidFill>
-                  <a:srgbClr val="1A1815"/>
-                </a:solidFill>
-                <a:latin typeface="Calibri" pitchFamily="34" charset="0"/>
-                <a:ea typeface="Calibri" pitchFamily="34" charset="-122"/>
-                <a:cs typeface="Calibri" pitchFamily="34" charset="-120"/>
-              </a:rPr>
-              <a:t> 시 성립</a:t>
-            </a:r>
-            <a:endParaRPr lang="en-US" sz="1500" dirty="0"/>
-          </a:p>
-        </p:txBody>
-      </p:sp>
-      <p:sp>
-        <p:nvSpPr>
-          <p:cNvPr id="11" name="Text 9"/>
-          <p:cNvSpPr/>
-          <p:nvPr/>
-        </p:nvSpPr>
-        <p:spPr>
-          <a:xfrm>
-            <a:off x="566928" y="4297680"/>
-            <a:ext cx="10972800" cy="274320"/>
-          </a:xfrm>
-          <a:prstGeom prst="rect">
-            <a:avLst/>
-          </a:prstGeom>
-          <a:noFill/>
-          <a:ln/>
-        </p:spPr>
-        <p:txBody>
-          <a:bodyPr wrap="square" rtlCol="0" anchor="ctr"/>
-          <a:lstStyle/>
-          <a:p>
-            <a:pPr indent="0" marL="0">
-              <a:buNone/>
-            </a:pPr>
-            <a:r>
-              <a:rPr lang="en-US" sz="1200" b="1" spc="200" kern="0" dirty="0">
-                <a:solidFill>
-                  <a:srgbClr val="8F887C"/>
-                </a:solidFill>
-                <a:latin typeface="Calibri" pitchFamily="34" charset="0"/>
-                <a:ea typeface="Calibri" pitchFamily="34" charset="-122"/>
-                <a:cs typeface="Calibri" pitchFamily="34" charset="-120"/>
-              </a:rPr>
               <a:t>기존 정량 기준</a:t>
             </a:r>
-            <a:endParaRPr lang="en-US" sz="1200" dirty="0"/>
-          </a:p>
-        </p:txBody>
-      </p:sp>
-      <p:sp>
-        <p:nvSpPr>
-          <p:cNvPr id="12" name="Shape 10"/>
-          <p:cNvSpPr/>
-          <p:nvPr/>
-        </p:nvSpPr>
-        <p:spPr>
-          <a:xfrm>
-            <a:off x="566928" y="4663440"/>
-            <a:ext cx="2157984" cy="658368"/>
+            <a:endParaRPr lang="en-US" sz="1150" dirty="0"/>
+          </a:p>
+        </p:txBody>
+      </p:sp>
+      <p:sp>
+        <p:nvSpPr>
+          <p:cNvPr id="11" name="Shape 9"/>
+          <p:cNvSpPr/>
+          <p:nvPr/>
+        </p:nvSpPr>
+        <p:spPr>
+          <a:xfrm>
+            <a:off x="566928" y="3977640"/>
+            <a:ext cx="2157984" cy="566928"/>
           </a:xfrm>
           <a:prstGeom prst="roundRect">
             <a:avLst>
-              <a:gd name="adj" fmla="val 19444"/>
+              <a:gd name="adj" fmla="val 19355"/>
             </a:avLst>
           </a:prstGeom>
           <a:solidFill>
             <a:srgbClr val="FFFFFF"/>
           </a:solidFill>
-          <a:ln w="19050">
+          <a:ln w="15875">
             <a:solidFill>
               <a:srgbClr val="A8895E"/>
             </a:solidFill>
@@ -7248,14 +7070,14 @@
       </p:sp>
       <p:sp>
         <p:nvSpPr>
-          <p:cNvPr id="13" name="Text 11"/>
-          <p:cNvSpPr/>
-          <p:nvPr/>
-        </p:nvSpPr>
-        <p:spPr>
-          <a:xfrm>
-            <a:off x="612648" y="4663440"/>
-            <a:ext cx="2066544" cy="658368"/>
+          <p:cNvPr id="12" name="Text 10"/>
+          <p:cNvSpPr/>
+          <p:nvPr/>
+        </p:nvSpPr>
+        <p:spPr>
+          <a:xfrm>
+            <a:off x="612648" y="3977640"/>
+            <a:ext cx="2066544" cy="566928"/>
           </a:xfrm>
           <a:prstGeom prst="rect">
             <a:avLst/>
@@ -7271,7 +7093,7 @@
               <a:buNone/>
             </a:pPr>
             <a:r>
-              <a:rPr lang="en-US" sz="1300" b="1" dirty="0">
+              <a:rPr lang="en-US" sz="1250" b="1" dirty="0">
                 <a:solidFill>
                   <a:srgbClr val="1A1815"/>
                 </a:solidFill>
@@ -7281,30 +7103,30 @@
               </a:rPr>
               <a:t>포트폴리오 30</a:t>
             </a:r>
-            <a:endParaRPr lang="en-US" sz="1300" dirty="0"/>
-          </a:p>
-        </p:txBody>
-      </p:sp>
-      <p:sp>
-        <p:nvSpPr>
-          <p:cNvPr id="14" name="Shape 12"/>
-          <p:cNvSpPr/>
-          <p:nvPr/>
-        </p:nvSpPr>
-        <p:spPr>
-          <a:xfrm>
-            <a:off x="2793492" y="4663440"/>
-            <a:ext cx="2157984" cy="658368"/>
+            <a:endParaRPr lang="en-US" sz="1250" dirty="0"/>
+          </a:p>
+        </p:txBody>
+      </p:sp>
+      <p:sp>
+        <p:nvSpPr>
+          <p:cNvPr id="13" name="Shape 11"/>
+          <p:cNvSpPr/>
+          <p:nvPr/>
+        </p:nvSpPr>
+        <p:spPr>
+          <a:xfrm>
+            <a:off x="2793492" y="3977640"/>
+            <a:ext cx="2157984" cy="566928"/>
           </a:xfrm>
           <a:prstGeom prst="roundRect">
             <a:avLst>
-              <a:gd name="adj" fmla="val 19444"/>
+              <a:gd name="adj" fmla="val 19355"/>
             </a:avLst>
           </a:prstGeom>
           <a:solidFill>
             <a:srgbClr val="FFFFFF"/>
           </a:solidFill>
-          <a:ln w="19050">
+          <a:ln w="15875">
             <a:solidFill>
               <a:srgbClr val="A8895E"/>
             </a:solidFill>
@@ -7314,14 +7136,14 @@
       </p:sp>
       <p:sp>
         <p:nvSpPr>
-          <p:cNvPr id="15" name="Text 13"/>
-          <p:cNvSpPr/>
-          <p:nvPr/>
-        </p:nvSpPr>
-        <p:spPr>
-          <a:xfrm>
-            <a:off x="2839212" y="4663440"/>
-            <a:ext cx="2066544" cy="658368"/>
+          <p:cNvPr id="14" name="Text 12"/>
+          <p:cNvSpPr/>
+          <p:nvPr/>
+        </p:nvSpPr>
+        <p:spPr>
+          <a:xfrm>
+            <a:off x="2839212" y="3977640"/>
+            <a:ext cx="2066544" cy="566928"/>
           </a:xfrm>
           <a:prstGeom prst="rect">
             <a:avLst/>
@@ -7337,7 +7159,7 @@
               <a:buNone/>
             </a:pPr>
             <a:r>
-              <a:rPr lang="en-US" sz="1300" b="1" dirty="0">
+              <a:rPr lang="en-US" sz="1250" b="1" dirty="0">
                 <a:solidFill>
                   <a:srgbClr val="1A1815"/>
                 </a:solidFill>
@@ -7347,30 +7169,30 @@
               </a:rPr>
               <a:t>인스타 3개월</a:t>
             </a:r>
-            <a:endParaRPr lang="en-US" sz="1300" dirty="0"/>
-          </a:p>
-        </p:txBody>
-      </p:sp>
-      <p:sp>
-        <p:nvSpPr>
-          <p:cNvPr id="16" name="Shape 14"/>
-          <p:cNvSpPr/>
-          <p:nvPr/>
-        </p:nvSpPr>
-        <p:spPr>
-          <a:xfrm>
-            <a:off x="5020056" y="4663440"/>
-            <a:ext cx="2157984" cy="658368"/>
+            <a:endParaRPr lang="en-US" sz="1250" dirty="0"/>
+          </a:p>
+        </p:txBody>
+      </p:sp>
+      <p:sp>
+        <p:nvSpPr>
+          <p:cNvPr id="15" name="Shape 13"/>
+          <p:cNvSpPr/>
+          <p:nvPr/>
+        </p:nvSpPr>
+        <p:spPr>
+          <a:xfrm>
+            <a:off x="5020056" y="3977640"/>
+            <a:ext cx="2157984" cy="566928"/>
           </a:xfrm>
           <a:prstGeom prst="roundRect">
             <a:avLst>
-              <a:gd name="adj" fmla="val 19444"/>
+              <a:gd name="adj" fmla="val 19355"/>
             </a:avLst>
           </a:prstGeom>
           <a:solidFill>
             <a:srgbClr val="FFFFFF"/>
           </a:solidFill>
-          <a:ln w="19050">
+          <a:ln w="15875">
             <a:solidFill>
               <a:srgbClr val="A8895E"/>
             </a:solidFill>
@@ -7380,14 +7202,14 @@
       </p:sp>
       <p:sp>
         <p:nvSpPr>
-          <p:cNvPr id="17" name="Text 15"/>
-          <p:cNvSpPr/>
-          <p:nvPr/>
-        </p:nvSpPr>
-        <p:spPr>
-          <a:xfrm>
-            <a:off x="5065776" y="4663440"/>
-            <a:ext cx="2066544" cy="658368"/>
+          <p:cNvPr id="16" name="Text 14"/>
+          <p:cNvSpPr/>
+          <p:nvPr/>
+        </p:nvSpPr>
+        <p:spPr>
+          <a:xfrm>
+            <a:off x="5065776" y="3977640"/>
+            <a:ext cx="2066544" cy="566928"/>
           </a:xfrm>
           <a:prstGeom prst="rect">
             <a:avLst/>
@@ -7403,7 +7225,7 @@
               <a:buNone/>
             </a:pPr>
             <a:r>
-              <a:rPr lang="en-US" sz="1300" b="1" dirty="0">
+              <a:rPr lang="en-US" sz="1250" b="1" dirty="0">
                 <a:solidFill>
                   <a:srgbClr val="1A1815"/>
                 </a:solidFill>
@@ -7413,30 +7235,30 @@
               </a:rPr>
               <a:t>매출 300~400만</a:t>
             </a:r>
-            <a:endParaRPr lang="en-US" sz="1300" dirty="0"/>
-          </a:p>
-        </p:txBody>
-      </p:sp>
-      <p:sp>
-        <p:nvSpPr>
-          <p:cNvPr id="18" name="Shape 16"/>
-          <p:cNvSpPr/>
-          <p:nvPr/>
-        </p:nvSpPr>
-        <p:spPr>
-          <a:xfrm>
-            <a:off x="7246620" y="4663440"/>
-            <a:ext cx="2157984" cy="658368"/>
+            <a:endParaRPr lang="en-US" sz="1250" dirty="0"/>
+          </a:p>
+        </p:txBody>
+      </p:sp>
+      <p:sp>
+        <p:nvSpPr>
+          <p:cNvPr id="17" name="Shape 15"/>
+          <p:cNvSpPr/>
+          <p:nvPr/>
+        </p:nvSpPr>
+        <p:spPr>
+          <a:xfrm>
+            <a:off x="7246620" y="3977640"/>
+            <a:ext cx="2157984" cy="566928"/>
           </a:xfrm>
           <a:prstGeom prst="roundRect">
             <a:avLst>
-              <a:gd name="adj" fmla="val 19444"/>
+              <a:gd name="adj" fmla="val 19355"/>
             </a:avLst>
           </a:prstGeom>
           <a:solidFill>
             <a:srgbClr val="FFFFFF"/>
           </a:solidFill>
-          <a:ln w="19050">
+          <a:ln w="15875">
             <a:solidFill>
               <a:srgbClr val="A8895E"/>
             </a:solidFill>
@@ -7446,14 +7268,14 @@
       </p:sp>
       <p:sp>
         <p:nvSpPr>
-          <p:cNvPr id="19" name="Text 17"/>
-          <p:cNvSpPr/>
-          <p:nvPr/>
-        </p:nvSpPr>
-        <p:spPr>
-          <a:xfrm>
-            <a:off x="7292340" y="4663440"/>
-            <a:ext cx="2066544" cy="658368"/>
+          <p:cNvPr id="18" name="Text 16"/>
+          <p:cNvSpPr/>
+          <p:nvPr/>
+        </p:nvSpPr>
+        <p:spPr>
+          <a:xfrm>
+            <a:off x="7292340" y="3977640"/>
+            <a:ext cx="2066544" cy="566928"/>
           </a:xfrm>
           <a:prstGeom prst="rect">
             <a:avLst/>
@@ -7469,7 +7291,7 @@
               <a:buNone/>
             </a:pPr>
             <a:r>
-              <a:rPr lang="en-US" sz="1300" b="1" dirty="0">
+              <a:rPr lang="en-US" sz="1250" b="1" dirty="0">
                 <a:solidFill>
                   <a:srgbClr val="1A1815"/>
                 </a:solidFill>
@@ -7479,30 +7301,30 @@
               </a:rPr>
               <a:t>리뷰 월 10</a:t>
             </a:r>
-            <a:endParaRPr lang="en-US" sz="1300" dirty="0"/>
-          </a:p>
-        </p:txBody>
-      </p:sp>
-      <p:sp>
-        <p:nvSpPr>
-          <p:cNvPr id="20" name="Shape 18"/>
-          <p:cNvSpPr/>
-          <p:nvPr/>
-        </p:nvSpPr>
-        <p:spPr>
-          <a:xfrm>
-            <a:off x="9473184" y="4663440"/>
-            <a:ext cx="2157984" cy="658368"/>
+            <a:endParaRPr lang="en-US" sz="1250" dirty="0"/>
+          </a:p>
+        </p:txBody>
+      </p:sp>
+      <p:sp>
+        <p:nvSpPr>
+          <p:cNvPr id="19" name="Shape 17"/>
+          <p:cNvSpPr/>
+          <p:nvPr/>
+        </p:nvSpPr>
+        <p:spPr>
+          <a:xfrm>
+            <a:off x="9473184" y="3977640"/>
+            <a:ext cx="2157984" cy="566928"/>
           </a:xfrm>
           <a:prstGeom prst="roundRect">
             <a:avLst>
-              <a:gd name="adj" fmla="val 19444"/>
+              <a:gd name="adj" fmla="val 19355"/>
             </a:avLst>
           </a:prstGeom>
           <a:solidFill>
             <a:srgbClr val="FFFFFF"/>
           </a:solidFill>
-          <a:ln w="19050">
+          <a:ln w="15875">
             <a:solidFill>
               <a:srgbClr val="A8895E"/>
             </a:solidFill>
@@ -7512,14 +7334,128 @@
       </p:sp>
       <p:sp>
         <p:nvSpPr>
+          <p:cNvPr id="20" name="Text 18"/>
+          <p:cNvSpPr/>
+          <p:nvPr/>
+        </p:nvSpPr>
+        <p:spPr>
+          <a:xfrm>
+            <a:off x="9518904" y="3977640"/>
+            <a:ext cx="2066544" cy="566928"/>
+          </a:xfrm>
+          <a:prstGeom prst="rect">
+            <a:avLst/>
+          </a:prstGeom>
+          <a:noFill/>
+          <a:ln/>
+        </p:spPr>
+        <p:txBody>
+          <a:bodyPr wrap="square" rtlCol="0" anchor="ctr"/>
+          <a:lstStyle/>
+          <a:p>
+            <a:pPr algn="ctr" indent="0" marL="0">
+              <a:buNone/>
+            </a:pPr>
+            <a:r>
+              <a:rPr lang="en-US" sz="1250" b="1" dirty="0">
+                <a:solidFill>
+                  <a:srgbClr val="1A1815"/>
+                </a:solidFill>
+                <a:latin typeface="Calibri" pitchFamily="34" charset="0"/>
+                <a:ea typeface="Calibri" pitchFamily="34" charset="-122"/>
+                <a:cs typeface="Calibri" pitchFamily="34" charset="-120"/>
+              </a:rPr>
+              <a:t>모델 50명</a:t>
+            </a:r>
+            <a:endParaRPr lang="en-US" sz="1250" dirty="0"/>
+          </a:p>
+        </p:txBody>
+      </p:sp>
+      <p:sp>
+        <p:nvSpPr>
           <p:cNvPr id="21" name="Text 19"/>
           <p:cNvSpPr/>
           <p:nvPr/>
         </p:nvSpPr>
         <p:spPr>
           <a:xfrm>
-            <a:off x="9518904" y="4663440"/>
-            <a:ext cx="2066544" cy="658368"/>
+            <a:off x="566928" y="4754880"/>
+            <a:ext cx="10972800" cy="274320"/>
+          </a:xfrm>
+          <a:prstGeom prst="rect">
+            <a:avLst/>
+          </a:prstGeom>
+          <a:noFill/>
+          <a:ln/>
+        </p:spPr>
+        <p:txBody>
+          <a:bodyPr wrap="square" rtlCol="0" anchor="ctr"/>
+          <a:lstStyle/>
+          <a:p>
+            <a:pPr indent="0" marL="0">
+              <a:buNone/>
+            </a:pPr>
+            <a:r>
+              <a:rPr lang="en-US" sz="1150" b="1" spc="100" kern="0" dirty="0">
+                <a:solidFill>
+                  <a:srgbClr val="1A1815"/>
+                </a:solidFill>
+                <a:latin typeface="Calibri" pitchFamily="34" charset="0"/>
+                <a:ea typeface="Calibri" pitchFamily="34" charset="-122"/>
+                <a:cs typeface="Calibri" pitchFamily="34" charset="-120"/>
+              </a:rPr>
+              <a:t>★ 무조건 디자이너 되는 KPI</a:t>
+            </a:r>
+            <a:pPr indent="0" marL="0">
+              <a:buNone/>
+            </a:pPr>
+            <a:r>
+              <a:rPr lang="en-US" sz="1150" spc="100" kern="0" dirty="0">
+                <a:solidFill>
+                  <a:srgbClr val="6A655C"/>
+                </a:solidFill>
+                <a:latin typeface="Calibri" pitchFamily="34" charset="0"/>
+                <a:ea typeface="Calibri" pitchFamily="34" charset="-122"/>
+                <a:cs typeface="Calibri" pitchFamily="34" charset="-120"/>
+              </a:rPr>
+              <a:t>  — 최종 조건 달성 시 쇼·정량 기준과 무관하게 승급</a:t>
+            </a:r>
+            <a:endParaRPr lang="en-US" sz="1150" dirty="0"/>
+          </a:p>
+        </p:txBody>
+      </p:sp>
+      <p:sp>
+        <p:nvSpPr>
+          <p:cNvPr id="22" name="Shape 20"/>
+          <p:cNvSpPr/>
+          <p:nvPr/>
+        </p:nvSpPr>
+        <p:spPr>
+          <a:xfrm>
+            <a:off x="566928" y="5074920"/>
+            <a:ext cx="2157984" cy="566928"/>
+          </a:xfrm>
+          <a:prstGeom prst="roundRect">
+            <a:avLst>
+              <a:gd name="adj" fmla="val 19355"/>
+            </a:avLst>
+          </a:prstGeom>
+          <a:solidFill>
+            <a:srgbClr val="A8895E"/>
+          </a:solidFill>
+          <a:ln/>
+        </p:spPr>
+      </p:sp>
+      <p:sp>
+        <p:nvSpPr>
+          <p:cNvPr id="23" name="Text 21"/>
+          <p:cNvSpPr/>
+          <p:nvPr/>
+        </p:nvSpPr>
+        <p:spPr>
+          <a:xfrm>
+            <a:off x="612648" y="5074920"/>
+            <a:ext cx="2066544" cy="566928"/>
           </a:xfrm>
           <a:prstGeom prst="rect">
             <a:avLst/>
@@ -7537,13 +7473,13 @@
             <a:r>
               <a:rPr lang="en-US" sz="1300" b="1" dirty="0">
                 <a:solidFill>
-                  <a:srgbClr val="1A1815"/>
-                </a:solidFill>
-                <a:latin typeface="Calibri" pitchFamily="34" charset="0"/>
-                <a:ea typeface="Calibri" pitchFamily="34" charset="-122"/>
-                <a:cs typeface="Calibri" pitchFamily="34" charset="-120"/>
-              </a:rPr>
-              <a:t>모델 50명</a:t>
+                  <a:srgbClr val="FFFFFF"/>
+                </a:solidFill>
+                <a:latin typeface="Calibri" pitchFamily="34" charset="0"/>
+                <a:ea typeface="Calibri" pitchFamily="34" charset="-122"/>
+                <a:cs typeface="Calibri" pitchFamily="34" charset="-120"/>
+              </a:rPr>
+              <a:t>모델 100명</a:t>
             </a:r>
             <a:endParaRPr lang="en-US" sz="1300" dirty="0"/>
           </a:p>
@@ -7551,30 +7487,274 @@
       </p:sp>
       <p:sp>
         <p:nvSpPr>
-          <p:cNvPr id="22" name="Text 20"/>
-          <p:cNvSpPr/>
-          <p:nvPr/>
-        </p:nvSpPr>
-        <p:spPr>
-          <a:xfrm>
-            <a:off x="566928" y="5623560"/>
-            <a:ext cx="10972800" cy="365760"/>
-          </a:xfrm>
-          <a:prstGeom prst="rect">
-            <a:avLst/>
-          </a:prstGeom>
-          <a:noFill/>
-          <a:ln/>
-        </p:spPr>
-        <p:txBody>
-          <a:bodyPr wrap="square" rtlCol="0" anchor="ctr"/>
-          <a:lstStyle/>
-          <a:p>
-            <a:pPr indent="0" marL="0">
-              <a:buNone/>
-            </a:pPr>
-            <a:r>
-              <a:rPr lang="en-US" sz="1250" dirty="0">
+          <p:cNvPr id="24" name="Shape 22"/>
+          <p:cNvSpPr/>
+          <p:nvPr/>
+        </p:nvSpPr>
+        <p:spPr>
+          <a:xfrm>
+            <a:off x="2793492" y="5074920"/>
+            <a:ext cx="2157984" cy="566928"/>
+          </a:xfrm>
+          <a:prstGeom prst="roundRect">
+            <a:avLst>
+              <a:gd name="adj" fmla="val 19355"/>
+            </a:avLst>
+          </a:prstGeom>
+          <a:solidFill>
+            <a:srgbClr val="A8895E"/>
+          </a:solidFill>
+          <a:ln/>
+        </p:spPr>
+      </p:sp>
+      <p:sp>
+        <p:nvSpPr>
+          <p:cNvPr id="25" name="Text 23"/>
+          <p:cNvSpPr/>
+          <p:nvPr/>
+        </p:nvSpPr>
+        <p:spPr>
+          <a:xfrm>
+            <a:off x="2839212" y="5074920"/>
+            <a:ext cx="2066544" cy="566928"/>
+          </a:xfrm>
+          <a:prstGeom prst="rect">
+            <a:avLst/>
+          </a:prstGeom>
+          <a:noFill/>
+          <a:ln/>
+        </p:spPr>
+        <p:txBody>
+          <a:bodyPr wrap="square" rtlCol="0" anchor="ctr"/>
+          <a:lstStyle/>
+          <a:p>
+            <a:pPr algn="ctr" indent="0" marL="0">
+              <a:buNone/>
+            </a:pPr>
+            <a:r>
+              <a:rPr lang="en-US" sz="1300" b="1" dirty="0">
+                <a:solidFill>
+                  <a:srgbClr val="FFFFFF"/>
+                </a:solidFill>
+                <a:latin typeface="Calibri" pitchFamily="34" charset="0"/>
+                <a:ea typeface="Calibri" pitchFamily="34" charset="-122"/>
+                <a:cs typeface="Calibri" pitchFamily="34" charset="-120"/>
+              </a:rPr>
+              <a:t>매출 500</a:t>
+            </a:r>
+            <a:endParaRPr lang="en-US" sz="1300" dirty="0"/>
+          </a:p>
+        </p:txBody>
+      </p:sp>
+      <p:sp>
+        <p:nvSpPr>
+          <p:cNvPr id="26" name="Shape 24"/>
+          <p:cNvSpPr/>
+          <p:nvPr/>
+        </p:nvSpPr>
+        <p:spPr>
+          <a:xfrm>
+            <a:off x="5020056" y="5074920"/>
+            <a:ext cx="2157984" cy="566928"/>
+          </a:xfrm>
+          <a:prstGeom prst="roundRect">
+            <a:avLst>
+              <a:gd name="adj" fmla="val 19355"/>
+            </a:avLst>
+          </a:prstGeom>
+          <a:solidFill>
+            <a:srgbClr val="A8895E"/>
+          </a:solidFill>
+          <a:ln/>
+        </p:spPr>
+      </p:sp>
+      <p:sp>
+        <p:nvSpPr>
+          <p:cNvPr id="27" name="Text 25"/>
+          <p:cNvSpPr/>
+          <p:nvPr/>
+        </p:nvSpPr>
+        <p:spPr>
+          <a:xfrm>
+            <a:off x="5065776" y="5074920"/>
+            <a:ext cx="2066544" cy="566928"/>
+          </a:xfrm>
+          <a:prstGeom prst="rect">
+            <a:avLst/>
+          </a:prstGeom>
+          <a:noFill/>
+          <a:ln/>
+        </p:spPr>
+        <p:txBody>
+          <a:bodyPr wrap="square" rtlCol="0" anchor="ctr"/>
+          <a:lstStyle/>
+          <a:p>
+            <a:pPr algn="ctr" indent="0" marL="0">
+              <a:buNone/>
+            </a:pPr>
+            <a:r>
+              <a:rPr lang="en-US" sz="1300" b="1" dirty="0">
+                <a:solidFill>
+                  <a:srgbClr val="FFFFFF"/>
+                </a:solidFill>
+                <a:latin typeface="Calibri" pitchFamily="34" charset="0"/>
+                <a:ea typeface="Calibri" pitchFamily="34" charset="-122"/>
+                <a:cs typeface="Calibri" pitchFamily="34" charset="-120"/>
+              </a:rPr>
+              <a:t>시그니처 60</a:t>
+            </a:r>
+            <a:endParaRPr lang="en-US" sz="1300" dirty="0"/>
+          </a:p>
+        </p:txBody>
+      </p:sp>
+      <p:sp>
+        <p:nvSpPr>
+          <p:cNvPr id="28" name="Shape 26"/>
+          <p:cNvSpPr/>
+          <p:nvPr/>
+        </p:nvSpPr>
+        <p:spPr>
+          <a:xfrm>
+            <a:off x="7246620" y="5074920"/>
+            <a:ext cx="2157984" cy="566928"/>
+          </a:xfrm>
+          <a:prstGeom prst="roundRect">
+            <a:avLst>
+              <a:gd name="adj" fmla="val 19355"/>
+            </a:avLst>
+          </a:prstGeom>
+          <a:solidFill>
+            <a:srgbClr val="A8895E"/>
+          </a:solidFill>
+          <a:ln/>
+        </p:spPr>
+      </p:sp>
+      <p:sp>
+        <p:nvSpPr>
+          <p:cNvPr id="29" name="Text 27"/>
+          <p:cNvSpPr/>
+          <p:nvPr/>
+        </p:nvSpPr>
+        <p:spPr>
+          <a:xfrm>
+            <a:off x="7292340" y="5074920"/>
+            <a:ext cx="2066544" cy="566928"/>
+          </a:xfrm>
+          <a:prstGeom prst="rect">
+            <a:avLst/>
+          </a:prstGeom>
+          <a:noFill/>
+          <a:ln/>
+        </p:spPr>
+        <p:txBody>
+          <a:bodyPr wrap="square" rtlCol="0" anchor="ctr"/>
+          <a:lstStyle/>
+          <a:p>
+            <a:pPr algn="ctr" indent="0" marL="0">
+              <a:buNone/>
+            </a:pPr>
+            <a:r>
+              <a:rPr lang="en-US" sz="1300" b="1" dirty="0">
+                <a:solidFill>
+                  <a:srgbClr val="FFFFFF"/>
+                </a:solidFill>
+                <a:latin typeface="Calibri" pitchFamily="34" charset="0"/>
+                <a:ea typeface="Calibri" pitchFamily="34" charset="-122"/>
+                <a:cs typeface="Calibri" pitchFamily="34" charset="-120"/>
+              </a:rPr>
+              <a:t>리뷰 70</a:t>
+            </a:r>
+            <a:endParaRPr lang="en-US" sz="1300" dirty="0"/>
+          </a:p>
+        </p:txBody>
+      </p:sp>
+      <p:sp>
+        <p:nvSpPr>
+          <p:cNvPr id="30" name="Shape 28"/>
+          <p:cNvSpPr/>
+          <p:nvPr/>
+        </p:nvSpPr>
+        <p:spPr>
+          <a:xfrm>
+            <a:off x="9473184" y="5074920"/>
+            <a:ext cx="2157984" cy="566928"/>
+          </a:xfrm>
+          <a:prstGeom prst="roundRect">
+            <a:avLst>
+              <a:gd name="adj" fmla="val 19355"/>
+            </a:avLst>
+          </a:prstGeom>
+          <a:solidFill>
+            <a:srgbClr val="A8895E"/>
+          </a:solidFill>
+          <a:ln/>
+        </p:spPr>
+      </p:sp>
+      <p:sp>
+        <p:nvSpPr>
+          <p:cNvPr id="31" name="Text 29"/>
+          <p:cNvSpPr/>
+          <p:nvPr/>
+        </p:nvSpPr>
+        <p:spPr>
+          <a:xfrm>
+            <a:off x="9518904" y="5074920"/>
+            <a:ext cx="2066544" cy="566928"/>
+          </a:xfrm>
+          <a:prstGeom prst="rect">
+            <a:avLst/>
+          </a:prstGeom>
+          <a:noFill/>
+          <a:ln/>
+        </p:spPr>
+        <p:txBody>
+          <a:bodyPr wrap="square" rtlCol="0" anchor="ctr"/>
+          <a:lstStyle/>
+          <a:p>
+            <a:pPr algn="ctr" indent="0" marL="0">
+              <a:buNone/>
+            </a:pPr>
+            <a:r>
+              <a:rPr lang="en-US" sz="1300" b="1" dirty="0">
+                <a:solidFill>
+                  <a:srgbClr val="FFFFFF"/>
+                </a:solidFill>
+                <a:latin typeface="Calibri" pitchFamily="34" charset="0"/>
+                <a:ea typeface="Calibri" pitchFamily="34" charset="-122"/>
+                <a:cs typeface="Calibri" pitchFamily="34" charset="-120"/>
+              </a:rPr>
+              <a:t>조회수 10만</a:t>
+            </a:r>
+            <a:endParaRPr lang="en-US" sz="1300" dirty="0"/>
+          </a:p>
+        </p:txBody>
+      </p:sp>
+      <p:sp>
+        <p:nvSpPr>
+          <p:cNvPr id="32" name="Text 30"/>
+          <p:cNvSpPr/>
+          <p:nvPr/>
+        </p:nvSpPr>
+        <p:spPr>
+          <a:xfrm>
+            <a:off x="566928" y="5943600"/>
+            <a:ext cx="10972800" cy="320040"/>
+          </a:xfrm>
+          <a:prstGeom prst="rect">
+            <a:avLst/>
+          </a:prstGeom>
+          <a:noFill/>
+          <a:ln/>
+        </p:spPr>
+        <p:txBody>
+          <a:bodyPr wrap="square" rtlCol="0" anchor="ctr"/>
+          <a:lstStyle/>
+          <a:p>
+            <a:pPr indent="0" marL="0">
+              <a:buNone/>
+            </a:pPr>
+            <a:r>
+              <a:rPr lang="en-US" sz="1200" dirty="0">
                 <a:solidFill>
                   <a:srgbClr val="6A655C"/>
                 </a:solidFill>
@@ -7584,7 +7764,7 @@
               </a:rPr>
               <a:t>SNS — 1·2레벨 주 1개 / 3·4레벨 주 2개 (나의 생각·연습)로 나를 알리는 힘까지</a:t>
             </a:r>
-            <a:endParaRPr lang="en-US" sz="1250" dirty="0"/>
+            <a:endParaRPr lang="en-US" sz="1200" dirty="0"/>
           </a:p>
         </p:txBody>
       </p:sp>

--- a/content/교육/2026-07-23_교육시스템_정본/시즈_오리엔테이션.pptx
+++ b/content/교육/2026-07-23_교육시스템_정본/시즈_오리엔테이션.pptx
@@ -24,9 +24,10 @@
     <p:sldId id="272" r:id="rId18"/>
     <p:sldId id="273" r:id="rId19"/>
     <p:sldId id="274" r:id="rId20"/>
+    <p:sldId id="275" r:id="rId21"/>
   </p:sldIdLst>
   <p:notesMasterIdLst>
-    <p:notesMasterId r:id="rId21"/>
+    <p:notesMasterId r:id="rId22"/>
   </p:notesMasterIdLst>
   <p:sldSz cx="12192000" cy="6858000"/>
   <p:notesSz cx="6858000" cy="12192000"/>
@@ -1136,7 +1137,7 @@
           <a:p>
             <a:r>
               <a:rPr lang="en-US" dirty="0"/>
-              <a:t>4레벨=쇼 50% 통과, 5레벨=쇼 80% 통과로 디자이너. 채점은 둘 다 80↑. KPI 채우면 지름길.</a:t>
+              <a:t>과목당 15점을 이수 정도로 차등: 100%=15, 80%↑=12, 60%↑=9, 40%↑=6, 미이수=0. '다 못 채우면 그만큼 깎인다'를 명확히. (구간·점수는 시안 — 대표님 확정 후 고정)</a:t>
             </a:r>
             <a:endParaRPr lang="en-US" dirty="0"/>
           </a:p>
@@ -1224,7 +1225,7 @@
           <a:p>
             <a:r>
               <a:rPr lang="en-US" dirty="0"/>
-              <a:t>샵 개편으로 디자이너 기준·시점 조정, 1~3레벨 즉시 적용. 핵심 강조: SNS 마케팅력 못 채우면 밀린다 — 빨라진 만큼 유입력이 관건. 정확한 날짜는 개편 확정 시 갱신.</a:t>
+              <a:t>4레벨=쇼 50% 통과, 5레벨=쇼 80% 통과로 디자이너. 채점은 둘 다 80↑. KPI 채우면 지름길.</a:t>
             </a:r>
             <a:endParaRPr lang="en-US" dirty="0"/>
           </a:p>
@@ -1312,7 +1313,7 @@
           <a:p>
             <a:r>
               <a:rPr lang="en-US" dirty="0"/>
-              <a:t>자유롭게 질문받기. 위 4개는 자주 나오는 질문 예시.</a:t>
+              <a:t>샵 개편으로 디자이너 기준·시점 조정, 1~3레벨 즉시 적용. 핵심 강조: SNS 마케팅력 못 채우면 밀린다 — 빨라진 만큼 유입력이 관건. 정확한 날짜는 개편 확정 시 갱신.</a:t>
             </a:r>
             <a:endParaRPr lang="en-US" dirty="0"/>
           </a:p>
@@ -1400,7 +1401,7 @@
           <a:p>
             <a:r>
               <a:rPr lang="en-US" dirty="0"/>
-              <a:t>마무리. 앞으로의 성장 응원.</a:t>
+              <a:t>자유롭게 질문받기. 위 4개는 자주 나오는 질문 예시.</a:t>
             </a:r>
             <a:endParaRPr lang="en-US" dirty="0"/>
           </a:p>
@@ -1512,6 +1513,94 @@
             <a:fld id="{F7021451-1387-4CA6-816F-3879F97B5CBC}" type="slidenum">
               <a:rPr lang="en-US"/>
               <a:t>2</a:t>
+            </a:fld>
+            <a:endParaRPr lang="en-US"/>
+          </a:p>
+        </p:txBody>
+      </p:sp>
+    </p:spTree>
+    <p:extLst>
+      <p:ext uri="{BB962C8B-B14F-4D97-AF65-F5344CB8AC3E}">
+        <p14:creationId xmlns:p14="http://schemas.microsoft.com/office/powerpoint/2010/main" val="1024086991"/>
+      </p:ext>
+    </p:extLst>
+  </p:cSld>
+  <p:clrMapOvr>
+    <a:masterClrMapping/>
+  </p:clrMapOvr>
+</p:notes>
+</file>
+
+<file path=ppt/notesSlides/notesSlide20.xml><?xml version="1.0" encoding="utf-8"?>
+<p:notes xmlns:a="http://schemas.openxmlformats.org/drawingml/2006/main" xmlns:r="http://schemas.openxmlformats.org/officeDocument/2006/relationships" xmlns:p="http://schemas.openxmlformats.org/presentationml/2006/main">
+  <p:cSld>
+    <p:spTree>
+      <p:nvGrpSpPr>
+        <p:cNvPr id="1" name=""/>
+        <p:cNvGrpSpPr/>
+        <p:nvPr/>
+      </p:nvGrpSpPr>
+      <p:grpSpPr>
+        <a:xfrm>
+          <a:off x="0" y="0"/>
+          <a:ext cx="0" cy="0"/>
+          <a:chOff x="0" y="0"/>
+          <a:chExt cx="0" cy="0"/>
+        </a:xfrm>
+      </p:grpSpPr>
+      <p:sp>
+        <p:nvSpPr>
+          <p:cNvPr id="2" name="Slide Image Placeholder 1"/>
+          <p:cNvSpPr>
+            <a:spLocks noGrp="1" noRot="1" noChangeAspect="1"/>
+          </p:cNvSpPr>
+          <p:nvPr>
+            <p:ph type="sldImg"/>
+          </p:nvPr>
+        </p:nvSpPr>
+        <p:spPr/>
+      </p:sp>
+      <p:sp>
+        <p:nvSpPr>
+          <p:cNvPr id="3" name="Notes Placeholder 2"/>
+          <p:cNvSpPr>
+            <a:spLocks noGrp="1"/>
+          </p:cNvSpPr>
+          <p:nvPr>
+            <p:ph type="body" idx="1"/>
+          </p:nvPr>
+        </p:nvSpPr>
+        <p:spPr/>
+        <p:txBody>
+          <a:bodyPr/>
+          <a:lstStyle/>
+          <a:p>
+            <a:r>
+              <a:rPr lang="en-US" dirty="0"/>
+              <a:t>마무리. 앞으로의 성장 응원.</a:t>
+            </a:r>
+            <a:endParaRPr lang="en-US" dirty="0"/>
+          </a:p>
+        </p:txBody>
+      </p:sp>
+      <p:sp>
+        <p:nvSpPr>
+          <p:cNvPr id="4" name="Slide Number Placeholder 3"/>
+          <p:cNvSpPr>
+            <a:spLocks noGrp="1"/>
+          </p:cNvSpPr>
+          <p:nvPr>
+            <p:ph type="sldNum" sz="quarter" idx="10"/>
+          </p:nvPr>
+        </p:nvSpPr>
+        <p:spPr/>
+        <p:txBody>
+          <a:bodyPr/>
+          <a:lstStyle/>
+          <a:p>
+            <a:fld id="{F7021451-1387-4CA6-816F-3879F97B5CBC}" type="slidenum">
+              <a:rPr lang="en-US"/>
+              <a:t>20</a:t>
             </a:fld>
             <a:endParaRPr lang="en-US"/>
           </a:p>
@@ -7566,7 +7655,7 @@
                 <a:ea typeface="Calibri" pitchFamily="34" charset="-122"/>
                 <a:cs typeface="Calibri" pitchFamily="34" charset="-120"/>
               </a:rPr>
-              <a:t>SNS — 1·2레벨 주 1개 / 3·4레벨 주 2개 (나의 생각·연습)로 나를 알리는 힘까지</a:t>
+              <a:t>SNS — 1~3레벨 주 2개(월 8·누적 35↑) / 4~5레벨 최소 주 3개(총 50)로 나를 알리는 힘까지</a:t>
             </a:r>
             <a:endParaRPr lang="en-US" sz="1200" dirty="0"/>
           </a:p>
@@ -7973,7 +8062,7 @@
                 <a:ea typeface="Cambria" pitchFamily="34" charset="-122"/>
                 <a:cs typeface="Cambria" pitchFamily="34" charset="-120"/>
               </a:rPr>
-              <a:t>45</a:t>
+              <a:t>30</a:t>
             </a:r>
             <a:endParaRPr lang="en-US" sz="1600" dirty="0"/>
           </a:p>
@@ -8012,7 +8101,7 @@
                 <a:ea typeface="Calibri" pitchFamily="34" charset="-122"/>
                 <a:cs typeface="Calibri" pitchFamily="34" charset="-120"/>
               </a:rPr>
-              <a:t>3과목 × 15</a:t>
+              <a:t>2과목 × 15</a:t>
             </a:r>
             <a:endParaRPr lang="en-US" sz="1150" dirty="0"/>
           </a:p>
@@ -8110,7 +8199,7 @@
                 <a:ea typeface="Cambria" pitchFamily="34" charset="-122"/>
                 <a:cs typeface="Cambria" pitchFamily="34" charset="-120"/>
               </a:rPr>
-              <a:t>15</a:t>
+              <a:t>20</a:t>
             </a:r>
             <a:endParaRPr lang="en-US" sz="1600" dirty="0"/>
           </a:p>
@@ -8149,7 +8238,7 @@
                 <a:ea typeface="Calibri" pitchFamily="34" charset="-122"/>
                 <a:cs typeface="Calibri" pitchFamily="34" charset="-120"/>
               </a:rPr>
-              <a:t>월 16회↑ 3점·매일 40분↑</a:t>
+              <a:t>월 16회↑·매일 40분↑</a:t>
             </a:r>
             <a:endParaRPr lang="en-US" sz="1150" dirty="0"/>
           </a:p>
@@ -8227,7 +8316,7 @@
                 <a:ea typeface="Cambria" pitchFamily="34" charset="-122"/>
                 <a:cs typeface="Cambria" pitchFamily="34" charset="-120"/>
               </a:rPr>
-              <a:t>10</a:t>
+              <a:t>20</a:t>
             </a:r>
             <a:endParaRPr lang="en-US" sz="1600" dirty="0"/>
           </a:p>
@@ -8266,7 +8355,7 @@
                 <a:ea typeface="Calibri" pitchFamily="34" charset="-122"/>
                 <a:cs typeface="Calibri" pitchFamily="34" charset="-120"/>
               </a:rPr>
-              <a:t>월 10회↑ 10점</a:t>
+              <a:t>주 2개·월 8개·누적 35↑</a:t>
             </a:r>
             <a:endParaRPr lang="en-US" sz="1150" dirty="0"/>
           </a:p>
@@ -8403,7 +8492,7 @@
                 <a:ea typeface="Calibri" pitchFamily="34" charset="-122"/>
                 <a:cs typeface="Calibri" pitchFamily="34" charset="-120"/>
               </a:rPr>
-              <a:t>매달 1회·총 5회 (확인 후 카톡 보고)</a:t>
+              <a:t>매달 1회·총 5회 (확인 후 카톡)</a:t>
             </a:r>
             <a:endParaRPr lang="en-US" sz="1150" dirty="0"/>
           </a:p>
@@ -9009,7 +9098,7 @@
                 <a:ea typeface="Calibri" pitchFamily="34" charset="-122"/>
                 <a:cs typeface="Calibri" pitchFamily="34" charset="-120"/>
               </a:rPr>
-              <a:t>시그니처 5개월 30개</a:t>
+              <a:t>최소 주 3개·총 50개(시그니처)</a:t>
             </a:r>
             <a:endParaRPr lang="en-US" sz="1150" dirty="0"/>
           </a:p>
@@ -9709,7 +9798,7 @@
                 <a:ea typeface="Calibri" pitchFamily="34" charset="-122"/>
                 <a:cs typeface="Calibri" pitchFamily="34" charset="-120"/>
               </a:rPr>
-              <a:t>LEVEL 4·5</a:t>
+              <a:t>SCORING · PARTIAL</a:t>
             </a:r>
             <a:endParaRPr lang="en-US" sz="1000" dirty="0"/>
           </a:p>
@@ -9748,7 +9837,7 @@
                 <a:ea typeface="Calibri" pitchFamily="34" charset="-122"/>
                 <a:cs typeface="Calibri" pitchFamily="34" charset="-120"/>
               </a:rPr>
-              <a:t>디자이너로 가는 마지막 관문</a:t>
+              <a:t>실기 과목당 15점 · 100% 이수 못했을 때</a:t>
             </a:r>
             <a:endParaRPr lang="en-US" sz="1150" dirty="0"/>
           </a:p>
@@ -9787,7 +9876,7 @@
                 <a:ea typeface="Cambria" pitchFamily="34" charset="-122"/>
                 <a:cs typeface="Cambria" pitchFamily="34" charset="-120"/>
               </a:rPr>
-              <a:t>4·5레벨 승급 기준</a:t>
+              <a:t>과목을 다 못 채우면?</a:t>
             </a:r>
             <a:endParaRPr lang="en-US" sz="4000" dirty="0"/>
           </a:p>
@@ -9801,23 +9890,16 @@
         </p:nvSpPr>
         <p:spPr>
           <a:xfrm>
-            <a:off x="548640" y="2514600"/>
-            <a:ext cx="5440680" cy="2834640"/>
-          </a:xfrm>
-          <a:prstGeom prst="roundRect">
-            <a:avLst>
-              <a:gd name="adj" fmla="val 3871"/>
-            </a:avLst>
+            <a:off x="1280160" y="2514600"/>
+            <a:ext cx="9601200" cy="457200"/>
+          </a:xfrm>
+          <a:prstGeom prst="rect">
+            <a:avLst/>
           </a:prstGeom>
           <a:solidFill>
-            <a:srgbClr val="FFFFFF"/>
+            <a:srgbClr val="1A1815"/>
           </a:solidFill>
-          <a:ln w="19050">
-            <a:solidFill>
-              <a:srgbClr val="A8895E"/>
-            </a:solidFill>
-            <a:prstDash val="solid"/>
-          </a:ln>
+          <a:ln/>
         </p:spPr>
       </p:sp>
       <p:sp>
@@ -9828,56 +9910,269 @@
         </p:nvSpPr>
         <p:spPr>
           <a:xfrm>
-            <a:off x="822960" y="2743200"/>
-            <a:ext cx="2720340" cy="457200"/>
-          </a:xfrm>
-          <a:prstGeom prst="rect">
-            <a:avLst/>
-          </a:prstGeom>
-          <a:noFill/>
-          <a:ln/>
-        </p:spPr>
-        <p:txBody>
-          <a:bodyPr wrap="square" rtlCol="0" anchor="ctr"/>
-          <a:lstStyle/>
-          <a:p>
-            <a:pPr indent="0" marL="0">
-              <a:buNone/>
-            </a:pPr>
-            <a:r>
-              <a:rPr lang="en-US" sz="2600" b="1" dirty="0">
+            <a:off x="1554480" y="2514600"/>
+            <a:ext cx="4800600" cy="457200"/>
+          </a:xfrm>
+          <a:prstGeom prst="rect">
+            <a:avLst/>
+          </a:prstGeom>
+          <a:noFill/>
+          <a:ln/>
+        </p:spPr>
+        <p:txBody>
+          <a:bodyPr wrap="square" rtlCol="0" anchor="ctr"/>
+          <a:lstStyle/>
+          <a:p>
+            <a:pPr indent="0" marL="0">
+              <a:buNone/>
+            </a:pPr>
+            <a:r>
+              <a:rPr lang="en-US" sz="1250" b="1" dirty="0">
+                <a:solidFill>
+                  <a:srgbClr val="FFFFFF"/>
+                </a:solidFill>
+                <a:latin typeface="Calibri" pitchFamily="34" charset="0"/>
+                <a:ea typeface="Calibri" pitchFamily="34" charset="-122"/>
+                <a:cs typeface="Calibri" pitchFamily="34" charset="-120"/>
+              </a:rPr>
+              <a:t>이수 정도</a:t>
+            </a:r>
+            <a:endParaRPr lang="en-US" sz="1250" dirty="0"/>
+          </a:p>
+        </p:txBody>
+      </p:sp>
+      <p:sp>
+        <p:nvSpPr>
+          <p:cNvPr id="9" name="Text 7"/>
+          <p:cNvSpPr/>
+          <p:nvPr/>
+        </p:nvSpPr>
+        <p:spPr>
+          <a:xfrm>
+            <a:off x="6080760" y="2514600"/>
+            <a:ext cx="4526280" cy="457200"/>
+          </a:xfrm>
+          <a:prstGeom prst="rect">
+            <a:avLst/>
+          </a:prstGeom>
+          <a:noFill/>
+          <a:ln/>
+        </p:spPr>
+        <p:txBody>
+          <a:bodyPr wrap="square" rtlCol="0" anchor="ctr"/>
+          <a:lstStyle/>
+          <a:p>
+            <a:pPr algn="r" indent="0" marL="0">
+              <a:buNone/>
+            </a:pPr>
+            <a:r>
+              <a:rPr lang="en-US" sz="1250" b="1" dirty="0">
+                <a:solidFill>
+                  <a:srgbClr val="A8895E"/>
+                </a:solidFill>
+                <a:latin typeface="Calibri" pitchFamily="34" charset="0"/>
+                <a:ea typeface="Calibri" pitchFamily="34" charset="-122"/>
+                <a:cs typeface="Calibri" pitchFamily="34" charset="-120"/>
+              </a:rPr>
+              <a:t>점수 (15점 만점)</a:t>
+            </a:r>
+            <a:endParaRPr lang="en-US" sz="1250" dirty="0"/>
+          </a:p>
+        </p:txBody>
+      </p:sp>
+      <p:sp>
+        <p:nvSpPr>
+          <p:cNvPr id="10" name="Text 8"/>
+          <p:cNvSpPr/>
+          <p:nvPr/>
+        </p:nvSpPr>
+        <p:spPr>
+          <a:xfrm>
+            <a:off x="1554480" y="2971800"/>
+            <a:ext cx="5280660" cy="658368"/>
+          </a:xfrm>
+          <a:prstGeom prst="rect">
+            <a:avLst/>
+          </a:prstGeom>
+          <a:noFill/>
+          <a:ln/>
+        </p:spPr>
+        <p:txBody>
+          <a:bodyPr wrap="square" rtlCol="0" anchor="ctr"/>
+          <a:lstStyle/>
+          <a:p>
+            <a:pPr indent="0" marL="0">
+              <a:buNone/>
+            </a:pPr>
+            <a:r>
+              <a:rPr lang="en-US" sz="1500" b="1" dirty="0">
                 <a:solidFill>
                   <a:srgbClr val="1A1815"/>
+                </a:solidFill>
+                <a:latin typeface="Calibri" pitchFamily="34" charset="0"/>
+                <a:ea typeface="Calibri" pitchFamily="34" charset="-122"/>
+                <a:cs typeface="Calibri" pitchFamily="34" charset="-120"/>
+              </a:rPr>
+              <a:t>100% 완벽 이수</a:t>
+            </a:r>
+            <a:endParaRPr lang="en-US" sz="1500" dirty="0"/>
+          </a:p>
+        </p:txBody>
+      </p:sp>
+      <p:sp>
+        <p:nvSpPr>
+          <p:cNvPr id="11" name="Text 9"/>
+          <p:cNvSpPr/>
+          <p:nvPr/>
+        </p:nvSpPr>
+        <p:spPr>
+          <a:xfrm>
+            <a:off x="6560820" y="2971800"/>
+            <a:ext cx="2112264" cy="658368"/>
+          </a:xfrm>
+          <a:prstGeom prst="rect">
+            <a:avLst/>
+          </a:prstGeom>
+          <a:noFill/>
+          <a:ln/>
+        </p:spPr>
+        <p:txBody>
+          <a:bodyPr wrap="square" rtlCol="0" anchor="ctr"/>
+          <a:lstStyle/>
+          <a:p>
+            <a:pPr algn="ctr" indent="0" marL="0">
+              <a:buNone/>
+            </a:pPr>
+            <a:r>
+              <a:rPr lang="en-US" sz="2400" b="1" dirty="0">
+                <a:solidFill>
+                  <a:srgbClr val="A8895E"/>
                 </a:solidFill>
                 <a:latin typeface="Cambria" pitchFamily="34" charset="0"/>
                 <a:ea typeface="Cambria" pitchFamily="34" charset="-122"/>
                 <a:cs typeface="Cambria" pitchFamily="34" charset="-120"/>
               </a:rPr>
-              <a:t>4레벨</a:t>
-            </a:r>
-            <a:endParaRPr lang="en-US" sz="2600" dirty="0"/>
-          </a:p>
-        </p:txBody>
-      </p:sp>
-      <p:sp>
-        <p:nvSpPr>
-          <p:cNvPr id="9" name="Text 7"/>
-          <p:cNvSpPr/>
-          <p:nvPr/>
-        </p:nvSpPr>
-        <p:spPr>
-          <a:xfrm>
-            <a:off x="2996946" y="2788920"/>
-            <a:ext cx="2446020" cy="384048"/>
+              <a:t>15</a:t>
+            </a:r>
+            <a:endParaRPr lang="en-US" sz="2400" dirty="0"/>
+          </a:p>
+        </p:txBody>
+      </p:sp>
+      <p:sp>
+        <p:nvSpPr>
+          <p:cNvPr id="12" name="Text 10"/>
+          <p:cNvSpPr/>
+          <p:nvPr/>
+        </p:nvSpPr>
+        <p:spPr>
+          <a:xfrm>
+            <a:off x="8673084" y="2971800"/>
+            <a:ext cx="1933956" cy="658368"/>
+          </a:xfrm>
+          <a:prstGeom prst="rect">
+            <a:avLst/>
+          </a:prstGeom>
+          <a:noFill/>
+          <a:ln/>
+        </p:spPr>
+        <p:txBody>
+          <a:bodyPr wrap="square" rtlCol="0" anchor="ctr"/>
+          <a:lstStyle/>
+          <a:p>
+            <a:pPr algn="r" indent="0" marL="0">
+              <a:buNone/>
+            </a:pPr>
+            <a:r>
+              <a:rPr lang="en-US" sz="1300" b="1" dirty="0">
+                <a:solidFill>
+                  <a:srgbClr val="888888"/>
+                </a:solidFill>
+                <a:latin typeface="Calibri" pitchFamily="34" charset="0"/>
+                <a:ea typeface="Calibri" pitchFamily="34" charset="-122"/>
+                <a:cs typeface="Calibri" pitchFamily="34" charset="-120"/>
+              </a:rPr>
+              <a:t>만점</a:t>
+            </a:r>
+            <a:endParaRPr lang="en-US" sz="1300" dirty="0"/>
+          </a:p>
+        </p:txBody>
+      </p:sp>
+      <p:sp>
+        <p:nvSpPr>
+          <p:cNvPr id="13" name="Shape 11"/>
+          <p:cNvSpPr/>
+          <p:nvPr/>
+        </p:nvSpPr>
+        <p:spPr>
+          <a:xfrm>
+            <a:off x="1280160" y="3630168"/>
+            <a:ext cx="9601200" cy="658368"/>
           </a:xfrm>
           <a:prstGeom prst="rect">
             <a:avLst/>
           </a:prstGeom>
           <a:solidFill>
-            <a:srgbClr val="A8895E"/>
+            <a:srgbClr val="F1ECE2"/>
           </a:solidFill>
           <a:ln/>
         </p:spPr>
+      </p:sp>
+      <p:sp>
+        <p:nvSpPr>
+          <p:cNvPr id="14" name="Text 12"/>
+          <p:cNvSpPr/>
+          <p:nvPr/>
+        </p:nvSpPr>
+        <p:spPr>
+          <a:xfrm>
+            <a:off x="1554480" y="3630168"/>
+            <a:ext cx="5280660" cy="658368"/>
+          </a:xfrm>
+          <a:prstGeom prst="rect">
+            <a:avLst/>
+          </a:prstGeom>
+          <a:noFill/>
+          <a:ln/>
+        </p:spPr>
+        <p:txBody>
+          <a:bodyPr wrap="square" rtlCol="0" anchor="ctr"/>
+          <a:lstStyle/>
+          <a:p>
+            <a:pPr indent="0" marL="0">
+              <a:buNone/>
+            </a:pPr>
+            <a:r>
+              <a:rPr lang="en-US" sz="1500" b="1" dirty="0">
+                <a:solidFill>
+                  <a:srgbClr val="1A1815"/>
+                </a:solidFill>
+                <a:latin typeface="Calibri" pitchFamily="34" charset="0"/>
+                <a:ea typeface="Calibri" pitchFamily="34" charset="-122"/>
+                <a:cs typeface="Calibri" pitchFamily="34" charset="-120"/>
+              </a:rPr>
+              <a:t>80% 이상 (대부분)</a:t>
+            </a:r>
+            <a:endParaRPr lang="en-US" sz="1500" dirty="0"/>
+          </a:p>
+        </p:txBody>
+      </p:sp>
+      <p:sp>
+        <p:nvSpPr>
+          <p:cNvPr id="15" name="Text 13"/>
+          <p:cNvSpPr/>
+          <p:nvPr/>
+        </p:nvSpPr>
+        <p:spPr>
+          <a:xfrm>
+            <a:off x="6560820" y="3630168"/>
+            <a:ext cx="2112264" cy="658368"/>
+          </a:xfrm>
+          <a:prstGeom prst="rect">
+            <a:avLst/>
+          </a:prstGeom>
+          <a:noFill/>
+          <a:ln/>
+        </p:spPr>
         <p:txBody>
           <a:bodyPr wrap="square" rtlCol="0" anchor="ctr"/>
           <a:lstStyle/>
@@ -9886,317 +10181,95 @@
               <a:buNone/>
             </a:pPr>
             <a:r>
-              <a:rPr lang="en-US" sz="1200" b="1" dirty="0">
-                <a:solidFill>
-                  <a:srgbClr val="FFFFFF"/>
-                </a:solidFill>
-                <a:latin typeface="Calibri" pitchFamily="34" charset="0"/>
-                <a:ea typeface="Calibri" pitchFamily="34" charset="-122"/>
-                <a:cs typeface="Calibri" pitchFamily="34" charset="-120"/>
-              </a:rPr>
-              <a:t>쇼 50% 통과</a:t>
-            </a:r>
-            <a:endParaRPr lang="en-US" sz="1200" dirty="0"/>
-          </a:p>
-        </p:txBody>
-      </p:sp>
-      <p:sp>
-        <p:nvSpPr>
-          <p:cNvPr id="10" name="Text 8"/>
-          <p:cNvSpPr/>
-          <p:nvPr/>
-        </p:nvSpPr>
-        <p:spPr>
-          <a:xfrm>
-            <a:off x="822960" y="3383280"/>
-            <a:ext cx="1188720" cy="548640"/>
-          </a:xfrm>
-          <a:prstGeom prst="rect">
-            <a:avLst/>
-          </a:prstGeom>
-          <a:noFill/>
-          <a:ln/>
-        </p:spPr>
-        <p:txBody>
-          <a:bodyPr wrap="square" rtlCol="0" anchor="ctr"/>
-          <a:lstStyle/>
-          <a:p>
-            <a:pPr indent="0" marL="0">
-              <a:buNone/>
-            </a:pPr>
-            <a:r>
-              <a:rPr lang="en-US" sz="1300" b="1" dirty="0">
+              <a:rPr lang="en-US" sz="2400" b="1" dirty="0">
                 <a:solidFill>
                   <a:srgbClr val="A8895E"/>
-                </a:solidFill>
-                <a:latin typeface="Calibri" pitchFamily="34" charset="0"/>
-                <a:ea typeface="Calibri" pitchFamily="34" charset="-122"/>
-                <a:cs typeface="Calibri" pitchFamily="34" charset="-120"/>
-              </a:rPr>
-              <a:t>채점</a:t>
-            </a:r>
-            <a:endParaRPr lang="en-US" sz="1300" dirty="0"/>
-          </a:p>
-        </p:txBody>
-      </p:sp>
-      <p:sp>
-        <p:nvSpPr>
-          <p:cNvPr id="11" name="Text 9"/>
-          <p:cNvSpPr/>
-          <p:nvPr/>
-        </p:nvSpPr>
-        <p:spPr>
-          <a:xfrm>
-            <a:off x="1920240" y="3383280"/>
-            <a:ext cx="3794760" cy="548640"/>
-          </a:xfrm>
-          <a:prstGeom prst="rect">
-            <a:avLst/>
-          </a:prstGeom>
-          <a:noFill/>
-          <a:ln/>
-        </p:spPr>
-        <p:txBody>
-          <a:bodyPr wrap="square" rtlCol="0" anchor="ctr"/>
-          <a:lstStyle/>
-          <a:p>
-            <a:pPr indent="0" marL="0">
-              <a:buNone/>
-            </a:pPr>
-            <a:r>
-              <a:rPr lang="en-US" sz="1250" dirty="0">
-                <a:solidFill>
-                  <a:srgbClr val="3A362F"/>
-                </a:solidFill>
-                <a:latin typeface="Calibri" pitchFamily="34" charset="0"/>
-                <a:ea typeface="Calibri" pitchFamily="34" charset="-122"/>
-                <a:cs typeface="Calibri" pitchFamily="34" charset="-120"/>
-              </a:rPr>
-              <a:t>합격 80점↑ (실기30·SNS30 중심)</a:t>
-            </a:r>
-            <a:endParaRPr lang="en-US" sz="1250" dirty="0"/>
-          </a:p>
-        </p:txBody>
-      </p:sp>
-      <p:sp>
-        <p:nvSpPr>
-          <p:cNvPr id="12" name="Text 10"/>
-          <p:cNvSpPr/>
-          <p:nvPr/>
-        </p:nvSpPr>
-        <p:spPr>
-          <a:xfrm>
-            <a:off x="822960" y="4005072"/>
-            <a:ext cx="1188720" cy="548640"/>
-          </a:xfrm>
-          <a:prstGeom prst="rect">
-            <a:avLst/>
-          </a:prstGeom>
-          <a:noFill/>
-          <a:ln/>
-        </p:spPr>
-        <p:txBody>
-          <a:bodyPr wrap="square" rtlCol="0" anchor="ctr"/>
-          <a:lstStyle/>
-          <a:p>
-            <a:pPr indent="0" marL="0">
-              <a:buNone/>
-            </a:pPr>
-            <a:r>
-              <a:rPr lang="en-US" sz="1300" b="1" dirty="0">
-                <a:solidFill>
-                  <a:srgbClr val="A8895E"/>
-                </a:solidFill>
-                <a:latin typeface="Calibri" pitchFamily="34" charset="0"/>
-                <a:ea typeface="Calibri" pitchFamily="34" charset="-122"/>
-                <a:cs typeface="Calibri" pitchFamily="34" charset="-120"/>
-              </a:rPr>
-              <a:t>헤어쇼</a:t>
-            </a:r>
-            <a:endParaRPr lang="en-US" sz="1300" dirty="0"/>
-          </a:p>
-        </p:txBody>
-      </p:sp>
-      <p:sp>
-        <p:nvSpPr>
-          <p:cNvPr id="13" name="Text 11"/>
-          <p:cNvSpPr/>
-          <p:nvPr/>
-        </p:nvSpPr>
-        <p:spPr>
-          <a:xfrm>
-            <a:off x="1920240" y="4005072"/>
-            <a:ext cx="3794760" cy="548640"/>
-          </a:xfrm>
-          <a:prstGeom prst="rect">
-            <a:avLst/>
-          </a:prstGeom>
-          <a:noFill/>
-          <a:ln/>
-        </p:spPr>
-        <p:txBody>
-          <a:bodyPr wrap="square" rtlCol="0" anchor="ctr"/>
-          <a:lstStyle/>
-          <a:p>
-            <a:pPr indent="0" marL="0">
-              <a:buNone/>
-            </a:pPr>
-            <a:r>
-              <a:rPr lang="en-US" sz="1250" dirty="0">
-                <a:solidFill>
-                  <a:srgbClr val="3A362F"/>
-                </a:solidFill>
-                <a:latin typeface="Calibri" pitchFamily="34" charset="0"/>
-                <a:ea typeface="Calibri" pitchFamily="34" charset="-122"/>
-                <a:cs typeface="Calibri" pitchFamily="34" charset="-120"/>
-              </a:rPr>
-              <a:t>기존 정량기준 50% 통과</a:t>
-            </a:r>
-            <a:endParaRPr lang="en-US" sz="1250" dirty="0"/>
-          </a:p>
-        </p:txBody>
-      </p:sp>
-      <p:sp>
-        <p:nvSpPr>
-          <p:cNvPr id="14" name="Text 12"/>
-          <p:cNvSpPr/>
-          <p:nvPr/>
-        </p:nvSpPr>
-        <p:spPr>
-          <a:xfrm>
-            <a:off x="822960" y="4626864"/>
-            <a:ext cx="1188720" cy="548640"/>
-          </a:xfrm>
-          <a:prstGeom prst="rect">
-            <a:avLst/>
-          </a:prstGeom>
-          <a:noFill/>
-          <a:ln/>
-        </p:spPr>
-        <p:txBody>
-          <a:bodyPr wrap="square" rtlCol="0" anchor="ctr"/>
-          <a:lstStyle/>
-          <a:p>
-            <a:pPr indent="0" marL="0">
-              <a:buNone/>
-            </a:pPr>
-            <a:r>
-              <a:rPr lang="en-US" sz="1300" b="1" dirty="0">
-                <a:solidFill>
-                  <a:srgbClr val="A8895E"/>
-                </a:solidFill>
-                <a:latin typeface="Calibri" pitchFamily="34" charset="0"/>
-                <a:ea typeface="Calibri" pitchFamily="34" charset="-122"/>
-                <a:cs typeface="Calibri" pitchFamily="34" charset="-120"/>
-              </a:rPr>
-              <a:t>방향</a:t>
-            </a:r>
-            <a:endParaRPr lang="en-US" sz="1300" dirty="0"/>
-          </a:p>
-        </p:txBody>
-      </p:sp>
-      <p:sp>
-        <p:nvSpPr>
-          <p:cNvPr id="15" name="Text 13"/>
-          <p:cNvSpPr/>
-          <p:nvPr/>
-        </p:nvSpPr>
-        <p:spPr>
-          <a:xfrm>
-            <a:off x="1920240" y="4626864"/>
-            <a:ext cx="3794760" cy="548640"/>
-          </a:xfrm>
-          <a:prstGeom prst="rect">
-            <a:avLst/>
-          </a:prstGeom>
-          <a:noFill/>
-          <a:ln/>
-        </p:spPr>
-        <p:txBody>
-          <a:bodyPr wrap="square" rtlCol="0" anchor="ctr"/>
-          <a:lstStyle/>
-          <a:p>
-            <a:pPr indent="0" marL="0">
-              <a:buNone/>
-            </a:pPr>
-            <a:r>
-              <a:rPr lang="en-US" sz="1250" dirty="0">
-                <a:solidFill>
-                  <a:srgbClr val="3A362F"/>
-                </a:solidFill>
-                <a:latin typeface="Calibri" pitchFamily="34" charset="0"/>
-                <a:ea typeface="Calibri" pitchFamily="34" charset="-122"/>
-                <a:cs typeface="Calibri" pitchFamily="34" charset="-120"/>
-              </a:rPr>
-              <a:t>현장 실전 + SNS로 유입 시작</a:t>
-            </a:r>
-            <a:endParaRPr lang="en-US" sz="1250" dirty="0"/>
-          </a:p>
-        </p:txBody>
-      </p:sp>
-      <p:sp>
-        <p:nvSpPr>
-          <p:cNvPr id="16" name="Shape 14"/>
-          <p:cNvSpPr/>
-          <p:nvPr/>
-        </p:nvSpPr>
-        <p:spPr>
-          <a:xfrm>
-            <a:off x="6291072" y="2514600"/>
-            <a:ext cx="5440680" cy="2834640"/>
-          </a:xfrm>
-          <a:prstGeom prst="roundRect">
-            <a:avLst>
-              <a:gd name="adj" fmla="val 3871"/>
-            </a:avLst>
-          </a:prstGeom>
-          <a:solidFill>
-            <a:srgbClr val="FFFFFF"/>
-          </a:solidFill>
-          <a:ln w="19050">
-            <a:solidFill>
-              <a:srgbClr val="A8895E"/>
-            </a:solidFill>
-            <a:prstDash val="solid"/>
-          </a:ln>
-        </p:spPr>
-      </p:sp>
-      <p:sp>
-        <p:nvSpPr>
-          <p:cNvPr id="17" name="Text 15"/>
-          <p:cNvSpPr/>
-          <p:nvPr/>
-        </p:nvSpPr>
-        <p:spPr>
-          <a:xfrm>
-            <a:off x="6565392" y="2743200"/>
-            <a:ext cx="2720340" cy="457200"/>
-          </a:xfrm>
-          <a:prstGeom prst="rect">
-            <a:avLst/>
-          </a:prstGeom>
-          <a:noFill/>
-          <a:ln/>
-        </p:spPr>
-        <p:txBody>
-          <a:bodyPr wrap="square" rtlCol="0" anchor="ctr"/>
-          <a:lstStyle/>
-          <a:p>
-            <a:pPr indent="0" marL="0">
-              <a:buNone/>
-            </a:pPr>
-            <a:r>
-              <a:rPr lang="en-US" sz="2600" b="1" dirty="0">
-                <a:solidFill>
-                  <a:srgbClr val="1A1815"/>
                 </a:solidFill>
                 <a:latin typeface="Cambria" pitchFamily="34" charset="0"/>
                 <a:ea typeface="Cambria" pitchFamily="34" charset="-122"/>
                 <a:cs typeface="Cambria" pitchFamily="34" charset="-120"/>
               </a:rPr>
-              <a:t>5레벨</a:t>
-            </a:r>
-            <a:endParaRPr lang="en-US" sz="2600" dirty="0"/>
+              <a:t>12</a:t>
+            </a:r>
+            <a:endParaRPr lang="en-US" sz="2400" dirty="0"/>
+          </a:p>
+        </p:txBody>
+      </p:sp>
+      <p:sp>
+        <p:nvSpPr>
+          <p:cNvPr id="16" name="Text 14"/>
+          <p:cNvSpPr/>
+          <p:nvPr/>
+        </p:nvSpPr>
+        <p:spPr>
+          <a:xfrm>
+            <a:off x="8673084" y="3630168"/>
+            <a:ext cx="1933956" cy="658368"/>
+          </a:xfrm>
+          <a:prstGeom prst="rect">
+            <a:avLst/>
+          </a:prstGeom>
+          <a:noFill/>
+          <a:ln/>
+        </p:spPr>
+        <p:txBody>
+          <a:bodyPr wrap="square" rtlCol="0" anchor="ctr"/>
+          <a:lstStyle/>
+          <a:p>
+            <a:pPr algn="r" indent="0" marL="0">
+              <a:buNone/>
+            </a:pPr>
+            <a:r>
+              <a:rPr lang="en-US" sz="1300" b="1" dirty="0">
+                <a:solidFill>
+                  <a:srgbClr val="888888"/>
+                </a:solidFill>
+                <a:latin typeface="Calibri" pitchFamily="34" charset="0"/>
+                <a:ea typeface="Calibri" pitchFamily="34" charset="-122"/>
+                <a:cs typeface="Calibri" pitchFamily="34" charset="-120"/>
+              </a:rPr>
+              <a:t>−3</a:t>
+            </a:r>
+            <a:endParaRPr lang="en-US" sz="1300" dirty="0"/>
+          </a:p>
+        </p:txBody>
+      </p:sp>
+      <p:sp>
+        <p:nvSpPr>
+          <p:cNvPr id="17" name="Text 15"/>
+          <p:cNvSpPr/>
+          <p:nvPr/>
+        </p:nvSpPr>
+        <p:spPr>
+          <a:xfrm>
+            <a:off x="1554480" y="4288536"/>
+            <a:ext cx="5280660" cy="658368"/>
+          </a:xfrm>
+          <a:prstGeom prst="rect">
+            <a:avLst/>
+          </a:prstGeom>
+          <a:noFill/>
+          <a:ln/>
+        </p:spPr>
+        <p:txBody>
+          <a:bodyPr wrap="square" rtlCol="0" anchor="ctr"/>
+          <a:lstStyle/>
+          <a:p>
+            <a:pPr indent="0" marL="0">
+              <a:buNone/>
+            </a:pPr>
+            <a:r>
+              <a:rPr lang="en-US" sz="1500" b="1" dirty="0">
+                <a:solidFill>
+                  <a:srgbClr val="1A1815"/>
+                </a:solidFill>
+                <a:latin typeface="Calibri" pitchFamily="34" charset="0"/>
+                <a:ea typeface="Calibri" pitchFamily="34" charset="-122"/>
+                <a:cs typeface="Calibri" pitchFamily="34" charset="-120"/>
+              </a:rPr>
+              <a:t>60% 이상 (절반↑)</a:t>
+            </a:r>
+            <a:endParaRPr lang="en-US" sz="1500" dirty="0"/>
           </a:p>
         </p:txBody>
       </p:sp>
@@ -10208,17 +10281,152 @@
         </p:nvSpPr>
         <p:spPr>
           <a:xfrm>
-            <a:off x="8739378" y="2788920"/>
-            <a:ext cx="2446020" cy="384048"/>
+            <a:off x="6560820" y="4288536"/>
+            <a:ext cx="2112264" cy="658368"/>
+          </a:xfrm>
+          <a:prstGeom prst="rect">
+            <a:avLst/>
+          </a:prstGeom>
+          <a:noFill/>
+          <a:ln/>
+        </p:spPr>
+        <p:txBody>
+          <a:bodyPr wrap="square" rtlCol="0" anchor="ctr"/>
+          <a:lstStyle/>
+          <a:p>
+            <a:pPr algn="ctr" indent="0" marL="0">
+              <a:buNone/>
+            </a:pPr>
+            <a:r>
+              <a:rPr lang="en-US" sz="2400" b="1" dirty="0">
+                <a:solidFill>
+                  <a:srgbClr val="A8895E"/>
+                </a:solidFill>
+                <a:latin typeface="Cambria" pitchFamily="34" charset="0"/>
+                <a:ea typeface="Cambria" pitchFamily="34" charset="-122"/>
+                <a:cs typeface="Cambria" pitchFamily="34" charset="-120"/>
+              </a:rPr>
+              <a:t>9</a:t>
+            </a:r>
+            <a:endParaRPr lang="en-US" sz="2400" dirty="0"/>
+          </a:p>
+        </p:txBody>
+      </p:sp>
+      <p:sp>
+        <p:nvSpPr>
+          <p:cNvPr id="19" name="Text 17"/>
+          <p:cNvSpPr/>
+          <p:nvPr/>
+        </p:nvSpPr>
+        <p:spPr>
+          <a:xfrm>
+            <a:off x="8673084" y="4288536"/>
+            <a:ext cx="1933956" cy="658368"/>
+          </a:xfrm>
+          <a:prstGeom prst="rect">
+            <a:avLst/>
+          </a:prstGeom>
+          <a:noFill/>
+          <a:ln/>
+        </p:spPr>
+        <p:txBody>
+          <a:bodyPr wrap="square" rtlCol="0" anchor="ctr"/>
+          <a:lstStyle/>
+          <a:p>
+            <a:pPr algn="r" indent="0" marL="0">
+              <a:buNone/>
+            </a:pPr>
+            <a:r>
+              <a:rPr lang="en-US" sz="1300" b="1" dirty="0">
+                <a:solidFill>
+                  <a:srgbClr val="888888"/>
+                </a:solidFill>
+                <a:latin typeface="Calibri" pitchFamily="34" charset="0"/>
+                <a:ea typeface="Calibri" pitchFamily="34" charset="-122"/>
+                <a:cs typeface="Calibri" pitchFamily="34" charset="-120"/>
+              </a:rPr>
+              <a:t>−6</a:t>
+            </a:r>
+            <a:endParaRPr lang="en-US" sz="1300" dirty="0"/>
+          </a:p>
+        </p:txBody>
+      </p:sp>
+      <p:sp>
+        <p:nvSpPr>
+          <p:cNvPr id="20" name="Shape 18"/>
+          <p:cNvSpPr/>
+          <p:nvPr/>
+        </p:nvSpPr>
+        <p:spPr>
+          <a:xfrm>
+            <a:off x="1280160" y="4946904"/>
+            <a:ext cx="9601200" cy="658368"/>
           </a:xfrm>
           <a:prstGeom prst="rect">
             <a:avLst/>
           </a:prstGeom>
           <a:solidFill>
-            <a:srgbClr val="A8895E"/>
+            <a:srgbClr val="F1ECE2"/>
           </a:solidFill>
           <a:ln/>
         </p:spPr>
+      </p:sp>
+      <p:sp>
+        <p:nvSpPr>
+          <p:cNvPr id="21" name="Text 19"/>
+          <p:cNvSpPr/>
+          <p:nvPr/>
+        </p:nvSpPr>
+        <p:spPr>
+          <a:xfrm>
+            <a:off x="1554480" y="4946904"/>
+            <a:ext cx="5280660" cy="658368"/>
+          </a:xfrm>
+          <a:prstGeom prst="rect">
+            <a:avLst/>
+          </a:prstGeom>
+          <a:noFill/>
+          <a:ln/>
+        </p:spPr>
+        <p:txBody>
+          <a:bodyPr wrap="square" rtlCol="0" anchor="ctr"/>
+          <a:lstStyle/>
+          <a:p>
+            <a:pPr indent="0" marL="0">
+              <a:buNone/>
+            </a:pPr>
+            <a:r>
+              <a:rPr lang="en-US" sz="1500" b="1" dirty="0">
+                <a:solidFill>
+                  <a:srgbClr val="1A1815"/>
+                </a:solidFill>
+                <a:latin typeface="Calibri" pitchFamily="34" charset="0"/>
+                <a:ea typeface="Calibri" pitchFamily="34" charset="-122"/>
+                <a:cs typeface="Calibri" pitchFamily="34" charset="-120"/>
+              </a:rPr>
+              <a:t>40% 이상 (미흡)</a:t>
+            </a:r>
+            <a:endParaRPr lang="en-US" sz="1500" dirty="0"/>
+          </a:p>
+        </p:txBody>
+      </p:sp>
+      <p:sp>
+        <p:nvSpPr>
+          <p:cNvPr id="22" name="Text 20"/>
+          <p:cNvSpPr/>
+          <p:nvPr/>
+        </p:nvSpPr>
+        <p:spPr>
+          <a:xfrm>
+            <a:off x="6560820" y="4946904"/>
+            <a:ext cx="2112264" cy="658368"/>
+          </a:xfrm>
+          <a:prstGeom prst="rect">
+            <a:avLst/>
+          </a:prstGeom>
+          <a:noFill/>
+          <a:ln/>
+        </p:spPr>
         <p:txBody>
           <a:bodyPr wrap="square" rtlCol="0" anchor="ctr"/>
           <a:lstStyle/>
@@ -10227,54 +10435,54 @@
               <a:buNone/>
             </a:pPr>
             <a:r>
-              <a:rPr lang="en-US" sz="1200" b="1" dirty="0">
-                <a:solidFill>
-                  <a:srgbClr val="FFFFFF"/>
-                </a:solidFill>
-                <a:latin typeface="Calibri" pitchFamily="34" charset="0"/>
-                <a:ea typeface="Calibri" pitchFamily="34" charset="-122"/>
-                <a:cs typeface="Calibri" pitchFamily="34" charset="-120"/>
-              </a:rPr>
-              <a:t>쇼 80% 통과</a:t>
-            </a:r>
-            <a:endParaRPr lang="en-US" sz="1200" dirty="0"/>
-          </a:p>
-        </p:txBody>
-      </p:sp>
-      <p:sp>
-        <p:nvSpPr>
-          <p:cNvPr id="19" name="Text 17"/>
-          <p:cNvSpPr/>
-          <p:nvPr/>
-        </p:nvSpPr>
-        <p:spPr>
-          <a:xfrm>
-            <a:off x="6565392" y="3383280"/>
-            <a:ext cx="1188720" cy="548640"/>
-          </a:xfrm>
-          <a:prstGeom prst="rect">
-            <a:avLst/>
-          </a:prstGeom>
-          <a:noFill/>
-          <a:ln/>
-        </p:spPr>
-        <p:txBody>
-          <a:bodyPr wrap="square" rtlCol="0" anchor="ctr"/>
-          <a:lstStyle/>
-          <a:p>
-            <a:pPr indent="0" marL="0">
+              <a:rPr lang="en-US" sz="2400" b="1" dirty="0">
+                <a:solidFill>
+                  <a:srgbClr val="A8895E"/>
+                </a:solidFill>
+                <a:latin typeface="Cambria" pitchFamily="34" charset="0"/>
+                <a:ea typeface="Cambria" pitchFamily="34" charset="-122"/>
+                <a:cs typeface="Cambria" pitchFamily="34" charset="-120"/>
+              </a:rPr>
+              <a:t>6</a:t>
+            </a:r>
+            <a:endParaRPr lang="en-US" sz="2400" dirty="0"/>
+          </a:p>
+        </p:txBody>
+      </p:sp>
+      <p:sp>
+        <p:nvSpPr>
+          <p:cNvPr id="23" name="Text 21"/>
+          <p:cNvSpPr/>
+          <p:nvPr/>
+        </p:nvSpPr>
+        <p:spPr>
+          <a:xfrm>
+            <a:off x="8673084" y="4946904"/>
+            <a:ext cx="1933956" cy="658368"/>
+          </a:xfrm>
+          <a:prstGeom prst="rect">
+            <a:avLst/>
+          </a:prstGeom>
+          <a:noFill/>
+          <a:ln/>
+        </p:spPr>
+        <p:txBody>
+          <a:bodyPr wrap="square" rtlCol="0" anchor="ctr"/>
+          <a:lstStyle/>
+          <a:p>
+            <a:pPr algn="r" indent="0" marL="0">
               <a:buNone/>
             </a:pPr>
             <a:r>
               <a:rPr lang="en-US" sz="1300" b="1" dirty="0">
                 <a:solidFill>
-                  <a:srgbClr val="A8895E"/>
-                </a:solidFill>
-                <a:latin typeface="Calibri" pitchFamily="34" charset="0"/>
-                <a:ea typeface="Calibri" pitchFamily="34" charset="-122"/>
-                <a:cs typeface="Calibri" pitchFamily="34" charset="-120"/>
-              </a:rPr>
-              <a:t>채점</a:t>
+                  <a:srgbClr val="888888"/>
+                </a:solidFill>
+                <a:latin typeface="Calibri" pitchFamily="34" charset="0"/>
+                <a:ea typeface="Calibri" pitchFamily="34" charset="-122"/>
+                <a:cs typeface="Calibri" pitchFamily="34" charset="-120"/>
+              </a:rPr>
+              <a:t>−9</a:t>
             </a:r>
             <a:endParaRPr lang="en-US" sz="1300" dirty="0"/>
           </a:p>
@@ -10282,77 +10490,116 @@
       </p:sp>
       <p:sp>
         <p:nvSpPr>
-          <p:cNvPr id="20" name="Text 18"/>
-          <p:cNvSpPr/>
-          <p:nvPr/>
-        </p:nvSpPr>
-        <p:spPr>
-          <a:xfrm>
-            <a:off x="7662672" y="3383280"/>
-            <a:ext cx="3794760" cy="548640"/>
-          </a:xfrm>
-          <a:prstGeom prst="rect">
-            <a:avLst/>
-          </a:prstGeom>
-          <a:noFill/>
-          <a:ln/>
-        </p:spPr>
-        <p:txBody>
-          <a:bodyPr wrap="square" rtlCol="0" anchor="ctr"/>
-          <a:lstStyle/>
-          <a:p>
-            <a:pPr indent="0" marL="0">
-              <a:buNone/>
-            </a:pPr>
-            <a:r>
-              <a:rPr lang="en-US" sz="1250" dirty="0">
-                <a:solidFill>
-                  <a:srgbClr val="3A362F"/>
-                </a:solidFill>
-                <a:latin typeface="Calibri" pitchFamily="34" charset="0"/>
-                <a:ea typeface="Calibri" pitchFamily="34" charset="-122"/>
-                <a:cs typeface="Calibri" pitchFamily="34" charset="-120"/>
-              </a:rPr>
-              <a:t>합격 80점↑</a:t>
-            </a:r>
-            <a:endParaRPr lang="en-US" sz="1250" dirty="0"/>
-          </a:p>
-        </p:txBody>
-      </p:sp>
-      <p:sp>
-        <p:nvSpPr>
-          <p:cNvPr id="21" name="Text 19"/>
-          <p:cNvSpPr/>
-          <p:nvPr/>
-        </p:nvSpPr>
-        <p:spPr>
-          <a:xfrm>
-            <a:off x="6565392" y="4005072"/>
-            <a:ext cx="1188720" cy="548640"/>
-          </a:xfrm>
-          <a:prstGeom prst="rect">
-            <a:avLst/>
-          </a:prstGeom>
-          <a:noFill/>
-          <a:ln/>
-        </p:spPr>
-        <p:txBody>
-          <a:bodyPr wrap="square" rtlCol="0" anchor="ctr"/>
-          <a:lstStyle/>
-          <a:p>
-            <a:pPr indent="0" marL="0">
+          <p:cNvPr id="24" name="Text 22"/>
+          <p:cNvSpPr/>
+          <p:nvPr/>
+        </p:nvSpPr>
+        <p:spPr>
+          <a:xfrm>
+            <a:off x="1554480" y="5605272"/>
+            <a:ext cx="5280660" cy="658368"/>
+          </a:xfrm>
+          <a:prstGeom prst="rect">
+            <a:avLst/>
+          </a:prstGeom>
+          <a:noFill/>
+          <a:ln/>
+        </p:spPr>
+        <p:txBody>
+          <a:bodyPr wrap="square" rtlCol="0" anchor="ctr"/>
+          <a:lstStyle/>
+          <a:p>
+            <a:pPr indent="0" marL="0">
+              <a:buNone/>
+            </a:pPr>
+            <a:r>
+              <a:rPr lang="en-US" sz="1500" b="1" dirty="0">
+                <a:solidFill>
+                  <a:srgbClr val="8A5A5A"/>
+                </a:solidFill>
+                <a:latin typeface="Calibri" pitchFamily="34" charset="0"/>
+                <a:ea typeface="Calibri" pitchFamily="34" charset="-122"/>
+                <a:cs typeface="Calibri" pitchFamily="34" charset="-120"/>
+              </a:rPr>
+              <a:t>40% 미만 · 미이수</a:t>
+            </a:r>
+            <a:endParaRPr lang="en-US" sz="1500" dirty="0"/>
+          </a:p>
+        </p:txBody>
+      </p:sp>
+      <p:sp>
+        <p:nvSpPr>
+          <p:cNvPr id="25" name="Text 23"/>
+          <p:cNvSpPr/>
+          <p:nvPr/>
+        </p:nvSpPr>
+        <p:spPr>
+          <a:xfrm>
+            <a:off x="6560820" y="5605272"/>
+            <a:ext cx="2112264" cy="658368"/>
+          </a:xfrm>
+          <a:prstGeom prst="rect">
+            <a:avLst/>
+          </a:prstGeom>
+          <a:noFill/>
+          <a:ln/>
+        </p:spPr>
+        <p:txBody>
+          <a:bodyPr wrap="square" rtlCol="0" anchor="ctr"/>
+          <a:lstStyle/>
+          <a:p>
+            <a:pPr algn="ctr" indent="0" marL="0">
+              <a:buNone/>
+            </a:pPr>
+            <a:r>
+              <a:rPr lang="en-US" sz="2400" b="1" dirty="0">
+                <a:solidFill>
+                  <a:srgbClr val="8A5A5A"/>
+                </a:solidFill>
+                <a:latin typeface="Cambria" pitchFamily="34" charset="0"/>
+                <a:ea typeface="Cambria" pitchFamily="34" charset="-122"/>
+                <a:cs typeface="Cambria" pitchFamily="34" charset="-120"/>
+              </a:rPr>
+              <a:t>0</a:t>
+            </a:r>
+            <a:endParaRPr lang="en-US" sz="2400" dirty="0"/>
+          </a:p>
+        </p:txBody>
+      </p:sp>
+      <p:sp>
+        <p:nvSpPr>
+          <p:cNvPr id="26" name="Text 24"/>
+          <p:cNvSpPr/>
+          <p:nvPr/>
+        </p:nvSpPr>
+        <p:spPr>
+          <a:xfrm>
+            <a:off x="8673084" y="5605272"/>
+            <a:ext cx="1933956" cy="658368"/>
+          </a:xfrm>
+          <a:prstGeom prst="rect">
+            <a:avLst/>
+          </a:prstGeom>
+          <a:noFill/>
+          <a:ln/>
+        </p:spPr>
+        <p:txBody>
+          <a:bodyPr wrap="square" rtlCol="0" anchor="ctr"/>
+          <a:lstStyle/>
+          <a:p>
+            <a:pPr algn="r" indent="0" marL="0">
               <a:buNone/>
             </a:pPr>
             <a:r>
               <a:rPr lang="en-US" sz="1300" b="1" dirty="0">
                 <a:solidFill>
-                  <a:srgbClr val="A8895E"/>
-                </a:solidFill>
-                <a:latin typeface="Calibri" pitchFamily="34" charset="0"/>
-                <a:ea typeface="Calibri" pitchFamily="34" charset="-122"/>
-                <a:cs typeface="Calibri" pitchFamily="34" charset="-120"/>
-              </a:rPr>
-              <a:t>헤어쇼</a:t>
+                  <a:srgbClr val="888888"/>
+                </a:solidFill>
+                <a:latin typeface="Calibri" pitchFamily="34" charset="0"/>
+                <a:ea typeface="Calibri" pitchFamily="34" charset="-122"/>
+                <a:cs typeface="Calibri" pitchFamily="34" charset="-120"/>
+              </a:rPr>
+              <a:t>실격</a:t>
             </a:r>
             <a:endParaRPr lang="en-US" sz="1300" dirty="0"/>
           </a:p>
@@ -10360,131 +10607,14 @@
       </p:sp>
       <p:sp>
         <p:nvSpPr>
-          <p:cNvPr id="22" name="Text 20"/>
-          <p:cNvSpPr/>
-          <p:nvPr/>
-        </p:nvSpPr>
-        <p:spPr>
-          <a:xfrm>
-            <a:off x="7662672" y="4005072"/>
-            <a:ext cx="3794760" cy="548640"/>
-          </a:xfrm>
-          <a:prstGeom prst="rect">
-            <a:avLst/>
-          </a:prstGeom>
-          <a:noFill/>
-          <a:ln/>
-        </p:spPr>
-        <p:txBody>
-          <a:bodyPr wrap="square" rtlCol="0" anchor="ctr"/>
-          <a:lstStyle/>
-          <a:p>
-            <a:pPr indent="0" marL="0">
-              <a:buNone/>
-            </a:pPr>
-            <a:r>
-              <a:rPr lang="en-US" sz="1250" dirty="0">
-                <a:solidFill>
-                  <a:srgbClr val="3A362F"/>
-                </a:solidFill>
-                <a:latin typeface="Calibri" pitchFamily="34" charset="0"/>
-                <a:ea typeface="Calibri" pitchFamily="34" charset="-122"/>
-                <a:cs typeface="Calibri" pitchFamily="34" charset="-120"/>
-              </a:rPr>
-              <a:t>기존 정량기준 80% 통과 → 디자이너</a:t>
-            </a:r>
-            <a:endParaRPr lang="en-US" sz="1250" dirty="0"/>
-          </a:p>
-        </p:txBody>
-      </p:sp>
-      <p:sp>
-        <p:nvSpPr>
-          <p:cNvPr id="23" name="Text 21"/>
-          <p:cNvSpPr/>
-          <p:nvPr/>
-        </p:nvSpPr>
-        <p:spPr>
-          <a:xfrm>
-            <a:off x="6565392" y="4626864"/>
-            <a:ext cx="1188720" cy="548640"/>
-          </a:xfrm>
-          <a:prstGeom prst="rect">
-            <a:avLst/>
-          </a:prstGeom>
-          <a:noFill/>
-          <a:ln/>
-        </p:spPr>
-        <p:txBody>
-          <a:bodyPr wrap="square" rtlCol="0" anchor="ctr"/>
-          <a:lstStyle/>
-          <a:p>
-            <a:pPr indent="0" marL="0">
-              <a:buNone/>
-            </a:pPr>
-            <a:r>
-              <a:rPr lang="en-US" sz="1300" b="1" dirty="0">
-                <a:solidFill>
-                  <a:srgbClr val="A8895E"/>
-                </a:solidFill>
-                <a:latin typeface="Calibri" pitchFamily="34" charset="0"/>
-                <a:ea typeface="Calibri" pitchFamily="34" charset="-122"/>
-                <a:cs typeface="Calibri" pitchFamily="34" charset="-120"/>
-              </a:rPr>
-              <a:t>방향</a:t>
-            </a:r>
-            <a:endParaRPr lang="en-US" sz="1300" dirty="0"/>
-          </a:p>
-        </p:txBody>
-      </p:sp>
-      <p:sp>
-        <p:nvSpPr>
-          <p:cNvPr id="24" name="Text 22"/>
-          <p:cNvSpPr/>
-          <p:nvPr/>
-        </p:nvSpPr>
-        <p:spPr>
-          <a:xfrm>
-            <a:off x="7662672" y="4626864"/>
-            <a:ext cx="3794760" cy="548640"/>
-          </a:xfrm>
-          <a:prstGeom prst="rect">
-            <a:avLst/>
-          </a:prstGeom>
-          <a:noFill/>
-          <a:ln/>
-        </p:spPr>
-        <p:txBody>
-          <a:bodyPr wrap="square" rtlCol="0" anchor="ctr"/>
-          <a:lstStyle/>
-          <a:p>
-            <a:pPr indent="0" marL="0">
-              <a:buNone/>
-            </a:pPr>
-            <a:r>
-              <a:rPr lang="en-US" sz="1250" dirty="0">
-                <a:solidFill>
-                  <a:srgbClr val="3A362F"/>
-                </a:solidFill>
-                <a:latin typeface="Calibri" pitchFamily="34" charset="0"/>
-                <a:ea typeface="Calibri" pitchFamily="34" charset="-122"/>
-                <a:cs typeface="Calibri" pitchFamily="34" charset="-120"/>
-              </a:rPr>
-              <a:t>혼자 서는 디자이너 · 케어까지</a:t>
-            </a:r>
-            <a:endParaRPr lang="en-US" sz="1250" dirty="0"/>
-          </a:p>
-        </p:txBody>
-      </p:sp>
-      <p:sp>
-        <p:nvSpPr>
-          <p:cNvPr id="25" name="Text 23"/>
-          <p:cNvSpPr/>
-          <p:nvPr/>
-        </p:nvSpPr>
-        <p:spPr>
-          <a:xfrm>
-            <a:off x="548640" y="5532120"/>
-            <a:ext cx="10972800" cy="365760"/>
+          <p:cNvPr id="27" name="Text 25"/>
+          <p:cNvSpPr/>
+          <p:nvPr/>
+        </p:nvSpPr>
+        <p:spPr>
+          <a:xfrm>
+            <a:off x="548640" y="6172200"/>
+            <a:ext cx="10972800" cy="320040"/>
           </a:xfrm>
           <a:prstGeom prst="rect">
             <a:avLst/>
@@ -10500,7 +10630,7 @@
               <a:buNone/>
             </a:pPr>
             <a:r>
-              <a:rPr lang="en-US" sz="1250" b="1" dirty="0">
+              <a:rPr lang="en-US" sz="1150" dirty="0">
                 <a:solidFill>
                   <a:srgbClr val="6A655C"/>
                 </a:solidFill>
@@ -10508,9 +10638,9 @@
                 <a:ea typeface="Calibri" pitchFamily="34" charset="-122"/>
                 <a:cs typeface="Calibri" pitchFamily="34" charset="-120"/>
               </a:rPr>
-              <a:t>＋ 최종 KPI(모델100·매출500·시그니처60·리뷰70·조회수10만) 달성 시 — 쇼·정량 무관하게 무조건 디자이너.</a:t>
-            </a:r>
-            <a:endParaRPr lang="en-US" sz="1250" dirty="0"/>
+              <a:t>＋ 준비물 미비·시간 초과·모델 미확보는 항목별 추가 감점 · 두 과목 각각 이 기준으로 채점</a:t>
+            </a:r>
+            <a:endParaRPr lang="en-US" sz="1150" dirty="0"/>
           </a:p>
         </p:txBody>
       </p:sp>
@@ -10661,7 +10791,7 @@
                 <a:ea typeface="Calibri" pitchFamily="34" charset="-122"/>
                 <a:cs typeface="Calibri" pitchFamily="34" charset="-120"/>
               </a:rPr>
-              <a:t>RENEWAL</a:t>
+              <a:t>LEVEL 4·5</a:t>
             </a:r>
             <a:endParaRPr lang="en-US" sz="1000" dirty="0"/>
           </a:p>
@@ -10700,7 +10830,7 @@
                 <a:ea typeface="Calibri" pitchFamily="34" charset="-122"/>
                 <a:cs typeface="Calibri" pitchFamily="34" charset="-120"/>
               </a:rPr>
-              <a:t>한남 · 맨즈 · 플레이스 개편</a:t>
+              <a:t>디자이너로 가는 마지막 관문</a:t>
             </a:r>
             <a:endParaRPr lang="en-US" sz="1150" dirty="0"/>
           </a:p>
@@ -10739,7 +10869,7 @@
                 <a:ea typeface="Cambria" pitchFamily="34" charset="-122"/>
                 <a:cs typeface="Cambria" pitchFamily="34" charset="-120"/>
               </a:rPr>
-              <a:t>디자이너 되는 기준이 바뀐다</a:t>
+              <a:t>4·5레벨 승급 기준</a:t>
             </a:r>
             <a:endParaRPr lang="en-US" sz="4000" dirty="0"/>
           </a:p>
@@ -10753,16 +10883,23 @@
         </p:nvSpPr>
         <p:spPr>
           <a:xfrm>
-            <a:off x="566928" y="2569464"/>
-            <a:ext cx="457200" cy="457200"/>
-          </a:xfrm>
-          <a:prstGeom prst="ellipse">
-            <a:avLst/>
+            <a:off x="548640" y="2514600"/>
+            <a:ext cx="5440680" cy="2834640"/>
+          </a:xfrm>
+          <a:prstGeom prst="roundRect">
+            <a:avLst>
+              <a:gd name="adj" fmla="val 3871"/>
+            </a:avLst>
           </a:prstGeom>
           <a:solidFill>
-            <a:srgbClr val="1A1815"/>
+            <a:srgbClr val="FFFFFF"/>
           </a:solidFill>
-          <a:ln/>
+          <a:ln w="19050">
+            <a:solidFill>
+              <a:srgbClr val="A8895E"/>
+            </a:solidFill>
+            <a:prstDash val="solid"/>
+          </a:ln>
         </p:spPr>
       </p:sp>
       <p:sp>
@@ -10773,34 +10910,34 @@
         </p:nvSpPr>
         <p:spPr>
           <a:xfrm>
-            <a:off x="566928" y="2569464"/>
-            <a:ext cx="457200" cy="457200"/>
-          </a:xfrm>
-          <a:prstGeom prst="rect">
-            <a:avLst/>
-          </a:prstGeom>
-          <a:noFill/>
-          <a:ln/>
-        </p:spPr>
-        <p:txBody>
-          <a:bodyPr wrap="square" rtlCol="0" anchor="ctr"/>
-          <a:lstStyle/>
-          <a:p>
-            <a:pPr algn="ctr" indent="0" marL="0">
-              <a:buNone/>
-            </a:pPr>
-            <a:r>
-              <a:rPr lang="en-US" sz="1600" b="1" dirty="0">
-                <a:solidFill>
-                  <a:srgbClr val="A8895E"/>
+            <a:off x="822960" y="2743200"/>
+            <a:ext cx="2720340" cy="457200"/>
+          </a:xfrm>
+          <a:prstGeom prst="rect">
+            <a:avLst/>
+          </a:prstGeom>
+          <a:noFill/>
+          <a:ln/>
+        </p:spPr>
+        <p:txBody>
+          <a:bodyPr wrap="square" rtlCol="0" anchor="ctr"/>
+          <a:lstStyle/>
+          <a:p>
+            <a:pPr indent="0" marL="0">
+              <a:buNone/>
+            </a:pPr>
+            <a:r>
+              <a:rPr lang="en-US" sz="2600" b="1" dirty="0">
+                <a:solidFill>
+                  <a:srgbClr val="1A1815"/>
                 </a:solidFill>
                 <a:latin typeface="Cambria" pitchFamily="34" charset="0"/>
                 <a:ea typeface="Cambria" pitchFamily="34" charset="-122"/>
                 <a:cs typeface="Cambria" pitchFamily="34" charset="-120"/>
               </a:rPr>
-              <a:t>1</a:t>
-            </a:r>
-            <a:endParaRPr lang="en-US" sz="1600" dirty="0"/>
+              <a:t>4레벨</a:t>
+            </a:r>
+            <a:endParaRPr lang="en-US" sz="2600" dirty="0"/>
           </a:p>
         </p:txBody>
       </p:sp>
@@ -10812,208 +10949,414 @@
         </p:nvSpPr>
         <p:spPr>
           <a:xfrm>
-            <a:off x="1234440" y="2468880"/>
-            <a:ext cx="10058400" cy="384048"/>
-          </a:xfrm>
-          <a:prstGeom prst="rect">
-            <a:avLst/>
-          </a:prstGeom>
-          <a:noFill/>
-          <a:ln/>
-        </p:spPr>
-        <p:txBody>
-          <a:bodyPr wrap="square" rtlCol="0" anchor="ctr"/>
-          <a:lstStyle/>
-          <a:p>
-            <a:pPr indent="0" marL="0">
-              <a:buNone/>
-            </a:pPr>
-            <a:r>
-              <a:rPr lang="en-US" sz="1700" b="1" dirty="0">
+            <a:off x="2996946" y="2788920"/>
+            <a:ext cx="2446020" cy="384048"/>
+          </a:xfrm>
+          <a:prstGeom prst="rect">
+            <a:avLst/>
+          </a:prstGeom>
+          <a:solidFill>
+            <a:srgbClr val="A8895E"/>
+          </a:solidFill>
+          <a:ln/>
+        </p:spPr>
+        <p:txBody>
+          <a:bodyPr wrap="square" rtlCol="0" anchor="ctr"/>
+          <a:lstStyle/>
+          <a:p>
+            <a:pPr algn="ctr" indent="0" marL="0">
+              <a:buNone/>
+            </a:pPr>
+            <a:r>
+              <a:rPr lang="en-US" sz="1200" b="1" dirty="0">
+                <a:solidFill>
+                  <a:srgbClr val="FFFFFF"/>
+                </a:solidFill>
+                <a:latin typeface="Calibri" pitchFamily="34" charset="0"/>
+                <a:ea typeface="Calibri" pitchFamily="34" charset="-122"/>
+                <a:cs typeface="Calibri" pitchFamily="34" charset="-120"/>
+              </a:rPr>
+              <a:t>쇼 50% 통과</a:t>
+            </a:r>
+            <a:endParaRPr lang="en-US" sz="1200" dirty="0"/>
+          </a:p>
+        </p:txBody>
+      </p:sp>
+      <p:sp>
+        <p:nvSpPr>
+          <p:cNvPr id="10" name="Text 8"/>
+          <p:cNvSpPr/>
+          <p:nvPr/>
+        </p:nvSpPr>
+        <p:spPr>
+          <a:xfrm>
+            <a:off x="822960" y="3383280"/>
+            <a:ext cx="1188720" cy="548640"/>
+          </a:xfrm>
+          <a:prstGeom prst="rect">
+            <a:avLst/>
+          </a:prstGeom>
+          <a:noFill/>
+          <a:ln/>
+        </p:spPr>
+        <p:txBody>
+          <a:bodyPr wrap="square" rtlCol="0" anchor="ctr"/>
+          <a:lstStyle/>
+          <a:p>
+            <a:pPr indent="0" marL="0">
+              <a:buNone/>
+            </a:pPr>
+            <a:r>
+              <a:rPr lang="en-US" sz="1300" b="1" dirty="0">
+                <a:solidFill>
+                  <a:srgbClr val="A8895E"/>
+                </a:solidFill>
+                <a:latin typeface="Calibri" pitchFamily="34" charset="0"/>
+                <a:ea typeface="Calibri" pitchFamily="34" charset="-122"/>
+                <a:cs typeface="Calibri" pitchFamily="34" charset="-120"/>
+              </a:rPr>
+              <a:t>채점</a:t>
+            </a:r>
+            <a:endParaRPr lang="en-US" sz="1300" dirty="0"/>
+          </a:p>
+        </p:txBody>
+      </p:sp>
+      <p:sp>
+        <p:nvSpPr>
+          <p:cNvPr id="11" name="Text 9"/>
+          <p:cNvSpPr/>
+          <p:nvPr/>
+        </p:nvSpPr>
+        <p:spPr>
+          <a:xfrm>
+            <a:off x="1920240" y="3383280"/>
+            <a:ext cx="3794760" cy="548640"/>
+          </a:xfrm>
+          <a:prstGeom prst="rect">
+            <a:avLst/>
+          </a:prstGeom>
+          <a:noFill/>
+          <a:ln/>
+        </p:spPr>
+        <p:txBody>
+          <a:bodyPr wrap="square" rtlCol="0" anchor="ctr"/>
+          <a:lstStyle/>
+          <a:p>
+            <a:pPr indent="0" marL="0">
+              <a:buNone/>
+            </a:pPr>
+            <a:r>
+              <a:rPr lang="en-US" sz="1250" dirty="0">
+                <a:solidFill>
+                  <a:srgbClr val="3A362F"/>
+                </a:solidFill>
+                <a:latin typeface="Calibri" pitchFamily="34" charset="0"/>
+                <a:ea typeface="Calibri" pitchFamily="34" charset="-122"/>
+                <a:cs typeface="Calibri" pitchFamily="34" charset="-120"/>
+              </a:rPr>
+              <a:t>합격 80점↑ (실기30·SNS30 중심)</a:t>
+            </a:r>
+            <a:endParaRPr lang="en-US" sz="1250" dirty="0"/>
+          </a:p>
+        </p:txBody>
+      </p:sp>
+      <p:sp>
+        <p:nvSpPr>
+          <p:cNvPr id="12" name="Text 10"/>
+          <p:cNvSpPr/>
+          <p:nvPr/>
+        </p:nvSpPr>
+        <p:spPr>
+          <a:xfrm>
+            <a:off x="822960" y="4005072"/>
+            <a:ext cx="1188720" cy="548640"/>
+          </a:xfrm>
+          <a:prstGeom prst="rect">
+            <a:avLst/>
+          </a:prstGeom>
+          <a:noFill/>
+          <a:ln/>
+        </p:spPr>
+        <p:txBody>
+          <a:bodyPr wrap="square" rtlCol="0" anchor="ctr"/>
+          <a:lstStyle/>
+          <a:p>
+            <a:pPr indent="0" marL="0">
+              <a:buNone/>
+            </a:pPr>
+            <a:r>
+              <a:rPr lang="en-US" sz="1300" b="1" dirty="0">
+                <a:solidFill>
+                  <a:srgbClr val="A8895E"/>
+                </a:solidFill>
+                <a:latin typeface="Calibri" pitchFamily="34" charset="0"/>
+                <a:ea typeface="Calibri" pitchFamily="34" charset="-122"/>
+                <a:cs typeface="Calibri" pitchFamily="34" charset="-120"/>
+              </a:rPr>
+              <a:t>헤어쇼</a:t>
+            </a:r>
+            <a:endParaRPr lang="en-US" sz="1300" dirty="0"/>
+          </a:p>
+        </p:txBody>
+      </p:sp>
+      <p:sp>
+        <p:nvSpPr>
+          <p:cNvPr id="13" name="Text 11"/>
+          <p:cNvSpPr/>
+          <p:nvPr/>
+        </p:nvSpPr>
+        <p:spPr>
+          <a:xfrm>
+            <a:off x="1920240" y="4005072"/>
+            <a:ext cx="3794760" cy="548640"/>
+          </a:xfrm>
+          <a:prstGeom prst="rect">
+            <a:avLst/>
+          </a:prstGeom>
+          <a:noFill/>
+          <a:ln/>
+        </p:spPr>
+        <p:txBody>
+          <a:bodyPr wrap="square" rtlCol="0" anchor="ctr"/>
+          <a:lstStyle/>
+          <a:p>
+            <a:pPr indent="0" marL="0">
+              <a:buNone/>
+            </a:pPr>
+            <a:r>
+              <a:rPr lang="en-US" sz="1250" dirty="0">
+                <a:solidFill>
+                  <a:srgbClr val="3A362F"/>
+                </a:solidFill>
+                <a:latin typeface="Calibri" pitchFamily="34" charset="0"/>
+                <a:ea typeface="Calibri" pitchFamily="34" charset="-122"/>
+                <a:cs typeface="Calibri" pitchFamily="34" charset="-120"/>
+              </a:rPr>
+              <a:t>기존 정량기준 50% 통과</a:t>
+            </a:r>
+            <a:endParaRPr lang="en-US" sz="1250" dirty="0"/>
+          </a:p>
+        </p:txBody>
+      </p:sp>
+      <p:sp>
+        <p:nvSpPr>
+          <p:cNvPr id="14" name="Text 12"/>
+          <p:cNvSpPr/>
+          <p:nvPr/>
+        </p:nvSpPr>
+        <p:spPr>
+          <a:xfrm>
+            <a:off x="822960" y="4626864"/>
+            <a:ext cx="1188720" cy="548640"/>
+          </a:xfrm>
+          <a:prstGeom prst="rect">
+            <a:avLst/>
+          </a:prstGeom>
+          <a:noFill/>
+          <a:ln/>
+        </p:spPr>
+        <p:txBody>
+          <a:bodyPr wrap="square" rtlCol="0" anchor="ctr"/>
+          <a:lstStyle/>
+          <a:p>
+            <a:pPr indent="0" marL="0">
+              <a:buNone/>
+            </a:pPr>
+            <a:r>
+              <a:rPr lang="en-US" sz="1300" b="1" dirty="0">
+                <a:solidFill>
+                  <a:srgbClr val="A8895E"/>
+                </a:solidFill>
+                <a:latin typeface="Calibri" pitchFamily="34" charset="0"/>
+                <a:ea typeface="Calibri" pitchFamily="34" charset="-122"/>
+                <a:cs typeface="Calibri" pitchFamily="34" charset="-120"/>
+              </a:rPr>
+              <a:t>방향</a:t>
+            </a:r>
+            <a:endParaRPr lang="en-US" sz="1300" dirty="0"/>
+          </a:p>
+        </p:txBody>
+      </p:sp>
+      <p:sp>
+        <p:nvSpPr>
+          <p:cNvPr id="15" name="Text 13"/>
+          <p:cNvSpPr/>
+          <p:nvPr/>
+        </p:nvSpPr>
+        <p:spPr>
+          <a:xfrm>
+            <a:off x="1920240" y="4626864"/>
+            <a:ext cx="3794760" cy="548640"/>
+          </a:xfrm>
+          <a:prstGeom prst="rect">
+            <a:avLst/>
+          </a:prstGeom>
+          <a:noFill/>
+          <a:ln/>
+        </p:spPr>
+        <p:txBody>
+          <a:bodyPr wrap="square" rtlCol="0" anchor="ctr"/>
+          <a:lstStyle/>
+          <a:p>
+            <a:pPr indent="0" marL="0">
+              <a:buNone/>
+            </a:pPr>
+            <a:r>
+              <a:rPr lang="en-US" sz="1250" dirty="0">
+                <a:solidFill>
+                  <a:srgbClr val="3A362F"/>
+                </a:solidFill>
+                <a:latin typeface="Calibri" pitchFamily="34" charset="0"/>
+                <a:ea typeface="Calibri" pitchFamily="34" charset="-122"/>
+                <a:cs typeface="Calibri" pitchFamily="34" charset="-120"/>
+              </a:rPr>
+              <a:t>현장 실전 + SNS로 유입 시작</a:t>
+            </a:r>
+            <a:endParaRPr lang="en-US" sz="1250" dirty="0"/>
+          </a:p>
+        </p:txBody>
+      </p:sp>
+      <p:sp>
+        <p:nvSpPr>
+          <p:cNvPr id="16" name="Shape 14"/>
+          <p:cNvSpPr/>
+          <p:nvPr/>
+        </p:nvSpPr>
+        <p:spPr>
+          <a:xfrm>
+            <a:off x="6291072" y="2514600"/>
+            <a:ext cx="5440680" cy="2834640"/>
+          </a:xfrm>
+          <a:prstGeom prst="roundRect">
+            <a:avLst>
+              <a:gd name="adj" fmla="val 3871"/>
+            </a:avLst>
+          </a:prstGeom>
+          <a:solidFill>
+            <a:srgbClr val="FFFFFF"/>
+          </a:solidFill>
+          <a:ln w="19050">
+            <a:solidFill>
+              <a:srgbClr val="A8895E"/>
+            </a:solidFill>
+            <a:prstDash val="solid"/>
+          </a:ln>
+        </p:spPr>
+      </p:sp>
+      <p:sp>
+        <p:nvSpPr>
+          <p:cNvPr id="17" name="Text 15"/>
+          <p:cNvSpPr/>
+          <p:nvPr/>
+        </p:nvSpPr>
+        <p:spPr>
+          <a:xfrm>
+            <a:off x="6565392" y="2743200"/>
+            <a:ext cx="2720340" cy="457200"/>
+          </a:xfrm>
+          <a:prstGeom prst="rect">
+            <a:avLst/>
+          </a:prstGeom>
+          <a:noFill/>
+          <a:ln/>
+        </p:spPr>
+        <p:txBody>
+          <a:bodyPr wrap="square" rtlCol="0" anchor="ctr"/>
+          <a:lstStyle/>
+          <a:p>
+            <a:pPr indent="0" marL="0">
+              <a:buNone/>
+            </a:pPr>
+            <a:r>
+              <a:rPr lang="en-US" sz="2600" b="1" dirty="0">
                 <a:solidFill>
                   <a:srgbClr val="1A1815"/>
-                </a:solidFill>
-                <a:latin typeface="Calibri" pitchFamily="34" charset="0"/>
-                <a:ea typeface="Calibri" pitchFamily="34" charset="-122"/>
-                <a:cs typeface="Calibri" pitchFamily="34" charset="-120"/>
-              </a:rPr>
-              <a:t>샵 개편</a:t>
-            </a:r>
-            <a:endParaRPr lang="en-US" sz="1700" dirty="0"/>
-          </a:p>
-        </p:txBody>
-      </p:sp>
-      <p:sp>
-        <p:nvSpPr>
-          <p:cNvPr id="10" name="Text 8"/>
-          <p:cNvSpPr/>
-          <p:nvPr/>
-        </p:nvSpPr>
-        <p:spPr>
-          <a:xfrm>
-            <a:off x="1234440" y="2862072"/>
-            <a:ext cx="10241280" cy="365760"/>
-          </a:xfrm>
-          <a:prstGeom prst="rect">
-            <a:avLst/>
-          </a:prstGeom>
-          <a:noFill/>
-          <a:ln/>
-        </p:spPr>
-        <p:txBody>
-          <a:bodyPr wrap="square" rtlCol="0" anchor="ctr"/>
-          <a:lstStyle/>
-          <a:p>
-            <a:pPr indent="0" marL="0">
-              <a:buNone/>
-            </a:pPr>
-            <a:r>
-              <a:rPr lang="en-US" sz="1300" dirty="0">
-                <a:solidFill>
-                  <a:srgbClr val="555555"/>
-                </a:solidFill>
-                <a:latin typeface="Calibri" pitchFamily="34" charset="0"/>
-                <a:ea typeface="Calibri" pitchFamily="34" charset="-122"/>
-                <a:cs typeface="Calibri" pitchFamily="34" charset="-120"/>
-              </a:rPr>
-              <a:t>한남·맨즈·플레이스 개편에 맞춰 디자이너 승급 기준·시점이 조정됨</a:t>
-            </a:r>
-            <a:endParaRPr lang="en-US" sz="1300" dirty="0"/>
-          </a:p>
-        </p:txBody>
-      </p:sp>
-      <p:sp>
-        <p:nvSpPr>
-          <p:cNvPr id="11" name="Shape 9"/>
-          <p:cNvSpPr/>
-          <p:nvPr/>
-        </p:nvSpPr>
-        <p:spPr>
-          <a:xfrm>
-            <a:off x="566928" y="3483864"/>
-            <a:ext cx="457200" cy="457200"/>
-          </a:xfrm>
-          <a:prstGeom prst="ellipse">
-            <a:avLst/>
-          </a:prstGeom>
-          <a:solidFill>
-            <a:srgbClr val="1A1815"/>
-          </a:solidFill>
-          <a:ln/>
-        </p:spPr>
-      </p:sp>
-      <p:sp>
-        <p:nvSpPr>
-          <p:cNvPr id="12" name="Text 10"/>
-          <p:cNvSpPr/>
-          <p:nvPr/>
-        </p:nvSpPr>
-        <p:spPr>
-          <a:xfrm>
-            <a:off x="566928" y="3483864"/>
-            <a:ext cx="457200" cy="457200"/>
-          </a:xfrm>
-          <a:prstGeom prst="rect">
-            <a:avLst/>
-          </a:prstGeom>
-          <a:noFill/>
-          <a:ln/>
-        </p:spPr>
-        <p:txBody>
-          <a:bodyPr wrap="square" rtlCol="0" anchor="ctr"/>
-          <a:lstStyle/>
-          <a:p>
-            <a:pPr algn="ctr" indent="0" marL="0">
-              <a:buNone/>
-            </a:pPr>
-            <a:r>
-              <a:rPr lang="en-US" sz="1600" b="1" dirty="0">
-                <a:solidFill>
-                  <a:srgbClr val="A8895E"/>
                 </a:solidFill>
                 <a:latin typeface="Cambria" pitchFamily="34" charset="0"/>
                 <a:ea typeface="Cambria" pitchFamily="34" charset="-122"/>
                 <a:cs typeface="Cambria" pitchFamily="34" charset="-120"/>
               </a:rPr>
-              <a:t>2</a:t>
-            </a:r>
-            <a:endParaRPr lang="en-US" sz="1600" dirty="0"/>
-          </a:p>
-        </p:txBody>
-      </p:sp>
-      <p:sp>
-        <p:nvSpPr>
-          <p:cNvPr id="13" name="Text 11"/>
-          <p:cNvSpPr/>
-          <p:nvPr/>
-        </p:nvSpPr>
-        <p:spPr>
-          <a:xfrm>
-            <a:off x="1234440" y="3383280"/>
-            <a:ext cx="10058400" cy="384048"/>
-          </a:xfrm>
-          <a:prstGeom prst="rect">
-            <a:avLst/>
-          </a:prstGeom>
-          <a:noFill/>
-          <a:ln/>
-        </p:spPr>
-        <p:txBody>
-          <a:bodyPr wrap="square" rtlCol="0" anchor="ctr"/>
-          <a:lstStyle/>
-          <a:p>
-            <a:pPr indent="0" marL="0">
-              <a:buNone/>
-            </a:pPr>
-            <a:r>
-              <a:rPr lang="en-US" sz="1700" b="1" dirty="0">
-                <a:solidFill>
-                  <a:srgbClr val="1A1815"/>
-                </a:solidFill>
-                <a:latin typeface="Calibri" pitchFamily="34" charset="0"/>
-                <a:ea typeface="Calibri" pitchFamily="34" charset="-122"/>
-                <a:cs typeface="Calibri" pitchFamily="34" charset="-120"/>
-              </a:rPr>
-              <a:t>1~3레벨 즉시 적용</a:t>
-            </a:r>
-            <a:endParaRPr lang="en-US" sz="1700" dirty="0"/>
-          </a:p>
-        </p:txBody>
-      </p:sp>
-      <p:sp>
-        <p:nvSpPr>
-          <p:cNvPr id="14" name="Text 12"/>
-          <p:cNvSpPr/>
-          <p:nvPr/>
-        </p:nvSpPr>
-        <p:spPr>
-          <a:xfrm>
-            <a:off x="1234440" y="3776472"/>
-            <a:ext cx="10241280" cy="365760"/>
-          </a:xfrm>
-          <a:prstGeom prst="rect">
-            <a:avLst/>
-          </a:prstGeom>
-          <a:noFill/>
-          <a:ln/>
-        </p:spPr>
-        <p:txBody>
-          <a:bodyPr wrap="square" rtlCol="0" anchor="ctr"/>
-          <a:lstStyle/>
-          <a:p>
-            <a:pPr indent="0" marL="0">
-              <a:buNone/>
-            </a:pPr>
-            <a:r>
-              <a:rPr lang="en-US" sz="1300" dirty="0">
-                <a:solidFill>
-                  <a:srgbClr val="555555"/>
-                </a:solidFill>
-                <a:latin typeface="Calibri" pitchFamily="34" charset="0"/>
-                <a:ea typeface="Calibri" pitchFamily="34" charset="-122"/>
-                <a:cs typeface="Calibri" pitchFamily="34" charset="-120"/>
-              </a:rPr>
-              <a:t>지금 1~3레벨 아이들에게 바로 적용된다</a:t>
+              <a:t>5레벨</a:t>
+            </a:r>
+            <a:endParaRPr lang="en-US" sz="2600" dirty="0"/>
+          </a:p>
+        </p:txBody>
+      </p:sp>
+      <p:sp>
+        <p:nvSpPr>
+          <p:cNvPr id="18" name="Text 16"/>
+          <p:cNvSpPr/>
+          <p:nvPr/>
+        </p:nvSpPr>
+        <p:spPr>
+          <a:xfrm>
+            <a:off x="8739378" y="2788920"/>
+            <a:ext cx="2446020" cy="384048"/>
+          </a:xfrm>
+          <a:prstGeom prst="rect">
+            <a:avLst/>
+          </a:prstGeom>
+          <a:solidFill>
+            <a:srgbClr val="A8895E"/>
+          </a:solidFill>
+          <a:ln/>
+        </p:spPr>
+        <p:txBody>
+          <a:bodyPr wrap="square" rtlCol="0" anchor="ctr"/>
+          <a:lstStyle/>
+          <a:p>
+            <a:pPr algn="ctr" indent="0" marL="0">
+              <a:buNone/>
+            </a:pPr>
+            <a:r>
+              <a:rPr lang="en-US" sz="1200" b="1" dirty="0">
+                <a:solidFill>
+                  <a:srgbClr val="FFFFFF"/>
+                </a:solidFill>
+                <a:latin typeface="Calibri" pitchFamily="34" charset="0"/>
+                <a:ea typeface="Calibri" pitchFamily="34" charset="-122"/>
+                <a:cs typeface="Calibri" pitchFamily="34" charset="-120"/>
+              </a:rPr>
+              <a:t>쇼 80% 통과</a:t>
+            </a:r>
+            <a:endParaRPr lang="en-US" sz="1200" dirty="0"/>
+          </a:p>
+        </p:txBody>
+      </p:sp>
+      <p:sp>
+        <p:nvSpPr>
+          <p:cNvPr id="19" name="Text 17"/>
+          <p:cNvSpPr/>
+          <p:nvPr/>
+        </p:nvSpPr>
+        <p:spPr>
+          <a:xfrm>
+            <a:off x="6565392" y="3383280"/>
+            <a:ext cx="1188720" cy="548640"/>
+          </a:xfrm>
+          <a:prstGeom prst="rect">
+            <a:avLst/>
+          </a:prstGeom>
+          <a:noFill/>
+          <a:ln/>
+        </p:spPr>
+        <p:txBody>
+          <a:bodyPr wrap="square" rtlCol="0" anchor="ctr"/>
+          <a:lstStyle/>
+          <a:p>
+            <a:pPr indent="0" marL="0">
+              <a:buNone/>
+            </a:pPr>
+            <a:r>
+              <a:rPr lang="en-US" sz="1300" b="1" dirty="0">
+                <a:solidFill>
+                  <a:srgbClr val="A8895E"/>
+                </a:solidFill>
+                <a:latin typeface="Calibri" pitchFamily="34" charset="0"/>
+                <a:ea typeface="Calibri" pitchFamily="34" charset="-122"/>
+                <a:cs typeface="Calibri" pitchFamily="34" charset="-120"/>
+              </a:rPr>
+              <a:t>채점</a:t>
             </a:r>
             <a:endParaRPr lang="en-US" sz="1300" dirty="0"/>
           </a:p>
@@ -11021,52 +11364,69 @@
       </p:sp>
       <p:sp>
         <p:nvSpPr>
-          <p:cNvPr id="15" name="Shape 13"/>
-          <p:cNvSpPr/>
-          <p:nvPr/>
-        </p:nvSpPr>
-        <p:spPr>
-          <a:xfrm>
-            <a:off x="548640" y="4526280"/>
-            <a:ext cx="11091672" cy="1234440"/>
-          </a:xfrm>
-          <a:prstGeom prst="roundRect">
-            <a:avLst>
-              <a:gd name="adj" fmla="val 8889"/>
-            </a:avLst>
-          </a:prstGeom>
-          <a:solidFill>
-            <a:srgbClr val="2A211A"/>
-          </a:solidFill>
-          <a:ln/>
-        </p:spPr>
-      </p:sp>
-      <p:sp>
-        <p:nvSpPr>
-          <p:cNvPr id="16" name="Text 14"/>
-          <p:cNvSpPr/>
-          <p:nvPr/>
-        </p:nvSpPr>
-        <p:spPr>
-          <a:xfrm>
-            <a:off x="914400" y="4709160"/>
-            <a:ext cx="10332720" cy="502920"/>
-          </a:xfrm>
-          <a:prstGeom prst="rect">
-            <a:avLst/>
-          </a:prstGeom>
-          <a:noFill/>
-          <a:ln/>
-        </p:spPr>
-        <p:txBody>
-          <a:bodyPr wrap="square" rtlCol="0" anchor="ctr"/>
-          <a:lstStyle/>
-          <a:p>
-            <a:pPr indent="0" marL="0">
-              <a:buNone/>
-            </a:pPr>
-            <a:r>
-              <a:rPr lang="en-US" sz="1900" b="1" dirty="0">
+          <p:cNvPr id="20" name="Text 18"/>
+          <p:cNvSpPr/>
+          <p:nvPr/>
+        </p:nvSpPr>
+        <p:spPr>
+          <a:xfrm>
+            <a:off x="7662672" y="3383280"/>
+            <a:ext cx="3794760" cy="548640"/>
+          </a:xfrm>
+          <a:prstGeom prst="rect">
+            <a:avLst/>
+          </a:prstGeom>
+          <a:noFill/>
+          <a:ln/>
+        </p:spPr>
+        <p:txBody>
+          <a:bodyPr wrap="square" rtlCol="0" anchor="ctr"/>
+          <a:lstStyle/>
+          <a:p>
+            <a:pPr indent="0" marL="0">
+              <a:buNone/>
+            </a:pPr>
+            <a:r>
+              <a:rPr lang="en-US" sz="1250" dirty="0">
+                <a:solidFill>
+                  <a:srgbClr val="3A362F"/>
+                </a:solidFill>
+                <a:latin typeface="Calibri" pitchFamily="34" charset="0"/>
+                <a:ea typeface="Calibri" pitchFamily="34" charset="-122"/>
+                <a:cs typeface="Calibri" pitchFamily="34" charset="-120"/>
+              </a:rPr>
+              <a:t>합격 80점↑</a:t>
+            </a:r>
+            <a:endParaRPr lang="en-US" sz="1250" dirty="0"/>
+          </a:p>
+        </p:txBody>
+      </p:sp>
+      <p:sp>
+        <p:nvSpPr>
+          <p:cNvPr id="21" name="Text 19"/>
+          <p:cNvSpPr/>
+          <p:nvPr/>
+        </p:nvSpPr>
+        <p:spPr>
+          <a:xfrm>
+            <a:off x="6565392" y="4005072"/>
+            <a:ext cx="1188720" cy="548640"/>
+          </a:xfrm>
+          <a:prstGeom prst="rect">
+            <a:avLst/>
+          </a:prstGeom>
+          <a:noFill/>
+          <a:ln/>
+        </p:spPr>
+        <p:txBody>
+          <a:bodyPr wrap="square" rtlCol="0" anchor="ctr"/>
+          <a:lstStyle/>
+          <a:p>
+            <a:pPr indent="0" marL="0">
+              <a:buNone/>
+            </a:pPr>
+            <a:r>
+              <a:rPr lang="en-US" sz="1300" b="1" dirty="0">
                 <a:solidFill>
                   <a:srgbClr val="A8895E"/>
                 </a:solidFill>
@@ -11074,61 +11434,139 @@
                 <a:ea typeface="Calibri" pitchFamily="34" charset="-122"/>
                 <a:cs typeface="Calibri" pitchFamily="34" charset="-120"/>
               </a:rPr>
-              <a:t>⚠  단, SNS 마케팅력 기준을 못 채우면 — 밀린다</a:t>
-            </a:r>
-            <a:endParaRPr lang="en-US" sz="1900" dirty="0"/>
-          </a:p>
-        </p:txBody>
-      </p:sp>
-      <p:sp>
-        <p:nvSpPr>
-          <p:cNvPr id="17" name="Text 15"/>
-          <p:cNvSpPr/>
-          <p:nvPr/>
-        </p:nvSpPr>
-        <p:spPr>
-          <a:xfrm>
-            <a:off x="914400" y="5257800"/>
-            <a:ext cx="10332720" cy="411480"/>
-          </a:xfrm>
-          <a:prstGeom prst="rect">
-            <a:avLst/>
-          </a:prstGeom>
-          <a:noFill/>
-          <a:ln/>
-        </p:spPr>
-        <p:txBody>
-          <a:bodyPr wrap="square" rtlCol="0" anchor="ctr"/>
-          <a:lstStyle/>
-          <a:p>
-            <a:pPr indent="0" marL="0">
-              <a:buNone/>
-            </a:pPr>
-            <a:r>
-              <a:rPr lang="en-US" sz="1350" dirty="0">
-                <a:solidFill>
-                  <a:srgbClr val="D7D1C6"/>
-                </a:solidFill>
-                <a:latin typeface="Calibri" pitchFamily="34" charset="0"/>
-                <a:ea typeface="Calibri" pitchFamily="34" charset="-122"/>
-                <a:cs typeface="Calibri" pitchFamily="34" charset="-120"/>
-              </a:rPr>
-              <a:t>빨라진 만큼, '나를 알리고 손님을 오게 하는 힘(SNS)'이 안 되면 승급은 미뤄진다.</a:t>
-            </a:r>
-            <a:endParaRPr lang="en-US" sz="1350" dirty="0"/>
-          </a:p>
-        </p:txBody>
-      </p:sp>
-      <p:sp>
-        <p:nvSpPr>
-          <p:cNvPr id="18" name="Text 16"/>
-          <p:cNvSpPr/>
-          <p:nvPr/>
-        </p:nvSpPr>
-        <p:spPr>
-          <a:xfrm>
-            <a:off x="548640" y="5989320"/>
-            <a:ext cx="10972800" cy="274320"/>
+              <a:t>헤어쇼</a:t>
+            </a:r>
+            <a:endParaRPr lang="en-US" sz="1300" dirty="0"/>
+          </a:p>
+        </p:txBody>
+      </p:sp>
+      <p:sp>
+        <p:nvSpPr>
+          <p:cNvPr id="22" name="Text 20"/>
+          <p:cNvSpPr/>
+          <p:nvPr/>
+        </p:nvSpPr>
+        <p:spPr>
+          <a:xfrm>
+            <a:off x="7662672" y="4005072"/>
+            <a:ext cx="3794760" cy="548640"/>
+          </a:xfrm>
+          <a:prstGeom prst="rect">
+            <a:avLst/>
+          </a:prstGeom>
+          <a:noFill/>
+          <a:ln/>
+        </p:spPr>
+        <p:txBody>
+          <a:bodyPr wrap="square" rtlCol="0" anchor="ctr"/>
+          <a:lstStyle/>
+          <a:p>
+            <a:pPr indent="0" marL="0">
+              <a:buNone/>
+            </a:pPr>
+            <a:r>
+              <a:rPr lang="en-US" sz="1250" dirty="0">
+                <a:solidFill>
+                  <a:srgbClr val="3A362F"/>
+                </a:solidFill>
+                <a:latin typeface="Calibri" pitchFamily="34" charset="0"/>
+                <a:ea typeface="Calibri" pitchFamily="34" charset="-122"/>
+                <a:cs typeface="Calibri" pitchFamily="34" charset="-120"/>
+              </a:rPr>
+              <a:t>기존 정량기준 80% 통과 → 디자이너</a:t>
+            </a:r>
+            <a:endParaRPr lang="en-US" sz="1250" dirty="0"/>
+          </a:p>
+        </p:txBody>
+      </p:sp>
+      <p:sp>
+        <p:nvSpPr>
+          <p:cNvPr id="23" name="Text 21"/>
+          <p:cNvSpPr/>
+          <p:nvPr/>
+        </p:nvSpPr>
+        <p:spPr>
+          <a:xfrm>
+            <a:off x="6565392" y="4626864"/>
+            <a:ext cx="1188720" cy="548640"/>
+          </a:xfrm>
+          <a:prstGeom prst="rect">
+            <a:avLst/>
+          </a:prstGeom>
+          <a:noFill/>
+          <a:ln/>
+        </p:spPr>
+        <p:txBody>
+          <a:bodyPr wrap="square" rtlCol="0" anchor="ctr"/>
+          <a:lstStyle/>
+          <a:p>
+            <a:pPr indent="0" marL="0">
+              <a:buNone/>
+            </a:pPr>
+            <a:r>
+              <a:rPr lang="en-US" sz="1300" b="1" dirty="0">
+                <a:solidFill>
+                  <a:srgbClr val="A8895E"/>
+                </a:solidFill>
+                <a:latin typeface="Calibri" pitchFamily="34" charset="0"/>
+                <a:ea typeface="Calibri" pitchFamily="34" charset="-122"/>
+                <a:cs typeface="Calibri" pitchFamily="34" charset="-120"/>
+              </a:rPr>
+              <a:t>방향</a:t>
+            </a:r>
+            <a:endParaRPr lang="en-US" sz="1300" dirty="0"/>
+          </a:p>
+        </p:txBody>
+      </p:sp>
+      <p:sp>
+        <p:nvSpPr>
+          <p:cNvPr id="24" name="Text 22"/>
+          <p:cNvSpPr/>
+          <p:nvPr/>
+        </p:nvSpPr>
+        <p:spPr>
+          <a:xfrm>
+            <a:off x="7662672" y="4626864"/>
+            <a:ext cx="3794760" cy="548640"/>
+          </a:xfrm>
+          <a:prstGeom prst="rect">
+            <a:avLst/>
+          </a:prstGeom>
+          <a:noFill/>
+          <a:ln/>
+        </p:spPr>
+        <p:txBody>
+          <a:bodyPr wrap="square" rtlCol="0" anchor="ctr"/>
+          <a:lstStyle/>
+          <a:p>
+            <a:pPr indent="0" marL="0">
+              <a:buNone/>
+            </a:pPr>
+            <a:r>
+              <a:rPr lang="en-US" sz="1250" dirty="0">
+                <a:solidFill>
+                  <a:srgbClr val="3A362F"/>
+                </a:solidFill>
+                <a:latin typeface="Calibri" pitchFamily="34" charset="0"/>
+                <a:ea typeface="Calibri" pitchFamily="34" charset="-122"/>
+                <a:cs typeface="Calibri" pitchFamily="34" charset="-120"/>
+              </a:rPr>
+              <a:t>혼자 서는 디자이너 · 케어까지</a:t>
+            </a:r>
+            <a:endParaRPr lang="en-US" sz="1250" dirty="0"/>
+          </a:p>
+        </p:txBody>
+      </p:sp>
+      <p:sp>
+        <p:nvSpPr>
+          <p:cNvPr id="25" name="Text 23"/>
+          <p:cNvSpPr/>
+          <p:nvPr/>
+        </p:nvSpPr>
+        <p:spPr>
+          <a:xfrm>
+            <a:off x="548640" y="5532120"/>
+            <a:ext cx="10972800" cy="365760"/>
           </a:xfrm>
           <a:prstGeom prst="rect">
             <a:avLst/>
@@ -11144,17 +11582,17 @@
               <a:buNone/>
             </a:pPr>
             <a:r>
-              <a:rPr lang="en-US" sz="1100" dirty="0">
-                <a:solidFill>
-                  <a:srgbClr val="8F887C"/>
-                </a:solidFill>
-                <a:latin typeface="Calibri" pitchFamily="34" charset="0"/>
-                <a:ea typeface="Calibri" pitchFamily="34" charset="-122"/>
-                <a:cs typeface="Calibri" pitchFamily="34" charset="-120"/>
-              </a:rPr>
-              <a:t>※ 구체 기준일자는 개편 확정본 반영 예정</a:t>
-            </a:r>
-            <a:endParaRPr lang="en-US" sz="1100" dirty="0"/>
+              <a:rPr lang="en-US" sz="1250" b="1" dirty="0">
+                <a:solidFill>
+                  <a:srgbClr val="6A655C"/>
+                </a:solidFill>
+                <a:latin typeface="Calibri" pitchFamily="34" charset="0"/>
+                <a:ea typeface="Calibri" pitchFamily="34" charset="-122"/>
+                <a:cs typeface="Calibri" pitchFamily="34" charset="-120"/>
+              </a:rPr>
+              <a:t>＋ 최종 KPI(모델100·매출500·시그니처60·리뷰70·조회수10만) 달성 시 — 쇼·정량 무관하게 무조건 디자이너.</a:t>
+            </a:r>
+            <a:endParaRPr lang="en-US" sz="1250" dirty="0"/>
           </a:p>
         </p:txBody>
       </p:sp>
@@ -11172,7 +11610,7 @@
     <p:bg>
       <p:bgPr>
         <a:solidFill>
-          <a:srgbClr val="1A1815"/>
+          <a:srgbClr val="F7F5F1"/>
         </a:solidFill>
       </p:bgPr>
     </p:bg>
@@ -11207,7 +11645,7 @@
           <a:noFill/>
           <a:ln w="12700">
             <a:solidFill>
-              <a:srgbClr val="F7F5F1"/>
+              <a:srgbClr val="1A1815"/>
             </a:solidFill>
           </a:ln>
         </p:spPr>
@@ -11221,7 +11659,7 @@
             <a:r>
               <a:rPr lang="en-US" sz="1500" b="1" dirty="0">
                 <a:solidFill>
-                  <a:srgbClr val="F7F5F1"/>
+                  <a:srgbClr val="1A1815"/>
                 </a:solidFill>
                 <a:latin typeface="Cambria" pitchFamily="34" charset="0"/>
                 <a:ea typeface="Cambria" pitchFamily="34" charset="-122"/>
@@ -11260,7 +11698,7 @@
             <a:r>
               <a:rPr lang="en-US" sz="1000" b="1" spc="300" kern="0" dirty="0">
                 <a:solidFill>
-                  <a:srgbClr val="C9C3B7"/>
+                  <a:srgbClr val="8F887C"/>
                 </a:solidFill>
                 <a:latin typeface="Calibri" pitchFamily="34" charset="0"/>
                 <a:ea typeface="Calibri" pitchFamily="34" charset="-122"/>
@@ -11299,13 +11737,13 @@
             <a:r>
               <a:rPr lang="en-US" sz="1000" b="1" spc="300" kern="0" dirty="0">
                 <a:solidFill>
-                  <a:srgbClr val="C9C3B7"/>
-                </a:solidFill>
-                <a:latin typeface="Calibri" pitchFamily="34" charset="0"/>
-                <a:ea typeface="Calibri" pitchFamily="34" charset="-122"/>
-                <a:cs typeface="Calibri" pitchFamily="34" charset="-120"/>
-              </a:rPr>
-              <a:t>ASK ANYTHING</a:t>
+                  <a:srgbClr val="8F887C"/>
+                </a:solidFill>
+                <a:latin typeface="Calibri" pitchFamily="34" charset="0"/>
+                <a:ea typeface="Calibri" pitchFamily="34" charset="-122"/>
+                <a:cs typeface="Calibri" pitchFamily="34" charset="-120"/>
+              </a:rPr>
+              <a:t>RENEWAL</a:t>
             </a:r>
             <a:endParaRPr lang="en-US" sz="1000" dirty="0"/>
           </a:p>
@@ -11313,23 +11751,42 @@
       </p:sp>
       <p:sp>
         <p:nvSpPr>
-          <p:cNvPr id="5" name="Shape 3"/>
-          <p:cNvSpPr/>
-          <p:nvPr/>
-        </p:nvSpPr>
-        <p:spPr>
-          <a:xfrm>
-            <a:off x="548640" y="1920240"/>
-            <a:ext cx="658368" cy="18288"/>
-          </a:xfrm>
-          <a:prstGeom prst="rect">
-            <a:avLst/>
-          </a:prstGeom>
-          <a:solidFill>
-            <a:srgbClr val="A8895E"/>
-          </a:solidFill>
-          <a:ln/>
-        </p:spPr>
+          <p:cNvPr id="5" name="Text 3"/>
+          <p:cNvSpPr/>
+          <p:nvPr/>
+        </p:nvSpPr>
+        <p:spPr>
+          <a:xfrm>
+            <a:off x="548640" y="1234440"/>
+            <a:ext cx="9144000" cy="274320"/>
+          </a:xfrm>
+          <a:prstGeom prst="rect">
+            <a:avLst/>
+          </a:prstGeom>
+          <a:noFill/>
+          <a:ln/>
+        </p:spPr>
+        <p:txBody>
+          <a:bodyPr wrap="square" rtlCol="0" anchor="ctr"/>
+          <a:lstStyle/>
+          <a:p>
+            <a:pPr indent="0" marL="0">
+              <a:buNone/>
+            </a:pPr>
+            <a:r>
+              <a:rPr lang="en-US" sz="1150" b="1" spc="300" kern="0" dirty="0">
+                <a:solidFill>
+                  <a:srgbClr val="A8895E"/>
+                </a:solidFill>
+                <a:latin typeface="Calibri" pitchFamily="34" charset="0"/>
+                <a:ea typeface="Calibri" pitchFamily="34" charset="-122"/>
+                <a:cs typeface="Calibri" pitchFamily="34" charset="-120"/>
+              </a:rPr>
+              <a:t>한남 · 맨즈 · 플레이스 개편</a:t>
+            </a:r>
+            <a:endParaRPr lang="en-US" sz="1150" dirty="0"/>
+          </a:p>
+        </p:txBody>
       </p:sp>
       <p:sp>
         <p:nvSpPr>
@@ -11339,63 +11796,83 @@
         </p:nvSpPr>
         <p:spPr>
           <a:xfrm>
-            <a:off x="502920" y="2103120"/>
-            <a:ext cx="7315200" cy="1188720"/>
-          </a:xfrm>
-          <a:prstGeom prst="rect">
-            <a:avLst/>
-          </a:prstGeom>
-          <a:noFill/>
-          <a:ln/>
-        </p:spPr>
-        <p:txBody>
-          <a:bodyPr wrap="square" rtlCol="0" anchor="ctr"/>
-          <a:lstStyle/>
-          <a:p>
-            <a:pPr indent="0" marL="0">
-              <a:buNone/>
-            </a:pPr>
-            <a:r>
-              <a:rPr lang="en-US" sz="6400" dirty="0">
-                <a:solidFill>
-                  <a:srgbClr val="F7F5F1"/>
+            <a:off x="530352" y="1463040"/>
+            <a:ext cx="10515600" cy="822960"/>
+          </a:xfrm>
+          <a:prstGeom prst="rect">
+            <a:avLst/>
+          </a:prstGeom>
+          <a:noFill/>
+          <a:ln/>
+        </p:spPr>
+        <p:txBody>
+          <a:bodyPr wrap="square" rtlCol="0" anchor="ctr"/>
+          <a:lstStyle/>
+          <a:p>
+            <a:pPr indent="0" marL="0">
+              <a:buNone/>
+            </a:pPr>
+            <a:r>
+              <a:rPr lang="en-US" sz="4000" dirty="0">
+                <a:solidFill>
+                  <a:srgbClr val="1A1815"/>
                 </a:solidFill>
                 <a:latin typeface="Cambria" pitchFamily="34" charset="0"/>
                 <a:ea typeface="Cambria" pitchFamily="34" charset="-122"/>
                 <a:cs typeface="Cambria" pitchFamily="34" charset="-120"/>
               </a:rPr>
-              <a:t>Q &amp; A</a:t>
-            </a:r>
-            <a:endParaRPr lang="en-US" sz="6400" dirty="0"/>
-          </a:p>
-        </p:txBody>
-      </p:sp>
-      <p:sp>
-        <p:nvSpPr>
-          <p:cNvPr id="7" name="Text 5"/>
-          <p:cNvSpPr/>
-          <p:nvPr/>
-        </p:nvSpPr>
-        <p:spPr>
-          <a:xfrm>
-            <a:off x="548640" y="3657600"/>
-            <a:ext cx="365760" cy="457200"/>
-          </a:xfrm>
-          <a:prstGeom prst="rect">
-            <a:avLst/>
-          </a:prstGeom>
-          <a:noFill/>
-          <a:ln/>
-        </p:spPr>
-        <p:txBody>
-          <a:bodyPr wrap="square" rtlCol="0" anchor="ctr"/>
-          <a:lstStyle/>
-          <a:p>
-            <a:pPr indent="0" marL="0">
-              <a:buNone/>
-            </a:pPr>
-            <a:r>
-              <a:rPr lang="en-US" sz="2000" b="1" dirty="0">
+              <a:t>디자이너 되는 기준이 바뀐다</a:t>
+            </a:r>
+            <a:endParaRPr lang="en-US" sz="4000" dirty="0"/>
+          </a:p>
+        </p:txBody>
+      </p:sp>
+      <p:sp>
+        <p:nvSpPr>
+          <p:cNvPr id="7" name="Shape 5"/>
+          <p:cNvSpPr/>
+          <p:nvPr/>
+        </p:nvSpPr>
+        <p:spPr>
+          <a:xfrm>
+            <a:off x="566928" y="2569464"/>
+            <a:ext cx="457200" cy="457200"/>
+          </a:xfrm>
+          <a:prstGeom prst="ellipse">
+            <a:avLst/>
+          </a:prstGeom>
+          <a:solidFill>
+            <a:srgbClr val="1A1815"/>
+          </a:solidFill>
+          <a:ln/>
+        </p:spPr>
+      </p:sp>
+      <p:sp>
+        <p:nvSpPr>
+          <p:cNvPr id="8" name="Text 6"/>
+          <p:cNvSpPr/>
+          <p:nvPr/>
+        </p:nvSpPr>
+        <p:spPr>
+          <a:xfrm>
+            <a:off x="566928" y="2569464"/>
+            <a:ext cx="457200" cy="457200"/>
+          </a:xfrm>
+          <a:prstGeom prst="rect">
+            <a:avLst/>
+          </a:prstGeom>
+          <a:noFill/>
+          <a:ln/>
+        </p:spPr>
+        <p:txBody>
+          <a:bodyPr wrap="square" rtlCol="0" anchor="ctr"/>
+          <a:lstStyle/>
+          <a:p>
+            <a:pPr algn="ctr" indent="0" marL="0">
+              <a:buNone/>
+            </a:pPr>
+            <a:r>
+              <a:rPr lang="en-US" sz="1600" b="1" dirty="0">
                 <a:solidFill>
                   <a:srgbClr val="A8895E"/>
                 </a:solidFill>
@@ -11403,62 +11880,9 @@
                 <a:ea typeface="Cambria" pitchFamily="34" charset="-122"/>
                 <a:cs typeface="Cambria" pitchFamily="34" charset="-120"/>
               </a:rPr>
-              <a:t>Q</a:t>
-            </a:r>
-            <a:endParaRPr lang="en-US" sz="2000" dirty="0"/>
-          </a:p>
-        </p:txBody>
-      </p:sp>
-      <p:sp>
-        <p:nvSpPr>
-          <p:cNvPr id="8" name="Text 6"/>
-          <p:cNvSpPr/>
-          <p:nvPr/>
-        </p:nvSpPr>
-        <p:spPr>
-          <a:xfrm>
-            <a:off x="960120" y="3657600"/>
-            <a:ext cx="10607040" cy="457200"/>
-          </a:xfrm>
-          <a:prstGeom prst="rect">
-            <a:avLst/>
-          </a:prstGeom>
-          <a:noFill/>
-          <a:ln/>
-        </p:spPr>
-        <p:txBody>
-          <a:bodyPr wrap="square" rtlCol="0" anchor="ctr"/>
-          <a:lstStyle/>
-          <a:p>
-            <a:pPr indent="0" marL="0">
-              <a:buNone/>
-            </a:pPr>
-            <a:r>
-              <a:rPr lang="en-US" sz="1350" b="1" dirty="0">
-                <a:solidFill>
-                  <a:srgbClr val="F7F5F1"/>
-                </a:solidFill>
-                <a:latin typeface="Calibri" pitchFamily="34" charset="0"/>
-                <a:ea typeface="Calibri" pitchFamily="34" charset="-122"/>
-                <a:cs typeface="Calibri" pitchFamily="34" charset="-120"/>
-              </a:rPr>
-              <a:t>내 레벨 수업만 들으면 되나요?  </a:t>
-            </a:r>
-            <a:pPr indent="0" marL="0">
-              <a:buNone/>
-            </a:pPr>
-            <a:r>
-              <a:rPr lang="en-US" sz="1350" dirty="0">
-                <a:solidFill>
-                  <a:srgbClr val="C9C3B7"/>
-                </a:solidFill>
-                <a:latin typeface="Calibri" pitchFamily="34" charset="0"/>
-                <a:ea typeface="Calibri" pitchFamily="34" charset="-122"/>
-                <a:cs typeface="Calibri" pitchFamily="34" charset="-120"/>
-              </a:rPr>
-              <a:t>네 — 캘린더의 내 레벨(L태그) 과목만.</a:t>
-            </a:r>
-            <a:endParaRPr lang="en-US" sz="1350" dirty="0"/>
+              <a:t>1</a:t>
+            </a:r>
+            <a:endParaRPr lang="en-US" sz="1600" dirty="0"/>
           </a:p>
         </p:txBody>
       </p:sp>
@@ -11470,24 +11894,122 @@
         </p:nvSpPr>
         <p:spPr>
           <a:xfrm>
-            <a:off x="548640" y="4315968"/>
-            <a:ext cx="365760" cy="457200"/>
-          </a:xfrm>
-          <a:prstGeom prst="rect">
-            <a:avLst/>
-          </a:prstGeom>
-          <a:noFill/>
-          <a:ln/>
-        </p:spPr>
-        <p:txBody>
-          <a:bodyPr wrap="square" rtlCol="0" anchor="ctr"/>
-          <a:lstStyle/>
-          <a:p>
-            <a:pPr indent="0" marL="0">
-              <a:buNone/>
-            </a:pPr>
-            <a:r>
-              <a:rPr lang="en-US" sz="2000" b="1" dirty="0">
+            <a:off x="1234440" y="2468880"/>
+            <a:ext cx="10058400" cy="384048"/>
+          </a:xfrm>
+          <a:prstGeom prst="rect">
+            <a:avLst/>
+          </a:prstGeom>
+          <a:noFill/>
+          <a:ln/>
+        </p:spPr>
+        <p:txBody>
+          <a:bodyPr wrap="square" rtlCol="0" anchor="ctr"/>
+          <a:lstStyle/>
+          <a:p>
+            <a:pPr indent="0" marL="0">
+              <a:buNone/>
+            </a:pPr>
+            <a:r>
+              <a:rPr lang="en-US" sz="1700" b="1" dirty="0">
+                <a:solidFill>
+                  <a:srgbClr val="1A1815"/>
+                </a:solidFill>
+                <a:latin typeface="Calibri" pitchFamily="34" charset="0"/>
+                <a:ea typeface="Calibri" pitchFamily="34" charset="-122"/>
+                <a:cs typeface="Calibri" pitchFamily="34" charset="-120"/>
+              </a:rPr>
+              <a:t>샵 개편</a:t>
+            </a:r>
+            <a:endParaRPr lang="en-US" sz="1700" dirty="0"/>
+          </a:p>
+        </p:txBody>
+      </p:sp>
+      <p:sp>
+        <p:nvSpPr>
+          <p:cNvPr id="10" name="Text 8"/>
+          <p:cNvSpPr/>
+          <p:nvPr/>
+        </p:nvSpPr>
+        <p:spPr>
+          <a:xfrm>
+            <a:off x="1234440" y="2862072"/>
+            <a:ext cx="10241280" cy="365760"/>
+          </a:xfrm>
+          <a:prstGeom prst="rect">
+            <a:avLst/>
+          </a:prstGeom>
+          <a:noFill/>
+          <a:ln/>
+        </p:spPr>
+        <p:txBody>
+          <a:bodyPr wrap="square" rtlCol="0" anchor="ctr"/>
+          <a:lstStyle/>
+          <a:p>
+            <a:pPr indent="0" marL="0">
+              <a:buNone/>
+            </a:pPr>
+            <a:r>
+              <a:rPr lang="en-US" sz="1300" dirty="0">
+                <a:solidFill>
+                  <a:srgbClr val="555555"/>
+                </a:solidFill>
+                <a:latin typeface="Calibri" pitchFamily="34" charset="0"/>
+                <a:ea typeface="Calibri" pitchFamily="34" charset="-122"/>
+                <a:cs typeface="Calibri" pitchFamily="34" charset="-120"/>
+              </a:rPr>
+              <a:t>한남·맨즈·플레이스 개편에 맞춰 디자이너 승급 기준·시점이 조정됨</a:t>
+            </a:r>
+            <a:endParaRPr lang="en-US" sz="1300" dirty="0"/>
+          </a:p>
+        </p:txBody>
+      </p:sp>
+      <p:sp>
+        <p:nvSpPr>
+          <p:cNvPr id="11" name="Shape 9"/>
+          <p:cNvSpPr/>
+          <p:nvPr/>
+        </p:nvSpPr>
+        <p:spPr>
+          <a:xfrm>
+            <a:off x="566928" y="3483864"/>
+            <a:ext cx="457200" cy="457200"/>
+          </a:xfrm>
+          <a:prstGeom prst="ellipse">
+            <a:avLst/>
+          </a:prstGeom>
+          <a:solidFill>
+            <a:srgbClr val="1A1815"/>
+          </a:solidFill>
+          <a:ln/>
+        </p:spPr>
+      </p:sp>
+      <p:sp>
+        <p:nvSpPr>
+          <p:cNvPr id="12" name="Text 10"/>
+          <p:cNvSpPr/>
+          <p:nvPr/>
+        </p:nvSpPr>
+        <p:spPr>
+          <a:xfrm>
+            <a:off x="566928" y="3483864"/>
+            <a:ext cx="457200" cy="457200"/>
+          </a:xfrm>
+          <a:prstGeom prst="rect">
+            <a:avLst/>
+          </a:prstGeom>
+          <a:noFill/>
+          <a:ln/>
+        </p:spPr>
+        <p:txBody>
+          <a:bodyPr wrap="square" rtlCol="0" anchor="ctr"/>
+          <a:lstStyle/>
+          <a:p>
+            <a:pPr algn="ctr" indent="0" marL="0">
+              <a:buNone/>
+            </a:pPr>
+            <a:r>
+              <a:rPr lang="en-US" sz="1600" b="1" dirty="0">
                 <a:solidFill>
                   <a:srgbClr val="A8895E"/>
                 </a:solidFill>
@@ -11495,60 +12017,185 @@
                 <a:ea typeface="Cambria" pitchFamily="34" charset="-122"/>
                 <a:cs typeface="Cambria" pitchFamily="34" charset="-120"/>
               </a:rPr>
-              <a:t>Q</a:t>
-            </a:r>
-            <a:endParaRPr lang="en-US" sz="2000" dirty="0"/>
-          </a:p>
-        </p:txBody>
-      </p:sp>
-      <p:sp>
-        <p:nvSpPr>
-          <p:cNvPr id="10" name="Text 8"/>
-          <p:cNvSpPr/>
-          <p:nvPr/>
-        </p:nvSpPr>
-        <p:spPr>
-          <a:xfrm>
-            <a:off x="960120" y="4315968"/>
-            <a:ext cx="10607040" cy="457200"/>
-          </a:xfrm>
-          <a:prstGeom prst="rect">
-            <a:avLst/>
-          </a:prstGeom>
-          <a:noFill/>
-          <a:ln/>
-        </p:spPr>
-        <p:txBody>
-          <a:bodyPr wrap="square" rtlCol="0" anchor="ctr"/>
-          <a:lstStyle/>
-          <a:p>
-            <a:pPr indent="0" marL="0">
-              <a:buNone/>
-            </a:pPr>
-            <a:r>
-              <a:rPr lang="en-US" sz="1350" b="1" dirty="0">
-                <a:solidFill>
-                  <a:srgbClr val="F7F5F1"/>
-                </a:solidFill>
-                <a:latin typeface="Calibri" pitchFamily="34" charset="0"/>
-                <a:ea typeface="Calibri" pitchFamily="34" charset="-122"/>
-                <a:cs typeface="Calibri" pitchFamily="34" charset="-120"/>
-              </a:rPr>
-              <a:t>준비물은 어디서 봐요?  </a:t>
-            </a:r>
+              <a:t>2</a:t>
+            </a:r>
+            <a:endParaRPr lang="en-US" sz="1600" dirty="0"/>
+          </a:p>
+        </p:txBody>
+      </p:sp>
+      <p:sp>
+        <p:nvSpPr>
+          <p:cNvPr id="13" name="Text 11"/>
+          <p:cNvSpPr/>
+          <p:nvPr/>
+        </p:nvSpPr>
+        <p:spPr>
+          <a:xfrm>
+            <a:off x="1234440" y="3383280"/>
+            <a:ext cx="10058400" cy="384048"/>
+          </a:xfrm>
+          <a:prstGeom prst="rect">
+            <a:avLst/>
+          </a:prstGeom>
+          <a:noFill/>
+          <a:ln/>
+        </p:spPr>
+        <p:txBody>
+          <a:bodyPr wrap="square" rtlCol="0" anchor="ctr"/>
+          <a:lstStyle/>
+          <a:p>
+            <a:pPr indent="0" marL="0">
+              <a:buNone/>
+            </a:pPr>
+            <a:r>
+              <a:rPr lang="en-US" sz="1700" b="1" dirty="0">
+                <a:solidFill>
+                  <a:srgbClr val="1A1815"/>
+                </a:solidFill>
+                <a:latin typeface="Calibri" pitchFamily="34" charset="0"/>
+                <a:ea typeface="Calibri" pitchFamily="34" charset="-122"/>
+                <a:cs typeface="Calibri" pitchFamily="34" charset="-120"/>
+              </a:rPr>
+              <a:t>1~3레벨 즉시 적용</a:t>
+            </a:r>
+            <a:endParaRPr lang="en-US" sz="1700" dirty="0"/>
+          </a:p>
+        </p:txBody>
+      </p:sp>
+      <p:sp>
+        <p:nvSpPr>
+          <p:cNvPr id="14" name="Text 12"/>
+          <p:cNvSpPr/>
+          <p:nvPr/>
+        </p:nvSpPr>
+        <p:spPr>
+          <a:xfrm>
+            <a:off x="1234440" y="3776472"/>
+            <a:ext cx="10241280" cy="365760"/>
+          </a:xfrm>
+          <a:prstGeom prst="rect">
+            <a:avLst/>
+          </a:prstGeom>
+          <a:noFill/>
+          <a:ln/>
+        </p:spPr>
+        <p:txBody>
+          <a:bodyPr wrap="square" rtlCol="0" anchor="ctr"/>
+          <a:lstStyle/>
+          <a:p>
+            <a:pPr indent="0" marL="0">
+              <a:buNone/>
+            </a:pPr>
+            <a:r>
+              <a:rPr lang="en-US" sz="1300" dirty="0">
+                <a:solidFill>
+                  <a:srgbClr val="555555"/>
+                </a:solidFill>
+                <a:latin typeface="Calibri" pitchFamily="34" charset="0"/>
+                <a:ea typeface="Calibri" pitchFamily="34" charset="-122"/>
+                <a:cs typeface="Calibri" pitchFamily="34" charset="-120"/>
+              </a:rPr>
+              <a:t>지금 1~3레벨 아이들에게 바로 적용된다</a:t>
+            </a:r>
+            <a:endParaRPr lang="en-US" sz="1300" dirty="0"/>
+          </a:p>
+        </p:txBody>
+      </p:sp>
+      <p:sp>
+        <p:nvSpPr>
+          <p:cNvPr id="15" name="Shape 13"/>
+          <p:cNvSpPr/>
+          <p:nvPr/>
+        </p:nvSpPr>
+        <p:spPr>
+          <a:xfrm>
+            <a:off x="548640" y="4526280"/>
+            <a:ext cx="11091672" cy="1234440"/>
+          </a:xfrm>
+          <a:prstGeom prst="roundRect">
+            <a:avLst>
+              <a:gd name="adj" fmla="val 8889"/>
+            </a:avLst>
+          </a:prstGeom>
+          <a:solidFill>
+            <a:srgbClr val="2A211A"/>
+          </a:solidFill>
+          <a:ln/>
+        </p:spPr>
+      </p:sp>
+      <p:sp>
+        <p:nvSpPr>
+          <p:cNvPr id="16" name="Text 14"/>
+          <p:cNvSpPr/>
+          <p:nvPr/>
+        </p:nvSpPr>
+        <p:spPr>
+          <a:xfrm>
+            <a:off x="914400" y="4709160"/>
+            <a:ext cx="10332720" cy="502920"/>
+          </a:xfrm>
+          <a:prstGeom prst="rect">
+            <a:avLst/>
+          </a:prstGeom>
+          <a:noFill/>
+          <a:ln/>
+        </p:spPr>
+        <p:txBody>
+          <a:bodyPr wrap="square" rtlCol="0" anchor="ctr"/>
+          <a:lstStyle/>
+          <a:p>
+            <a:pPr indent="0" marL="0">
+              <a:buNone/>
+            </a:pPr>
+            <a:r>
+              <a:rPr lang="en-US" sz="1900" b="1" dirty="0">
+                <a:solidFill>
+                  <a:srgbClr val="A8895E"/>
+                </a:solidFill>
+                <a:latin typeface="Calibri" pitchFamily="34" charset="0"/>
+                <a:ea typeface="Calibri" pitchFamily="34" charset="-122"/>
+                <a:cs typeface="Calibri" pitchFamily="34" charset="-120"/>
+              </a:rPr>
+              <a:t>⚠  단, SNS 마케팅력 기준을 못 채우면 — 밀린다</a:t>
+            </a:r>
+            <a:endParaRPr lang="en-US" sz="1900" dirty="0"/>
+          </a:p>
+        </p:txBody>
+      </p:sp>
+      <p:sp>
+        <p:nvSpPr>
+          <p:cNvPr id="17" name="Text 15"/>
+          <p:cNvSpPr/>
+          <p:nvPr/>
+        </p:nvSpPr>
+        <p:spPr>
+          <a:xfrm>
+            <a:off x="914400" y="5257800"/>
+            <a:ext cx="10332720" cy="411480"/>
+          </a:xfrm>
+          <a:prstGeom prst="rect">
+            <a:avLst/>
+          </a:prstGeom>
+          <a:noFill/>
+          <a:ln/>
+        </p:spPr>
+        <p:txBody>
+          <a:bodyPr wrap="square" rtlCol="0" anchor="ctr"/>
+          <a:lstStyle/>
+          <a:p>
             <a:pPr indent="0" marL="0">
               <a:buNone/>
             </a:pPr>
             <a:r>
               <a:rPr lang="en-US" sz="1350" dirty="0">
                 <a:solidFill>
-                  <a:srgbClr val="C9C3B7"/>
-                </a:solidFill>
-                <a:latin typeface="Calibri" pitchFamily="34" charset="0"/>
-                <a:ea typeface="Calibri" pitchFamily="34" charset="-122"/>
-                <a:cs typeface="Calibri" pitchFamily="34" charset="-120"/>
-              </a:rPr>
-              <a:t>「과목별 준비물·과제·주의」 문서 (선생님별).</a:t>
+                  <a:srgbClr val="D7D1C6"/>
+                </a:solidFill>
+                <a:latin typeface="Calibri" pitchFamily="34" charset="0"/>
+                <a:ea typeface="Calibri" pitchFamily="34" charset="-122"/>
+                <a:cs typeface="Calibri" pitchFamily="34" charset="-120"/>
+              </a:rPr>
+              <a:t>빨라진 만큼, '나를 알리고 손님을 오게 하는 힘(SNS)'이 안 되면 승급은 미뤄진다.</a:t>
             </a:r>
             <a:endParaRPr lang="en-US" sz="1350" dirty="0"/>
           </a:p>
@@ -11556,185 +12203,40 @@
       </p:sp>
       <p:sp>
         <p:nvSpPr>
-          <p:cNvPr id="11" name="Text 9"/>
-          <p:cNvSpPr/>
-          <p:nvPr/>
-        </p:nvSpPr>
-        <p:spPr>
-          <a:xfrm>
-            <a:off x="548640" y="4974336"/>
-            <a:ext cx="365760" cy="457200"/>
-          </a:xfrm>
-          <a:prstGeom prst="rect">
-            <a:avLst/>
-          </a:prstGeom>
-          <a:noFill/>
-          <a:ln/>
-        </p:spPr>
-        <p:txBody>
-          <a:bodyPr wrap="square" rtlCol="0" anchor="ctr"/>
-          <a:lstStyle/>
-          <a:p>
-            <a:pPr indent="0" marL="0">
-              <a:buNone/>
-            </a:pPr>
-            <a:r>
-              <a:rPr lang="en-US" sz="2000" b="1" dirty="0">
-                <a:solidFill>
-                  <a:srgbClr val="A8895E"/>
-                </a:solidFill>
-                <a:latin typeface="Cambria" pitchFamily="34" charset="0"/>
-                <a:ea typeface="Cambria" pitchFamily="34" charset="-122"/>
-                <a:cs typeface="Cambria" pitchFamily="34" charset="-120"/>
-              </a:rPr>
-              <a:t>Q</a:t>
-            </a:r>
-            <a:endParaRPr lang="en-US" sz="2000" dirty="0"/>
-          </a:p>
-        </p:txBody>
-      </p:sp>
-      <p:sp>
-        <p:nvSpPr>
-          <p:cNvPr id="12" name="Text 10"/>
-          <p:cNvSpPr/>
-          <p:nvPr/>
-        </p:nvSpPr>
-        <p:spPr>
-          <a:xfrm>
-            <a:off x="960120" y="4974336"/>
-            <a:ext cx="10607040" cy="457200"/>
-          </a:xfrm>
-          <a:prstGeom prst="rect">
-            <a:avLst/>
-          </a:prstGeom>
-          <a:noFill/>
-          <a:ln/>
-        </p:spPr>
-        <p:txBody>
-          <a:bodyPr wrap="square" rtlCol="0" anchor="ctr"/>
-          <a:lstStyle/>
-          <a:p>
-            <a:pPr indent="0" marL="0">
-              <a:buNone/>
-            </a:pPr>
-            <a:r>
-              <a:rPr lang="en-US" sz="1350" b="1" dirty="0">
-                <a:solidFill>
-                  <a:srgbClr val="F7F5F1"/>
-                </a:solidFill>
-                <a:latin typeface="Calibri" pitchFamily="34" charset="0"/>
-                <a:ea typeface="Calibri" pitchFamily="34" charset="-122"/>
-                <a:cs typeface="Calibri" pitchFamily="34" charset="-120"/>
-              </a:rPr>
-              <a:t>디자이너는 어떻게 되나요?  </a:t>
-            </a:r>
-            <a:pPr indent="0" marL="0">
-              <a:buNone/>
-            </a:pPr>
-            <a:r>
-              <a:rPr lang="en-US" sz="1350" dirty="0">
-                <a:solidFill>
-                  <a:srgbClr val="C9C3B7"/>
-                </a:solidFill>
-                <a:latin typeface="Calibri" pitchFamily="34" charset="0"/>
-                <a:ea typeface="Calibri" pitchFamily="34" charset="-122"/>
-                <a:cs typeface="Calibri" pitchFamily="34" charset="-120"/>
-              </a:rPr>
-              <a:t>시그니처 쇼 — 4레벨 50%·5레벨 80% 통과 시.</a:t>
-            </a:r>
-            <a:endParaRPr lang="en-US" sz="1350" dirty="0"/>
-          </a:p>
-        </p:txBody>
-      </p:sp>
-      <p:sp>
-        <p:nvSpPr>
-          <p:cNvPr id="13" name="Text 11"/>
-          <p:cNvSpPr/>
-          <p:nvPr/>
-        </p:nvSpPr>
-        <p:spPr>
-          <a:xfrm>
-            <a:off x="548640" y="5632704"/>
-            <a:ext cx="365760" cy="457200"/>
-          </a:xfrm>
-          <a:prstGeom prst="rect">
-            <a:avLst/>
-          </a:prstGeom>
-          <a:noFill/>
-          <a:ln/>
-        </p:spPr>
-        <p:txBody>
-          <a:bodyPr wrap="square" rtlCol="0" anchor="ctr"/>
-          <a:lstStyle/>
-          <a:p>
-            <a:pPr indent="0" marL="0">
-              <a:buNone/>
-            </a:pPr>
-            <a:r>
-              <a:rPr lang="en-US" sz="2000" b="1" dirty="0">
-                <a:solidFill>
-                  <a:srgbClr val="A8895E"/>
-                </a:solidFill>
-                <a:latin typeface="Cambria" pitchFamily="34" charset="0"/>
-                <a:ea typeface="Cambria" pitchFamily="34" charset="-122"/>
-                <a:cs typeface="Cambria" pitchFamily="34" charset="-120"/>
-              </a:rPr>
-              <a:t>Q</a:t>
-            </a:r>
-            <a:endParaRPr lang="en-US" sz="2000" dirty="0"/>
-          </a:p>
-        </p:txBody>
-      </p:sp>
-      <p:sp>
-        <p:nvSpPr>
-          <p:cNvPr id="14" name="Text 12"/>
-          <p:cNvSpPr/>
-          <p:nvPr/>
-        </p:nvSpPr>
-        <p:spPr>
-          <a:xfrm>
-            <a:off x="960120" y="5632704"/>
-            <a:ext cx="10607040" cy="457200"/>
-          </a:xfrm>
-          <a:prstGeom prst="rect">
-            <a:avLst/>
-          </a:prstGeom>
-          <a:noFill/>
-          <a:ln/>
-        </p:spPr>
-        <p:txBody>
-          <a:bodyPr wrap="square" rtlCol="0" anchor="ctr"/>
-          <a:lstStyle/>
-          <a:p>
-            <a:pPr indent="0" marL="0">
-              <a:buNone/>
-            </a:pPr>
-            <a:r>
-              <a:rPr lang="en-US" sz="1350" b="1" dirty="0">
-                <a:solidFill>
-                  <a:srgbClr val="F7F5F1"/>
-                </a:solidFill>
-                <a:latin typeface="Calibri" pitchFamily="34" charset="0"/>
-                <a:ea typeface="Calibri" pitchFamily="34" charset="-122"/>
-                <a:cs typeface="Calibri" pitchFamily="34" charset="-120"/>
-              </a:rPr>
-              <a:t>모델데이·특강은 언제?  </a:t>
-            </a:r>
-            <a:pPr indent="0" marL="0">
-              <a:buNone/>
-            </a:pPr>
-            <a:r>
-              <a:rPr lang="en-US" sz="1350" dirty="0">
-                <a:solidFill>
-                  <a:srgbClr val="C9C3B7"/>
-                </a:solidFill>
-                <a:latin typeface="Calibri" pitchFamily="34" charset="0"/>
-                <a:ea typeface="Calibri" pitchFamily="34" charset="-122"/>
-                <a:cs typeface="Calibri" pitchFamily="34" charset="-120"/>
-              </a:rPr>
-              <a:t>매월 2·4주 금(모델) · 3주 금(특강).</a:t>
-            </a:r>
-            <a:endParaRPr lang="en-US" sz="1350" dirty="0"/>
+          <p:cNvPr id="18" name="Text 16"/>
+          <p:cNvSpPr/>
+          <p:nvPr/>
+        </p:nvSpPr>
+        <p:spPr>
+          <a:xfrm>
+            <a:off x="548640" y="5989320"/>
+            <a:ext cx="10972800" cy="274320"/>
+          </a:xfrm>
+          <a:prstGeom prst="rect">
+            <a:avLst/>
+          </a:prstGeom>
+          <a:noFill/>
+          <a:ln/>
+        </p:spPr>
+        <p:txBody>
+          <a:bodyPr wrap="square" rtlCol="0" anchor="ctr"/>
+          <a:lstStyle/>
+          <a:p>
+            <a:pPr algn="ctr" indent="0" marL="0">
+              <a:buNone/>
+            </a:pPr>
+            <a:r>
+              <a:rPr lang="en-US" sz="1100" dirty="0">
+                <a:solidFill>
+                  <a:srgbClr val="8F887C"/>
+                </a:solidFill>
+                <a:latin typeface="Calibri" pitchFamily="34" charset="0"/>
+                <a:ea typeface="Calibri" pitchFamily="34" charset="-122"/>
+                <a:cs typeface="Calibri" pitchFamily="34" charset="-120"/>
+              </a:rPr>
+              <a:t>※ 구체 기준일자는 개편 확정본 반영 예정</a:t>
+            </a:r>
+            <a:endParaRPr lang="en-US" sz="1100" dirty="0"/>
           </a:p>
         </p:txBody>
       </p:sp>
@@ -11772,13 +12274,134 @@
       </p:grpSpPr>
       <p:sp>
         <p:nvSpPr>
-          <p:cNvPr id="2" name="Shape 0"/>
-          <p:cNvSpPr/>
-          <p:nvPr/>
-        </p:nvSpPr>
-        <p:spPr>
-          <a:xfrm>
-            <a:off x="5765292" y="2286000"/>
+          <p:cNvPr id="2" name="Text 0"/>
+          <p:cNvSpPr/>
+          <p:nvPr/>
+        </p:nvSpPr>
+        <p:spPr>
+          <a:xfrm>
+            <a:off x="502920" y="384048"/>
+            <a:ext cx="457200" cy="384048"/>
+          </a:xfrm>
+          <a:prstGeom prst="rect">
+            <a:avLst/>
+          </a:prstGeom>
+          <a:noFill/>
+          <a:ln w="12700">
+            <a:solidFill>
+              <a:srgbClr val="F7F5F1"/>
+            </a:solidFill>
+          </a:ln>
+        </p:spPr>
+        <p:txBody>
+          <a:bodyPr wrap="square" rtlCol="0" anchor="ctr"/>
+          <a:lstStyle/>
+          <a:p>
+            <a:pPr algn="ctr" indent="0" marL="0">
+              <a:buNone/>
+            </a:pPr>
+            <a:r>
+              <a:rPr lang="en-US" sz="1500" b="1" dirty="0">
+                <a:solidFill>
+                  <a:srgbClr val="F7F5F1"/>
+                </a:solidFill>
+                <a:latin typeface="Cambria" pitchFamily="34" charset="0"/>
+                <a:ea typeface="Cambria" pitchFamily="34" charset="-122"/>
+                <a:cs typeface="Cambria" pitchFamily="34" charset="-120"/>
+              </a:rPr>
+              <a:t>AN</a:t>
+            </a:r>
+            <a:endParaRPr lang="en-US" sz="1500" dirty="0"/>
+          </a:p>
+        </p:txBody>
+      </p:sp>
+      <p:sp>
+        <p:nvSpPr>
+          <p:cNvPr id="3" name="Text 1"/>
+          <p:cNvSpPr/>
+          <p:nvPr/>
+        </p:nvSpPr>
+        <p:spPr>
+          <a:xfrm>
+            <a:off x="1024128" y="384048"/>
+            <a:ext cx="3657600" cy="384048"/>
+          </a:xfrm>
+          <a:prstGeom prst="rect">
+            <a:avLst/>
+          </a:prstGeom>
+          <a:noFill/>
+          <a:ln/>
+        </p:spPr>
+        <p:txBody>
+          <a:bodyPr wrap="square" rtlCol="0" anchor="ctr"/>
+          <a:lstStyle/>
+          <a:p>
+            <a:pPr indent="0" marL="0">
+              <a:buNone/>
+            </a:pPr>
+            <a:r>
+              <a:rPr lang="en-US" sz="1000" b="1" spc="300" kern="0" dirty="0">
+                <a:solidFill>
+                  <a:srgbClr val="C9C3B7"/>
+                </a:solidFill>
+                <a:latin typeface="Calibri" pitchFamily="34" charset="0"/>
+                <a:ea typeface="Calibri" pitchFamily="34" charset="-122"/>
+                <a:cs typeface="Calibri" pitchFamily="34" charset="-120"/>
+              </a:rPr>
+              <a:t>ATNOWN ACADEMY</a:t>
+            </a:r>
+            <a:endParaRPr lang="en-US" sz="1000" dirty="0"/>
+          </a:p>
+        </p:txBody>
+      </p:sp>
+      <p:sp>
+        <p:nvSpPr>
+          <p:cNvPr id="4" name="Text 2"/>
+          <p:cNvSpPr/>
+          <p:nvPr/>
+        </p:nvSpPr>
+        <p:spPr>
+          <a:xfrm>
+            <a:off x="9994392" y="402336"/>
+            <a:ext cx="1737360" cy="310896"/>
+          </a:xfrm>
+          <a:prstGeom prst="rect">
+            <a:avLst/>
+          </a:prstGeom>
+          <a:noFill/>
+          <a:ln/>
+        </p:spPr>
+        <p:txBody>
+          <a:bodyPr wrap="square" rtlCol="0" anchor="ctr"/>
+          <a:lstStyle/>
+          <a:p>
+            <a:pPr algn="r" indent="0" marL="0">
+              <a:buNone/>
+            </a:pPr>
+            <a:r>
+              <a:rPr lang="en-US" sz="1000" b="1" spc="300" kern="0" dirty="0">
+                <a:solidFill>
+                  <a:srgbClr val="C9C3B7"/>
+                </a:solidFill>
+                <a:latin typeface="Calibri" pitchFamily="34" charset="0"/>
+                <a:ea typeface="Calibri" pitchFamily="34" charset="-122"/>
+                <a:cs typeface="Calibri" pitchFamily="34" charset="-120"/>
+              </a:rPr>
+              <a:t>ASK ANYTHING</a:t>
+            </a:r>
+            <a:endParaRPr lang="en-US" sz="1000" dirty="0"/>
+          </a:p>
+        </p:txBody>
+      </p:sp>
+      <p:sp>
+        <p:nvSpPr>
+          <p:cNvPr id="5" name="Shape 3"/>
+          <p:cNvSpPr/>
+          <p:nvPr/>
+        </p:nvSpPr>
+        <p:spPr>
+          <a:xfrm>
+            <a:off x="548640" y="1920240"/>
             <a:ext cx="658368" cy="18288"/>
           </a:xfrm>
           <a:prstGeom prst="rect">
@@ -11792,33 +12415,30 @@
       </p:sp>
       <p:sp>
         <p:nvSpPr>
-          <p:cNvPr id="3" name="Text 1"/>
-          <p:cNvSpPr/>
-          <p:nvPr/>
-        </p:nvSpPr>
-        <p:spPr>
-          <a:xfrm>
-            <a:off x="914400" y="2651760"/>
-            <a:ext cx="10360152" cy="1645920"/>
-          </a:xfrm>
-          <a:prstGeom prst="rect">
-            <a:avLst/>
-          </a:prstGeom>
-          <a:noFill/>
-          <a:ln/>
-        </p:spPr>
-        <p:txBody>
-          <a:bodyPr wrap="square" rtlCol="0" anchor="ctr"/>
-          <a:lstStyle/>
-          <a:p>
-            <a:pPr algn="ctr" indent="0" marL="0">
-              <a:lnSpc>
-                <a:spcPct val="110000"/>
-              </a:lnSpc>
-              <a:buNone/>
-            </a:pPr>
-            <a:r>
-              <a:rPr lang="en-US" sz="4200" dirty="0">
+          <p:cNvPr id="6" name="Text 4"/>
+          <p:cNvSpPr/>
+          <p:nvPr/>
+        </p:nvSpPr>
+        <p:spPr>
+          <a:xfrm>
+            <a:off x="502920" y="2103120"/>
+            <a:ext cx="7315200" cy="1188720"/>
+          </a:xfrm>
+          <a:prstGeom prst="rect">
+            <a:avLst/>
+          </a:prstGeom>
+          <a:noFill/>
+          <a:ln/>
+        </p:spPr>
+        <p:txBody>
+          <a:bodyPr wrap="square" rtlCol="0" anchor="ctr"/>
+          <a:lstStyle/>
+          <a:p>
+            <a:pPr indent="0" marL="0">
+              <a:buNone/>
+            </a:pPr>
+            <a:r>
+              <a:rPr lang="en-US" sz="6400" dirty="0">
                 <a:solidFill>
                   <a:srgbClr val="F7F5F1"/>
                 </a:solidFill>
@@ -11826,68 +12446,377 @@
                 <a:ea typeface="Cambria" pitchFamily="34" charset="-122"/>
                 <a:cs typeface="Cambria" pitchFamily="34" charset="-120"/>
               </a:rPr>
-              <a:t>손이랑 마음부터</a:t>
-            </a:r>
-            <a:endParaRPr lang="en-US" sz="4200" dirty="0"/>
-          </a:p>
-          <a:p>
-            <a:pPr algn="ctr" indent="0" marL="0">
-              <a:lnSpc>
-                <a:spcPct val="110000"/>
-              </a:lnSpc>
-              <a:buNone/>
-            </a:pPr>
-            <a:r>
-              <a:rPr lang="en-US" sz="4200" dirty="0">
-                <a:solidFill>
-                  <a:srgbClr val="F7F5F1"/>
+              <a:t>Q &amp; A</a:t>
+            </a:r>
+            <a:endParaRPr lang="en-US" sz="6400" dirty="0"/>
+          </a:p>
+        </p:txBody>
+      </p:sp>
+      <p:sp>
+        <p:nvSpPr>
+          <p:cNvPr id="7" name="Text 5"/>
+          <p:cNvSpPr/>
+          <p:nvPr/>
+        </p:nvSpPr>
+        <p:spPr>
+          <a:xfrm>
+            <a:off x="548640" y="3657600"/>
+            <a:ext cx="365760" cy="457200"/>
+          </a:xfrm>
+          <a:prstGeom prst="rect">
+            <a:avLst/>
+          </a:prstGeom>
+          <a:noFill/>
+          <a:ln/>
+        </p:spPr>
+        <p:txBody>
+          <a:bodyPr wrap="square" rtlCol="0" anchor="ctr"/>
+          <a:lstStyle/>
+          <a:p>
+            <a:pPr indent="0" marL="0">
+              <a:buNone/>
+            </a:pPr>
+            <a:r>
+              <a:rPr lang="en-US" sz="2000" b="1" dirty="0">
+                <a:solidFill>
+                  <a:srgbClr val="A8895E"/>
                 </a:solidFill>
                 <a:latin typeface="Cambria" pitchFamily="34" charset="0"/>
                 <a:ea typeface="Cambria" pitchFamily="34" charset="-122"/>
                 <a:cs typeface="Cambria" pitchFamily="34" charset="-120"/>
               </a:rPr>
-              <a:t>혼자 서는 디자이너까지</a:t>
-            </a:r>
-            <a:endParaRPr lang="en-US" sz="4200" dirty="0"/>
-          </a:p>
-        </p:txBody>
-      </p:sp>
-      <p:sp>
-        <p:nvSpPr>
-          <p:cNvPr id="4" name="Text 2"/>
-          <p:cNvSpPr/>
-          <p:nvPr/>
-        </p:nvSpPr>
-        <p:spPr>
-          <a:xfrm>
-            <a:off x="914400" y="4480560"/>
-            <a:ext cx="10360152" cy="365760"/>
-          </a:xfrm>
-          <a:prstGeom prst="rect">
-            <a:avLst/>
-          </a:prstGeom>
-          <a:noFill/>
-          <a:ln/>
-        </p:spPr>
-        <p:txBody>
-          <a:bodyPr wrap="square" rtlCol="0" anchor="ctr"/>
-          <a:lstStyle/>
-          <a:p>
-            <a:pPr algn="ctr" indent="0" marL="0">
-              <a:buNone/>
-            </a:pPr>
-            <a:r>
-              <a:rPr lang="en-US" sz="1300" b="1" spc="400" kern="0" dirty="0">
+              <a:t>Q</a:t>
+            </a:r>
+            <a:endParaRPr lang="en-US" sz="2000" dirty="0"/>
+          </a:p>
+        </p:txBody>
+      </p:sp>
+      <p:sp>
+        <p:nvSpPr>
+          <p:cNvPr id="8" name="Text 6"/>
+          <p:cNvSpPr/>
+          <p:nvPr/>
+        </p:nvSpPr>
+        <p:spPr>
+          <a:xfrm>
+            <a:off x="960120" y="3657600"/>
+            <a:ext cx="10607040" cy="457200"/>
+          </a:xfrm>
+          <a:prstGeom prst="rect">
+            <a:avLst/>
+          </a:prstGeom>
+          <a:noFill/>
+          <a:ln/>
+        </p:spPr>
+        <p:txBody>
+          <a:bodyPr wrap="square" rtlCol="0" anchor="ctr"/>
+          <a:lstStyle/>
+          <a:p>
+            <a:pPr indent="0" marL="0">
+              <a:buNone/>
+            </a:pPr>
+            <a:r>
+              <a:rPr lang="en-US" sz="1350" b="1" dirty="0">
+                <a:solidFill>
+                  <a:srgbClr val="F7F5F1"/>
+                </a:solidFill>
+                <a:latin typeface="Calibri" pitchFamily="34" charset="0"/>
+                <a:ea typeface="Calibri" pitchFamily="34" charset="-122"/>
+                <a:cs typeface="Calibri" pitchFamily="34" charset="-120"/>
+              </a:rPr>
+              <a:t>내 레벨 수업만 들으면 되나요?  </a:t>
+            </a:r>
+            <a:pPr indent="0" marL="0">
+              <a:buNone/>
+            </a:pPr>
+            <a:r>
+              <a:rPr lang="en-US" sz="1350" dirty="0">
+                <a:solidFill>
+                  <a:srgbClr val="C9C3B7"/>
+                </a:solidFill>
+                <a:latin typeface="Calibri" pitchFamily="34" charset="0"/>
+                <a:ea typeface="Calibri" pitchFamily="34" charset="-122"/>
+                <a:cs typeface="Calibri" pitchFamily="34" charset="-120"/>
+              </a:rPr>
+              <a:t>네 — 캘린더의 내 레벨(L태그) 과목만.</a:t>
+            </a:r>
+            <a:endParaRPr lang="en-US" sz="1350" dirty="0"/>
+          </a:p>
+        </p:txBody>
+      </p:sp>
+      <p:sp>
+        <p:nvSpPr>
+          <p:cNvPr id="9" name="Text 7"/>
+          <p:cNvSpPr/>
+          <p:nvPr/>
+        </p:nvSpPr>
+        <p:spPr>
+          <a:xfrm>
+            <a:off x="548640" y="4315968"/>
+            <a:ext cx="365760" cy="457200"/>
+          </a:xfrm>
+          <a:prstGeom prst="rect">
+            <a:avLst/>
+          </a:prstGeom>
+          <a:noFill/>
+          <a:ln/>
+        </p:spPr>
+        <p:txBody>
+          <a:bodyPr wrap="square" rtlCol="0" anchor="ctr"/>
+          <a:lstStyle/>
+          <a:p>
+            <a:pPr indent="0" marL="0">
+              <a:buNone/>
+            </a:pPr>
+            <a:r>
+              <a:rPr lang="en-US" sz="2000" b="1" dirty="0">
                 <a:solidFill>
                   <a:srgbClr val="A8895E"/>
                 </a:solidFill>
-                <a:latin typeface="Calibri" pitchFamily="34" charset="0"/>
-                <a:ea typeface="Calibri" pitchFamily="34" charset="-122"/>
-                <a:cs typeface="Calibri" pitchFamily="34" charset="-120"/>
-              </a:rPr>
-              <a:t>AT NOWN · 2026 EDUCATION</a:t>
-            </a:r>
-            <a:endParaRPr lang="en-US" sz="1300" dirty="0"/>
+                <a:latin typeface="Cambria" pitchFamily="34" charset="0"/>
+                <a:ea typeface="Cambria" pitchFamily="34" charset="-122"/>
+                <a:cs typeface="Cambria" pitchFamily="34" charset="-120"/>
+              </a:rPr>
+              <a:t>Q</a:t>
+            </a:r>
+            <a:endParaRPr lang="en-US" sz="2000" dirty="0"/>
+          </a:p>
+        </p:txBody>
+      </p:sp>
+      <p:sp>
+        <p:nvSpPr>
+          <p:cNvPr id="10" name="Text 8"/>
+          <p:cNvSpPr/>
+          <p:nvPr/>
+        </p:nvSpPr>
+        <p:spPr>
+          <a:xfrm>
+            <a:off x="960120" y="4315968"/>
+            <a:ext cx="10607040" cy="457200"/>
+          </a:xfrm>
+          <a:prstGeom prst="rect">
+            <a:avLst/>
+          </a:prstGeom>
+          <a:noFill/>
+          <a:ln/>
+        </p:spPr>
+        <p:txBody>
+          <a:bodyPr wrap="square" rtlCol="0" anchor="ctr"/>
+          <a:lstStyle/>
+          <a:p>
+            <a:pPr indent="0" marL="0">
+              <a:buNone/>
+            </a:pPr>
+            <a:r>
+              <a:rPr lang="en-US" sz="1350" b="1" dirty="0">
+                <a:solidFill>
+                  <a:srgbClr val="F7F5F1"/>
+                </a:solidFill>
+                <a:latin typeface="Calibri" pitchFamily="34" charset="0"/>
+                <a:ea typeface="Calibri" pitchFamily="34" charset="-122"/>
+                <a:cs typeface="Calibri" pitchFamily="34" charset="-120"/>
+              </a:rPr>
+              <a:t>준비물은 어디서 봐요?  </a:t>
+            </a:r>
+            <a:pPr indent="0" marL="0">
+              <a:buNone/>
+            </a:pPr>
+            <a:r>
+              <a:rPr lang="en-US" sz="1350" dirty="0">
+                <a:solidFill>
+                  <a:srgbClr val="C9C3B7"/>
+                </a:solidFill>
+                <a:latin typeface="Calibri" pitchFamily="34" charset="0"/>
+                <a:ea typeface="Calibri" pitchFamily="34" charset="-122"/>
+                <a:cs typeface="Calibri" pitchFamily="34" charset="-120"/>
+              </a:rPr>
+              <a:t>「과목별 준비물·과제·주의」 문서 (선생님별).</a:t>
+            </a:r>
+            <a:endParaRPr lang="en-US" sz="1350" dirty="0"/>
+          </a:p>
+        </p:txBody>
+      </p:sp>
+      <p:sp>
+        <p:nvSpPr>
+          <p:cNvPr id="11" name="Text 9"/>
+          <p:cNvSpPr/>
+          <p:nvPr/>
+        </p:nvSpPr>
+        <p:spPr>
+          <a:xfrm>
+            <a:off x="548640" y="4974336"/>
+            <a:ext cx="365760" cy="457200"/>
+          </a:xfrm>
+          <a:prstGeom prst="rect">
+            <a:avLst/>
+          </a:prstGeom>
+          <a:noFill/>
+          <a:ln/>
+        </p:spPr>
+        <p:txBody>
+          <a:bodyPr wrap="square" rtlCol="0" anchor="ctr"/>
+          <a:lstStyle/>
+          <a:p>
+            <a:pPr indent="0" marL="0">
+              <a:buNone/>
+            </a:pPr>
+            <a:r>
+              <a:rPr lang="en-US" sz="2000" b="1" dirty="0">
+                <a:solidFill>
+                  <a:srgbClr val="A8895E"/>
+                </a:solidFill>
+                <a:latin typeface="Cambria" pitchFamily="34" charset="0"/>
+                <a:ea typeface="Cambria" pitchFamily="34" charset="-122"/>
+                <a:cs typeface="Cambria" pitchFamily="34" charset="-120"/>
+              </a:rPr>
+              <a:t>Q</a:t>
+            </a:r>
+            <a:endParaRPr lang="en-US" sz="2000" dirty="0"/>
+          </a:p>
+        </p:txBody>
+      </p:sp>
+      <p:sp>
+        <p:nvSpPr>
+          <p:cNvPr id="12" name="Text 10"/>
+          <p:cNvSpPr/>
+          <p:nvPr/>
+        </p:nvSpPr>
+        <p:spPr>
+          <a:xfrm>
+            <a:off x="960120" y="4974336"/>
+            <a:ext cx="10607040" cy="457200"/>
+          </a:xfrm>
+          <a:prstGeom prst="rect">
+            <a:avLst/>
+          </a:prstGeom>
+          <a:noFill/>
+          <a:ln/>
+        </p:spPr>
+        <p:txBody>
+          <a:bodyPr wrap="square" rtlCol="0" anchor="ctr"/>
+          <a:lstStyle/>
+          <a:p>
+            <a:pPr indent="0" marL="0">
+              <a:buNone/>
+            </a:pPr>
+            <a:r>
+              <a:rPr lang="en-US" sz="1350" b="1" dirty="0">
+                <a:solidFill>
+                  <a:srgbClr val="F7F5F1"/>
+                </a:solidFill>
+                <a:latin typeface="Calibri" pitchFamily="34" charset="0"/>
+                <a:ea typeface="Calibri" pitchFamily="34" charset="-122"/>
+                <a:cs typeface="Calibri" pitchFamily="34" charset="-120"/>
+              </a:rPr>
+              <a:t>디자이너는 어떻게 되나요?  </a:t>
+            </a:r>
+            <a:pPr indent="0" marL="0">
+              <a:buNone/>
+            </a:pPr>
+            <a:r>
+              <a:rPr lang="en-US" sz="1350" dirty="0">
+                <a:solidFill>
+                  <a:srgbClr val="C9C3B7"/>
+                </a:solidFill>
+                <a:latin typeface="Calibri" pitchFamily="34" charset="0"/>
+                <a:ea typeface="Calibri" pitchFamily="34" charset="-122"/>
+                <a:cs typeface="Calibri" pitchFamily="34" charset="-120"/>
+              </a:rPr>
+              <a:t>시그니처 쇼 — 4레벨 50%·5레벨 80% 통과 시.</a:t>
+            </a:r>
+            <a:endParaRPr lang="en-US" sz="1350" dirty="0"/>
+          </a:p>
+        </p:txBody>
+      </p:sp>
+      <p:sp>
+        <p:nvSpPr>
+          <p:cNvPr id="13" name="Text 11"/>
+          <p:cNvSpPr/>
+          <p:nvPr/>
+        </p:nvSpPr>
+        <p:spPr>
+          <a:xfrm>
+            <a:off x="548640" y="5632704"/>
+            <a:ext cx="365760" cy="457200"/>
+          </a:xfrm>
+          <a:prstGeom prst="rect">
+            <a:avLst/>
+          </a:prstGeom>
+          <a:noFill/>
+          <a:ln/>
+        </p:spPr>
+        <p:txBody>
+          <a:bodyPr wrap="square" rtlCol="0" anchor="ctr"/>
+          <a:lstStyle/>
+          <a:p>
+            <a:pPr indent="0" marL="0">
+              <a:buNone/>
+            </a:pPr>
+            <a:r>
+              <a:rPr lang="en-US" sz="2000" b="1" dirty="0">
+                <a:solidFill>
+                  <a:srgbClr val="A8895E"/>
+                </a:solidFill>
+                <a:latin typeface="Cambria" pitchFamily="34" charset="0"/>
+                <a:ea typeface="Cambria" pitchFamily="34" charset="-122"/>
+                <a:cs typeface="Cambria" pitchFamily="34" charset="-120"/>
+              </a:rPr>
+              <a:t>Q</a:t>
+            </a:r>
+            <a:endParaRPr lang="en-US" sz="2000" dirty="0"/>
+          </a:p>
+        </p:txBody>
+      </p:sp>
+      <p:sp>
+        <p:nvSpPr>
+          <p:cNvPr id="14" name="Text 12"/>
+          <p:cNvSpPr/>
+          <p:nvPr/>
+        </p:nvSpPr>
+        <p:spPr>
+          <a:xfrm>
+            <a:off x="960120" y="5632704"/>
+            <a:ext cx="10607040" cy="457200"/>
+          </a:xfrm>
+          <a:prstGeom prst="rect">
+            <a:avLst/>
+          </a:prstGeom>
+          <a:noFill/>
+          <a:ln/>
+        </p:spPr>
+        <p:txBody>
+          <a:bodyPr wrap="square" rtlCol="0" anchor="ctr"/>
+          <a:lstStyle/>
+          <a:p>
+            <a:pPr indent="0" marL="0">
+              <a:buNone/>
+            </a:pPr>
+            <a:r>
+              <a:rPr lang="en-US" sz="1350" b="1" dirty="0">
+                <a:solidFill>
+                  <a:srgbClr val="F7F5F1"/>
+                </a:solidFill>
+                <a:latin typeface="Calibri" pitchFamily="34" charset="0"/>
+                <a:ea typeface="Calibri" pitchFamily="34" charset="-122"/>
+                <a:cs typeface="Calibri" pitchFamily="34" charset="-120"/>
+              </a:rPr>
+              <a:t>모델데이·특강은 언제?  </a:t>
+            </a:r>
+            <a:pPr indent="0" marL="0">
+              <a:buNone/>
+            </a:pPr>
+            <a:r>
+              <a:rPr lang="en-US" sz="1350" dirty="0">
+                <a:solidFill>
+                  <a:srgbClr val="C9C3B7"/>
+                </a:solidFill>
+                <a:latin typeface="Calibri" pitchFamily="34" charset="0"/>
+                <a:ea typeface="Calibri" pitchFamily="34" charset="-122"/>
+                <a:cs typeface="Calibri" pitchFamily="34" charset="-120"/>
+              </a:rPr>
+              <a:t>매월 2·4주 금(모델) · 3주 금(특강).</a:t>
+            </a:r>
+            <a:endParaRPr lang="en-US" sz="1350" dirty="0"/>
           </a:p>
         </p:txBody>
       </p:sp>
@@ -12142,6 +13071,159 @@
               <a:t>되고 싶어요?</a:t>
             </a:r>
             <a:endParaRPr lang="en-US" sz="6000" dirty="0"/>
+          </a:p>
+        </p:txBody>
+      </p:sp>
+    </p:spTree>
+  </p:cSld>
+  <p:clrMapOvr>
+    <a:masterClrMapping/>
+  </p:clrMapOvr>
+</p:sld>
+</file>
+
+<file path=ppt/slides/slide20.xml><?xml version="1.0" encoding="utf-8"?>
+<p:sld xmlns:a="http://schemas.openxmlformats.org/drawingml/2006/main" xmlns:r="http://schemas.openxmlformats.org/officeDocument/2006/relationships" xmlns:p="http://schemas.openxmlformats.org/presentationml/2006/main">
+  <p:cSld name="Slide 20">
+    <p:bg>
+      <p:bgPr>
+        <a:solidFill>
+          <a:srgbClr val="1A1815"/>
+        </a:solidFill>
+      </p:bgPr>
+    </p:bg>
+    <p:spTree>
+      <p:nvGrpSpPr>
+        <p:cNvPr id="1" name=""/>
+        <p:cNvGrpSpPr/>
+        <p:nvPr/>
+      </p:nvGrpSpPr>
+      <p:grpSpPr>
+        <a:xfrm>
+          <a:off x="0" y="0"/>
+          <a:ext cx="0" cy="0"/>
+          <a:chOff x="0" y="0"/>
+          <a:chExt cx="0" cy="0"/>
+        </a:xfrm>
+      </p:grpSpPr>
+      <p:sp>
+        <p:nvSpPr>
+          <p:cNvPr id="2" name="Shape 0"/>
+          <p:cNvSpPr/>
+          <p:nvPr/>
+        </p:nvSpPr>
+        <p:spPr>
+          <a:xfrm>
+            <a:off x="5765292" y="2286000"/>
+            <a:ext cx="658368" cy="18288"/>
+          </a:xfrm>
+          <a:prstGeom prst="rect">
+            <a:avLst/>
+          </a:prstGeom>
+          <a:solidFill>
+            <a:srgbClr val="A8895E"/>
+          </a:solidFill>
+          <a:ln/>
+        </p:spPr>
+      </p:sp>
+      <p:sp>
+        <p:nvSpPr>
+          <p:cNvPr id="3" name="Text 1"/>
+          <p:cNvSpPr/>
+          <p:nvPr/>
+        </p:nvSpPr>
+        <p:spPr>
+          <a:xfrm>
+            <a:off x="914400" y="2651760"/>
+            <a:ext cx="10360152" cy="1645920"/>
+          </a:xfrm>
+          <a:prstGeom prst="rect">
+            <a:avLst/>
+          </a:prstGeom>
+          <a:noFill/>
+          <a:ln/>
+        </p:spPr>
+        <p:txBody>
+          <a:bodyPr wrap="square" rtlCol="0" anchor="ctr"/>
+          <a:lstStyle/>
+          <a:p>
+            <a:pPr algn="ctr" indent="0" marL="0">
+              <a:lnSpc>
+                <a:spcPct val="110000"/>
+              </a:lnSpc>
+              <a:buNone/>
+            </a:pPr>
+            <a:r>
+              <a:rPr lang="en-US" sz="4200" dirty="0">
+                <a:solidFill>
+                  <a:srgbClr val="F7F5F1"/>
+                </a:solidFill>
+                <a:latin typeface="Cambria" pitchFamily="34" charset="0"/>
+                <a:ea typeface="Cambria" pitchFamily="34" charset="-122"/>
+                <a:cs typeface="Cambria" pitchFamily="34" charset="-120"/>
+              </a:rPr>
+              <a:t>손이랑 마음부터</a:t>
+            </a:r>
+            <a:endParaRPr lang="en-US" sz="4200" dirty="0"/>
+          </a:p>
+          <a:p>
+            <a:pPr algn="ctr" indent="0" marL="0">
+              <a:lnSpc>
+                <a:spcPct val="110000"/>
+              </a:lnSpc>
+              <a:buNone/>
+            </a:pPr>
+            <a:r>
+              <a:rPr lang="en-US" sz="4200" dirty="0">
+                <a:solidFill>
+                  <a:srgbClr val="F7F5F1"/>
+                </a:solidFill>
+                <a:latin typeface="Cambria" pitchFamily="34" charset="0"/>
+                <a:ea typeface="Cambria" pitchFamily="34" charset="-122"/>
+                <a:cs typeface="Cambria" pitchFamily="34" charset="-120"/>
+              </a:rPr>
+              <a:t>혼자 서는 디자이너까지</a:t>
+            </a:r>
+            <a:endParaRPr lang="en-US" sz="4200" dirty="0"/>
+          </a:p>
+        </p:txBody>
+      </p:sp>
+      <p:sp>
+        <p:nvSpPr>
+          <p:cNvPr id="4" name="Text 2"/>
+          <p:cNvSpPr/>
+          <p:nvPr/>
+        </p:nvSpPr>
+        <p:spPr>
+          <a:xfrm>
+            <a:off x="914400" y="4480560"/>
+            <a:ext cx="10360152" cy="365760"/>
+          </a:xfrm>
+          <a:prstGeom prst="rect">
+            <a:avLst/>
+          </a:prstGeom>
+          <a:noFill/>
+          <a:ln/>
+        </p:spPr>
+        <p:txBody>
+          <a:bodyPr wrap="square" rtlCol="0" anchor="ctr"/>
+          <a:lstStyle/>
+          <a:p>
+            <a:pPr algn="ctr" indent="0" marL="0">
+              <a:buNone/>
+            </a:pPr>
+            <a:r>
+              <a:rPr lang="en-US" sz="1300" b="1" spc="400" kern="0" dirty="0">
+                <a:solidFill>
+                  <a:srgbClr val="A8895E"/>
+                </a:solidFill>
+                <a:latin typeface="Calibri" pitchFamily="34" charset="0"/>
+                <a:ea typeface="Calibri" pitchFamily="34" charset="-122"/>
+                <a:cs typeface="Calibri" pitchFamily="34" charset="-120"/>
+              </a:rPr>
+              <a:t>AT NOWN · 2026 EDUCATION</a:t>
+            </a:r>
+            <a:endParaRPr lang="en-US" sz="1300" dirty="0"/>
           </a:p>
         </p:txBody>
       </p:sp>

--- a/content/교육/2026-07-23_교육시스템_정본/시즈_오리엔테이션.pptx
+++ b/content/교육/2026-07-23_교육시스템_정본/시즈_오리엔테이션.pptx
@@ -1665,7 +1665,7 @@
           <a:p>
             <a:r>
               <a:rPr lang="en-US" dirty="0"/>
-              <a:t>현재와 이상향 사이의 간극 = '고객이 나를 찾아오게 만드는 것'. 이 강을 어떻게 건널까?</a:t>
+              <a:t>현재와 이상향, 그 사이 = 고객이 나를 찾아오게. (설명은 대표님)</a:t>
             </a:r>
             <a:endParaRPr lang="en-US" dirty="0"/>
           </a:p>
@@ -1753,7 +1753,7 @@
           <a:p>
             <a:r>
               <a:rPr lang="en-US" dirty="0"/>
-              <a:t>이상향은 한 번에 도달 불가. 초디부터 디딤돌(역경)을 하나씩 밟는 '과정'이 곧 성장. 이게 플레이어의 길.</a:t>
+              <a:t>한 번에 못 건넌다 — 디딤돌을 하나씩. (설명은 대표님)</a:t>
             </a:r>
             <a:endParaRPr lang="en-US" dirty="0"/>
           </a:p>
@@ -1841,7 +1841,7 @@
           <a:p>
             <a:r>
               <a:rPr lang="en-US" dirty="0"/>
-              <a:t>두 갈래. 윗길: 디딤돌→과정→도달. 아랫길: 이상향만 높이→건너뜀→좌절→타협→'미용=생계수단' 평범. 요즘 디딤돌을 잊고 이상향만 높다가 타협하는 걸 우리가 돌아보자는 취지. (여기서 대표님이 직접 풀어 설명)</a:t>
+              <a:t>윗길 디딤돌→과정→이상향 / 아랫길 이상향만 높이→건너뜀→타협. 취지 설명은 대표님이 직접.</a:t>
             </a:r>
             <a:endParaRPr lang="en-US" dirty="0"/>
           </a:p>
@@ -1929,7 +1929,7 @@
           <a:p>
             <a:r>
               <a:rPr lang="en-US" dirty="0"/>
-              <a:t>마무리 한 줄. 이상향은 방향, 디딤돌은 오늘 할 일. 여기서 시스템 설명으로 자연스럽게 넘어간다.</a:t>
+              <a:t>마무리 키워드. 설명은 대표님.</a:t>
             </a:r>
             <a:endParaRPr lang="en-US" dirty="0"/>
           </a:p>
@@ -2017,7 +2017,7 @@
           <a:p>
             <a:r>
               <a:rPr lang="en-US" dirty="0"/>
-              <a:t>핵심 선언: 판단 기준을 '머리를 할 수 있다(기술 완료)'에서 '디자이너로 우뚝 선다(유입·케어·브랜드)'로 옮긴다. 개편의 방향.</a:t>
+              <a:t>판단 기준: 머리를 할 수 있다 → 디자이너로 우뚝 선다. 설명은 대표님.</a:t>
             </a:r>
             <a:endParaRPr lang="en-US" dirty="0"/>
           </a:p>
@@ -2105,7 +2105,7 @@
           <a:p>
             <a:r>
               <a:rPr lang="en-US" dirty="0"/>
-              <a:t>유안·범진의 실제 성장 영상을 재생. (영상 파일/링크는 발표 전 삽입) — '너희도 이 길을 건널 수 있다'는 증거.</a:t>
+              <a:t>유안·범진 영상 재생 자리. (영상 파일/링크는 발표 전 삽입)</a:t>
             </a:r>
             <a:endParaRPr lang="en-US" dirty="0"/>
           </a:p>
@@ -13374,7 +13374,7 @@
                 <a:ea typeface="Calibri" pitchFamily="34" charset="-122"/>
                 <a:cs typeface="Calibri" pitchFamily="34" charset="-120"/>
               </a:rPr>
-              <a:t>NOW vs DREAM</a:t>
+              <a:t>NOW / DREAM</a:t>
             </a:r>
             <a:endParaRPr lang="en-US" sz="1000" dirty="0"/>
           </a:p>
@@ -13382,52 +13382,13 @@
       </p:sp>
       <p:sp>
         <p:nvSpPr>
-          <p:cNvPr id="5" name="Text 3"/>
-          <p:cNvSpPr/>
-          <p:nvPr/>
-        </p:nvSpPr>
-        <p:spPr>
-          <a:xfrm>
-            <a:off x="548640" y="1234440"/>
-            <a:ext cx="9144000" cy="274320"/>
-          </a:xfrm>
-          <a:prstGeom prst="rect">
-            <a:avLst/>
-          </a:prstGeom>
-          <a:noFill/>
-          <a:ln/>
-        </p:spPr>
-        <p:txBody>
-          <a:bodyPr wrap="square" rtlCol="0" anchor="ctr"/>
-          <a:lstStyle/>
-          <a:p>
-            <a:pPr indent="0" marL="0">
-              <a:buNone/>
-            </a:pPr>
-            <a:r>
-              <a:rPr lang="en-US" sz="1150" b="1" spc="300" kern="0" dirty="0">
-                <a:solidFill>
-                  <a:srgbClr val="A8895E"/>
-                </a:solidFill>
-                <a:latin typeface="Calibri" pitchFamily="34" charset="0"/>
-                <a:ea typeface="Calibri" pitchFamily="34" charset="-122"/>
-                <a:cs typeface="Calibri" pitchFamily="34" charset="-120"/>
-              </a:rPr>
-              <a:t>지금의 나 · 그리고 되고 싶은 나</a:t>
-            </a:r>
-            <a:endParaRPr lang="en-US" sz="1150" dirty="0"/>
-          </a:p>
-        </p:txBody>
-      </p:sp>
-      <p:sp>
-        <p:nvSpPr>
-          <p:cNvPr id="6" name="Shape 4"/>
-          <p:cNvSpPr/>
-          <p:nvPr/>
-        </p:nvSpPr>
-        <p:spPr>
-          <a:xfrm>
-            <a:off x="822960" y="3200400"/>
+          <p:cNvPr id="5" name="Shape 3"/>
+          <p:cNvSpPr/>
+          <p:nvPr/>
+        </p:nvSpPr>
+        <p:spPr>
+          <a:xfrm>
+            <a:off x="822960" y="2834640"/>
             <a:ext cx="1828800" cy="1828800"/>
           </a:xfrm>
           <a:prstGeom prst="ellipse">
@@ -13446,13 +13407,13 @@
       </p:sp>
       <p:sp>
         <p:nvSpPr>
-          <p:cNvPr id="7" name="Text 5"/>
-          <p:cNvSpPr/>
-          <p:nvPr/>
-        </p:nvSpPr>
-        <p:spPr>
-          <a:xfrm>
-            <a:off x="822960" y="3200400"/>
+          <p:cNvPr id="6" name="Text 4"/>
+          <p:cNvSpPr/>
+          <p:nvPr/>
+        </p:nvSpPr>
+        <p:spPr>
+          <a:xfrm>
+            <a:off x="822960" y="2834640"/>
             <a:ext cx="1828800" cy="1828800"/>
           </a:xfrm>
           <a:prstGeom prst="rect">
@@ -13469,7 +13430,7 @@
               <a:buNone/>
             </a:pPr>
             <a:r>
-              <a:rPr lang="en-US" sz="1600" b="1" dirty="0">
+              <a:rPr lang="en-US" sz="1700" b="1" dirty="0">
                 <a:solidFill>
                   <a:srgbClr val="1A1815"/>
                 </a:solidFill>
@@ -13479,36 +13440,19 @@
               </a:rPr>
               <a:t>지금의 나</a:t>
             </a:r>
-            <a:endParaRPr lang="en-US" sz="1600" dirty="0"/>
-          </a:p>
-          <a:p>
-            <a:pPr algn="ctr" indent="0" marL="0">
-              <a:buNone/>
-            </a:pPr>
-            <a:r>
-              <a:rPr lang="en-US" sz="1600" b="1" dirty="0">
-                <a:solidFill>
-                  <a:srgbClr val="1A1815"/>
-                </a:solidFill>
-                <a:latin typeface="Calibri" pitchFamily="34" charset="0"/>
-                <a:ea typeface="Calibri" pitchFamily="34" charset="-122"/>
-                <a:cs typeface="Calibri" pitchFamily="34" charset="-120"/>
-              </a:rPr>
-              <a:t>(초급)</a:t>
-            </a:r>
-            <a:endParaRPr lang="en-US" sz="1600" dirty="0"/>
-          </a:p>
-        </p:txBody>
-      </p:sp>
-      <p:sp>
-        <p:nvSpPr>
-          <p:cNvPr id="8" name="Shape 6"/>
-          <p:cNvSpPr/>
-          <p:nvPr/>
-        </p:nvSpPr>
-        <p:spPr>
-          <a:xfrm>
-            <a:off x="9537192" y="3200400"/>
+            <a:endParaRPr lang="en-US" sz="1700" dirty="0"/>
+          </a:p>
+        </p:txBody>
+      </p:sp>
+      <p:sp>
+        <p:nvSpPr>
+          <p:cNvPr id="7" name="Shape 5"/>
+          <p:cNvSpPr/>
+          <p:nvPr/>
+        </p:nvSpPr>
+        <p:spPr>
+          <a:xfrm>
+            <a:off x="9537192" y="2834640"/>
             <a:ext cx="1828800" cy="1828800"/>
           </a:xfrm>
           <a:prstGeom prst="ellipse">
@@ -13522,13 +13466,13 @@
       </p:sp>
       <p:sp>
         <p:nvSpPr>
-          <p:cNvPr id="9" name="Text 7"/>
-          <p:cNvSpPr/>
-          <p:nvPr/>
-        </p:nvSpPr>
-        <p:spPr>
-          <a:xfrm>
-            <a:off x="9537192" y="3200400"/>
+          <p:cNvPr id="8" name="Text 6"/>
+          <p:cNvSpPr/>
+          <p:nvPr/>
+        </p:nvSpPr>
+        <p:spPr>
+          <a:xfrm>
+            <a:off x="9537192" y="2834640"/>
             <a:ext cx="1828800" cy="1828800"/>
           </a:xfrm>
           <a:prstGeom prst="rect">
@@ -13545,7 +13489,7 @@
               <a:buNone/>
             </a:pPr>
             <a:r>
-              <a:rPr lang="en-US" sz="1800" b="1" dirty="0">
+              <a:rPr lang="en-US" sz="2200" b="1" dirty="0">
                 <a:solidFill>
                   <a:srgbClr val="FFFFFF"/>
                 </a:solidFill>
@@ -13553,56 +13497,22 @@
                 <a:ea typeface="Cambria" pitchFamily="34" charset="-122"/>
                 <a:cs typeface="Cambria" pitchFamily="34" charset="-120"/>
               </a:rPr>
-              <a:t>되고 싶은</a:t>
-            </a:r>
-            <a:endParaRPr lang="en-US" sz="1800" dirty="0"/>
-          </a:p>
-          <a:p>
-            <a:pPr algn="ctr" indent="0" marL="0">
-              <a:buNone/>
-            </a:pPr>
-            <a:r>
-              <a:rPr lang="en-US" sz="1800" b="1" dirty="0">
-                <a:solidFill>
-                  <a:srgbClr val="FFFFFF"/>
-                </a:solidFill>
-                <a:latin typeface="Cambria" pitchFamily="34" charset="0"/>
-                <a:ea typeface="Cambria" pitchFamily="34" charset="-122"/>
-                <a:cs typeface="Cambria" pitchFamily="34" charset="-120"/>
-              </a:rPr>
-              <a:t>디자이너</a:t>
-            </a:r>
-            <a:endParaRPr lang="en-US" sz="1800" dirty="0"/>
-          </a:p>
-          <a:p>
-            <a:pPr algn="ctr" indent="0" marL="0">
-              <a:buNone/>
-            </a:pPr>
-            <a:r>
-              <a:rPr lang="en-US" sz="1800" b="1" dirty="0">
-                <a:solidFill>
-                  <a:srgbClr val="FFFFFF"/>
-                </a:solidFill>
-                <a:latin typeface="Cambria" pitchFamily="34" charset="0"/>
-                <a:ea typeface="Cambria" pitchFamily="34" charset="-122"/>
-                <a:cs typeface="Cambria" pitchFamily="34" charset="-120"/>
-              </a:rPr>
-              <a:t>(이상향)</a:t>
-            </a:r>
-            <a:endParaRPr lang="en-US" sz="1800" dirty="0"/>
-          </a:p>
-        </p:txBody>
-      </p:sp>
-      <p:sp>
-        <p:nvSpPr>
-          <p:cNvPr id="10" name="Shape 8"/>
-          <p:cNvSpPr/>
-          <p:nvPr/>
-        </p:nvSpPr>
-        <p:spPr>
-          <a:xfrm>
-            <a:off x="2834640" y="3520440"/>
-            <a:ext cx="6519672" cy="1188720"/>
+              <a:t>이상향</a:t>
+            </a:r>
+            <a:endParaRPr lang="en-US" sz="2200" dirty="0"/>
+          </a:p>
+        </p:txBody>
+      </p:sp>
+      <p:sp>
+        <p:nvSpPr>
+          <p:cNvPr id="9" name="Shape 7"/>
+          <p:cNvSpPr/>
+          <p:nvPr/>
+        </p:nvSpPr>
+        <p:spPr>
+          <a:xfrm>
+            <a:off x="2834640" y="3200400"/>
+            <a:ext cx="6519672" cy="1097280"/>
           </a:xfrm>
           <a:prstGeom prst="rect">
             <a:avLst/>
@@ -13615,14 +13525,14 @@
       </p:sp>
       <p:sp>
         <p:nvSpPr>
-          <p:cNvPr id="11" name="Text 9"/>
-          <p:cNvSpPr/>
-          <p:nvPr/>
-        </p:nvSpPr>
-        <p:spPr>
-          <a:xfrm>
-            <a:off x="2834640" y="3520440"/>
-            <a:ext cx="6519672" cy="1188720"/>
+          <p:cNvPr id="10" name="Text 8"/>
+          <p:cNvSpPr/>
+          <p:nvPr/>
+        </p:nvSpPr>
+        <p:spPr>
+          <a:xfrm>
+            <a:off x="2834640" y="3200400"/>
+            <a:ext cx="6519672" cy="1097280"/>
           </a:xfrm>
           <a:prstGeom prst="rect">
             <a:avLst/>
@@ -13638,7 +13548,7 @@
               <a:buNone/>
             </a:pPr>
             <a:r>
-              <a:rPr lang="en-US" sz="1600" b="1" dirty="0">
+              <a:rPr lang="en-US" sz="1800" b="1" dirty="0">
                 <a:solidFill>
                   <a:srgbClr val="8A7F66"/>
                 </a:solidFill>
@@ -13646,65 +13556,9 @@
                 <a:ea typeface="Calibri" pitchFamily="34" charset="-122"/>
                 <a:cs typeface="Calibri" pitchFamily="34" charset="-120"/>
               </a:rPr>
-              <a:t>고객이 나를 찾아오게 만들어야</a:t>
-            </a:r>
-            <a:endParaRPr lang="en-US" sz="1600" dirty="0"/>
-          </a:p>
-          <a:p>
-            <a:pPr algn="ctr" indent="0" marL="0">
-              <a:buNone/>
-            </a:pPr>
-            <a:r>
-              <a:rPr lang="en-US" sz="1600" b="1" dirty="0">
-                <a:solidFill>
-                  <a:srgbClr val="8A7F66"/>
-                </a:solidFill>
-                <a:latin typeface="Calibri" pitchFamily="34" charset="0"/>
-                <a:ea typeface="Calibri" pitchFamily="34" charset="-122"/>
-                <a:cs typeface="Calibri" pitchFamily="34" charset="-120"/>
-              </a:rPr>
-              <a:t>건널 수 있는 강</a:t>
-            </a:r>
-            <a:endParaRPr lang="en-US" sz="1600" dirty="0"/>
-          </a:p>
-        </p:txBody>
-      </p:sp>
-      <p:sp>
-        <p:nvSpPr>
-          <p:cNvPr id="12" name="Text 10"/>
-          <p:cNvSpPr/>
-          <p:nvPr/>
-        </p:nvSpPr>
-        <p:spPr>
-          <a:xfrm>
-            <a:off x="548640" y="5669280"/>
-            <a:ext cx="10972800" cy="365760"/>
-          </a:xfrm>
-          <a:prstGeom prst="rect">
-            <a:avLst/>
-          </a:prstGeom>
-          <a:noFill/>
-          <a:ln/>
-        </p:spPr>
-        <p:txBody>
-          <a:bodyPr wrap="square" rtlCol="0" anchor="ctr"/>
-          <a:lstStyle/>
-          <a:p>
-            <a:pPr algn="ctr" indent="0" marL="0">
-              <a:buNone/>
-            </a:pPr>
-            <a:r>
-              <a:rPr lang="en-US" sz="1350" dirty="0">
-                <a:solidFill>
-                  <a:srgbClr val="555555"/>
-                </a:solidFill>
-                <a:latin typeface="Calibri" pitchFamily="34" charset="0"/>
-                <a:ea typeface="Calibri" pitchFamily="34" charset="-122"/>
-                <a:cs typeface="Calibri" pitchFamily="34" charset="-120"/>
-              </a:rPr>
-              <a:t>이상향과 지금 사이엔 '강'이 있다 — 손님이 나를 찾아오게 만드는 것.</a:t>
-            </a:r>
-            <a:endParaRPr lang="en-US" sz="1350" dirty="0"/>
+              <a:t>고객이 나를 찾아오게</a:t>
+            </a:r>
+            <a:endParaRPr lang="en-US" sz="1800" dirty="0"/>
           </a:p>
         </p:txBody>
       </p:sp>
@@ -13863,52 +13717,13 @@
       </p:sp>
       <p:sp>
         <p:nvSpPr>
-          <p:cNvPr id="5" name="Text 3"/>
-          <p:cNvSpPr/>
-          <p:nvPr/>
-        </p:nvSpPr>
-        <p:spPr>
-          <a:xfrm>
-            <a:off x="548640" y="1234440"/>
-            <a:ext cx="9144000" cy="274320"/>
-          </a:xfrm>
-          <a:prstGeom prst="rect">
-            <a:avLst/>
-          </a:prstGeom>
-          <a:noFill/>
-          <a:ln/>
-        </p:spPr>
-        <p:txBody>
-          <a:bodyPr wrap="square" rtlCol="0" anchor="ctr"/>
-          <a:lstStyle/>
-          <a:p>
-            <a:pPr indent="0" marL="0">
-              <a:buNone/>
-            </a:pPr>
-            <a:r>
-              <a:rPr lang="en-US" sz="1150" b="1" spc="300" kern="0" dirty="0">
-                <a:solidFill>
-                  <a:srgbClr val="A8895E"/>
-                </a:solidFill>
-                <a:latin typeface="Calibri" pitchFamily="34" charset="0"/>
-                <a:ea typeface="Calibri" pitchFamily="34" charset="-122"/>
-                <a:cs typeface="Calibri" pitchFamily="34" charset="-120"/>
-              </a:rPr>
-              <a:t>한 번에 못 건넌다 · 디딤돌을 하나씩</a:t>
-            </a:r>
-            <a:endParaRPr lang="en-US" sz="1150" dirty="0"/>
-          </a:p>
-        </p:txBody>
-      </p:sp>
-      <p:sp>
-        <p:nvSpPr>
-          <p:cNvPr id="6" name="Shape 4"/>
-          <p:cNvSpPr/>
-          <p:nvPr/>
-        </p:nvSpPr>
-        <p:spPr>
-          <a:xfrm>
-            <a:off x="548640" y="3200400"/>
+          <p:cNvPr id="5" name="Shape 3"/>
+          <p:cNvSpPr/>
+          <p:nvPr/>
+        </p:nvSpPr>
+        <p:spPr>
+          <a:xfrm>
+            <a:off x="548640" y="2834640"/>
             <a:ext cx="1828800" cy="1828800"/>
           </a:xfrm>
           <a:prstGeom prst="ellipse">
@@ -13927,13 +13742,13 @@
       </p:sp>
       <p:sp>
         <p:nvSpPr>
-          <p:cNvPr id="7" name="Text 5"/>
-          <p:cNvSpPr/>
-          <p:nvPr/>
-        </p:nvSpPr>
-        <p:spPr>
-          <a:xfrm>
-            <a:off x="548640" y="3200400"/>
+          <p:cNvPr id="6" name="Text 4"/>
+          <p:cNvSpPr/>
+          <p:nvPr/>
+        </p:nvSpPr>
+        <p:spPr>
+          <a:xfrm>
+            <a:off x="548640" y="2834640"/>
             <a:ext cx="1828800" cy="1828800"/>
           </a:xfrm>
           <a:prstGeom prst="rect">
@@ -13966,13 +13781,13 @@
       </p:sp>
       <p:sp>
         <p:nvSpPr>
-          <p:cNvPr id="8" name="Shape 6"/>
-          <p:cNvSpPr/>
-          <p:nvPr/>
-        </p:nvSpPr>
-        <p:spPr>
-          <a:xfrm>
-            <a:off x="9811512" y="3200400"/>
+          <p:cNvPr id="7" name="Shape 5"/>
+          <p:cNvSpPr/>
+          <p:nvPr/>
+        </p:nvSpPr>
+        <p:spPr>
+          <a:xfrm>
+            <a:off x="9811512" y="2834640"/>
             <a:ext cx="1828800" cy="1828800"/>
           </a:xfrm>
           <a:prstGeom prst="ellipse">
@@ -13986,13 +13801,13 @@
       </p:sp>
       <p:sp>
         <p:nvSpPr>
-          <p:cNvPr id="9" name="Text 7"/>
-          <p:cNvSpPr/>
-          <p:nvPr/>
-        </p:nvSpPr>
-        <p:spPr>
-          <a:xfrm>
-            <a:off x="9811512" y="3200400"/>
+          <p:cNvPr id="8" name="Text 6"/>
+          <p:cNvSpPr/>
+          <p:nvPr/>
+        </p:nvSpPr>
+        <p:spPr>
+          <a:xfrm>
+            <a:off x="9811512" y="2834640"/>
             <a:ext cx="1828800" cy="1828800"/>
           </a:xfrm>
           <a:prstGeom prst="rect">
@@ -14025,13 +13840,13 @@
       </p:sp>
       <p:sp>
         <p:nvSpPr>
-          <p:cNvPr id="10" name="Shape 8"/>
-          <p:cNvSpPr/>
-          <p:nvPr/>
-        </p:nvSpPr>
-        <p:spPr>
-          <a:xfrm>
-            <a:off x="2697480" y="3497580"/>
+          <p:cNvPr id="9" name="Shape 7"/>
+          <p:cNvSpPr/>
+          <p:nvPr/>
+        </p:nvSpPr>
+        <p:spPr>
+          <a:xfrm>
+            <a:off x="2697480" y="3131820"/>
             <a:ext cx="868680" cy="868680"/>
           </a:xfrm>
           <a:prstGeom prst="ellipse">
@@ -14050,13 +13865,13 @@
       </p:sp>
       <p:sp>
         <p:nvSpPr>
-          <p:cNvPr id="11" name="Text 9"/>
-          <p:cNvSpPr/>
-          <p:nvPr/>
-        </p:nvSpPr>
-        <p:spPr>
-          <a:xfrm>
-            <a:off x="2697480" y="3497580"/>
+          <p:cNvPr id="10" name="Text 8"/>
+          <p:cNvSpPr/>
+          <p:nvPr/>
+        </p:nvSpPr>
+        <p:spPr>
+          <a:xfrm>
+            <a:off x="2697480" y="3131820"/>
             <a:ext cx="868680" cy="868680"/>
           </a:xfrm>
           <a:prstGeom prst="rect">
@@ -14089,13 +13904,13 @@
       </p:sp>
       <p:sp>
         <p:nvSpPr>
-          <p:cNvPr id="12" name="Shape 10"/>
-          <p:cNvSpPr/>
-          <p:nvPr/>
-        </p:nvSpPr>
-        <p:spPr>
-          <a:xfrm>
-            <a:off x="4178808" y="4137660"/>
+          <p:cNvPr id="11" name="Shape 9"/>
+          <p:cNvSpPr/>
+          <p:nvPr/>
+        </p:nvSpPr>
+        <p:spPr>
+          <a:xfrm>
+            <a:off x="4178808" y="3771900"/>
             <a:ext cx="868680" cy="868680"/>
           </a:xfrm>
           <a:prstGeom prst="ellipse">
@@ -14114,13 +13929,13 @@
       </p:sp>
       <p:sp>
         <p:nvSpPr>
-          <p:cNvPr id="13" name="Text 11"/>
-          <p:cNvSpPr/>
-          <p:nvPr/>
-        </p:nvSpPr>
-        <p:spPr>
-          <a:xfrm>
-            <a:off x="4178808" y="4137660"/>
+          <p:cNvPr id="12" name="Text 10"/>
+          <p:cNvSpPr/>
+          <p:nvPr/>
+        </p:nvSpPr>
+        <p:spPr>
+          <a:xfrm>
+            <a:off x="4178808" y="3771900"/>
             <a:ext cx="868680" cy="868680"/>
           </a:xfrm>
           <a:prstGeom prst="rect">
@@ -14153,13 +13968,13 @@
       </p:sp>
       <p:sp>
         <p:nvSpPr>
-          <p:cNvPr id="14" name="Shape 12"/>
-          <p:cNvSpPr/>
-          <p:nvPr/>
-        </p:nvSpPr>
-        <p:spPr>
-          <a:xfrm>
-            <a:off x="5660136" y="3497580"/>
+          <p:cNvPr id="13" name="Shape 11"/>
+          <p:cNvSpPr/>
+          <p:nvPr/>
+        </p:nvSpPr>
+        <p:spPr>
+          <a:xfrm>
+            <a:off x="5660136" y="3131820"/>
             <a:ext cx="868680" cy="868680"/>
           </a:xfrm>
           <a:prstGeom prst="ellipse">
@@ -14178,13 +13993,13 @@
       </p:sp>
       <p:sp>
         <p:nvSpPr>
-          <p:cNvPr id="15" name="Text 13"/>
-          <p:cNvSpPr/>
-          <p:nvPr/>
-        </p:nvSpPr>
-        <p:spPr>
-          <a:xfrm>
-            <a:off x="5660136" y="3497580"/>
+          <p:cNvPr id="14" name="Text 12"/>
+          <p:cNvSpPr/>
+          <p:nvPr/>
+        </p:nvSpPr>
+        <p:spPr>
+          <a:xfrm>
+            <a:off x="5660136" y="3131820"/>
             <a:ext cx="868680" cy="868680"/>
           </a:xfrm>
           <a:prstGeom prst="rect">
@@ -14217,13 +14032,13 @@
       </p:sp>
       <p:sp>
         <p:nvSpPr>
-          <p:cNvPr id="16" name="Shape 14"/>
-          <p:cNvSpPr/>
-          <p:nvPr/>
-        </p:nvSpPr>
-        <p:spPr>
-          <a:xfrm>
-            <a:off x="7141464" y="4137660"/>
+          <p:cNvPr id="15" name="Shape 13"/>
+          <p:cNvSpPr/>
+          <p:nvPr/>
+        </p:nvSpPr>
+        <p:spPr>
+          <a:xfrm>
+            <a:off x="7141464" y="3771900"/>
             <a:ext cx="868680" cy="868680"/>
           </a:xfrm>
           <a:prstGeom prst="ellipse">
@@ -14242,13 +14057,13 @@
       </p:sp>
       <p:sp>
         <p:nvSpPr>
-          <p:cNvPr id="17" name="Text 15"/>
-          <p:cNvSpPr/>
-          <p:nvPr/>
-        </p:nvSpPr>
-        <p:spPr>
-          <a:xfrm>
-            <a:off x="7141464" y="4137660"/>
+          <p:cNvPr id="16" name="Text 14"/>
+          <p:cNvSpPr/>
+          <p:nvPr/>
+        </p:nvSpPr>
+        <p:spPr>
+          <a:xfrm>
+            <a:off x="7141464" y="3771900"/>
             <a:ext cx="868680" cy="868680"/>
           </a:xfrm>
           <a:prstGeom prst="rect">
@@ -14281,13 +14096,13 @@
       </p:sp>
       <p:sp>
         <p:nvSpPr>
-          <p:cNvPr id="18" name="Shape 16"/>
-          <p:cNvSpPr/>
-          <p:nvPr/>
-        </p:nvSpPr>
-        <p:spPr>
-          <a:xfrm>
-            <a:off x="8622792" y="3497580"/>
+          <p:cNvPr id="17" name="Shape 15"/>
+          <p:cNvSpPr/>
+          <p:nvPr/>
+        </p:nvSpPr>
+        <p:spPr>
+          <a:xfrm>
+            <a:off x="8622792" y="3131820"/>
             <a:ext cx="868680" cy="868680"/>
           </a:xfrm>
           <a:prstGeom prst="ellipse">
@@ -14306,13 +14121,13 @@
       </p:sp>
       <p:sp>
         <p:nvSpPr>
-          <p:cNvPr id="19" name="Text 17"/>
-          <p:cNvSpPr/>
-          <p:nvPr/>
-        </p:nvSpPr>
-        <p:spPr>
-          <a:xfrm>
-            <a:off x="8622792" y="3497580"/>
+          <p:cNvPr id="18" name="Text 16"/>
+          <p:cNvSpPr/>
+          <p:nvPr/>
+        </p:nvSpPr>
+        <p:spPr>
+          <a:xfrm>
+            <a:off x="8622792" y="3131820"/>
             <a:ext cx="868680" cy="868680"/>
           </a:xfrm>
           <a:prstGeom prst="rect">
@@ -14340,45 +14155,6 @@
               <a:t>도약</a:t>
             </a:r>
             <a:endParaRPr lang="en-US" sz="1200" dirty="0"/>
-          </a:p>
-        </p:txBody>
-      </p:sp>
-      <p:sp>
-        <p:nvSpPr>
-          <p:cNvPr id="20" name="Text 18"/>
-          <p:cNvSpPr/>
-          <p:nvPr/>
-        </p:nvSpPr>
-        <p:spPr>
-          <a:xfrm>
-            <a:off x="548640" y="5669280"/>
-            <a:ext cx="10972800" cy="365760"/>
-          </a:xfrm>
-          <a:prstGeom prst="rect">
-            <a:avLst/>
-          </a:prstGeom>
-          <a:noFill/>
-          <a:ln/>
-        </p:spPr>
-        <p:txBody>
-          <a:bodyPr wrap="square" rtlCol="0" anchor="ctr"/>
-          <a:lstStyle/>
-          <a:p>
-            <a:pPr algn="ctr" indent="0" marL="0">
-              <a:buNone/>
-            </a:pPr>
-            <a:r>
-              <a:rPr lang="en-US" sz="1350" dirty="0">
-                <a:solidFill>
-                  <a:srgbClr val="555555"/>
-                </a:solidFill>
-                <a:latin typeface="Calibri" pitchFamily="34" charset="0"/>
-                <a:ea typeface="Calibri" pitchFamily="34" charset="-122"/>
-                <a:cs typeface="Calibri" pitchFamily="34" charset="-120"/>
-              </a:rPr>
-              <a:t>이상향은 한 걸음에 못 간다 — 초디부터 디딤돌(역경·과정)을 하나씩 밟아 건넌다.</a:t>
-            </a:r>
-            <a:endParaRPr lang="en-US" sz="1350" dirty="0"/>
           </a:p>
         </p:txBody>
       </p:sp>
@@ -14543,45 +14319,6 @@
         </p:nvSpPr>
         <p:spPr>
           <a:xfrm>
-            <a:off x="548640" y="1234440"/>
-            <a:ext cx="9144000" cy="274320"/>
-          </a:xfrm>
-          <a:prstGeom prst="rect">
-            <a:avLst/>
-          </a:prstGeom>
-          <a:noFill/>
-          <a:ln/>
-        </p:spPr>
-        <p:txBody>
-          <a:bodyPr wrap="square" rtlCol="0" anchor="ctr"/>
-          <a:lstStyle/>
-          <a:p>
-            <a:pPr indent="0" marL="0">
-              <a:buNone/>
-            </a:pPr>
-            <a:r>
-              <a:rPr lang="en-US" sz="1150" b="1" spc="300" kern="0" dirty="0">
-                <a:solidFill>
-                  <a:srgbClr val="A8895E"/>
-                </a:solidFill>
-                <a:latin typeface="Calibri" pitchFamily="34" charset="0"/>
-                <a:ea typeface="Calibri" pitchFamily="34" charset="-122"/>
-                <a:cs typeface="Calibri" pitchFamily="34" charset="-120"/>
-              </a:rPr>
-              <a:t>두 갈래 길</a:t>
-            </a:r>
-            <a:endParaRPr lang="en-US" sz="1150" dirty="0"/>
-          </a:p>
-        </p:txBody>
-      </p:sp>
-      <p:sp>
-        <p:nvSpPr>
-          <p:cNvPr id="6" name="Text 4"/>
-          <p:cNvSpPr/>
-          <p:nvPr/>
-        </p:nvSpPr>
-        <p:spPr>
-          <a:xfrm>
             <a:off x="530352" y="1463040"/>
             <a:ext cx="10515600" cy="822960"/>
           </a:xfrm>
@@ -14607,7 +14344,7 @@
                 <a:ea typeface="Cambria" pitchFamily="34" charset="-122"/>
                 <a:cs typeface="Cambria" pitchFamily="34" charset="-120"/>
               </a:rPr>
-              <a:t>디딤돌이냐, 타협이냐</a:t>
+              <a:t>두 갈래</a:t>
             </a:r>
             <a:endParaRPr lang="en-US" sz="4000" dirty="0"/>
           </a:p>
@@ -14615,18 +14352,18 @@
       </p:sp>
       <p:sp>
         <p:nvSpPr>
-          <p:cNvPr id="7" name="Shape 5"/>
-          <p:cNvSpPr/>
-          <p:nvPr/>
-        </p:nvSpPr>
-        <p:spPr>
-          <a:xfrm>
-            <a:off x="548640" y="2468880"/>
-            <a:ext cx="11091672" cy="1417320"/>
+          <p:cNvPr id="6" name="Shape 4"/>
+          <p:cNvSpPr/>
+          <p:nvPr/>
+        </p:nvSpPr>
+        <p:spPr>
+          <a:xfrm>
+            <a:off x="548640" y="2651760"/>
+            <a:ext cx="11091672" cy="1280160"/>
           </a:xfrm>
           <a:prstGeom prst="roundRect">
             <a:avLst>
-              <a:gd name="adj" fmla="val 7742"/>
+              <a:gd name="adj" fmla="val 8571"/>
             </a:avLst>
           </a:prstGeom>
           <a:solidFill>
@@ -14642,14 +14379,14 @@
       </p:sp>
       <p:sp>
         <p:nvSpPr>
-          <p:cNvPr id="8" name="Text 6"/>
-          <p:cNvSpPr/>
-          <p:nvPr/>
-        </p:nvSpPr>
-        <p:spPr>
-          <a:xfrm>
-            <a:off x="777240" y="2468880"/>
-            <a:ext cx="548640" cy="1417320"/>
+          <p:cNvPr id="7" name="Text 5"/>
+          <p:cNvSpPr/>
+          <p:nvPr/>
+        </p:nvSpPr>
+        <p:spPr>
+          <a:xfrm>
+            <a:off x="548640" y="2651760"/>
+            <a:ext cx="11091672" cy="1280160"/>
           </a:xfrm>
           <a:prstGeom prst="rect">
             <a:avLst/>
@@ -14665,140 +14402,62 @@
               <a:buNone/>
             </a:pPr>
             <a:r>
-              <a:rPr lang="en-US" sz="2600" b="1" dirty="0">
-                <a:solidFill>
-                  <a:srgbClr val="A8895E"/>
+              <a:rPr lang="en-US" sz="3000" b="1" dirty="0">
+                <a:solidFill>
+                  <a:srgbClr val="1A1815"/>
                 </a:solidFill>
                 <a:latin typeface="Cambria" pitchFamily="34" charset="0"/>
                 <a:ea typeface="Cambria" pitchFamily="34" charset="-122"/>
                 <a:cs typeface="Cambria" pitchFamily="34" charset="-120"/>
               </a:rPr>
-              <a:t>○</a:t>
-            </a:r>
-            <a:endParaRPr lang="en-US" sz="2600" dirty="0"/>
-          </a:p>
-        </p:txBody>
-      </p:sp>
-      <p:sp>
-        <p:nvSpPr>
-          <p:cNvPr id="9" name="Text 7"/>
-          <p:cNvSpPr/>
-          <p:nvPr/>
-        </p:nvSpPr>
-        <p:spPr>
-          <a:xfrm>
-            <a:off x="1371600" y="2651760"/>
-            <a:ext cx="10058400" cy="457200"/>
-          </a:xfrm>
-          <a:prstGeom prst="rect">
-            <a:avLst/>
-          </a:prstGeom>
-          <a:noFill/>
-          <a:ln/>
-        </p:spPr>
-        <p:txBody>
-          <a:bodyPr wrap="square" rtlCol="0" anchor="ctr"/>
-          <a:lstStyle/>
-          <a:p>
-            <a:pPr indent="0" marL="0">
-              <a:buNone/>
-            </a:pPr>
-            <a:r>
-              <a:rPr lang="en-US" sz="1600" b="1" dirty="0">
-                <a:solidFill>
-                  <a:srgbClr val="1A1815"/>
-                </a:solidFill>
-                <a:latin typeface="Calibri" pitchFamily="34" charset="0"/>
-                <a:ea typeface="Calibri" pitchFamily="34" charset="-122"/>
-                <a:cs typeface="Calibri" pitchFamily="34" charset="-120"/>
-              </a:rPr>
-              <a:t>디딤돌을 하나씩 밟는다  </a:t>
-            </a:r>
-            <a:pPr indent="0" marL="0">
-              <a:buNone/>
-            </a:pPr>
-            <a:r>
-              <a:rPr lang="en-US" sz="1600" dirty="0">
-                <a:solidFill>
-                  <a:srgbClr val="555555"/>
-                </a:solidFill>
-                <a:latin typeface="Calibri" pitchFamily="34" charset="0"/>
-                <a:ea typeface="Calibri" pitchFamily="34" charset="-122"/>
-                <a:cs typeface="Calibri" pitchFamily="34" charset="-120"/>
-              </a:rPr>
-              <a:t>→ 역경·과정을 지난다 → </a:t>
-            </a:r>
-            <a:pPr indent="0" marL="0">
-              <a:buNone/>
-            </a:pPr>
-            <a:r>
-              <a:rPr lang="en-US" sz="1600" b="1" dirty="0">
+              <a:t>디딤돌  </a:t>
+            </a:r>
+            <a:pPr algn="ctr" indent="0" marL="0">
+              <a:buNone/>
+            </a:pPr>
+            <a:r>
+              <a:rPr lang="en-US" sz="3000" dirty="0">
+                <a:solidFill>
+                  <a:srgbClr val="8A7F66"/>
+                </a:solidFill>
+                <a:latin typeface="Cambria" pitchFamily="34" charset="0"/>
+                <a:ea typeface="Cambria" pitchFamily="34" charset="-122"/>
+                <a:cs typeface="Cambria" pitchFamily="34" charset="-120"/>
+              </a:rPr>
+              <a:t>→ 과정 → </a:t>
+            </a:r>
+            <a:pPr algn="ctr" indent="0" marL="0">
+              <a:buNone/>
+            </a:pPr>
+            <a:r>
+              <a:rPr lang="en-US" sz="3000" b="1" dirty="0">
                 <a:solidFill>
                   <a:srgbClr val="A8895E"/>
                 </a:solidFill>
-                <a:latin typeface="Calibri" pitchFamily="34" charset="0"/>
-                <a:ea typeface="Calibri" pitchFamily="34" charset="-122"/>
-                <a:cs typeface="Calibri" pitchFamily="34" charset="-120"/>
-              </a:rPr>
-              <a:t>이상향에 닿는다</a:t>
-            </a:r>
-            <a:endParaRPr lang="en-US" sz="1600" dirty="0"/>
-          </a:p>
-        </p:txBody>
-      </p:sp>
-      <p:sp>
-        <p:nvSpPr>
-          <p:cNvPr id="10" name="Text 8"/>
-          <p:cNvSpPr/>
-          <p:nvPr/>
-        </p:nvSpPr>
-        <p:spPr>
-          <a:xfrm>
-            <a:off x="1371600" y="3200400"/>
-            <a:ext cx="10058400" cy="457200"/>
-          </a:xfrm>
-          <a:prstGeom prst="rect">
-            <a:avLst/>
-          </a:prstGeom>
-          <a:noFill/>
-          <a:ln/>
-        </p:spPr>
-        <p:txBody>
-          <a:bodyPr wrap="square" rtlCol="0" anchor="ctr"/>
-          <a:lstStyle/>
-          <a:p>
-            <a:pPr indent="0" marL="0">
-              <a:buNone/>
-            </a:pPr>
-            <a:r>
-              <a:rPr lang="en-US" sz="1300" dirty="0">
-                <a:solidFill>
-                  <a:srgbClr val="6A655C"/>
-                </a:solidFill>
-                <a:latin typeface="Calibri" pitchFamily="34" charset="0"/>
-                <a:ea typeface="Calibri" pitchFamily="34" charset="-122"/>
-                <a:cs typeface="Calibri" pitchFamily="34" charset="-120"/>
-              </a:rPr>
-              <a:t>느려 보여도, 결국 원하는 디자이너가 되는 유일한 길</a:t>
-            </a:r>
-            <a:endParaRPr lang="en-US" sz="1300" dirty="0"/>
-          </a:p>
-        </p:txBody>
-      </p:sp>
-      <p:sp>
-        <p:nvSpPr>
-          <p:cNvPr id="11" name="Shape 9"/>
-          <p:cNvSpPr/>
-          <p:nvPr/>
-        </p:nvSpPr>
-        <p:spPr>
-          <a:xfrm>
-            <a:off x="548640" y="4114800"/>
-            <a:ext cx="11091672" cy="1600200"/>
+                <a:latin typeface="Cambria" pitchFamily="34" charset="0"/>
+                <a:ea typeface="Cambria" pitchFamily="34" charset="-122"/>
+                <a:cs typeface="Cambria" pitchFamily="34" charset="-120"/>
+              </a:rPr>
+              <a:t>이상향</a:t>
+            </a:r>
+            <a:endParaRPr lang="en-US" sz="3000" dirty="0"/>
+          </a:p>
+        </p:txBody>
+      </p:sp>
+      <p:sp>
+        <p:nvSpPr>
+          <p:cNvPr id="8" name="Shape 6"/>
+          <p:cNvSpPr/>
+          <p:nvPr/>
+        </p:nvSpPr>
+        <p:spPr>
+          <a:xfrm>
+            <a:off x="548640" y="4160520"/>
+            <a:ext cx="11091672" cy="1280160"/>
           </a:xfrm>
           <a:prstGeom prst="roundRect">
             <a:avLst>
-              <a:gd name="adj" fmla="val 6857"/>
+              <a:gd name="adj" fmla="val 8571"/>
             </a:avLst>
           </a:prstGeom>
           <a:solidFill>
@@ -14814,14 +14473,14 @@
       </p:sp>
       <p:sp>
         <p:nvSpPr>
-          <p:cNvPr id="12" name="Text 10"/>
-          <p:cNvSpPr/>
-          <p:nvPr/>
-        </p:nvSpPr>
-        <p:spPr>
-          <a:xfrm>
-            <a:off x="777240" y="4114800"/>
-            <a:ext cx="548640" cy="1600200"/>
+          <p:cNvPr id="9" name="Text 7"/>
+          <p:cNvSpPr/>
+          <p:nvPr/>
+        </p:nvSpPr>
+        <p:spPr>
+          <a:xfrm>
+            <a:off x="548640" y="4160520"/>
+            <a:ext cx="11091672" cy="1280160"/>
           </a:xfrm>
           <a:prstGeom prst="rect">
             <a:avLst/>
@@ -14837,162 +14496,45 @@
               <a:buNone/>
             </a:pPr>
             <a:r>
-              <a:rPr lang="en-US" sz="2400" b="1" dirty="0">
+              <a:rPr lang="en-US" sz="3000" b="1" dirty="0">
+                <a:solidFill>
+                  <a:srgbClr val="8A847A"/>
+                </a:solidFill>
+                <a:latin typeface="Cambria" pitchFamily="34" charset="0"/>
+                <a:ea typeface="Cambria" pitchFamily="34" charset="-122"/>
+                <a:cs typeface="Cambria" pitchFamily="34" charset="-120"/>
+              </a:rPr>
+              <a:t>이상향만 높이  </a:t>
+            </a:r>
+            <a:pPr algn="ctr" indent="0" marL="0">
+              <a:buNone/>
+            </a:pPr>
+            <a:r>
+              <a:rPr lang="en-US" sz="3000" dirty="0">
                 <a:solidFill>
                   <a:srgbClr val="9A948A"/>
                 </a:solidFill>
-                <a:latin typeface="Calibri" pitchFamily="34" charset="0"/>
-                <a:ea typeface="Calibri" pitchFamily="34" charset="-122"/>
-                <a:cs typeface="Calibri" pitchFamily="34" charset="-120"/>
-              </a:rPr>
-              <a:t>✕</a:t>
-            </a:r>
-            <a:endParaRPr lang="en-US" sz="2400" dirty="0"/>
-          </a:p>
-        </p:txBody>
-      </p:sp>
-      <p:sp>
-        <p:nvSpPr>
-          <p:cNvPr id="13" name="Text 11"/>
-          <p:cNvSpPr/>
-          <p:nvPr/>
-        </p:nvSpPr>
-        <p:spPr>
-          <a:xfrm>
-            <a:off x="1371600" y="4297680"/>
-            <a:ext cx="10058400" cy="457200"/>
-          </a:xfrm>
-          <a:prstGeom prst="rect">
-            <a:avLst/>
-          </a:prstGeom>
-          <a:noFill/>
-          <a:ln/>
-        </p:spPr>
-        <p:txBody>
-          <a:bodyPr wrap="square" rtlCol="0" anchor="ctr"/>
-          <a:lstStyle/>
-          <a:p>
-            <a:pPr indent="0" marL="0">
-              <a:buNone/>
-            </a:pPr>
-            <a:r>
-              <a:rPr lang="en-US" sz="1600" b="1" dirty="0">
-                <a:solidFill>
-                  <a:srgbClr val="555555"/>
-                </a:solidFill>
-                <a:latin typeface="Calibri" pitchFamily="34" charset="0"/>
-                <a:ea typeface="Calibri" pitchFamily="34" charset="-122"/>
-                <a:cs typeface="Calibri" pitchFamily="34" charset="-120"/>
-              </a:rPr>
-              <a:t>이상향만 높이 잡는다  </a:t>
-            </a:r>
-            <a:pPr indent="0" marL="0">
-              <a:buNone/>
-            </a:pPr>
-            <a:r>
-              <a:rPr lang="en-US" sz="1600" dirty="0">
-                <a:solidFill>
-                  <a:srgbClr val="8A847A"/>
-                </a:solidFill>
-                <a:latin typeface="Calibri" pitchFamily="34" charset="0"/>
-                <a:ea typeface="Calibri" pitchFamily="34" charset="-122"/>
-                <a:cs typeface="Calibri" pitchFamily="34" charset="-120"/>
-              </a:rPr>
-              <a:t>→ 디딤돌을 건너뛴다 → 안 된다 → </a:t>
-            </a:r>
-            <a:pPr indent="0" marL="0">
-              <a:buNone/>
-            </a:pPr>
-            <a:r>
-              <a:rPr lang="en-US" sz="1600" b="1" dirty="0">
+                <a:latin typeface="Cambria" pitchFamily="34" charset="0"/>
+                <a:ea typeface="Cambria" pitchFamily="34" charset="-122"/>
+                <a:cs typeface="Cambria" pitchFamily="34" charset="-120"/>
+              </a:rPr>
+              <a:t>→ 건너뜀 → </a:t>
+            </a:r>
+            <a:pPr algn="ctr" indent="0" marL="0">
+              <a:buNone/>
+            </a:pPr>
+            <a:r>
+              <a:rPr lang="en-US" sz="3000" b="1" dirty="0">
                 <a:solidFill>
                   <a:srgbClr val="8A5A5A"/>
                 </a:solidFill>
-                <a:latin typeface="Calibri" pitchFamily="34" charset="0"/>
-                <a:ea typeface="Calibri" pitchFamily="34" charset="-122"/>
-                <a:cs typeface="Calibri" pitchFamily="34" charset="-120"/>
+                <a:latin typeface="Cambria" pitchFamily="34" charset="0"/>
+                <a:ea typeface="Cambria" pitchFamily="34" charset="-122"/>
+                <a:cs typeface="Cambria" pitchFamily="34" charset="-120"/>
               </a:rPr>
               <a:t>타협</a:t>
             </a:r>
-            <a:endParaRPr lang="en-US" sz="1600" dirty="0"/>
-          </a:p>
-        </p:txBody>
-      </p:sp>
-      <p:sp>
-        <p:nvSpPr>
-          <p:cNvPr id="14" name="Text 12"/>
-          <p:cNvSpPr/>
-          <p:nvPr/>
-        </p:nvSpPr>
-        <p:spPr>
-          <a:xfrm>
-            <a:off x="1371600" y="4892040"/>
-            <a:ext cx="10058400" cy="457200"/>
-          </a:xfrm>
-          <a:prstGeom prst="rect">
-            <a:avLst/>
-          </a:prstGeom>
-          <a:noFill/>
-          <a:ln/>
-        </p:spPr>
-        <p:txBody>
-          <a:bodyPr wrap="square" rtlCol="0" anchor="ctr"/>
-          <a:lstStyle/>
-          <a:p>
-            <a:pPr indent="0" marL="0">
-              <a:buNone/>
-            </a:pPr>
-            <a:r>
-              <a:rPr lang="en-US" sz="1400" b="1" dirty="0">
-                <a:solidFill>
-                  <a:srgbClr val="8A5A5A"/>
-                </a:solidFill>
-                <a:latin typeface="Calibri" pitchFamily="34" charset="0"/>
-                <a:ea typeface="Calibri" pitchFamily="34" charset="-122"/>
-                <a:cs typeface="Calibri" pitchFamily="34" charset="-120"/>
-              </a:rPr>
-              <a:t>→ '미용은 그냥 생계수단' → 평범하게 먹고사는 데서 멈춘다</a:t>
-            </a:r>
-            <a:endParaRPr lang="en-US" sz="1400" dirty="0"/>
-          </a:p>
-        </p:txBody>
-      </p:sp>
-      <p:sp>
-        <p:nvSpPr>
-          <p:cNvPr id="15" name="Text 13"/>
-          <p:cNvSpPr/>
-          <p:nvPr/>
-        </p:nvSpPr>
-        <p:spPr>
-          <a:xfrm>
-            <a:off x="1371600" y="5303520"/>
-            <a:ext cx="10058400" cy="365760"/>
-          </a:xfrm>
-          <a:prstGeom prst="rect">
-            <a:avLst/>
-          </a:prstGeom>
-          <a:noFill/>
-          <a:ln/>
-        </p:spPr>
-        <p:txBody>
-          <a:bodyPr wrap="square" rtlCol="0" anchor="ctr"/>
-          <a:lstStyle/>
-          <a:p>
-            <a:pPr indent="0" marL="0">
-              <a:buNone/>
-            </a:pPr>
-            <a:r>
-              <a:rPr lang="en-US" sz="1250" dirty="0">
-                <a:solidFill>
-                  <a:srgbClr val="6A655C"/>
-                </a:solidFill>
-                <a:latin typeface="Calibri" pitchFamily="34" charset="0"/>
-                <a:ea typeface="Calibri" pitchFamily="34" charset="-122"/>
-                <a:cs typeface="Calibri" pitchFamily="34" charset="-120"/>
-              </a:rPr>
-              <a:t>요즘 디딤돌을 생각하는 사람이 드물다 — 우리가 돌아봐야 할 지점</a:t>
-            </a:r>
-            <a:endParaRPr lang="en-US" sz="1250" dirty="0"/>
+            <a:endParaRPr lang="en-US" sz="3000" dirty="0"/>
           </a:p>
         </p:txBody>
       </p:sp>
@@ -15036,7 +14578,7 @@
         </p:nvSpPr>
         <p:spPr>
           <a:xfrm>
-            <a:off x="5765292" y="2468880"/>
+            <a:off x="5765292" y="2834640"/>
             <a:ext cx="658368" cy="18288"/>
           </a:xfrm>
           <a:prstGeom prst="rect">
@@ -15056,8 +14598,8 @@
         </p:nvSpPr>
         <p:spPr>
           <a:xfrm>
-            <a:off x="914400" y="2743200"/>
-            <a:ext cx="10360152" cy="1828800"/>
+            <a:off x="914400" y="3108960"/>
+            <a:ext cx="10360152" cy="1280160"/>
           </a:xfrm>
           <a:prstGeom prst="rect">
             <a:avLst/>
@@ -15070,13 +14612,10 @@
           <a:lstStyle/>
           <a:p>
             <a:pPr algn="ctr" indent="0" marL="0">
-              <a:lnSpc>
-                <a:spcPct val="110000"/>
-              </a:lnSpc>
-              <a:buNone/>
-            </a:pPr>
-            <a:r>
-              <a:rPr lang="en-US" sz="5200" dirty="0">
+              <a:buNone/>
+            </a:pPr>
+            <a:r>
+              <a:rPr lang="en-US" sz="5800" dirty="0">
                 <a:solidFill>
                   <a:srgbClr val="F7F5F1"/>
                 </a:solidFill>
@@ -15084,68 +14623,9 @@
                 <a:ea typeface="Cambria" pitchFamily="34" charset="-122"/>
                 <a:cs typeface="Cambria" pitchFamily="34" charset="-120"/>
               </a:rPr>
-              <a:t>이상향보다,</a:t>
-            </a:r>
-            <a:endParaRPr lang="en-US" sz="5200" dirty="0"/>
-          </a:p>
-          <a:p>
-            <a:pPr algn="ctr" indent="0" marL="0">
-              <a:lnSpc>
-                <a:spcPct val="110000"/>
-              </a:lnSpc>
-              <a:buNone/>
-            </a:pPr>
-            <a:r>
-              <a:rPr lang="en-US" sz="5200" dirty="0">
-                <a:solidFill>
-                  <a:srgbClr val="F7F5F1"/>
-                </a:solidFill>
-                <a:latin typeface="Cambria" pitchFamily="34" charset="0"/>
-                <a:ea typeface="Cambria" pitchFamily="34" charset="-122"/>
-                <a:cs typeface="Cambria" pitchFamily="34" charset="-120"/>
-              </a:rPr>
-              <a:t>오늘의 디딤돌.</a:t>
-            </a:r>
-            <a:endParaRPr lang="en-US" sz="5200" dirty="0"/>
-          </a:p>
-        </p:txBody>
-      </p:sp>
-      <p:sp>
-        <p:nvSpPr>
-          <p:cNvPr id="4" name="Text 2"/>
-          <p:cNvSpPr/>
-          <p:nvPr/>
-        </p:nvSpPr>
-        <p:spPr>
-          <a:xfrm>
-            <a:off x="914400" y="4663440"/>
-            <a:ext cx="10360152" cy="457200"/>
-          </a:xfrm>
-          <a:prstGeom prst="rect">
-            <a:avLst/>
-          </a:prstGeom>
-          <a:noFill/>
-          <a:ln/>
-        </p:spPr>
-        <p:txBody>
-          <a:bodyPr wrap="square" rtlCol="0" anchor="ctr"/>
-          <a:lstStyle/>
-          <a:p>
-            <a:pPr algn="ctr" indent="0" marL="0">
-              <a:buNone/>
-            </a:pPr>
-            <a:r>
-              <a:rPr lang="en-US" sz="1600" dirty="0">
-                <a:solidFill>
-                  <a:srgbClr val="A8895E"/>
-                </a:solidFill>
-                <a:latin typeface="Calibri" pitchFamily="34" charset="0"/>
-                <a:ea typeface="Calibri" pitchFamily="34" charset="-122"/>
-                <a:cs typeface="Calibri" pitchFamily="34" charset="-120"/>
-              </a:rPr>
-              <a:t>— 초디의 한 걸음이 곧 그 길이다</a:t>
-            </a:r>
-            <a:endParaRPr lang="en-US" sz="1600" dirty="0"/>
+              <a:t>오늘의 디딤돌</a:t>
+            </a:r>
+            <a:endParaRPr lang="en-US" sz="5800" dirty="0"/>
           </a:p>
         </p:txBody>
       </p:sp>
@@ -15304,57 +14784,18 @@
       </p:sp>
       <p:sp>
         <p:nvSpPr>
-          <p:cNvPr id="5" name="Text 3"/>
-          <p:cNvSpPr/>
-          <p:nvPr/>
-        </p:nvSpPr>
-        <p:spPr>
-          <a:xfrm>
-            <a:off x="914400" y="1554480"/>
-            <a:ext cx="10360152" cy="548640"/>
-          </a:xfrm>
-          <a:prstGeom prst="rect">
-            <a:avLst/>
-          </a:prstGeom>
-          <a:noFill/>
-          <a:ln/>
-        </p:spPr>
-        <p:txBody>
-          <a:bodyPr wrap="square" rtlCol="0" anchor="ctr"/>
-          <a:lstStyle/>
-          <a:p>
-            <a:pPr algn="ctr" indent="0" marL="0">
-              <a:buNone/>
-            </a:pPr>
-            <a:r>
-              <a:rPr lang="en-US" sz="2000" dirty="0">
-                <a:solidFill>
-                  <a:srgbClr val="C9C3B7"/>
-                </a:solidFill>
-                <a:latin typeface="Calibri" pitchFamily="34" charset="0"/>
-                <a:ea typeface="Calibri" pitchFamily="34" charset="-122"/>
-                <a:cs typeface="Calibri" pitchFamily="34" charset="-120"/>
-              </a:rPr>
-              <a:t>우리의 판단 기준이 바뀝니다</a:t>
-            </a:r>
-            <a:endParaRPr lang="en-US" sz="2000" dirty="0"/>
-          </a:p>
-        </p:txBody>
-      </p:sp>
-      <p:sp>
-        <p:nvSpPr>
-          <p:cNvPr id="6" name="Shape 4"/>
-          <p:cNvSpPr/>
-          <p:nvPr/>
-        </p:nvSpPr>
-        <p:spPr>
-          <a:xfrm>
-            <a:off x="1005840" y="2468880"/>
-            <a:ext cx="4572000" cy="2286000"/>
+          <p:cNvPr id="5" name="Shape 3"/>
+          <p:cNvSpPr/>
+          <p:nvPr/>
+        </p:nvSpPr>
+        <p:spPr>
+          <a:xfrm>
+            <a:off x="1005840" y="2651760"/>
+            <a:ext cx="4572000" cy="2377440"/>
           </a:xfrm>
           <a:prstGeom prst="roundRect">
             <a:avLst>
-              <a:gd name="adj" fmla="val 5600"/>
+              <a:gd name="adj" fmla="val 5385"/>
             </a:avLst>
           </a:prstGeom>
           <a:solidFill>
@@ -15370,53 +14811,14 @@
       </p:sp>
       <p:sp>
         <p:nvSpPr>
-          <p:cNvPr id="7" name="Text 5"/>
-          <p:cNvSpPr/>
-          <p:nvPr/>
-        </p:nvSpPr>
-        <p:spPr>
-          <a:xfrm>
-            <a:off x="1005840" y="2697480"/>
-            <a:ext cx="4572000" cy="365760"/>
-          </a:xfrm>
-          <a:prstGeom prst="rect">
-            <a:avLst/>
-          </a:prstGeom>
-          <a:noFill/>
-          <a:ln/>
-        </p:spPr>
-        <p:txBody>
-          <a:bodyPr wrap="square" rtlCol="0" anchor="ctr"/>
-          <a:lstStyle/>
-          <a:p>
-            <a:pPr algn="ctr" indent="0" marL="0">
-              <a:buNone/>
-            </a:pPr>
-            <a:r>
-              <a:rPr lang="en-US" sz="1300" b="1" spc="200" kern="0" dirty="0">
-                <a:solidFill>
-                  <a:srgbClr val="8A8F9A"/>
-                </a:solidFill>
-                <a:latin typeface="Calibri" pitchFamily="34" charset="0"/>
-                <a:ea typeface="Calibri" pitchFamily="34" charset="-122"/>
-                <a:cs typeface="Calibri" pitchFamily="34" charset="-120"/>
-              </a:rPr>
-              <a:t>예전</a:t>
-            </a:r>
-            <a:endParaRPr lang="en-US" sz="1300" dirty="0"/>
-          </a:p>
-        </p:txBody>
-      </p:sp>
-      <p:sp>
-        <p:nvSpPr>
-          <p:cNvPr id="8" name="Text 6"/>
-          <p:cNvSpPr/>
-          <p:nvPr/>
-        </p:nvSpPr>
-        <p:spPr>
-          <a:xfrm>
-            <a:off x="1005840" y="3063240"/>
-            <a:ext cx="4572000" cy="1554480"/>
+          <p:cNvPr id="6" name="Text 4"/>
+          <p:cNvSpPr/>
+          <p:nvPr/>
+        </p:nvSpPr>
+        <p:spPr>
+          <a:xfrm>
+            <a:off x="1005840" y="2651760"/>
+            <a:ext cx="4572000" cy="2377440"/>
           </a:xfrm>
           <a:prstGeom prst="rect">
             <a:avLst/>
@@ -15435,7 +14837,7 @@
               <a:buNone/>
             </a:pPr>
             <a:r>
-              <a:rPr lang="en-US" sz="3200" b="1" dirty="0">
+              <a:rPr lang="en-US" sz="3400" b="1" dirty="0">
                 <a:solidFill>
                   <a:srgbClr val="C9C3B7"/>
                 </a:solidFill>
@@ -15445,7 +14847,7 @@
               </a:rPr>
               <a:t>"머리를</a:t>
             </a:r>
-            <a:endParaRPr lang="en-US" sz="3200" dirty="0"/>
+            <a:endParaRPr lang="en-US" sz="3400" dirty="0"/>
           </a:p>
           <a:p>
             <a:pPr algn="ctr" indent="0" marL="0">
@@ -15455,7 +14857,7 @@
               <a:buNone/>
             </a:pPr>
             <a:r>
-              <a:rPr lang="en-US" sz="3200" b="1" dirty="0">
+              <a:rPr lang="en-US" sz="3400" b="1" dirty="0">
                 <a:solidFill>
                   <a:srgbClr val="C9C3B7"/>
                 </a:solidFill>
@@ -15465,20 +14867,20 @@
               </a:rPr>
               <a:t>할 수 있다"</a:t>
             </a:r>
-            <a:endParaRPr lang="en-US" sz="3200" dirty="0"/>
-          </a:p>
-        </p:txBody>
-      </p:sp>
-      <p:sp>
-        <p:nvSpPr>
-          <p:cNvPr id="9" name="Text 7"/>
-          <p:cNvSpPr/>
-          <p:nvPr/>
-        </p:nvSpPr>
-        <p:spPr>
-          <a:xfrm>
-            <a:off x="5577840" y="2468880"/>
-            <a:ext cx="1033272" cy="2286000"/>
+            <a:endParaRPr lang="en-US" sz="3400" dirty="0"/>
+          </a:p>
+        </p:txBody>
+      </p:sp>
+      <p:sp>
+        <p:nvSpPr>
+          <p:cNvPr id="7" name="Text 5"/>
+          <p:cNvSpPr/>
+          <p:nvPr/>
+        </p:nvSpPr>
+        <p:spPr>
+          <a:xfrm>
+            <a:off x="5577840" y="2651760"/>
+            <a:ext cx="1033272" cy="2377440"/>
           </a:xfrm>
           <a:prstGeom prst="rect">
             <a:avLst/>
@@ -15494,7 +14896,7 @@
               <a:buNone/>
             </a:pPr>
             <a:r>
-              <a:rPr lang="en-US" sz="4000" b="1" dirty="0">
+              <a:rPr lang="en-US" sz="4400" b="1" dirty="0">
                 <a:solidFill>
                   <a:srgbClr val="A8895E"/>
                 </a:solidFill>
@@ -15504,24 +14906,24 @@
               </a:rPr>
               <a:t>→</a:t>
             </a:r>
-            <a:endParaRPr lang="en-US" sz="4000" dirty="0"/>
-          </a:p>
-        </p:txBody>
-      </p:sp>
-      <p:sp>
-        <p:nvSpPr>
-          <p:cNvPr id="10" name="Shape 8"/>
-          <p:cNvSpPr/>
-          <p:nvPr/>
-        </p:nvSpPr>
-        <p:spPr>
-          <a:xfrm>
-            <a:off x="6611112" y="2468880"/>
-            <a:ext cx="4572000" cy="2286000"/>
+            <a:endParaRPr lang="en-US" sz="4400" dirty="0"/>
+          </a:p>
+        </p:txBody>
+      </p:sp>
+      <p:sp>
+        <p:nvSpPr>
+          <p:cNvPr id="8" name="Shape 6"/>
+          <p:cNvSpPr/>
+          <p:nvPr/>
+        </p:nvSpPr>
+        <p:spPr>
+          <a:xfrm>
+            <a:off x="6611112" y="2651760"/>
+            <a:ext cx="4572000" cy="2377440"/>
           </a:xfrm>
           <a:prstGeom prst="roundRect">
             <a:avLst>
-              <a:gd name="adj" fmla="val 5600"/>
+              <a:gd name="adj" fmla="val 5385"/>
             </a:avLst>
           </a:prstGeom>
           <a:solidFill>
@@ -15532,53 +14934,14 @@
       </p:sp>
       <p:sp>
         <p:nvSpPr>
-          <p:cNvPr id="11" name="Text 9"/>
-          <p:cNvSpPr/>
-          <p:nvPr/>
-        </p:nvSpPr>
-        <p:spPr>
-          <a:xfrm>
-            <a:off x="6611112" y="2697480"/>
-            <a:ext cx="4572000" cy="365760"/>
-          </a:xfrm>
-          <a:prstGeom prst="rect">
-            <a:avLst/>
-          </a:prstGeom>
-          <a:noFill/>
-          <a:ln/>
-        </p:spPr>
-        <p:txBody>
-          <a:bodyPr wrap="square" rtlCol="0" anchor="ctr"/>
-          <a:lstStyle/>
-          <a:p>
-            <a:pPr algn="ctr" indent="0" marL="0">
-              <a:buNone/>
-            </a:pPr>
-            <a:r>
-              <a:rPr lang="en-US" sz="1300" b="1" spc="200" kern="0" dirty="0">
-                <a:solidFill>
-                  <a:srgbClr val="5A4A2A"/>
-                </a:solidFill>
-                <a:latin typeface="Calibri" pitchFamily="34" charset="0"/>
-                <a:ea typeface="Calibri" pitchFamily="34" charset="-122"/>
-                <a:cs typeface="Calibri" pitchFamily="34" charset="-120"/>
-              </a:rPr>
-              <a:t>이제</a:t>
-            </a:r>
-            <a:endParaRPr lang="en-US" sz="1300" dirty="0"/>
-          </a:p>
-        </p:txBody>
-      </p:sp>
-      <p:sp>
-        <p:nvSpPr>
-          <p:cNvPr id="12" name="Text 10"/>
-          <p:cNvSpPr/>
-          <p:nvPr/>
-        </p:nvSpPr>
-        <p:spPr>
-          <a:xfrm>
-            <a:off x="6611112" y="3063240"/>
-            <a:ext cx="4572000" cy="1554480"/>
+          <p:cNvPr id="9" name="Text 7"/>
+          <p:cNvSpPr/>
+          <p:nvPr/>
+        </p:nvSpPr>
+        <p:spPr>
+          <a:xfrm>
+            <a:off x="6611112" y="2651760"/>
+            <a:ext cx="4572000" cy="2377440"/>
           </a:xfrm>
           <a:prstGeom prst="rect">
             <a:avLst/>
@@ -15597,7 +14960,7 @@
               <a:buNone/>
             </a:pPr>
             <a:r>
-              <a:rPr lang="en-US" sz="3200" b="1" dirty="0">
+              <a:rPr lang="en-US" sz="3400" b="1" dirty="0">
                 <a:solidFill>
                   <a:srgbClr val="1A1815"/>
                 </a:solidFill>
@@ -15607,7 +14970,7 @@
               </a:rPr>
               <a:t>"디자이너로</a:t>
             </a:r>
-            <a:endParaRPr lang="en-US" sz="3200" dirty="0"/>
+            <a:endParaRPr lang="en-US" sz="3400" dirty="0"/>
           </a:p>
           <a:p>
             <a:pPr algn="ctr" indent="0" marL="0">
@@ -15617,7 +14980,7 @@
               <a:buNone/>
             </a:pPr>
             <a:r>
-              <a:rPr lang="en-US" sz="3200" b="1" dirty="0">
+              <a:rPr lang="en-US" sz="3400" b="1" dirty="0">
                 <a:solidFill>
                   <a:srgbClr val="1A1815"/>
                 </a:solidFill>
@@ -15627,46 +14990,7 @@
               </a:rPr>
               <a:t>우뚝 선다"</a:t>
             </a:r>
-            <a:endParaRPr lang="en-US" sz="3200" dirty="0"/>
-          </a:p>
-        </p:txBody>
-      </p:sp>
-      <p:sp>
-        <p:nvSpPr>
-          <p:cNvPr id="13" name="Text 11"/>
-          <p:cNvSpPr/>
-          <p:nvPr/>
-        </p:nvSpPr>
-        <p:spPr>
-          <a:xfrm>
-            <a:off x="914400" y="5120640"/>
-            <a:ext cx="10360152" cy="457200"/>
-          </a:xfrm>
-          <a:prstGeom prst="rect">
-            <a:avLst/>
-          </a:prstGeom>
-          <a:noFill/>
-          <a:ln/>
-        </p:spPr>
-        <p:txBody>
-          <a:bodyPr wrap="square" rtlCol="0" anchor="ctr"/>
-          <a:lstStyle/>
-          <a:p>
-            <a:pPr algn="ctr" indent="0" marL="0">
-              <a:buNone/>
-            </a:pPr>
-            <a:r>
-              <a:rPr lang="en-US" sz="1400" dirty="0">
-                <a:solidFill>
-                  <a:srgbClr val="9AA0AB"/>
-                </a:solidFill>
-                <a:latin typeface="Calibri" pitchFamily="34" charset="0"/>
-                <a:ea typeface="Calibri" pitchFamily="34" charset="-122"/>
-                <a:cs typeface="Calibri" pitchFamily="34" charset="-120"/>
-              </a:rPr>
-              <a:t>기술을 익혔느냐가 아니라 — 손님을 오게 하고 케어하는, 디자이너로 설 수 있느냐로 본다.</a:t>
-            </a:r>
-            <a:endParaRPr lang="en-US" sz="1400" dirty="0"/>
+            <a:endParaRPr lang="en-US" sz="3400" dirty="0"/>
           </a:p>
         </p:txBody>
       </p:sp>
@@ -15817,7 +15141,7 @@
                 <a:ea typeface="Calibri" pitchFamily="34" charset="-122"/>
                 <a:cs typeface="Calibri" pitchFamily="34" charset="-120"/>
               </a:rPr>
-              <a:t>ROLE MODEL</a:t>
+              <a:t>VIDEO</a:t>
             </a:r>
             <a:endParaRPr lang="en-US" sz="1000" dirty="0"/>
           </a:p>
@@ -15831,46 +15155,7 @@
         </p:nvSpPr>
         <p:spPr>
           <a:xfrm>
-            <a:off x="548640" y="1234440"/>
-            <a:ext cx="9144000" cy="274320"/>
-          </a:xfrm>
-          <a:prstGeom prst="rect">
-            <a:avLst/>
-          </a:prstGeom>
-          <a:noFill/>
-          <a:ln/>
-        </p:spPr>
-        <p:txBody>
-          <a:bodyPr wrap="square" rtlCol="0" anchor="ctr"/>
-          <a:lstStyle/>
-          <a:p>
-            <a:pPr indent="0" marL="0">
-              <a:buNone/>
-            </a:pPr>
-            <a:r>
-              <a:rPr lang="en-US" sz="1150" b="1" spc="300" kern="0" dirty="0">
-                <a:solidFill>
-                  <a:srgbClr val="A8895E"/>
-                </a:solidFill>
-                <a:latin typeface="Calibri" pitchFamily="34" charset="0"/>
-                <a:ea typeface="Calibri" pitchFamily="34" charset="-122"/>
-                <a:cs typeface="Calibri" pitchFamily="34" charset="-120"/>
-              </a:rPr>
-              <a:t>먼저 디딤돌을 밟은 사람들 · 영상 예시</a:t>
-            </a:r>
-            <a:endParaRPr lang="en-US" sz="1150" dirty="0"/>
-          </a:p>
-        </p:txBody>
-      </p:sp>
-      <p:sp>
-        <p:nvSpPr>
-          <p:cNvPr id="6" name="Text 4"/>
-          <p:cNvSpPr/>
-          <p:nvPr/>
-        </p:nvSpPr>
-        <p:spPr>
-          <a:xfrm>
-            <a:off x="530352" y="1463040"/>
+            <a:off x="530352" y="1554480"/>
             <a:ext cx="10515600" cy="822960"/>
           </a:xfrm>
           <a:prstGeom prst="rect">
@@ -15895,7 +15180,7 @@
                 <a:ea typeface="Cambria" pitchFamily="34" charset="-122"/>
                 <a:cs typeface="Cambria" pitchFamily="34" charset="-120"/>
               </a:rPr>
-              <a:t>유안 · 범진 — 이렇게 건넜다</a:t>
+              <a:t>유안 · 범진</a:t>
             </a:r>
             <a:endParaRPr lang="en-US" sz="4000" dirty="0"/>
           </a:p>
@@ -15903,18 +15188,18 @@
       </p:sp>
       <p:sp>
         <p:nvSpPr>
-          <p:cNvPr id="7" name="Shape 5"/>
-          <p:cNvSpPr/>
-          <p:nvPr/>
-        </p:nvSpPr>
-        <p:spPr>
-          <a:xfrm>
-            <a:off x="548640" y="2514600"/>
-            <a:ext cx="5440680" cy="2651760"/>
+          <p:cNvPr id="6" name="Shape 4"/>
+          <p:cNvSpPr/>
+          <p:nvPr/>
+        </p:nvSpPr>
+        <p:spPr>
+          <a:xfrm>
+            <a:off x="548640" y="2651760"/>
+            <a:ext cx="5440680" cy="2926080"/>
           </a:xfrm>
           <a:prstGeom prst="roundRect">
             <a:avLst>
-              <a:gd name="adj" fmla="val 4138"/>
+              <a:gd name="adj" fmla="val 3750"/>
             </a:avLst>
           </a:prstGeom>
           <a:solidFill>
@@ -15925,14 +15210,14 @@
       </p:sp>
       <p:sp>
         <p:nvSpPr>
-          <p:cNvPr id="8" name="Shape 6"/>
-          <p:cNvSpPr/>
-          <p:nvPr/>
-        </p:nvSpPr>
-        <p:spPr>
-          <a:xfrm>
-            <a:off x="2811780" y="3200400"/>
-            <a:ext cx="914400" cy="914400"/>
+          <p:cNvPr id="7" name="Shape 5"/>
+          <p:cNvSpPr/>
+          <p:nvPr/>
+        </p:nvSpPr>
+        <p:spPr>
+          <a:xfrm>
+            <a:off x="2766060" y="3566160"/>
+            <a:ext cx="1005840" cy="1005840"/>
           </a:xfrm>
           <a:prstGeom prst="ellipse">
             <a:avLst/>
@@ -15945,14 +15230,53 @@
       </p:sp>
       <p:sp>
         <p:nvSpPr>
+          <p:cNvPr id="8" name="Text 6"/>
+          <p:cNvSpPr/>
+          <p:nvPr/>
+        </p:nvSpPr>
+        <p:spPr>
+          <a:xfrm>
+            <a:off x="2766060" y="3566160"/>
+            <a:ext cx="1005840" cy="1005840"/>
+          </a:xfrm>
+          <a:prstGeom prst="rect">
+            <a:avLst/>
+          </a:prstGeom>
+          <a:noFill/>
+          <a:ln/>
+        </p:spPr>
+        <p:txBody>
+          <a:bodyPr wrap="square" rtlCol="0" anchor="ctr"/>
+          <a:lstStyle/>
+          <a:p>
+            <a:pPr algn="ctr" indent="0" marL="0">
+              <a:buNone/>
+            </a:pPr>
+            <a:r>
+              <a:rPr lang="en-US" sz="2800" b="1" dirty="0">
+                <a:solidFill>
+                  <a:srgbClr val="111114"/>
+                </a:solidFill>
+                <a:latin typeface="Calibri" pitchFamily="34" charset="0"/>
+                <a:ea typeface="Calibri" pitchFamily="34" charset="-122"/>
+                <a:cs typeface="Calibri" pitchFamily="34" charset="-120"/>
+              </a:rPr>
+              <a:t>▶</a:t>
+            </a:r>
+            <a:endParaRPr lang="en-US" sz="2800" dirty="0"/>
+          </a:p>
+        </p:txBody>
+      </p:sp>
+      <p:sp>
+        <p:nvSpPr>
           <p:cNvPr id="9" name="Text 7"/>
           <p:cNvSpPr/>
           <p:nvPr/>
         </p:nvSpPr>
         <p:spPr>
           <a:xfrm>
-            <a:off x="2811780" y="3200400"/>
-            <a:ext cx="914400" cy="914400"/>
+            <a:off x="548640" y="4754880"/>
+            <a:ext cx="5440680" cy="457200"/>
           </a:xfrm>
           <a:prstGeom prst="rect">
             <a:avLst/>
@@ -15968,46 +15292,7 @@
               <a:buNone/>
             </a:pPr>
             <a:r>
-              <a:rPr lang="en-US" sz="2600" b="1" dirty="0">
-                <a:solidFill>
-                  <a:srgbClr val="111114"/>
-                </a:solidFill>
-                <a:latin typeface="Calibri" pitchFamily="34" charset="0"/>
-                <a:ea typeface="Calibri" pitchFamily="34" charset="-122"/>
-                <a:cs typeface="Calibri" pitchFamily="34" charset="-120"/>
-              </a:rPr>
-              <a:t>▶</a:t>
-            </a:r>
-            <a:endParaRPr lang="en-US" sz="2600" dirty="0"/>
-          </a:p>
-        </p:txBody>
-      </p:sp>
-      <p:sp>
-        <p:nvSpPr>
-          <p:cNvPr id="10" name="Text 8"/>
-          <p:cNvSpPr/>
-          <p:nvPr/>
-        </p:nvSpPr>
-        <p:spPr>
-          <a:xfrm>
-            <a:off x="548640" y="4297680"/>
-            <a:ext cx="5440680" cy="365760"/>
-          </a:xfrm>
-          <a:prstGeom prst="rect">
-            <a:avLst/>
-          </a:prstGeom>
-          <a:noFill/>
-          <a:ln/>
-        </p:spPr>
-        <p:txBody>
-          <a:bodyPr wrap="square" rtlCol="0" anchor="ctr"/>
-          <a:lstStyle/>
-          <a:p>
-            <a:pPr algn="ctr" indent="0" marL="0">
-              <a:buNone/>
-            </a:pPr>
-            <a:r>
-              <a:rPr lang="en-US" sz="1600" b="1" dirty="0">
+              <a:rPr lang="en-US" sz="1800" b="1" dirty="0">
                 <a:solidFill>
                   <a:srgbClr val="FFFFFF"/>
                 </a:solidFill>
@@ -16015,65 +15300,26 @@
                 <a:ea typeface="Calibri" pitchFamily="34" charset="-122"/>
                 <a:cs typeface="Calibri" pitchFamily="34" charset="-120"/>
               </a:rPr>
-              <a:t>유안 영상</a:t>
-            </a:r>
-            <a:endParaRPr lang="en-US" sz="1600" dirty="0"/>
-          </a:p>
-        </p:txBody>
-      </p:sp>
-      <p:sp>
-        <p:nvSpPr>
-          <p:cNvPr id="11" name="Text 9"/>
-          <p:cNvSpPr/>
-          <p:nvPr/>
-        </p:nvSpPr>
-        <p:spPr>
-          <a:xfrm>
-            <a:off x="548640" y="4663440"/>
-            <a:ext cx="5440680" cy="320040"/>
-          </a:xfrm>
-          <a:prstGeom prst="rect">
-            <a:avLst/>
-          </a:prstGeom>
-          <a:noFill/>
-          <a:ln/>
-        </p:spPr>
-        <p:txBody>
-          <a:bodyPr wrap="square" rtlCol="0" anchor="ctr"/>
-          <a:lstStyle/>
-          <a:p>
-            <a:pPr algn="ctr" indent="0" marL="0">
-              <a:buNone/>
-            </a:pPr>
-            <a:r>
-              <a:rPr lang="en-US" sz="1150" dirty="0">
-                <a:solidFill>
-                  <a:srgbClr val="8A8F9A"/>
-                </a:solidFill>
-                <a:latin typeface="Calibri" pitchFamily="34" charset="0"/>
-                <a:ea typeface="Calibri" pitchFamily="34" charset="-122"/>
-                <a:cs typeface="Calibri" pitchFamily="34" charset="-120"/>
-              </a:rPr>
-              <a:t>(발표 때 영상 재생 — 링크 삽입 자리)</a:t>
-            </a:r>
-            <a:endParaRPr lang="en-US" sz="1150" dirty="0"/>
-          </a:p>
-        </p:txBody>
-      </p:sp>
-      <p:sp>
-        <p:nvSpPr>
-          <p:cNvPr id="12" name="Shape 10"/>
-          <p:cNvSpPr/>
-          <p:nvPr/>
-        </p:nvSpPr>
-        <p:spPr>
-          <a:xfrm>
-            <a:off x="6291072" y="2514600"/>
-            <a:ext cx="5440680" cy="2651760"/>
+              <a:t>유안</a:t>
+            </a:r>
+            <a:endParaRPr lang="en-US" sz="1800" dirty="0"/>
+          </a:p>
+        </p:txBody>
+      </p:sp>
+      <p:sp>
+        <p:nvSpPr>
+          <p:cNvPr id="10" name="Shape 8"/>
+          <p:cNvSpPr/>
+          <p:nvPr/>
+        </p:nvSpPr>
+        <p:spPr>
+          <a:xfrm>
+            <a:off x="6291072" y="2651760"/>
+            <a:ext cx="5440680" cy="2926080"/>
           </a:xfrm>
           <a:prstGeom prst="roundRect">
             <a:avLst>
-              <a:gd name="adj" fmla="val 4138"/>
+              <a:gd name="adj" fmla="val 3750"/>
             </a:avLst>
           </a:prstGeom>
           <a:solidFill>
@@ -16084,14 +15330,14 @@
       </p:sp>
       <p:sp>
         <p:nvSpPr>
-          <p:cNvPr id="13" name="Shape 11"/>
-          <p:cNvSpPr/>
-          <p:nvPr/>
-        </p:nvSpPr>
-        <p:spPr>
-          <a:xfrm>
-            <a:off x="8554212" y="3200400"/>
-            <a:ext cx="914400" cy="914400"/>
+          <p:cNvPr id="11" name="Shape 9"/>
+          <p:cNvSpPr/>
+          <p:nvPr/>
+        </p:nvSpPr>
+        <p:spPr>
+          <a:xfrm>
+            <a:off x="8508492" y="3566160"/>
+            <a:ext cx="1005840" cy="1005840"/>
           </a:xfrm>
           <a:prstGeom prst="ellipse">
             <a:avLst/>
@@ -16104,14 +15350,14 @@
       </p:sp>
       <p:sp>
         <p:nvSpPr>
-          <p:cNvPr id="14" name="Text 12"/>
-          <p:cNvSpPr/>
-          <p:nvPr/>
-        </p:nvSpPr>
-        <p:spPr>
-          <a:xfrm>
-            <a:off x="8554212" y="3200400"/>
-            <a:ext cx="914400" cy="914400"/>
+          <p:cNvPr id="12" name="Text 10"/>
+          <p:cNvSpPr/>
+          <p:nvPr/>
+        </p:nvSpPr>
+        <p:spPr>
+          <a:xfrm>
+            <a:off x="8508492" y="3566160"/>
+            <a:ext cx="1005840" cy="1005840"/>
           </a:xfrm>
           <a:prstGeom prst="rect">
             <a:avLst/>
@@ -16127,7 +15373,7 @@
               <a:buNone/>
             </a:pPr>
             <a:r>
-              <a:rPr lang="en-US" sz="2600" b="1" dirty="0">
+              <a:rPr lang="en-US" sz="2800" b="1" dirty="0">
                 <a:solidFill>
                   <a:srgbClr val="111114"/>
                 </a:solidFill>
@@ -16137,20 +15383,20 @@
               </a:rPr>
               <a:t>▶</a:t>
             </a:r>
-            <a:endParaRPr lang="en-US" sz="2600" dirty="0"/>
-          </a:p>
-        </p:txBody>
-      </p:sp>
-      <p:sp>
-        <p:nvSpPr>
-          <p:cNvPr id="15" name="Text 13"/>
-          <p:cNvSpPr/>
-          <p:nvPr/>
-        </p:nvSpPr>
-        <p:spPr>
-          <a:xfrm>
-            <a:off x="6291072" y="4297680"/>
-            <a:ext cx="5440680" cy="365760"/>
+            <a:endParaRPr lang="en-US" sz="2800" dirty="0"/>
+          </a:p>
+        </p:txBody>
+      </p:sp>
+      <p:sp>
+        <p:nvSpPr>
+          <p:cNvPr id="13" name="Text 11"/>
+          <p:cNvSpPr/>
+          <p:nvPr/>
+        </p:nvSpPr>
+        <p:spPr>
+          <a:xfrm>
+            <a:off x="6291072" y="4754880"/>
+            <a:ext cx="5440680" cy="457200"/>
           </a:xfrm>
           <a:prstGeom prst="rect">
             <a:avLst/>
@@ -16166,7 +15412,7 @@
               <a:buNone/>
             </a:pPr>
             <a:r>
-              <a:rPr lang="en-US" sz="1600" b="1" dirty="0">
+              <a:rPr lang="en-US" sz="1800" b="1" dirty="0">
                 <a:solidFill>
                   <a:srgbClr val="FFFFFF"/>
                 </a:solidFill>
@@ -16174,87 +15420,9 @@
                 <a:ea typeface="Calibri" pitchFamily="34" charset="-122"/>
                 <a:cs typeface="Calibri" pitchFamily="34" charset="-120"/>
               </a:rPr>
-              <a:t>범진 영상</a:t>
-            </a:r>
-            <a:endParaRPr lang="en-US" sz="1600" dirty="0"/>
-          </a:p>
-        </p:txBody>
-      </p:sp>
-      <p:sp>
-        <p:nvSpPr>
-          <p:cNvPr id="16" name="Text 14"/>
-          <p:cNvSpPr/>
-          <p:nvPr/>
-        </p:nvSpPr>
-        <p:spPr>
-          <a:xfrm>
-            <a:off x="6291072" y="4663440"/>
-            <a:ext cx="5440680" cy="320040"/>
-          </a:xfrm>
-          <a:prstGeom prst="rect">
-            <a:avLst/>
-          </a:prstGeom>
-          <a:noFill/>
-          <a:ln/>
-        </p:spPr>
-        <p:txBody>
-          <a:bodyPr wrap="square" rtlCol="0" anchor="ctr"/>
-          <a:lstStyle/>
-          <a:p>
-            <a:pPr algn="ctr" indent="0" marL="0">
-              <a:buNone/>
-            </a:pPr>
-            <a:r>
-              <a:rPr lang="en-US" sz="1150" dirty="0">
-                <a:solidFill>
-                  <a:srgbClr val="8A8F9A"/>
-                </a:solidFill>
-                <a:latin typeface="Calibri" pitchFamily="34" charset="0"/>
-                <a:ea typeface="Calibri" pitchFamily="34" charset="-122"/>
-                <a:cs typeface="Calibri" pitchFamily="34" charset="-120"/>
-              </a:rPr>
-              <a:t>(발표 때 영상 재생 — 링크 삽입 자리)</a:t>
-            </a:r>
-            <a:endParaRPr lang="en-US" sz="1150" dirty="0"/>
-          </a:p>
-        </p:txBody>
-      </p:sp>
-      <p:sp>
-        <p:nvSpPr>
-          <p:cNvPr id="17" name="Text 15"/>
-          <p:cNvSpPr/>
-          <p:nvPr/>
-        </p:nvSpPr>
-        <p:spPr>
-          <a:xfrm>
-            <a:off x="548640" y="5440680"/>
-            <a:ext cx="10972800" cy="365760"/>
-          </a:xfrm>
-          <a:prstGeom prst="rect">
-            <a:avLst/>
-          </a:prstGeom>
-          <a:noFill/>
-          <a:ln/>
-        </p:spPr>
-        <p:txBody>
-          <a:bodyPr wrap="square" rtlCol="0" anchor="ctr"/>
-          <a:lstStyle/>
-          <a:p>
-            <a:pPr algn="ctr" indent="0" marL="0">
-              <a:buNone/>
-            </a:pPr>
-            <a:r>
-              <a:rPr lang="en-US" sz="1300" dirty="0">
-                <a:solidFill>
-                  <a:srgbClr val="555555"/>
-                </a:solidFill>
-                <a:latin typeface="Calibri" pitchFamily="34" charset="0"/>
-                <a:ea typeface="Calibri" pitchFamily="34" charset="-122"/>
-                <a:cs typeface="Calibri" pitchFamily="34" charset="-120"/>
-              </a:rPr>
-              <a:t>같은 초디에서 디딤돌을 하나씩 밟아 디자이너로 선 실제 예시 — 영상으로 보여준다.</a:t>
-            </a:r>
-            <a:endParaRPr lang="en-US" sz="1300" dirty="0"/>
+              <a:t>범진</a:t>
+            </a:r>
+            <a:endParaRPr lang="en-US" sz="1800" dirty="0"/>
           </a:p>
         </p:txBody>
       </p:sp>
